--- a/docs/presentation/LibriSense_Demo.pptx
+++ b/docs/presentation/LibriSense_Demo.pptx
@@ -1679,7 +1679,7 @@
                 <a:ea typeface="Calibri" pitchFamily="34" charset="-122"/>
                 <a:cs typeface="Calibri" pitchFamily="34" charset="-120"/>
               </a:rPr>
-              <a:t>A library that senses, plans and acts</a:t>
+              <a:t>An adaptive smart library</a:t>
             </a:r>
             <a:endParaRPr lang="en-US" sz="1800" dirty="0"/>
           </a:p>
@@ -2023,7 +2023,7 @@
                 <a:ea typeface="Cambria" pitchFamily="34" charset="-122"/>
                 <a:cs typeface="Cambria" pitchFamily="34" charset="-120"/>
               </a:rPr>
-              <a:t>0</a:t>
+              <a:t>24/7</a:t>
             </a:r>
             <a:endParaRPr lang="en-US" sz="5200" dirty="0"/>
           </a:p>
@@ -2062,7 +2062,7 @@
                 <a:ea typeface="Calibri" pitchFamily="34" charset="-122"/>
                 <a:cs typeface="Calibri" pitchFamily="34" charset="-120"/>
               </a:rPr>
-              <a:t>people whose job it is to manage light, air and breaks</a:t>
+              <a:t>lighting and ventilation usually run on fixed schedules, not on demand</a:t>
             </a:r>
             <a:endParaRPr lang="en-US" sz="1450" dirty="0"/>
           </a:p>
@@ -2093,15 +2093,15 @@
               <a:buNone/>
             </a:pPr>
             <a:r>
-              <a:rPr lang="en-US" sz="1700" i="1" dirty="0">
-                <a:solidFill>
-                  <a:srgbClr val="D97706"/>
+              <a:rPr lang="en-US" sz="1700" dirty="0">
+                <a:solidFill>
+                  <a:srgbClr val="6B7280"/>
                 </a:solidFill>
                 <a:latin typeface="Calibri" pitchFamily="34" charset="0"/>
                 <a:ea typeface="Calibri" pitchFamily="34" charset="-122"/>
                 <a:cs typeface="Calibri" pitchFamily="34" charset="-120"/>
               </a:rPr>
-              <a:t>LibriSense: a reading room that optimises focus, comfort and energy on its own and can justify every decision.</a:t>
+              <a:t>Our project: a reading zone that controls light, air quality and break timing automatically, with transparent decisions.</a:t>
             </a:r>
             <a:endParaRPr lang="en-US" sz="1700" dirty="0"/>
           </a:p>
@@ -2211,7 +2211,7 @@
                 <a:ea typeface="Cambria" pitchFamily="34" charset="-122"/>
                 <a:cs typeface="Cambria" pitchFamily="34" charset="-120"/>
               </a:rPr>
-              <a:t>What it senses, what it moves, what it does</a:t>
+              <a:t>Sensors, actuators and functionality</a:t>
             </a:r>
             <a:endParaRPr lang="en-US" sz="3000" dirty="0"/>
           </a:p>
@@ -3625,7 +3625,7 @@
                 <a:ea typeface="Calibri" pitchFamily="34" charset="-122"/>
                 <a:cs typeface="Calibri" pitchFamily="34" charset="-120"/>
               </a:rPr>
-              <a:t>Coach breaks: LED + buzzer after 2 min of focus</a:t>
+              <a:t>Suggest breaks via LED + buzzer after 2 min of focus</a:t>
             </a:r>
             <a:endParaRPr lang="en-US" sz="1250" dirty="0"/>
           </a:p>
@@ -3749,7 +3749,7 @@
                 <a:ea typeface="Calibri" pitchFamily="34" charset="-122"/>
                 <a:cs typeface="Calibri" pitchFamily="34" charset="-120"/>
               </a:rPr>
-              <a:t>Re-plan on every state change; self-heal in &lt; 1 s</a:t>
+              <a:t>Re-plan on every state change; recover in &lt; 1 s</a:t>
             </a:r>
             <a:endParaRPr lang="en-US" sz="1250" dirty="0"/>
           </a:p>
@@ -3898,7 +3898,7 @@
                 <a:ea typeface="Cambria" pitchFamily="34" charset="-122"/>
                 <a:cs typeface="Cambria" pitchFamily="34" charset="-120"/>
               </a:rPr>
-              <a:t>Eight modules, one rule: talk only via MQTT</a:t>
+              <a:t>Eight modules, communicating only via MQTT</a:t>
             </a:r>
             <a:endParaRPr lang="en-US" sz="3000" dirty="0"/>
           </a:p>
@@ -5512,7 +5512,7 @@
                 <a:ea typeface="Cambria" pitchFamily="34" charset="-122"/>
                 <a:cs typeface="Cambria" pitchFamily="34" charset="-120"/>
               </a:rPr>
-              <a:t>Discretisation bridges the analog world</a:t>
+              <a:t>Discretisation thresholds</a:t>
             </a:r>
             <a:endParaRPr lang="en-US" sz="1450" dirty="0"/>
           </a:p>
@@ -5660,15 +5660,15 @@
               <a:buNone/>
             </a:pPr>
             <a:r>
-              <a:rPr lang="en-US" sz="1200" i="1" dirty="0">
-                <a:solidFill>
-                  <a:srgbClr val="D97706"/>
+              <a:rPr lang="en-US" sz="1200" dirty="0">
+                <a:solidFill>
+                  <a:srgbClr val="6B7280"/>
                 </a:solidFill>
                 <a:latin typeface="Calibri" pitchFamily="34" charset="0"/>
                 <a:ea typeface="Calibri" pitchFamily="34" charset="-122"/>
                 <a:cs typeface="Calibri" pitchFamily="34" charset="-120"/>
               </a:rPr>
-              <a:t>Continuous quantities stay out of the planner by design: cleanly classical, hence provably optimal plans.</a:t>
+              <a:t>Continuous values are discretised before planning, so the domain stays classical and plans remain provably optimal.</a:t>
             </a:r>
             <a:endParaRPr lang="en-US" sz="1200" dirty="0"/>
           </a:p>
@@ -6708,15 +6708,15 @@
               <a:buNone/>
             </a:pPr>
             <a:r>
-              <a:rPr lang="en-US" sz="1350" i="1" dirty="0">
-                <a:solidFill>
-                  <a:srgbClr val="D97706"/>
+              <a:rPr lang="en-US" sz="1350" dirty="0">
+                <a:solidFill>
+                  <a:srgbClr val="6B7280"/>
                 </a:solidFill>
                 <a:latin typeface="Calibri" pitchFamily="34" charset="0"/>
                 <a:ea typeface="Calibri" pitchFamily="34" charset="-122"/>
                 <a:cs typeface="Calibri" pitchFamily="34" charset="-120"/>
               </a:rPr>
-              <a:t>LM-Cut is admissible, so A* returns provably minimal-cost plans. Nobody programmed the winter rule; it falls out of the cost model.</a:t>
+              <a:t>LM-Cut is admissible, so A* returns minimal-cost plans. The winter strategy is not hard-coded; it results from the weather-dependent action costs.</a:t>
             </a:r>
             <a:endParaRPr lang="en-US" sz="1350" dirty="0"/>
           </a:p>
@@ -6826,7 +6826,7 @@
                 <a:ea typeface="Cambria" pitchFamily="34" charset="-122"/>
                 <a:cs typeface="Cambria" pitchFamily="34" charset="-120"/>
               </a:rPr>
-              <a:t>The demo: six moments</a:t>
+              <a:t>Live demo procedure</a:t>
             </a:r>
             <a:endParaRPr lang="en-US" sz="3000" dirty="0"/>
           </a:p>
@@ -7184,7 +7184,7 @@
                 <a:ea typeface="Cambria" pitchFamily="34" charset="-122"/>
                 <a:cs typeface="Cambria" pitchFamily="34" charset="-120"/>
               </a:rPr>
-              <a:t>Sabotage the lamp</a:t>
+              <a:t>Switch the lamp off manually</a:t>
             </a:r>
             <a:endParaRPr lang="en-US" sz="1600" dirty="0"/>
           </a:p>
@@ -7223,7 +7223,7 @@
                 <a:ea typeface="Calibri" pitchFamily="34" charset="-122"/>
                 <a:cs typeface="Calibri" pitchFamily="34" charset="-120"/>
               </a:rPr>
-              <a:t>switched off by hand: re-planned and re-lit in under 1 s</a:t>
+              <a:t>the disturbance is detected and corrected in under 1 s</a:t>
             </a:r>
             <a:endParaRPr lang="en-US" sz="1250" dirty="0"/>
           </a:p>
@@ -7464,7 +7464,7 @@
                 <a:ea typeface="Cambria" pitchFamily="34" charset="-122"/>
                 <a:cs typeface="Cambria" pitchFamily="34" charset="-120"/>
               </a:rPr>
-              <a:t>Air gets stale</a:t>
+              <a:t>CO₂ rises</a:t>
             </a:r>
             <a:endParaRPr lang="en-US" sz="1600" dirty="0"/>
           </a:p>
@@ -7503,7 +7503,7 @@
                 <a:ea typeface="Calibri" pitchFamily="34" charset="-122"/>
                 <a:cs typeface="Calibri" pitchFamily="34" charset="-120"/>
               </a:rPr>
-              <a:t>CO₂ climbs, windows open on the floor plan, CO₂ falls</a:t>
+              <a:t>the planner opens the windows on the floor plan, CO₂ falls again</a:t>
             </a:r>
             <a:endParaRPr lang="en-US" sz="1250" dirty="0"/>
           </a:p>
@@ -7815,7 +7815,7 @@
                 <a:ea typeface="Cambria" pitchFamily="34" charset="-122"/>
                 <a:cs typeface="Cambria" pitchFamily="34" charset="-120"/>
               </a:rPr>
-              <a:t>All six, measured on the real system</a:t>
+              <a:t>All six requirements are met</a:t>
             </a:r>
             <a:endParaRPr lang="en-US" sz="3000" dirty="0"/>
           </a:p>
@@ -8765,7 +8765,7 @@
                 <a:ea typeface="Calibri" pitchFamily="34" charset="-122"/>
                 <a:cs typeface="Calibri" pitchFamily="34" charset="-120"/>
               </a:rPr>
-              <a:t>WHAT WE LEARNED</a:t>
+              <a:t>LESSONS LEARNED</a:t>
             </a:r>
             <a:endParaRPr lang="en-US" sz="1100" dirty="0"/>
           </a:p>
@@ -8804,7 +8804,7 @@
                 <a:ea typeface="Cambria" pitchFamily="34" charset="-122"/>
                 <a:cs typeface="Cambria" pitchFamily="34" charset="-120"/>
               </a:rPr>
-              <a:t>Honesty beats fake data</a:t>
+              <a:t>Sound sensor removed</a:t>
             </a:r>
             <a:endParaRPr lang="en-US" sz="1700" dirty="0"/>
           </a:p>
@@ -8843,7 +8843,7 @@
                 <a:ea typeface="Calibri" pitchFamily="34" charset="-122"/>
                 <a:cs typeface="Calibri" pitchFamily="34" charset="-120"/>
               </a:rPr>
-              <a:t>the sound sensor could not measure loudness over the slow GrovePi bus, so we removed it instead of showing noise.</a:t>
+              <a:t>it could not measure loudness over the slow GrovePi bus, so we removed it instead of publishing noise as data.</a:t>
             </a:r>
             <a:endParaRPr lang="en-US" sz="1250" dirty="0"/>
           </a:p>
@@ -8882,7 +8882,7 @@
                 <a:ea typeface="Cambria" pitchFamily="34" charset="-122"/>
                 <a:cs typeface="Cambria" pitchFamily="34" charset="-120"/>
               </a:rPr>
-              <a:t>Guard the planner</a:t>
+              <a:t>Unsolvable goals prevented</a:t>
             </a:r>
             <a:endParaRPr lang="en-US" sz="1700" dirty="0"/>
           </a:p>
@@ -8921,7 +8921,7 @@
                 <a:ea typeface="Calibri" pitchFamily="34" charset="-122"/>
                 <a:cs typeface="Calibri" pitchFamily="34" charset="-120"/>
               </a:rPr>
-              <a:t>an early bug asked it to brighten a zone whose lamp was already on. The generator now emits only achievable goals.</a:t>
+              <a:t>an early bug asked the planner to brighten a zone whose lamp was already on. The generator now emits only achievable goals.</a:t>
             </a:r>
             <a:endParaRPr lang="en-US" sz="1250" dirty="0"/>
           </a:p>
@@ -8960,7 +8960,7 @@
                 <a:ea typeface="Cambria" pitchFamily="34" charset="-122"/>
                 <a:cs typeface="Cambria" pitchFamily="34" charset="-120"/>
               </a:rPr>
-              <a:t>Simulate transparently</a:t>
+              <a:t>CO₂ and windows are simulated</a:t>
             </a:r>
             <a:endParaRPr lang="en-US" sz="1700" dirty="0"/>
           </a:p>
@@ -8999,7 +8999,7 @@
                 <a:ea typeface="Calibri" pitchFamily="34" charset="-122"/>
                 <a:cs typeface="Calibri" pitchFamily="34" charset="-120"/>
               </a:rPr>
-              <a:t>CO₂ and windows are modelled, clearly labelled, and react realistically to planner actions.</a:t>
+              <a:t>both are modelled, clearly labelled, and react realistically to planner actions.</a:t>
             </a:r>
             <a:endParaRPr lang="en-US" sz="1250" dirty="0"/>
           </a:p>
@@ -9038,7 +9038,7 @@
                 <a:ea typeface="Cambria" pitchFamily="34" charset="-122"/>
                 <a:cs typeface="Cambria" pitchFamily="34" charset="-120"/>
               </a:rPr>
-              <a:t>WiFi is the real enemy</a:t>
+              <a:t>WiFi reliability</a:t>
             </a:r>
             <a:endParaRPr lang="en-US" sz="1700" dirty="0"/>
           </a:p>
@@ -9077,7 +9077,7 @@
                 <a:ea typeface="Calibri" pitchFamily="34" charset="-122"/>
                 <a:cs typeface="Calibri" pitchFamily="34" charset="-120"/>
               </a:rPr>
-              <a:t>client isolation, band steering, power-save. Demo mode now spans its own access point.</a:t>
+              <a:t>client isolation, band steering and power-save caused repeated dropouts, so the demo runs on its own access point.</a:t>
             </a:r>
             <a:endParaRPr lang="en-US" sz="1250" dirty="0"/>
           </a:p>

--- a/docs/presentation/LibriSense_Demo.pptx
+++ b/docs/presentation/LibriSense_Demo.pptx
@@ -1718,7 +1718,7 @@
                 <a:ea typeface="Calibri" pitchFamily="34" charset="-122"/>
                 <a:cs typeface="Calibri" pitchFamily="34" charset="-120"/>
               </a:rPr>
-              <a:t>Dennis Gunt · Haoyang Chen · Niclas     |     Smart Cities and the IoT · University of Stuttgart     |     20 July 2026</a:t>
+              <a:t>Dennis Gunt · Haoyang Chen · Niclas Mittag     |     Smart Cities and the IoT · University of Stuttgart     |     20 July 2026</a:t>
             </a:r>
             <a:endParaRPr lang="en-US" sz="1250" dirty="0"/>
           </a:p>

--- a/docs/presentation/LibriSense_Demo.pptx
+++ b/docs/presentation/LibriSense_Demo.pptx
@@ -687,7 +687,7 @@
           <a:p>
             <a:r>
               <a:rPr lang="en-US" dirty="0"/>
-              <a:t>The one explaining slide: on the desk sit two Raspberry Pis. The edge Pi senses and acts, the core Pi thinks: every sensor reading flows over MQTT into the context, becomes a PDDL problem with weather-based costs, Fast Downward returns the cost-optimal plan, the executor sends the actions back to the edge. The laptop is only a window into the system; in the demo it joins the WiFi that the core Pi itself provides.</a:t>
+              <a:t>Narrative opener (idea by Niclas). Tell it slowly, first person. The card numbers are an illustrative scenario; the Harvard COGfx study (2015) documented cognitive decline above roughly 1,000 ppm CO2. Close with the question, then answer it on the next slide: this is exactly what LibriSense does.</a:t>
             </a:r>
             <a:endParaRPr lang="en-US" dirty="0"/>
           </a:p>
@@ -775,7 +775,7 @@
           <a:p>
             <a:r>
               <a:rPr lang="en-US" dirty="0"/>
-              <a:t>Opening story: this summer is brutal, libraries are packed. Light, air and breaks are constant trade-offs that nobody actively manages. That is a planning problem, so we gave the room a planner.</a:t>
+              <a:t>The one explaining slide: on the desk sit two Raspberry Pis. The edge Pi senses and acts, the core Pi thinks: every sensor reading flows over MQTT into the context, becomes a PDDL problem with weather-based costs, Fast Downward returns the cost-optimal plan, the executor sends the actions back to the edge. The laptop is only a window into the system; in the demo it joins the WiFi that the core Pi itself provides.</a:t>
             </a:r>
             <a:endParaRPr lang="en-US" dirty="0"/>
           </a:p>
@@ -1676,35 +1676,39 @@
           <a:chExt cx="0" cy="0"/>
         </a:xfrm>
       </p:grpSpPr>
-      <p:sp>
-        <p:nvSpPr>
-          <p:cNvPr id="2" name="Shape 0"/>
-          <p:cNvSpPr/>
-          <p:nvPr/>
-        </p:nvSpPr>
-        <p:spPr>
-          <a:xfrm>
-            <a:off x="5870448" y="1847088"/>
-            <a:ext cx="457200" cy="457200"/>
-          </a:xfrm>
-          <a:prstGeom prst="ellipse">
-            <a:avLst/>
-          </a:prstGeom>
-          <a:solidFill>
-            <a:srgbClr val="D97706"/>
-          </a:solidFill>
-          <a:ln/>
-        </p:spPr>
-      </p:sp>
-      <p:sp>
-        <p:nvSpPr>
-          <p:cNvPr id="3" name="Text 1"/>
-          <p:cNvSpPr/>
-          <p:nvPr/>
-        </p:nvSpPr>
-        <p:spPr>
-          <a:xfrm>
-            <a:off x="0" y="2377440"/>
+      <p:pic>
+        <p:nvPicPr>
+          <p:cNvPr id="2" name="Image 0" descr="/Users/dennisgunt/Library/CloudStorage/OneDrive-Persönlich/Master_Studium/03_Semester/SmartCities/librisense/docs/logo/librisense_logo_dark.png">    </p:cNvPr>
+          <p:cNvPicPr>
+            <a:picLocks noChangeAspect="1"/>
+          </p:cNvPicPr>
+          <p:nvPr/>
+        </p:nvPicPr>
+        <p:blipFill>
+          <a:blip r:embed="rId1"/>
+          <a:stretch>
+            <a:fillRect/>
+          </a:stretch>
+        </p:blipFill>
+        <p:spPr>
+          <a:xfrm>
+            <a:off x="5294376" y="868680"/>
+            <a:ext cx="1600200" cy="1600200"/>
+          </a:xfrm>
+          <a:prstGeom prst="rect">
+            <a:avLst/>
+          </a:prstGeom>
+        </p:spPr>
+      </p:pic>
+      <p:sp>
+        <p:nvSpPr>
+          <p:cNvPr id="3" name="Text 0"/>
+          <p:cNvSpPr/>
+          <p:nvPr/>
+        </p:nvSpPr>
+        <p:spPr>
+          <a:xfrm>
+            <a:off x="0" y="2560320"/>
             <a:ext cx="12188952" cy="1005840"/>
           </a:xfrm>
           <a:prstGeom prst="rect">
@@ -1737,13 +1741,13 @@
       </p:sp>
       <p:sp>
         <p:nvSpPr>
-          <p:cNvPr id="4" name="Text 2"/>
-          <p:cNvSpPr/>
-          <p:nvPr/>
-        </p:nvSpPr>
-        <p:spPr>
-          <a:xfrm>
-            <a:off x="0" y="3429000"/>
+          <p:cNvPr id="4" name="Text 1"/>
+          <p:cNvSpPr/>
+          <p:nvPr/>
+        </p:nvSpPr>
+        <p:spPr>
+          <a:xfrm>
+            <a:off x="0" y="3584448"/>
             <a:ext cx="12188952" cy="457200"/>
           </a:xfrm>
           <a:prstGeom prst="rect">
@@ -1776,7 +1780,7 @@
       </p:sp>
       <p:sp>
         <p:nvSpPr>
-          <p:cNvPr id="5" name="Text 3"/>
+          <p:cNvPr id="5" name="Text 2"/>
           <p:cNvSpPr/>
           <p:nvPr/>
         </p:nvSpPr>
@@ -2311,7 +2315,7 @@
     <p:bg>
       <p:bgPr>
         <a:solidFill>
-          <a:srgbClr val="FFFFFF"/>
+          <a:srgbClr val="0F1B2D"/>
         </a:solidFill>
       </p:bgPr>
     </p:bg>
@@ -2337,8 +2341,8 @@
         </p:nvSpPr>
         <p:spPr>
           <a:xfrm>
-            <a:off x="658368" y="219456"/>
-            <a:ext cx="10881360" cy="274320"/>
+            <a:off x="822960" y="502920"/>
+            <a:ext cx="5486400" cy="274320"/>
           </a:xfrm>
           <a:prstGeom prst="rect">
             <a:avLst/>
@@ -2362,7 +2366,7 @@
                 <a:ea typeface="Calibri" pitchFamily="34" charset="-122"/>
                 <a:cs typeface="Calibri" pitchFamily="34" charset="-120"/>
               </a:rPr>
-              <a:t>HOW IT WORKS</a:t>
+              <a:t>THE PROBLEM</a:t>
             </a:r>
             <a:endParaRPr lang="en-US" sz="1100" dirty="0"/>
           </a:p>
@@ -2376,34 +2380,77 @@
         </p:nvSpPr>
         <p:spPr>
           <a:xfrm>
-            <a:off x="640080" y="457200"/>
-            <a:ext cx="10881360" cy="640080"/>
-          </a:xfrm>
-          <a:prstGeom prst="rect">
-            <a:avLst/>
-          </a:prstGeom>
-          <a:noFill/>
-          <a:ln/>
-        </p:spPr>
-        <p:txBody>
-          <a:bodyPr wrap="square" lIns="0" tIns="0" rIns="0" bIns="0" rtlCol="0" anchor="ctr"/>
-          <a:lstStyle/>
-          <a:p>
-            <a:pPr indent="0" marL="0">
-              <a:buNone/>
-            </a:pPr>
-            <a:r>
-              <a:rPr lang="en-US" sz="3000" b="1" dirty="0">
-                <a:solidFill>
-                  <a:srgbClr val="111827"/>
+            <a:off x="822960" y="1097280"/>
+            <a:ext cx="5852160" cy="1600200"/>
+          </a:xfrm>
+          <a:prstGeom prst="rect">
+            <a:avLst/>
+          </a:prstGeom>
+          <a:noFill/>
+          <a:ln/>
+        </p:spPr>
+        <p:txBody>
+          <a:bodyPr wrap="square" lIns="0" tIns="0" rIns="0" bIns="0" rtlCol="0" anchor="ctr"/>
+          <a:lstStyle/>
+          <a:p>
+            <a:pPr indent="0" marL="0">
+              <a:lnSpc>
+                <a:spcPct val="115000"/>
+              </a:lnSpc>
+              <a:buNone/>
+            </a:pPr>
+            <a:r>
+              <a:rPr lang="en-US" sz="2500" b="1" dirty="0">
+                <a:solidFill>
+                  <a:srgbClr val="FFFFFF"/>
                 </a:solidFill>
                 <a:latin typeface="Cambria" pitchFamily="34" charset="0"/>
                 <a:ea typeface="Cambria" pitchFamily="34" charset="-122"/>
                 <a:cs typeface="Cambria" pitchFamily="34" charset="-120"/>
               </a:rPr>
-              <a:t>Setup: two Raspberry Pis and a browser dashboard</a:t>
-            </a:r>
-            <a:endParaRPr lang="en-US" sz="3000" dirty="0"/>
+              <a:t>It's a hot Monday morning.</a:t>
+            </a:r>
+            <a:endParaRPr lang="en-US" sz="2500" dirty="0"/>
+          </a:p>
+          <a:p>
+            <a:pPr indent="0" marL="0">
+              <a:lnSpc>
+                <a:spcPct val="115000"/>
+              </a:lnSpc>
+              <a:buNone/>
+            </a:pPr>
+            <a:r>
+              <a:rPr lang="en-US" sz="2500" b="1" dirty="0">
+                <a:solidFill>
+                  <a:srgbClr val="FFFFFF"/>
+                </a:solidFill>
+                <a:latin typeface="Cambria" pitchFamily="34" charset="0"/>
+                <a:ea typeface="Cambria" pitchFamily="34" charset="-122"/>
+                <a:cs typeface="Cambria" pitchFamily="34" charset="-120"/>
+              </a:rPr>
+              <a:t>You find a seat in the library,</a:t>
+            </a:r>
+            <a:endParaRPr lang="en-US" sz="2500" dirty="0"/>
+          </a:p>
+          <a:p>
+            <a:pPr indent="0" marL="0">
+              <a:lnSpc>
+                <a:spcPct val="115000"/>
+              </a:lnSpc>
+              <a:buNone/>
+            </a:pPr>
+            <a:r>
+              <a:rPr lang="en-US" sz="2500" b="1" dirty="0">
+                <a:solidFill>
+                  <a:srgbClr val="FFFFFF"/>
+                </a:solidFill>
+                <a:latin typeface="Cambria" pitchFamily="34" charset="0"/>
+                <a:ea typeface="Cambria" pitchFamily="34" charset="-122"/>
+                <a:cs typeface="Cambria" pitchFamily="34" charset="-120"/>
+              </a:rPr>
+              <a:t>close the door.</a:t>
+            </a:r>
+            <a:endParaRPr lang="en-US" sz="2500" dirty="0"/>
           </a:p>
         </p:txBody>
       </p:sp>
@@ -2415,20 +2462,16 @@
         </p:nvSpPr>
         <p:spPr>
           <a:xfrm>
-            <a:off x="640080" y="1325880"/>
-            <a:ext cx="3383280" cy="4343400"/>
-          </a:xfrm>
-          <a:prstGeom prst="roundRect">
-            <a:avLst>
-              <a:gd name="adj" fmla="val 2703"/>
-            </a:avLst>
-          </a:prstGeom>
-          <a:solidFill>
-            <a:srgbClr val="FFFFFF"/>
-          </a:solidFill>
-          <a:ln w="15875">
+            <a:off x="822960" y="2926080"/>
+            <a:ext cx="2377440" cy="0"/>
+          </a:xfrm>
+          <a:prstGeom prst="line">
+            <a:avLst/>
+          </a:prstGeom>
+          <a:noFill/>
+          <a:ln w="12700">
             <a:solidFill>
-              <a:srgbClr val="E5E7EB"/>
+              <a:srgbClr val="3A4A63"/>
             </a:solidFill>
             <a:prstDash val="solid"/>
           </a:ln>
@@ -2442,278 +2485,262 @@
         </p:nvSpPr>
         <p:spPr>
           <a:xfrm>
-            <a:off x="868680" y="1481328"/>
-            <a:ext cx="2926080" cy="320040"/>
-          </a:xfrm>
-          <a:prstGeom prst="rect">
-            <a:avLst/>
-          </a:prstGeom>
-          <a:noFill/>
-          <a:ln/>
-        </p:spPr>
-        <p:txBody>
-          <a:bodyPr wrap="square" lIns="0" tIns="0" rIns="0" bIns="0" rtlCol="0" anchor="ctr"/>
-          <a:lstStyle/>
-          <a:p>
-            <a:pPr indent="0" marL="0">
-              <a:buNone/>
-            </a:pPr>
-            <a:r>
-              <a:rPr lang="en-US" sz="1500" b="1" dirty="0">
-                <a:solidFill>
-                  <a:srgbClr val="111827"/>
+            <a:off x="822960" y="3154680"/>
+            <a:ext cx="5852160" cy="1234440"/>
+          </a:xfrm>
+          <a:prstGeom prst="rect">
+            <a:avLst/>
+          </a:prstGeom>
+          <a:noFill/>
+          <a:ln/>
+        </p:spPr>
+        <p:txBody>
+          <a:bodyPr wrap="square" lIns="0" tIns="0" rIns="0" bIns="0" rtlCol="0" anchor="ctr"/>
+          <a:lstStyle/>
+          <a:p>
+            <a:pPr indent="0" marL="0">
+              <a:lnSpc>
+                <a:spcPct val="130000"/>
+              </a:lnSpc>
+              <a:buNone/>
+            </a:pPr>
+            <a:r>
+              <a:rPr lang="en-US" sz="1550" dirty="0">
+                <a:solidFill>
+                  <a:srgbClr val="9DB2C7"/>
+                </a:solidFill>
+                <a:latin typeface="Calibri" pitchFamily="34" charset="0"/>
+                <a:ea typeface="Calibri" pitchFamily="34" charset="-122"/>
+                <a:cs typeface="Calibri" pitchFamily="34" charset="-120"/>
+              </a:rPr>
+              <a:t>Two hours in, the air is heavy.</a:t>
+            </a:r>
+            <a:endParaRPr lang="en-US" sz="1550" dirty="0"/>
+          </a:p>
+          <a:p>
+            <a:pPr indent="0" marL="0">
+              <a:lnSpc>
+                <a:spcPct val="130000"/>
+              </a:lnSpc>
+              <a:buNone/>
+            </a:pPr>
+            <a:r>
+              <a:rPr lang="en-US" sz="1550" dirty="0">
+                <a:solidFill>
+                  <a:srgbClr val="9DB2C7"/>
+                </a:solidFill>
+                <a:latin typeface="Calibri" pitchFamily="34" charset="0"/>
+                <a:ea typeface="Calibri" pitchFamily="34" charset="-122"/>
+                <a:cs typeface="Calibri" pitchFamily="34" charset="-120"/>
+              </a:rPr>
+              <a:t>You can't open the window.</a:t>
+            </a:r>
+            <a:endParaRPr lang="en-US" sz="1550" dirty="0"/>
+          </a:p>
+          <a:p>
+            <a:pPr indent="0" marL="0">
+              <a:lnSpc>
+                <a:spcPct val="130000"/>
+              </a:lnSpc>
+              <a:buNone/>
+            </a:pPr>
+            <a:r>
+              <a:rPr lang="en-US" sz="1550" dirty="0">
+                <a:solidFill>
+                  <a:srgbClr val="9DB2C7"/>
+                </a:solidFill>
+                <a:latin typeface="Calibri" pitchFamily="34" charset="0"/>
+                <a:ea typeface="Calibri" pitchFamily="34" charset="-122"/>
+                <a:cs typeface="Calibri" pitchFamily="34" charset="-120"/>
+              </a:rPr>
+              <a:t>It's hotter outside than in.</a:t>
+            </a:r>
+            <a:endParaRPr lang="en-US" sz="1550" dirty="0"/>
+          </a:p>
+        </p:txBody>
+      </p:sp>
+      <p:sp>
+        <p:nvSpPr>
+          <p:cNvPr id="6" name="Text 4"/>
+          <p:cNvSpPr/>
+          <p:nvPr/>
+        </p:nvSpPr>
+        <p:spPr>
+          <a:xfrm>
+            <a:off x="822960" y="4526280"/>
+            <a:ext cx="5852160" cy="457200"/>
+          </a:xfrm>
+          <a:prstGeom prst="rect">
+            <a:avLst/>
+          </a:prstGeom>
+          <a:noFill/>
+          <a:ln/>
+        </p:spPr>
+        <p:txBody>
+          <a:bodyPr wrap="square" lIns="0" tIns="0" rIns="0" bIns="0" rtlCol="0" anchor="ctr"/>
+          <a:lstStyle/>
+          <a:p>
+            <a:pPr indent="0" marL="0">
+              <a:buNone/>
+            </a:pPr>
+            <a:r>
+              <a:rPr lang="en-US" sz="1550" dirty="0">
+                <a:solidFill>
+                  <a:srgbClr val="9DB2C7"/>
+                </a:solidFill>
+                <a:latin typeface="Calibri" pitchFamily="34" charset="0"/>
+                <a:ea typeface="Calibri" pitchFamily="34" charset="-122"/>
+                <a:cs typeface="Calibri" pitchFamily="34" charset="-120"/>
+              </a:rPr>
+              <a:t>By hour three, you're rereading the same paragraph.</a:t>
+            </a:r>
+            <a:endParaRPr lang="en-US" sz="1550" dirty="0"/>
+          </a:p>
+        </p:txBody>
+      </p:sp>
+      <p:sp>
+        <p:nvSpPr>
+          <p:cNvPr id="7" name="Text 5"/>
+          <p:cNvSpPr/>
+          <p:nvPr/>
+        </p:nvSpPr>
+        <p:spPr>
+          <a:xfrm>
+            <a:off x="822960" y="5120640"/>
+            <a:ext cx="5852160" cy="457200"/>
+          </a:xfrm>
+          <a:prstGeom prst="rect">
+            <a:avLst/>
+          </a:prstGeom>
+          <a:noFill/>
+          <a:ln/>
+        </p:spPr>
+        <p:txBody>
+          <a:bodyPr wrap="square" lIns="0" tIns="0" rIns="0" bIns="0" rtlCol="0" anchor="ctr"/>
+          <a:lstStyle/>
+          <a:p>
+            <a:pPr indent="0" marL="0">
+              <a:buNone/>
+            </a:pPr>
+            <a:r>
+              <a:rPr lang="en-US" sz="1650" b="1" dirty="0">
+                <a:solidFill>
+                  <a:srgbClr val="FFFFFF"/>
+                </a:solidFill>
+                <a:latin typeface="Calibri" pitchFamily="34" charset="0"/>
+                <a:ea typeface="Calibri" pitchFamily="34" charset="-122"/>
+                <a:cs typeface="Calibri" pitchFamily="34" charset="-120"/>
+              </a:rPr>
+              <a:t>Nobody noticed. Nobody acted.</a:t>
+            </a:r>
+            <a:endParaRPr lang="en-US" sz="1650" dirty="0"/>
+          </a:p>
+        </p:txBody>
+      </p:sp>
+      <p:sp>
+        <p:nvSpPr>
+          <p:cNvPr id="8" name="Shape 6"/>
+          <p:cNvSpPr/>
+          <p:nvPr/>
+        </p:nvSpPr>
+        <p:spPr>
+          <a:xfrm>
+            <a:off x="7223760" y="960120"/>
+            <a:ext cx="4297680" cy="1874520"/>
+          </a:xfrm>
+          <a:prstGeom prst="roundRect">
+            <a:avLst>
+              <a:gd name="adj" fmla="val 4878"/>
+            </a:avLst>
+          </a:prstGeom>
+          <a:solidFill>
+            <a:srgbClr val="2A2113"/>
+          </a:solidFill>
+          <a:ln w="12700">
+            <a:solidFill>
+              <a:srgbClr val="6B5426"/>
+            </a:solidFill>
+            <a:prstDash val="solid"/>
+          </a:ln>
+        </p:spPr>
+      </p:sp>
+      <p:sp>
+        <p:nvSpPr>
+          <p:cNvPr id="9" name="Text 7"/>
+          <p:cNvSpPr/>
+          <p:nvPr/>
+        </p:nvSpPr>
+        <p:spPr>
+          <a:xfrm>
+            <a:off x="7452360" y="1143000"/>
+            <a:ext cx="3840480" cy="256032"/>
+          </a:xfrm>
+          <a:prstGeom prst="rect">
+            <a:avLst/>
+          </a:prstGeom>
+          <a:noFill/>
+          <a:ln/>
+        </p:spPr>
+        <p:txBody>
+          <a:bodyPr wrap="square" lIns="0" tIns="0" rIns="0" bIns="0" rtlCol="0" anchor="ctr"/>
+          <a:lstStyle/>
+          <a:p>
+            <a:pPr indent="0" marL="0">
+              <a:buNone/>
+            </a:pPr>
+            <a:r>
+              <a:rPr lang="en-US" sz="1050" b="1" spc="200" kern="0" dirty="0">
+                <a:solidFill>
+                  <a:srgbClr val="E8B45A"/>
+                </a:solidFill>
+                <a:latin typeface="Calibri" pitchFamily="34" charset="0"/>
+                <a:ea typeface="Calibri" pitchFamily="34" charset="-122"/>
+                <a:cs typeface="Calibri" pitchFamily="34" charset="-120"/>
+              </a:rPr>
+              <a:t>OUTDOOR TEMPERATURE</a:t>
+            </a:r>
+            <a:endParaRPr lang="en-US" sz="1050" dirty="0"/>
+          </a:p>
+        </p:txBody>
+      </p:sp>
+      <p:sp>
+        <p:nvSpPr>
+          <p:cNvPr id="10" name="Text 8"/>
+          <p:cNvSpPr/>
+          <p:nvPr/>
+        </p:nvSpPr>
+        <p:spPr>
+          <a:xfrm>
+            <a:off x="7452360" y="1463040"/>
+            <a:ext cx="3840480" cy="777240"/>
+          </a:xfrm>
+          <a:prstGeom prst="rect">
+            <a:avLst/>
+          </a:prstGeom>
+          <a:noFill/>
+          <a:ln/>
+        </p:spPr>
+        <p:txBody>
+          <a:bodyPr wrap="square" lIns="0" tIns="0" rIns="0" bIns="0" rtlCol="0" anchor="ctr"/>
+          <a:lstStyle/>
+          <a:p>
+            <a:pPr indent="0" marL="0">
+              <a:buNone/>
+            </a:pPr>
+            <a:r>
+              <a:rPr lang="en-US" sz="4400" b="1" dirty="0">
+                <a:solidFill>
+                  <a:srgbClr val="D97706"/>
                 </a:solidFill>
                 <a:latin typeface="Cambria" pitchFamily="34" charset="0"/>
                 <a:ea typeface="Cambria" pitchFamily="34" charset="-122"/>
                 <a:cs typeface="Cambria" pitchFamily="34" charset="-120"/>
               </a:rPr>
-              <a:t>Raspberry Pi 3 B+  ·  edge</a:t>
-            </a:r>
-            <a:endParaRPr lang="en-US" sz="1500" dirty="0"/>
-          </a:p>
-        </p:txBody>
-      </p:sp>
-      <p:sp>
-        <p:nvSpPr>
-          <p:cNvPr id="6" name="Text 4"/>
-          <p:cNvSpPr/>
-          <p:nvPr/>
-        </p:nvSpPr>
-        <p:spPr>
-          <a:xfrm>
-            <a:off x="868680" y="1938528"/>
-            <a:ext cx="2926080" cy="228600"/>
-          </a:xfrm>
-          <a:prstGeom prst="rect">
-            <a:avLst/>
-          </a:prstGeom>
-          <a:noFill/>
-          <a:ln/>
-        </p:spPr>
-        <p:txBody>
-          <a:bodyPr wrap="square" lIns="0" tIns="0" rIns="0" bIns="0" rtlCol="0" anchor="ctr"/>
-          <a:lstStyle/>
-          <a:p>
-            <a:pPr indent="0" marL="0">
-              <a:buNone/>
-            </a:pPr>
-            <a:r>
-              <a:rPr lang="en-US" sz="950" b="1" spc="200" kern="0" dirty="0">
-                <a:solidFill>
-                  <a:srgbClr val="15803D"/>
-                </a:solidFill>
-                <a:latin typeface="Calibri" pitchFamily="34" charset="0"/>
-                <a:ea typeface="Calibri" pitchFamily="34" charset="-122"/>
-                <a:cs typeface="Calibri" pitchFamily="34" charset="-120"/>
-              </a:rPr>
-              <a:t>SENSES</a:t>
-            </a:r>
-            <a:endParaRPr lang="en-US" sz="950" dirty="0"/>
-          </a:p>
-        </p:txBody>
-      </p:sp>
-      <p:sp>
-        <p:nvSpPr>
-          <p:cNvPr id="7" name="Text 5"/>
-          <p:cNvSpPr/>
-          <p:nvPr/>
-        </p:nvSpPr>
-        <p:spPr>
-          <a:xfrm>
-            <a:off x="868680" y="2194560"/>
-            <a:ext cx="2926080" cy="594360"/>
-          </a:xfrm>
-          <a:prstGeom prst="rect">
-            <a:avLst/>
-          </a:prstGeom>
-          <a:noFill/>
-          <a:ln/>
-        </p:spPr>
-        <p:txBody>
-          <a:bodyPr wrap="square" lIns="0" tIns="0" rIns="0" bIns="0" rtlCol="0" anchor="ctr"/>
-          <a:lstStyle/>
-          <a:p>
-            <a:pPr indent="0" marL="0">
-              <a:lnSpc>
-                <a:spcPct val="125000"/>
-              </a:lnSpc>
-              <a:buNone/>
-            </a:pPr>
-            <a:r>
-              <a:rPr lang="en-US" sz="1250" dirty="0">
-                <a:solidFill>
-                  <a:srgbClr val="111827"/>
-                </a:solidFill>
-                <a:latin typeface="Calibri" pitchFamily="34" charset="0"/>
-                <a:ea typeface="Calibri" pitchFamily="34" charset="-122"/>
-                <a:cs typeface="Calibri" pitchFamily="34" charset="-120"/>
-              </a:rPr>
-              <a:t>motion sensor · 2 Hz</a:t>
-            </a:r>
-            <a:endParaRPr lang="en-US" sz="1250" dirty="0"/>
-          </a:p>
-          <a:p>
-            <a:pPr indent="0" marL="0">
-              <a:lnSpc>
-                <a:spcPct val="125000"/>
-              </a:lnSpc>
-              <a:buNone/>
-            </a:pPr>
-            <a:r>
-              <a:rPr lang="en-US" sz="1250" dirty="0">
-                <a:solidFill>
-                  <a:srgbClr val="111827"/>
-                </a:solidFill>
-                <a:latin typeface="Calibri" pitchFamily="34" charset="0"/>
-                <a:ea typeface="Calibri" pitchFamily="34" charset="-122"/>
-                <a:cs typeface="Calibri" pitchFamily="34" charset="-120"/>
-              </a:rPr>
-              <a:t>light sensor · 2 Hz</a:t>
-            </a:r>
-            <a:endParaRPr lang="en-US" sz="1250" dirty="0"/>
-          </a:p>
-        </p:txBody>
-      </p:sp>
-      <p:sp>
-        <p:nvSpPr>
-          <p:cNvPr id="8" name="Text 6"/>
-          <p:cNvSpPr/>
-          <p:nvPr/>
-        </p:nvSpPr>
-        <p:spPr>
-          <a:xfrm>
-            <a:off x="868680" y="2971800"/>
-            <a:ext cx="2926080" cy="228600"/>
-          </a:xfrm>
-          <a:prstGeom prst="rect">
-            <a:avLst/>
-          </a:prstGeom>
-          <a:noFill/>
-          <a:ln/>
-        </p:spPr>
-        <p:txBody>
-          <a:bodyPr wrap="square" lIns="0" tIns="0" rIns="0" bIns="0" rtlCol="0" anchor="ctr"/>
-          <a:lstStyle/>
-          <a:p>
-            <a:pPr indent="0" marL="0">
-              <a:buNone/>
-            </a:pPr>
-            <a:r>
-              <a:rPr lang="en-US" sz="950" b="1" spc="200" kern="0" dirty="0">
-                <a:solidFill>
-                  <a:srgbClr val="D97706"/>
-                </a:solidFill>
-                <a:latin typeface="Calibri" pitchFamily="34" charset="0"/>
-                <a:ea typeface="Calibri" pitchFamily="34" charset="-122"/>
-                <a:cs typeface="Calibri" pitchFamily="34" charset="-120"/>
-              </a:rPr>
-              <a:t>ACTS</a:t>
-            </a:r>
-            <a:endParaRPr lang="en-US" sz="950" dirty="0"/>
-          </a:p>
-        </p:txBody>
-      </p:sp>
-      <p:sp>
-        <p:nvSpPr>
-          <p:cNvPr id="9" name="Text 7"/>
-          <p:cNvSpPr/>
-          <p:nvPr/>
-        </p:nvSpPr>
-        <p:spPr>
-          <a:xfrm>
-            <a:off x="868680" y="3227832"/>
-            <a:ext cx="2926080" cy="914400"/>
-          </a:xfrm>
-          <a:prstGeom prst="rect">
-            <a:avLst/>
-          </a:prstGeom>
-          <a:noFill/>
-          <a:ln/>
-        </p:spPr>
-        <p:txBody>
-          <a:bodyPr wrap="square" lIns="0" tIns="0" rIns="0" bIns="0" rtlCol="0" anchor="ctr"/>
-          <a:lstStyle/>
-          <a:p>
-            <a:pPr indent="0" marL="0">
-              <a:lnSpc>
-                <a:spcPct val="125000"/>
-              </a:lnSpc>
-              <a:buNone/>
-            </a:pPr>
-            <a:r>
-              <a:rPr lang="en-US" sz="1250" dirty="0">
-                <a:solidFill>
-                  <a:srgbClr val="111827"/>
-                </a:solidFill>
-                <a:latin typeface="Calibri" pitchFamily="34" charset="0"/>
-                <a:ea typeface="Calibri" pitchFamily="34" charset="-122"/>
-                <a:cs typeface="Calibri" pitchFamily="34" charset="-120"/>
-              </a:rPr>
-              <a:t>reading lamp · ZigBee relay</a:t>
-            </a:r>
-            <a:endParaRPr lang="en-US" sz="1250" dirty="0"/>
-          </a:p>
-          <a:p>
-            <a:pPr indent="0" marL="0">
-              <a:lnSpc>
-                <a:spcPct val="125000"/>
-              </a:lnSpc>
-              <a:buNone/>
-            </a:pPr>
-            <a:r>
-              <a:rPr lang="en-US" sz="1250" dirty="0">
-                <a:solidFill>
-                  <a:srgbClr val="111827"/>
-                </a:solidFill>
-                <a:latin typeface="Calibri" pitchFamily="34" charset="0"/>
-                <a:ea typeface="Calibri" pitchFamily="34" charset="-122"/>
-                <a:cs typeface="Calibri" pitchFamily="34" charset="-120"/>
-              </a:rPr>
-              <a:t>break LED + quiet buzzer</a:t>
-            </a:r>
-            <a:endParaRPr lang="en-US" sz="1250" dirty="0"/>
-          </a:p>
-          <a:p>
-            <a:pPr indent="0" marL="0">
-              <a:lnSpc>
-                <a:spcPct val="125000"/>
-              </a:lnSpc>
-              <a:buNone/>
-            </a:pPr>
-            <a:r>
-              <a:rPr lang="en-US" sz="1250" dirty="0">
-                <a:solidFill>
-                  <a:srgbClr val="111827"/>
-                </a:solidFill>
-                <a:latin typeface="Calibri" pitchFamily="34" charset="0"/>
-                <a:ea typeface="Calibri" pitchFamily="34" charset="-122"/>
-                <a:cs typeface="Calibri" pitchFamily="34" charset="-120"/>
-              </a:rPr>
-              <a:t>status LCD · CO₂ light</a:t>
-            </a:r>
-            <a:endParaRPr lang="en-US" sz="1250" dirty="0"/>
-          </a:p>
-        </p:txBody>
-      </p:sp>
-      <p:sp>
-        <p:nvSpPr>
-          <p:cNvPr id="10" name="Shape 8"/>
-          <p:cNvSpPr/>
-          <p:nvPr/>
-        </p:nvSpPr>
-        <p:spPr>
-          <a:xfrm>
-            <a:off x="868680" y="4434840"/>
-            <a:ext cx="201168" cy="201168"/>
-          </a:xfrm>
-          <a:prstGeom prst="ellipse">
-            <a:avLst/>
-          </a:prstGeom>
-          <a:solidFill>
-            <a:srgbClr val="D97706"/>
-          </a:solidFill>
-          <a:ln/>
-        </p:spPr>
+              <a:t>33 °C</a:t>
+            </a:r>
+            <a:endParaRPr lang="en-US" sz="4400" dirty="0"/>
+          </a:p>
+        </p:txBody>
       </p:sp>
       <p:sp>
         <p:nvSpPr>
@@ -2723,34 +2750,34 @@
         </p:nvSpPr>
         <p:spPr>
           <a:xfrm>
-            <a:off x="1170432" y="4416552"/>
-            <a:ext cx="2743200" cy="457200"/>
-          </a:xfrm>
-          <a:prstGeom prst="rect">
-            <a:avLst/>
-          </a:prstGeom>
-          <a:noFill/>
-          <a:ln/>
-        </p:spPr>
-        <p:txBody>
-          <a:bodyPr wrap="square" lIns="0" tIns="0" rIns="0" bIns="0" rtlCol="0" anchor="ctr"/>
-          <a:lstStyle/>
-          <a:p>
-            <a:pPr indent="0" marL="0">
-              <a:buNone/>
-            </a:pPr>
-            <a:r>
-              <a:rPr lang="en-US" sz="1100" dirty="0">
-                <a:solidFill>
-                  <a:srgbClr val="6B7280"/>
-                </a:solidFill>
-                <a:latin typeface="Calibri" pitchFamily="34" charset="0"/>
-                <a:ea typeface="Calibri" pitchFamily="34" charset="-122"/>
-                <a:cs typeface="Calibri" pitchFamily="34" charset="-120"/>
-              </a:rPr>
-              <a:t>the relay switches a real desk lamp</a:t>
-            </a:r>
-            <a:endParaRPr lang="en-US" sz="1100" dirty="0"/>
+            <a:off x="7452360" y="2331720"/>
+            <a:ext cx="3840480" cy="365760"/>
+          </a:xfrm>
+          <a:prstGeom prst="rect">
+            <a:avLst/>
+          </a:prstGeom>
+          <a:noFill/>
+          <a:ln/>
+        </p:spPr>
+        <p:txBody>
+          <a:bodyPr wrap="square" lIns="0" tIns="0" rIns="0" bIns="0" rtlCol="0" anchor="ctr"/>
+          <a:lstStyle/>
+          <a:p>
+            <a:pPr indent="0" marL="0">
+              <a:buNone/>
+            </a:pPr>
+            <a:r>
+              <a:rPr lang="en-US" sz="1150" dirty="0">
+                <a:solidFill>
+                  <a:srgbClr val="B08D4F"/>
+                </a:solidFill>
+                <a:latin typeface="Calibri" pitchFamily="34" charset="0"/>
+                <a:ea typeface="Calibri" pitchFamily="34" charset="-122"/>
+                <a:cs typeface="Calibri" pitchFamily="34" charset="-120"/>
+              </a:rPr>
+              <a:t>windows stay closed, hotter outside than in</a:t>
+            </a:r>
+            <a:endParaRPr lang="en-US" sz="1150" dirty="0"/>
           </a:p>
         </p:txBody>
       </p:sp>
@@ -2762,20 +2789,20 @@
         </p:nvSpPr>
         <p:spPr>
           <a:xfrm>
-            <a:off x="4709160" y="1325880"/>
-            <a:ext cx="3566160" cy="4343400"/>
+            <a:off x="7223760" y="3063240"/>
+            <a:ext cx="4297680" cy="2331720"/>
           </a:xfrm>
           <a:prstGeom prst="roundRect">
             <a:avLst>
-              <a:gd name="adj" fmla="val 2564"/>
+              <a:gd name="adj" fmla="val 3922"/>
             </a:avLst>
           </a:prstGeom>
           <a:solidFill>
-            <a:srgbClr val="FFFFFF"/>
+            <a:srgbClr val="2A1214"/>
           </a:solidFill>
-          <a:ln w="15875">
+          <a:ln w="12700">
             <a:solidFill>
-              <a:srgbClr val="E5E7EB"/>
+              <a:srgbClr val="7A2E2E"/>
             </a:solidFill>
             <a:prstDash val="solid"/>
           </a:ln>
@@ -2789,69 +2816,249 @@
         </p:nvSpPr>
         <p:spPr>
           <a:xfrm>
-            <a:off x="4937760" y="1481328"/>
-            <a:ext cx="3108960" cy="320040"/>
-          </a:xfrm>
-          <a:prstGeom prst="rect">
-            <a:avLst/>
-          </a:prstGeom>
-          <a:noFill/>
-          <a:ln/>
-        </p:spPr>
-        <p:txBody>
-          <a:bodyPr wrap="square" lIns="0" tIns="0" rIns="0" bIns="0" rtlCol="0" anchor="ctr"/>
-          <a:lstStyle/>
-          <a:p>
-            <a:pPr indent="0" marL="0">
-              <a:buNone/>
-            </a:pPr>
-            <a:r>
-              <a:rPr lang="en-US" sz="1500" b="1" dirty="0">
-                <a:solidFill>
-                  <a:srgbClr val="111827"/>
+            <a:off x="7452360" y="3246120"/>
+            <a:ext cx="3840480" cy="256032"/>
+          </a:xfrm>
+          <a:prstGeom prst="rect">
+            <a:avLst/>
+          </a:prstGeom>
+          <a:noFill/>
+          <a:ln/>
+        </p:spPr>
+        <p:txBody>
+          <a:bodyPr wrap="square" lIns="0" tIns="0" rIns="0" bIns="0" rtlCol="0" anchor="ctr"/>
+          <a:lstStyle/>
+          <a:p>
+            <a:pPr indent="0" marL="0">
+              <a:buNone/>
+            </a:pPr>
+            <a:r>
+              <a:rPr lang="en-US" sz="1050" b="1" spc="200" kern="0" dirty="0">
+                <a:solidFill>
+                  <a:srgbClr val="F0655A"/>
+                </a:solidFill>
+                <a:latin typeface="Calibri" pitchFamily="34" charset="0"/>
+                <a:ea typeface="Calibri" pitchFamily="34" charset="-122"/>
+                <a:cs typeface="Calibri" pitchFamily="34" charset="-120"/>
+              </a:rPr>
+              <a:t>CO₂ CONCENTRATION</a:t>
+            </a:r>
+            <a:endParaRPr lang="en-US" sz="1050" dirty="0"/>
+          </a:p>
+        </p:txBody>
+      </p:sp>
+      <p:sp>
+        <p:nvSpPr>
+          <p:cNvPr id="14" name="Shape 12"/>
+          <p:cNvSpPr/>
+          <p:nvPr/>
+        </p:nvSpPr>
+        <p:spPr>
+          <a:xfrm>
+            <a:off x="7452360" y="3675888"/>
+            <a:ext cx="3840480" cy="0"/>
+          </a:xfrm>
+          <a:prstGeom prst="line">
+            <a:avLst/>
+          </a:prstGeom>
+          <a:noFill/>
+          <a:ln w="25400">
+            <a:solidFill>
+              <a:srgbClr val="F0655A"/>
+            </a:solidFill>
+            <a:prstDash val="solid"/>
+          </a:ln>
+        </p:spPr>
+      </p:sp>
+      <p:sp>
+        <p:nvSpPr>
+          <p:cNvPr id="15" name="Shape 13"/>
+          <p:cNvSpPr/>
+          <p:nvPr/>
+        </p:nvSpPr>
+        <p:spPr>
+          <a:xfrm>
+            <a:off x="9966960" y="3584448"/>
+            <a:ext cx="0" cy="182880"/>
+          </a:xfrm>
+          <a:prstGeom prst="line">
+            <a:avLst/>
+          </a:prstGeom>
+          <a:noFill/>
+          <a:ln w="25400">
+            <a:solidFill>
+              <a:srgbClr val="F0655A"/>
+            </a:solidFill>
+            <a:prstDash val="solid"/>
+          </a:ln>
+        </p:spPr>
+      </p:sp>
+      <p:sp>
+        <p:nvSpPr>
+          <p:cNvPr id="16" name="Text 14"/>
+          <p:cNvSpPr/>
+          <p:nvPr/>
+        </p:nvSpPr>
+        <p:spPr>
+          <a:xfrm>
+            <a:off x="9052560" y="3767328"/>
+            <a:ext cx="2240280" cy="228600"/>
+          </a:xfrm>
+          <a:prstGeom prst="rect">
+            <a:avLst/>
+          </a:prstGeom>
+          <a:noFill/>
+          <a:ln/>
+        </p:spPr>
+        <p:txBody>
+          <a:bodyPr wrap="square" lIns="0" tIns="0" rIns="0" bIns="0" rtlCol="0" anchor="ctr"/>
+          <a:lstStyle/>
+          <a:p>
+            <a:pPr indent="0" marL="0">
+              <a:buNone/>
+            </a:pPr>
+            <a:r>
+              <a:rPr lang="en-US" sz="950" dirty="0">
+                <a:solidFill>
+                  <a:srgbClr val="B76A6A"/>
+                </a:solidFill>
+                <a:latin typeface="Calibri" pitchFamily="34" charset="0"/>
+                <a:ea typeface="Calibri" pitchFamily="34" charset="-122"/>
+                <a:cs typeface="Calibri" pitchFamily="34" charset="-120"/>
+              </a:rPr>
+              <a:t>1,000 ppm threshold</a:t>
+            </a:r>
+            <a:endParaRPr lang="en-US" sz="950" dirty="0"/>
+          </a:p>
+        </p:txBody>
+      </p:sp>
+      <p:sp>
+        <p:nvSpPr>
+          <p:cNvPr id="17" name="Text 15"/>
+          <p:cNvSpPr/>
+          <p:nvPr/>
+        </p:nvSpPr>
+        <p:spPr>
+          <a:xfrm>
+            <a:off x="7452360" y="4023360"/>
+            <a:ext cx="3840480" cy="777240"/>
+          </a:xfrm>
+          <a:prstGeom prst="rect">
+            <a:avLst/>
+          </a:prstGeom>
+          <a:noFill/>
+          <a:ln/>
+        </p:spPr>
+        <p:txBody>
+          <a:bodyPr wrap="square" lIns="0" tIns="0" rIns="0" bIns="0" rtlCol="0" anchor="ctr"/>
+          <a:lstStyle/>
+          <a:p>
+            <a:pPr indent="0" marL="0">
+              <a:buNone/>
+            </a:pPr>
+            <a:r>
+              <a:rPr lang="en-US" sz="4600" b="1" dirty="0">
+                <a:solidFill>
+                  <a:srgbClr val="F0655A"/>
                 </a:solidFill>
                 <a:latin typeface="Cambria" pitchFamily="34" charset="0"/>
                 <a:ea typeface="Cambria" pitchFamily="34" charset="-122"/>
                 <a:cs typeface="Cambria" pitchFamily="34" charset="-120"/>
               </a:rPr>
-              <a:t>Raspberry Pi 5  ·  core</a:t>
-            </a:r>
-            <a:endParaRPr lang="en-US" sz="1500" dirty="0"/>
-          </a:p>
-        </p:txBody>
-      </p:sp>
-      <p:sp>
-        <p:nvSpPr>
-          <p:cNvPr id="14" name="Shape 12"/>
-          <p:cNvSpPr/>
-          <p:nvPr/>
-        </p:nvSpPr>
-        <p:spPr>
-          <a:xfrm>
-            <a:off x="4937760" y="1874520"/>
-            <a:ext cx="3108960" cy="384048"/>
-          </a:xfrm>
-          <a:prstGeom prst="roundRect">
-            <a:avLst>
-              <a:gd name="adj" fmla="val 14286"/>
-            </a:avLst>
-          </a:prstGeom>
-          <a:solidFill>
-            <a:srgbClr val="FBEFD9"/>
-          </a:solidFill>
-          <a:ln/>
-        </p:spPr>
-      </p:sp>
-      <p:sp>
-        <p:nvSpPr>
-          <p:cNvPr id="15" name="Text 13"/>
-          <p:cNvSpPr/>
-          <p:nvPr/>
-        </p:nvSpPr>
-        <p:spPr>
-          <a:xfrm>
-            <a:off x="4937760" y="1911096"/>
-            <a:ext cx="3108960" cy="320040"/>
+              <a:t>1,547</a:t>
+            </a:r>
+            <a:endParaRPr lang="en-US" sz="4600" dirty="0"/>
+          </a:p>
+        </p:txBody>
+      </p:sp>
+      <p:sp>
+        <p:nvSpPr>
+          <p:cNvPr id="18" name="Text 16"/>
+          <p:cNvSpPr/>
+          <p:nvPr/>
+        </p:nvSpPr>
+        <p:spPr>
+          <a:xfrm>
+            <a:off x="7452360" y="4892040"/>
+            <a:ext cx="3840480" cy="457200"/>
+          </a:xfrm>
+          <a:prstGeom prst="rect">
+            <a:avLst/>
+          </a:prstGeom>
+          <a:noFill/>
+          <a:ln/>
+        </p:spPr>
+        <p:txBody>
+          <a:bodyPr wrap="square" lIns="0" tIns="0" rIns="0" bIns="0" rtlCol="0" anchor="ctr"/>
+          <a:lstStyle/>
+          <a:p>
+            <a:pPr indent="0" marL="0">
+              <a:buNone/>
+            </a:pPr>
+            <a:r>
+              <a:rPr lang="en-US" sz="1100" dirty="0">
+                <a:solidFill>
+                  <a:srgbClr val="B76A6A"/>
+                </a:solidFill>
+                <a:latin typeface="Calibri" pitchFamily="34" charset="0"/>
+                <a:ea typeface="Calibri" pitchFamily="34" charset="-122"/>
+                <a:cs typeface="Calibri" pitchFamily="34" charset="-120"/>
+              </a:rPr>
+              <a:t>ppm · cognitive performance declines above 1,000 ppm (Harvard study, 2015)</a:t>
+            </a:r>
+            <a:endParaRPr lang="en-US" sz="1100" dirty="0"/>
+          </a:p>
+        </p:txBody>
+      </p:sp>
+      <p:sp>
+        <p:nvSpPr>
+          <p:cNvPr id="19" name="Text 17"/>
+          <p:cNvSpPr/>
+          <p:nvPr/>
+        </p:nvSpPr>
+        <p:spPr>
+          <a:xfrm>
+            <a:off x="7223760" y="5532120"/>
+            <a:ext cx="4297680" cy="228600"/>
+          </a:xfrm>
+          <a:prstGeom prst="rect">
+            <a:avLst/>
+          </a:prstGeom>
+          <a:noFill/>
+          <a:ln/>
+        </p:spPr>
+        <p:txBody>
+          <a:bodyPr wrap="square" lIns="0" tIns="0" rIns="0" bIns="0" rtlCol="0" anchor="ctr"/>
+          <a:lstStyle/>
+          <a:p>
+            <a:pPr algn="r" indent="0" marL="0">
+              <a:buNone/>
+            </a:pPr>
+            <a:r>
+              <a:rPr lang="en-US" sz="900" spc="200" kern="0" dirty="0">
+                <a:solidFill>
+                  <a:srgbClr val="3A4A63"/>
+                </a:solidFill>
+                <a:latin typeface="Calibri" pitchFamily="34" charset="0"/>
+                <a:ea typeface="Calibri" pitchFamily="34" charset="-122"/>
+                <a:cs typeface="Calibri" pitchFamily="34" charset="-120"/>
+              </a:rPr>
+              <a:t>UNIVERSITÄTSBIBLIOTHEK STUTTGART</a:t>
+            </a:r>
+            <a:endParaRPr lang="en-US" sz="900" dirty="0"/>
+          </a:p>
+        </p:txBody>
+      </p:sp>
+      <p:sp>
+        <p:nvSpPr>
+          <p:cNvPr id="20" name="Text 18"/>
+          <p:cNvSpPr/>
+          <p:nvPr/>
+        </p:nvSpPr>
+        <p:spPr>
+          <a:xfrm>
+            <a:off x="0" y="6035040"/>
+            <a:ext cx="12188952" cy="548640"/>
           </a:xfrm>
           <a:prstGeom prst="rect">
             <a:avLst/>
@@ -2867,1024 +3074,17 @@
               <a:buNone/>
             </a:pPr>
             <a:r>
-              <a:rPr lang="en-US" sz="1150" b="1" dirty="0">
-                <a:solidFill>
-                  <a:srgbClr val="D97706"/>
-                </a:solidFill>
-                <a:latin typeface="Calibri" pitchFamily="34" charset="0"/>
-                <a:ea typeface="Calibri" pitchFamily="34" charset="-122"/>
-                <a:cs typeface="Calibri" pitchFamily="34" charset="-120"/>
-              </a:rPr>
-              <a:t>MQTT broker · Mosquitto</a:t>
-            </a:r>
-            <a:endParaRPr lang="en-US" sz="1150" dirty="0"/>
-          </a:p>
-        </p:txBody>
-      </p:sp>
-      <p:sp>
-        <p:nvSpPr>
-          <p:cNvPr id="16" name="Shape 14"/>
-          <p:cNvSpPr/>
-          <p:nvPr/>
-        </p:nvSpPr>
-        <p:spPr>
-          <a:xfrm>
-            <a:off x="4937760" y="2450592"/>
-            <a:ext cx="3108960" cy="548640"/>
-          </a:xfrm>
-          <a:prstGeom prst="roundRect">
-            <a:avLst>
-              <a:gd name="adj" fmla="val 10000"/>
-            </a:avLst>
-          </a:prstGeom>
-          <a:solidFill>
-            <a:srgbClr val="F3F4F6"/>
-          </a:solidFill>
-          <a:ln/>
-        </p:spPr>
-      </p:sp>
-      <p:sp>
-        <p:nvSpPr>
-          <p:cNvPr id="17" name="Text 15"/>
-          <p:cNvSpPr/>
-          <p:nvPr/>
-        </p:nvSpPr>
-        <p:spPr>
-          <a:xfrm>
-            <a:off x="5047488" y="2496312"/>
-            <a:ext cx="2889504" cy="237744"/>
-          </a:xfrm>
-          <a:prstGeom prst="rect">
-            <a:avLst/>
-          </a:prstGeom>
-          <a:noFill/>
-          <a:ln/>
-        </p:spPr>
-        <p:txBody>
-          <a:bodyPr wrap="square" lIns="0" tIns="0" rIns="0" bIns="0" rtlCol="0" anchor="ctr"/>
-          <a:lstStyle/>
-          <a:p>
-            <a:pPr indent="0" marL="0">
-              <a:buNone/>
-            </a:pPr>
-            <a:r>
-              <a:rPr lang="en-US" sz="1150" b="1" dirty="0">
-                <a:solidFill>
-                  <a:srgbClr val="111827"/>
-                </a:solidFill>
-                <a:latin typeface="Calibri" pitchFamily="34" charset="0"/>
-                <a:ea typeface="Calibri" pitchFamily="34" charset="-122"/>
-                <a:cs typeface="Calibri" pitchFamily="34" charset="-120"/>
-              </a:rPr>
-              <a:t>context</a:t>
-            </a:r>
-            <a:endParaRPr lang="en-US" sz="1150" dirty="0"/>
-          </a:p>
-        </p:txBody>
-      </p:sp>
-      <p:sp>
-        <p:nvSpPr>
-          <p:cNvPr id="18" name="Text 16"/>
-          <p:cNvSpPr/>
-          <p:nvPr/>
-        </p:nvSpPr>
-        <p:spPr>
-          <a:xfrm>
-            <a:off x="5047488" y="2734056"/>
-            <a:ext cx="2889504" cy="228600"/>
-          </a:xfrm>
-          <a:prstGeom prst="rect">
-            <a:avLst/>
-          </a:prstGeom>
-          <a:noFill/>
-          <a:ln/>
-        </p:spPr>
-        <p:txBody>
-          <a:bodyPr wrap="square" lIns="0" tIns="0" rIns="0" bIns="0" rtlCol="0" anchor="ctr"/>
-          <a:lstStyle/>
-          <a:p>
-            <a:pPr indent="0" marL="0">
-              <a:buNone/>
-            </a:pPr>
-            <a:r>
-              <a:rPr lang="en-US" sz="950" dirty="0">
-                <a:solidFill>
-                  <a:srgbClr val="6B7280"/>
-                </a:solidFill>
-                <a:latin typeface="Calibri" pitchFamily="34" charset="0"/>
-                <a:ea typeface="Calibri" pitchFamily="34" charset="-122"/>
-                <a:cs typeface="Calibri" pitchFamily="34" charset="-120"/>
-              </a:rPr>
-              <a:t>world state · CO₂ · session FSM</a:t>
-            </a:r>
-            <a:endParaRPr lang="en-US" sz="950" dirty="0"/>
-          </a:p>
-        </p:txBody>
-      </p:sp>
-      <p:sp>
-        <p:nvSpPr>
-          <p:cNvPr id="19" name="Text 17"/>
-          <p:cNvSpPr/>
-          <p:nvPr/>
-        </p:nvSpPr>
-        <p:spPr>
-          <a:xfrm>
-            <a:off x="6400800" y="2962656"/>
-            <a:ext cx="274320" cy="274320"/>
-          </a:xfrm>
-          <a:prstGeom prst="rect">
-            <a:avLst/>
-          </a:prstGeom>
-          <a:noFill/>
-          <a:ln/>
-        </p:spPr>
-        <p:txBody>
-          <a:bodyPr wrap="square" lIns="0" tIns="0" rIns="0" bIns="0" rtlCol="0" anchor="ctr"/>
-          <a:lstStyle/>
-          <a:p>
-            <a:pPr algn="ctr" indent="0" marL="0">
-              <a:buNone/>
-            </a:pPr>
-            <a:r>
-              <a:rPr lang="en-US" sz="1100" dirty="0">
-                <a:solidFill>
-                  <a:srgbClr val="6B7280"/>
-                </a:solidFill>
-                <a:latin typeface="Calibri" pitchFamily="34" charset="0"/>
-                <a:ea typeface="Calibri" pitchFamily="34" charset="-122"/>
-                <a:cs typeface="Calibri" pitchFamily="34" charset="-120"/>
-              </a:rPr>
-              <a:t>↓</a:t>
-            </a:r>
-            <a:endParaRPr lang="en-US" sz="1100" dirty="0"/>
-          </a:p>
-        </p:txBody>
-      </p:sp>
-      <p:sp>
-        <p:nvSpPr>
-          <p:cNvPr id="20" name="Shape 18"/>
-          <p:cNvSpPr/>
-          <p:nvPr/>
-        </p:nvSpPr>
-        <p:spPr>
-          <a:xfrm>
-            <a:off x="4937760" y="3209544"/>
-            <a:ext cx="3108960" cy="548640"/>
-          </a:xfrm>
-          <a:prstGeom prst="roundRect">
-            <a:avLst>
-              <a:gd name="adj" fmla="val 10000"/>
-            </a:avLst>
-          </a:prstGeom>
-          <a:solidFill>
-            <a:srgbClr val="F3F4F6"/>
-          </a:solidFill>
-          <a:ln/>
-        </p:spPr>
-      </p:sp>
-      <p:sp>
-        <p:nvSpPr>
-          <p:cNvPr id="21" name="Text 19"/>
-          <p:cNvSpPr/>
-          <p:nvPr/>
-        </p:nvSpPr>
-        <p:spPr>
-          <a:xfrm>
-            <a:off x="5047488" y="3255264"/>
-            <a:ext cx="2889504" cy="237744"/>
-          </a:xfrm>
-          <a:prstGeom prst="rect">
-            <a:avLst/>
-          </a:prstGeom>
-          <a:noFill/>
-          <a:ln/>
-        </p:spPr>
-        <p:txBody>
-          <a:bodyPr wrap="square" lIns="0" tIns="0" rIns="0" bIns="0" rtlCol="0" anchor="ctr"/>
-          <a:lstStyle/>
-          <a:p>
-            <a:pPr indent="0" marL="0">
-              <a:buNone/>
-            </a:pPr>
-            <a:r>
-              <a:rPr lang="en-US" sz="1150" b="1" dirty="0">
-                <a:solidFill>
-                  <a:srgbClr val="111827"/>
-                </a:solidFill>
-                <a:latin typeface="Calibri" pitchFamily="34" charset="0"/>
-                <a:ea typeface="Calibri" pitchFamily="34" charset="-122"/>
-                <a:cs typeface="Calibri" pitchFamily="34" charset="-120"/>
-              </a:rPr>
-              <a:t>problem generator</a:t>
-            </a:r>
-            <a:endParaRPr lang="en-US" sz="1150" dirty="0"/>
-          </a:p>
-        </p:txBody>
-      </p:sp>
-      <p:sp>
-        <p:nvSpPr>
-          <p:cNvPr id="22" name="Text 20"/>
-          <p:cNvSpPr/>
-          <p:nvPr/>
-        </p:nvSpPr>
-        <p:spPr>
-          <a:xfrm>
-            <a:off x="5047488" y="3493008"/>
-            <a:ext cx="2889504" cy="228600"/>
-          </a:xfrm>
-          <a:prstGeom prst="rect">
-            <a:avLst/>
-          </a:prstGeom>
-          <a:noFill/>
-          <a:ln/>
-        </p:spPr>
-        <p:txBody>
-          <a:bodyPr wrap="square" lIns="0" tIns="0" rIns="0" bIns="0" rtlCol="0" anchor="ctr"/>
-          <a:lstStyle/>
-          <a:p>
-            <a:pPr indent="0" marL="0">
-              <a:buNone/>
-            </a:pPr>
-            <a:r>
-              <a:rPr lang="en-US" sz="950" dirty="0">
-                <a:solidFill>
-                  <a:srgbClr val="6B7280"/>
-                </a:solidFill>
-                <a:latin typeface="Calibri" pitchFamily="34" charset="0"/>
-                <a:ea typeface="Calibri" pitchFamily="34" charset="-122"/>
-                <a:cs typeface="Calibri" pitchFamily="34" charset="-120"/>
-              </a:rPr>
-              <a:t>state → PDDL goals + weather costs</a:t>
-            </a:r>
-            <a:endParaRPr lang="en-US" sz="950" dirty="0"/>
-          </a:p>
-        </p:txBody>
-      </p:sp>
-      <p:sp>
-        <p:nvSpPr>
-          <p:cNvPr id="23" name="Text 21"/>
-          <p:cNvSpPr/>
-          <p:nvPr/>
-        </p:nvSpPr>
-        <p:spPr>
-          <a:xfrm>
-            <a:off x="6400800" y="3721608"/>
-            <a:ext cx="274320" cy="274320"/>
-          </a:xfrm>
-          <a:prstGeom prst="rect">
-            <a:avLst/>
-          </a:prstGeom>
-          <a:noFill/>
-          <a:ln/>
-        </p:spPr>
-        <p:txBody>
-          <a:bodyPr wrap="square" lIns="0" tIns="0" rIns="0" bIns="0" rtlCol="0" anchor="ctr"/>
-          <a:lstStyle/>
-          <a:p>
-            <a:pPr algn="ctr" indent="0" marL="0">
-              <a:buNone/>
-            </a:pPr>
-            <a:r>
-              <a:rPr lang="en-US" sz="1100" dirty="0">
-                <a:solidFill>
-                  <a:srgbClr val="6B7280"/>
-                </a:solidFill>
-                <a:latin typeface="Calibri" pitchFamily="34" charset="0"/>
-                <a:ea typeface="Calibri" pitchFamily="34" charset="-122"/>
-                <a:cs typeface="Calibri" pitchFamily="34" charset="-120"/>
-              </a:rPr>
-              <a:t>↓</a:t>
-            </a:r>
-            <a:endParaRPr lang="en-US" sz="1100" dirty="0"/>
-          </a:p>
-        </p:txBody>
-      </p:sp>
-      <p:sp>
-        <p:nvSpPr>
-          <p:cNvPr id="24" name="Shape 22"/>
-          <p:cNvSpPr/>
-          <p:nvPr/>
-        </p:nvSpPr>
-        <p:spPr>
-          <a:xfrm>
-            <a:off x="4937760" y="3968496"/>
-            <a:ext cx="3108960" cy="548640"/>
-          </a:xfrm>
-          <a:prstGeom prst="roundRect">
-            <a:avLst>
-              <a:gd name="adj" fmla="val 10000"/>
-            </a:avLst>
-          </a:prstGeom>
-          <a:solidFill>
-            <a:srgbClr val="FBEFD9"/>
-          </a:solidFill>
-          <a:ln w="12700">
-            <a:solidFill>
-              <a:srgbClr val="D97706"/>
-            </a:solidFill>
-            <a:prstDash val="solid"/>
-          </a:ln>
-        </p:spPr>
-      </p:sp>
-      <p:sp>
-        <p:nvSpPr>
-          <p:cNvPr id="25" name="Text 23"/>
-          <p:cNvSpPr/>
-          <p:nvPr/>
-        </p:nvSpPr>
-        <p:spPr>
-          <a:xfrm>
-            <a:off x="5047488" y="4014216"/>
-            <a:ext cx="2889504" cy="237744"/>
-          </a:xfrm>
-          <a:prstGeom prst="rect">
-            <a:avLst/>
-          </a:prstGeom>
-          <a:noFill/>
-          <a:ln/>
-        </p:spPr>
-        <p:txBody>
-          <a:bodyPr wrap="square" lIns="0" tIns="0" rIns="0" bIns="0" rtlCol="0" anchor="ctr"/>
-          <a:lstStyle/>
-          <a:p>
-            <a:pPr indent="0" marL="0">
-              <a:buNone/>
-            </a:pPr>
-            <a:r>
-              <a:rPr lang="en-US" sz="1150" b="1" dirty="0">
-                <a:solidFill>
-                  <a:srgbClr val="D97706"/>
-                </a:solidFill>
-                <a:latin typeface="Calibri" pitchFamily="34" charset="0"/>
-                <a:ea typeface="Calibri" pitchFamily="34" charset="-122"/>
-                <a:cs typeface="Calibri" pitchFamily="34" charset="-120"/>
-              </a:rPr>
-              <a:t>planner · Fast Downward</a:t>
-            </a:r>
-            <a:endParaRPr lang="en-US" sz="1150" dirty="0"/>
-          </a:p>
-        </p:txBody>
-      </p:sp>
-      <p:sp>
-        <p:nvSpPr>
-          <p:cNvPr id="26" name="Text 24"/>
-          <p:cNvSpPr/>
-          <p:nvPr/>
-        </p:nvSpPr>
-        <p:spPr>
-          <a:xfrm>
-            <a:off x="5047488" y="4251960"/>
-            <a:ext cx="2889504" cy="228600"/>
-          </a:xfrm>
-          <a:prstGeom prst="rect">
-            <a:avLst/>
-          </a:prstGeom>
-          <a:noFill/>
-          <a:ln/>
-        </p:spPr>
-        <p:txBody>
-          <a:bodyPr wrap="square" lIns="0" tIns="0" rIns="0" bIns="0" rtlCol="0" anchor="ctr"/>
-          <a:lstStyle/>
-          <a:p>
-            <a:pPr indent="0" marL="0">
-              <a:buNone/>
-            </a:pPr>
-            <a:r>
-              <a:rPr lang="en-US" sz="950" dirty="0">
-                <a:solidFill>
-                  <a:srgbClr val="6B7280"/>
-                </a:solidFill>
-                <a:latin typeface="Calibri" pitchFamily="34" charset="0"/>
-                <a:ea typeface="Calibri" pitchFamily="34" charset="-122"/>
-                <a:cs typeface="Calibri" pitchFamily="34" charset="-120"/>
-              </a:rPr>
-              <a:t>cost-optimal plan, ~130 ms</a:t>
-            </a:r>
-            <a:endParaRPr lang="en-US" sz="950" dirty="0"/>
-          </a:p>
-        </p:txBody>
-      </p:sp>
-      <p:sp>
-        <p:nvSpPr>
-          <p:cNvPr id="27" name="Text 25"/>
-          <p:cNvSpPr/>
-          <p:nvPr/>
-        </p:nvSpPr>
-        <p:spPr>
-          <a:xfrm>
-            <a:off x="6400800" y="4480560"/>
-            <a:ext cx="274320" cy="274320"/>
-          </a:xfrm>
-          <a:prstGeom prst="rect">
-            <a:avLst/>
-          </a:prstGeom>
-          <a:noFill/>
-          <a:ln/>
-        </p:spPr>
-        <p:txBody>
-          <a:bodyPr wrap="square" lIns="0" tIns="0" rIns="0" bIns="0" rtlCol="0" anchor="ctr"/>
-          <a:lstStyle/>
-          <a:p>
-            <a:pPr algn="ctr" indent="0" marL="0">
-              <a:buNone/>
-            </a:pPr>
-            <a:r>
-              <a:rPr lang="en-US" sz="1100" dirty="0">
-                <a:solidFill>
-                  <a:srgbClr val="6B7280"/>
-                </a:solidFill>
-                <a:latin typeface="Calibri" pitchFamily="34" charset="0"/>
-                <a:ea typeface="Calibri" pitchFamily="34" charset="-122"/>
-                <a:cs typeface="Calibri" pitchFamily="34" charset="-120"/>
-              </a:rPr>
-              <a:t>↓</a:t>
-            </a:r>
-            <a:endParaRPr lang="en-US" sz="1100" dirty="0"/>
-          </a:p>
-        </p:txBody>
-      </p:sp>
-      <p:sp>
-        <p:nvSpPr>
-          <p:cNvPr id="28" name="Shape 26"/>
-          <p:cNvSpPr/>
-          <p:nvPr/>
-        </p:nvSpPr>
-        <p:spPr>
-          <a:xfrm>
-            <a:off x="4937760" y="4727448"/>
-            <a:ext cx="3108960" cy="548640"/>
-          </a:xfrm>
-          <a:prstGeom prst="roundRect">
-            <a:avLst>
-              <a:gd name="adj" fmla="val 10000"/>
-            </a:avLst>
-          </a:prstGeom>
-          <a:solidFill>
-            <a:srgbClr val="F3F4F6"/>
-          </a:solidFill>
-          <a:ln/>
-        </p:spPr>
-      </p:sp>
-      <p:sp>
-        <p:nvSpPr>
-          <p:cNvPr id="29" name="Text 27"/>
-          <p:cNvSpPr/>
-          <p:nvPr/>
-        </p:nvSpPr>
-        <p:spPr>
-          <a:xfrm>
-            <a:off x="5047488" y="4773168"/>
-            <a:ext cx="2889504" cy="237744"/>
-          </a:xfrm>
-          <a:prstGeom prst="rect">
-            <a:avLst/>
-          </a:prstGeom>
-          <a:noFill/>
-          <a:ln/>
-        </p:spPr>
-        <p:txBody>
-          <a:bodyPr wrap="square" lIns="0" tIns="0" rIns="0" bIns="0" rtlCol="0" anchor="ctr"/>
-          <a:lstStyle/>
-          <a:p>
-            <a:pPr indent="0" marL="0">
-              <a:buNone/>
-            </a:pPr>
-            <a:r>
-              <a:rPr lang="en-US" sz="1150" b="1" dirty="0">
-                <a:solidFill>
-                  <a:srgbClr val="111827"/>
-                </a:solidFill>
-                <a:latin typeface="Calibri" pitchFamily="34" charset="0"/>
-                <a:ea typeface="Calibri" pitchFamily="34" charset="-122"/>
-                <a:cs typeface="Calibri" pitchFamily="34" charset="-120"/>
-              </a:rPr>
-              <a:t>executor</a:t>
-            </a:r>
-            <a:endParaRPr lang="en-US" sz="1150" dirty="0"/>
-          </a:p>
-        </p:txBody>
-      </p:sp>
-      <p:sp>
-        <p:nvSpPr>
-          <p:cNvPr id="30" name="Text 28"/>
-          <p:cNvSpPr/>
-          <p:nvPr/>
-        </p:nvSpPr>
-        <p:spPr>
-          <a:xfrm>
-            <a:off x="5047488" y="5010912"/>
-            <a:ext cx="2889504" cy="228600"/>
-          </a:xfrm>
-          <a:prstGeom prst="rect">
-            <a:avLst/>
-          </a:prstGeom>
-          <a:noFill/>
-          <a:ln/>
-        </p:spPr>
-        <p:txBody>
-          <a:bodyPr wrap="square" lIns="0" tIns="0" rIns="0" bIns="0" rtlCol="0" anchor="ctr"/>
-          <a:lstStyle/>
-          <a:p>
-            <a:pPr indent="0" marL="0">
-              <a:buNone/>
-            </a:pPr>
-            <a:r>
-              <a:rPr lang="en-US" sz="950" dirty="0">
-                <a:solidFill>
-                  <a:srgbClr val="6B7280"/>
-                </a:solidFill>
-                <a:latin typeface="Calibri" pitchFamily="34" charset="0"/>
-                <a:ea typeface="Calibri" pitchFamily="34" charset="-122"/>
-                <a:cs typeface="Calibri" pitchFamily="34" charset="-120"/>
-              </a:rPr>
-              <a:t>dispatches planned actions</a:t>
-            </a:r>
-            <a:endParaRPr lang="en-US" sz="950" dirty="0"/>
-          </a:p>
-        </p:txBody>
-      </p:sp>
-      <p:sp>
-        <p:nvSpPr>
-          <p:cNvPr id="31" name="Shape 29"/>
-          <p:cNvSpPr/>
-          <p:nvPr/>
-        </p:nvSpPr>
-        <p:spPr>
-          <a:xfrm>
-            <a:off x="9006840" y="1325880"/>
-            <a:ext cx="2560320" cy="4343400"/>
-          </a:xfrm>
-          <a:prstGeom prst="roundRect">
-            <a:avLst>
-              <a:gd name="adj" fmla="val 3571"/>
-            </a:avLst>
-          </a:prstGeom>
-          <a:solidFill>
-            <a:srgbClr val="FFFFFF"/>
-          </a:solidFill>
-          <a:ln w="15875">
-            <a:solidFill>
-              <a:srgbClr val="E5E7EB"/>
-            </a:solidFill>
-            <a:prstDash val="solid"/>
-          </a:ln>
-        </p:spPr>
-      </p:sp>
-      <p:sp>
-        <p:nvSpPr>
-          <p:cNvPr id="32" name="Text 30"/>
-          <p:cNvSpPr/>
-          <p:nvPr/>
-        </p:nvSpPr>
-        <p:spPr>
-          <a:xfrm>
-            <a:off x="9189720" y="1481328"/>
-            <a:ext cx="2194560" cy="320040"/>
-          </a:xfrm>
-          <a:prstGeom prst="rect">
-            <a:avLst/>
-          </a:prstGeom>
-          <a:noFill/>
-          <a:ln/>
-        </p:spPr>
-        <p:txBody>
-          <a:bodyPr wrap="square" lIns="0" tIns="0" rIns="0" bIns="0" rtlCol="0" anchor="ctr"/>
-          <a:lstStyle/>
-          <a:p>
-            <a:pPr indent="0" marL="0">
-              <a:buNone/>
-            </a:pPr>
-            <a:r>
-              <a:rPr lang="en-US" sz="1500" b="1" dirty="0">
-                <a:solidFill>
-                  <a:srgbClr val="111827"/>
+              <a:rPr lang="en-US" sz="2600" b="1" dirty="0">
+                <a:solidFill>
+                  <a:srgbClr val="FFFFFF"/>
                 </a:solidFill>
                 <a:latin typeface="Cambria" pitchFamily="34" charset="0"/>
                 <a:ea typeface="Cambria" pitchFamily="34" charset="-122"/>
                 <a:cs typeface="Cambria" pitchFamily="34" charset="-120"/>
               </a:rPr>
-              <a:t>Laptop · browser</a:t>
-            </a:r>
-            <a:endParaRPr lang="en-US" sz="1500" dirty="0"/>
-          </a:p>
-        </p:txBody>
-      </p:sp>
-      <p:sp>
-        <p:nvSpPr>
-          <p:cNvPr id="33" name="Text 31"/>
-          <p:cNvSpPr/>
-          <p:nvPr/>
-        </p:nvSpPr>
-        <p:spPr>
-          <a:xfrm>
-            <a:off x="9189720" y="1938528"/>
-            <a:ext cx="2194560" cy="228600"/>
-          </a:xfrm>
-          <a:prstGeom prst="rect">
-            <a:avLst/>
-          </a:prstGeom>
-          <a:noFill/>
-          <a:ln/>
-        </p:spPr>
-        <p:txBody>
-          <a:bodyPr wrap="square" lIns="0" tIns="0" rIns="0" bIns="0" rtlCol="0" anchor="ctr"/>
-          <a:lstStyle/>
-          <a:p>
-            <a:pPr indent="0" marL="0">
-              <a:buNone/>
-            </a:pPr>
-            <a:r>
-              <a:rPr lang="en-US" sz="950" b="1" spc="200" kern="0" dirty="0">
-                <a:solidFill>
-                  <a:srgbClr val="1D4ED8"/>
-                </a:solidFill>
-                <a:latin typeface="Calibri" pitchFamily="34" charset="0"/>
-                <a:ea typeface="Calibri" pitchFamily="34" charset="-122"/>
-                <a:cs typeface="Calibri" pitchFamily="34" charset="-120"/>
-              </a:rPr>
-              <a:t>LIVE DASHBOARD</a:t>
-            </a:r>
-            <a:endParaRPr lang="en-US" sz="950" dirty="0"/>
-          </a:p>
-        </p:txBody>
-      </p:sp>
-      <p:sp>
-        <p:nvSpPr>
-          <p:cNvPr id="34" name="Text 32"/>
-          <p:cNvSpPr/>
-          <p:nvPr/>
-        </p:nvSpPr>
-        <p:spPr>
-          <a:xfrm>
-            <a:off x="9189720" y="2194560"/>
-            <a:ext cx="2240280" cy="1371600"/>
-          </a:xfrm>
-          <a:prstGeom prst="rect">
-            <a:avLst/>
-          </a:prstGeom>
-          <a:noFill/>
-          <a:ln/>
-        </p:spPr>
-        <p:txBody>
-          <a:bodyPr wrap="square" lIns="0" tIns="0" rIns="0" bIns="0" rtlCol="0" anchor="ctr"/>
-          <a:lstStyle/>
-          <a:p>
-            <a:pPr indent="0" marL="0">
-              <a:lnSpc>
-                <a:spcPct val="130000"/>
-              </a:lnSpc>
-              <a:buNone/>
-            </a:pPr>
-            <a:r>
-              <a:rPr lang="en-US" sz="1200" dirty="0">
-                <a:solidFill>
-                  <a:srgbClr val="111827"/>
-                </a:solidFill>
-                <a:latin typeface="Calibri" pitchFamily="34" charset="0"/>
-                <a:ea typeface="Calibri" pitchFamily="34" charset="-122"/>
-                <a:cs typeface="Calibri" pitchFamily="34" charset="-120"/>
-              </a:rPr>
-              <a:t>seat floor plan + windows</a:t>
-            </a:r>
-            <a:endParaRPr lang="en-US" sz="1200" dirty="0"/>
-          </a:p>
-          <a:p>
-            <a:pPr indent="0" marL="0">
-              <a:lnSpc>
-                <a:spcPct val="130000"/>
-              </a:lnSpc>
-              <a:buNone/>
-            </a:pPr>
-            <a:r>
-              <a:rPr lang="en-US" sz="1200" dirty="0">
-                <a:solidFill>
-                  <a:srgbClr val="111827"/>
-                </a:solidFill>
-                <a:latin typeface="Calibri" pitchFamily="34" charset="0"/>
-                <a:ea typeface="Calibri" pitchFamily="34" charset="-122"/>
-                <a:cs typeface="Calibri" pitchFamily="34" charset="-120"/>
-              </a:rPr>
-              <a:t>current plan with cost</a:t>
-            </a:r>
-            <a:endParaRPr lang="en-US" sz="1200" dirty="0"/>
-          </a:p>
-          <a:p>
-            <a:pPr indent="0" marL="0">
-              <a:lnSpc>
-                <a:spcPct val="130000"/>
-              </a:lnSpc>
-              <a:buNone/>
-            </a:pPr>
-            <a:r>
-              <a:rPr lang="en-US" sz="1200" dirty="0">
-                <a:solidFill>
-                  <a:srgbClr val="111827"/>
-                </a:solidFill>
-                <a:latin typeface="Calibri" pitchFamily="34" charset="0"/>
-                <a:ea typeface="Calibri" pitchFamily="34" charset="-122"/>
-                <a:cs typeface="Calibri" pitchFamily="34" charset="-120"/>
-              </a:rPr>
-              <a:t>trend charts</a:t>
-            </a:r>
-            <a:endParaRPr lang="en-US" sz="1200" dirty="0"/>
-          </a:p>
-          <a:p>
-            <a:pPr indent="0" marL="0">
-              <a:lnSpc>
-                <a:spcPct val="130000"/>
-              </a:lnSpc>
-              <a:buNone/>
-            </a:pPr>
-            <a:r>
-              <a:rPr lang="en-US" sz="1200" dirty="0">
-                <a:solidFill>
-                  <a:srgbClr val="111827"/>
-                </a:solidFill>
-                <a:latin typeface="Calibri" pitchFamily="34" charset="0"/>
-                <a:ea typeface="Calibri" pitchFamily="34" charset="-122"/>
-                <a:cs typeface="Calibri" pitchFamily="34" charset="-120"/>
-              </a:rPr>
-              <a:t>Pomodoro session rings</a:t>
-            </a:r>
-            <a:endParaRPr lang="en-US" sz="1200" dirty="0"/>
-          </a:p>
-        </p:txBody>
-      </p:sp>
-      <p:sp>
-        <p:nvSpPr>
-          <p:cNvPr id="35" name="Text 33"/>
-          <p:cNvSpPr/>
-          <p:nvPr/>
-        </p:nvSpPr>
-        <p:spPr>
-          <a:xfrm>
-            <a:off x="9189720" y="4160520"/>
-            <a:ext cx="2240280" cy="914400"/>
-          </a:xfrm>
-          <a:prstGeom prst="rect">
-            <a:avLst/>
-          </a:prstGeom>
-          <a:noFill/>
-          <a:ln/>
-        </p:spPr>
-        <p:txBody>
-          <a:bodyPr wrap="square" lIns="0" tIns="0" rIns="0" bIns="0" rtlCol="0" anchor="ctr"/>
-          <a:lstStyle/>
-          <a:p>
-            <a:pPr indent="0" marL="0">
-              <a:buNone/>
-            </a:pPr>
-            <a:r>
-              <a:rPr lang="en-US" sz="1050" dirty="0">
-                <a:solidFill>
-                  <a:srgbClr val="6B7280"/>
-                </a:solidFill>
-                <a:latin typeface="Calibri" pitchFamily="34" charset="0"/>
-                <a:ea typeface="Calibri" pitchFamily="34" charset="-122"/>
-                <a:cs typeface="Calibri" pitchFamily="34" charset="-120"/>
-              </a:rPr>
-              <a:t>in demo mode the laptop joins the WiFi access point spanned by the Pi 5</a:t>
-            </a:r>
-            <a:endParaRPr lang="en-US" sz="1050" dirty="0"/>
-          </a:p>
-        </p:txBody>
-      </p:sp>
-      <p:sp>
-        <p:nvSpPr>
-          <p:cNvPr id="36" name="Shape 34"/>
-          <p:cNvSpPr/>
-          <p:nvPr/>
-        </p:nvSpPr>
-        <p:spPr>
-          <a:xfrm>
-            <a:off x="4059936" y="2148840"/>
-            <a:ext cx="621792" cy="292608"/>
-          </a:xfrm>
-          <a:prstGeom prst="rightArrow">
-            <a:avLst/>
-          </a:prstGeom>
-          <a:solidFill>
-            <a:srgbClr val="15803D"/>
-          </a:solidFill>
-          <a:ln/>
-        </p:spPr>
-      </p:sp>
-      <p:sp>
-        <p:nvSpPr>
-          <p:cNvPr id="37" name="Text 35"/>
-          <p:cNvSpPr/>
-          <p:nvPr/>
-        </p:nvSpPr>
-        <p:spPr>
-          <a:xfrm>
-            <a:off x="3913632" y="1847088"/>
-            <a:ext cx="914400" cy="256032"/>
-          </a:xfrm>
-          <a:prstGeom prst="rect">
-            <a:avLst/>
-          </a:prstGeom>
-          <a:noFill/>
-          <a:ln/>
-        </p:spPr>
-        <p:txBody>
-          <a:bodyPr wrap="square" lIns="0" tIns="0" rIns="0" bIns="0" rtlCol="0" anchor="ctr"/>
-          <a:lstStyle/>
-          <a:p>
-            <a:pPr algn="ctr" indent="0" marL="0">
-              <a:buNone/>
-            </a:pPr>
-            <a:r>
-              <a:rPr lang="en-US" sz="950" dirty="0">
-                <a:solidFill>
-                  <a:srgbClr val="6B7280"/>
-                </a:solidFill>
-                <a:latin typeface="Calibri" pitchFamily="34" charset="0"/>
-                <a:ea typeface="Calibri" pitchFamily="34" charset="-122"/>
-                <a:cs typeface="Calibri" pitchFamily="34" charset="-120"/>
-              </a:rPr>
-              <a:t>sensor data</a:t>
-            </a:r>
-            <a:endParaRPr lang="en-US" sz="950" dirty="0"/>
-          </a:p>
-        </p:txBody>
-      </p:sp>
-      <p:sp>
-        <p:nvSpPr>
-          <p:cNvPr id="38" name="Shape 36"/>
-          <p:cNvSpPr/>
-          <p:nvPr/>
-        </p:nvSpPr>
-        <p:spPr>
-          <a:xfrm>
-            <a:off x="4059936" y="4297680"/>
-            <a:ext cx="621792" cy="292608"/>
-          </a:xfrm>
-          <a:prstGeom prst="leftArrow">
-            <a:avLst/>
-          </a:prstGeom>
-          <a:solidFill>
-            <a:srgbClr val="D97706"/>
-          </a:solidFill>
-          <a:ln/>
-        </p:spPr>
-      </p:sp>
-      <p:sp>
-        <p:nvSpPr>
-          <p:cNvPr id="39" name="Text 37"/>
-          <p:cNvSpPr/>
-          <p:nvPr/>
-        </p:nvSpPr>
-        <p:spPr>
-          <a:xfrm>
-            <a:off x="3913632" y="4626864"/>
-            <a:ext cx="914400" cy="256032"/>
-          </a:xfrm>
-          <a:prstGeom prst="rect">
-            <a:avLst/>
-          </a:prstGeom>
-          <a:noFill/>
-          <a:ln/>
-        </p:spPr>
-        <p:txBody>
-          <a:bodyPr wrap="square" lIns="0" tIns="0" rIns="0" bIns="0" rtlCol="0" anchor="ctr"/>
-          <a:lstStyle/>
-          <a:p>
-            <a:pPr algn="ctr" indent="0" marL="0">
-              <a:buNone/>
-            </a:pPr>
-            <a:r>
-              <a:rPr lang="en-US" sz="950" dirty="0">
-                <a:solidFill>
-                  <a:srgbClr val="6B7280"/>
-                </a:solidFill>
-                <a:latin typeface="Calibri" pitchFamily="34" charset="0"/>
-                <a:ea typeface="Calibri" pitchFamily="34" charset="-122"/>
-                <a:cs typeface="Calibri" pitchFamily="34" charset="-120"/>
-              </a:rPr>
-              <a:t>actions</a:t>
-            </a:r>
-            <a:endParaRPr lang="en-US" sz="950" dirty="0"/>
-          </a:p>
-        </p:txBody>
-      </p:sp>
-      <p:sp>
-        <p:nvSpPr>
-          <p:cNvPr id="40" name="Shape 38"/>
-          <p:cNvSpPr/>
-          <p:nvPr/>
-        </p:nvSpPr>
-        <p:spPr>
-          <a:xfrm>
-            <a:off x="8311896" y="2148840"/>
-            <a:ext cx="621792" cy="292608"/>
-          </a:xfrm>
-          <a:prstGeom prst="rightArrow">
-            <a:avLst/>
-          </a:prstGeom>
-          <a:solidFill>
-            <a:srgbClr val="1D4ED8"/>
-          </a:solidFill>
-          <a:ln/>
-        </p:spPr>
-      </p:sp>
-      <p:sp>
-        <p:nvSpPr>
-          <p:cNvPr id="41" name="Text 39"/>
-          <p:cNvSpPr/>
-          <p:nvPr/>
-        </p:nvSpPr>
-        <p:spPr>
-          <a:xfrm>
-            <a:off x="8156448" y="1847088"/>
-            <a:ext cx="960120" cy="256032"/>
-          </a:xfrm>
-          <a:prstGeom prst="rect">
-            <a:avLst/>
-          </a:prstGeom>
-          <a:noFill/>
-          <a:ln/>
-        </p:spPr>
-        <p:txBody>
-          <a:bodyPr wrap="square" lIns="0" tIns="0" rIns="0" bIns="0" rtlCol="0" anchor="ctr"/>
-          <a:lstStyle/>
-          <a:p>
-            <a:pPr algn="ctr" indent="0" marL="0">
-              <a:buNone/>
-            </a:pPr>
-            <a:r>
-              <a:rPr lang="en-US" sz="950" dirty="0">
-                <a:solidFill>
-                  <a:srgbClr val="6B7280"/>
-                </a:solidFill>
-                <a:latin typeface="Calibri" pitchFamily="34" charset="0"/>
-                <a:ea typeface="Calibri" pitchFamily="34" charset="-122"/>
-                <a:cs typeface="Calibri" pitchFamily="34" charset="-120"/>
-              </a:rPr>
-              <a:t>state + plan</a:t>
-            </a:r>
-            <a:endParaRPr lang="en-US" sz="950" dirty="0"/>
-          </a:p>
-        </p:txBody>
-      </p:sp>
-      <p:sp>
-        <p:nvSpPr>
-          <p:cNvPr id="42" name="Shape 40"/>
-          <p:cNvSpPr/>
-          <p:nvPr/>
-        </p:nvSpPr>
-        <p:spPr>
-          <a:xfrm>
-            <a:off x="640080" y="5989320"/>
-            <a:ext cx="10927080" cy="0"/>
-          </a:xfrm>
-          <a:prstGeom prst="line">
-            <a:avLst/>
-          </a:prstGeom>
-          <a:noFill/>
-          <a:ln w="9525">
-            <a:solidFill>
-              <a:srgbClr val="E5E7EB"/>
-            </a:solidFill>
-            <a:prstDash val="solid"/>
-          </a:ln>
-        </p:spPr>
-      </p:sp>
-      <p:sp>
-        <p:nvSpPr>
-          <p:cNvPr id="43" name="Text 41"/>
-          <p:cNvSpPr/>
-          <p:nvPr/>
-        </p:nvSpPr>
-        <p:spPr>
-          <a:xfrm>
-            <a:off x="640080" y="6126480"/>
-            <a:ext cx="10927080" cy="457200"/>
-          </a:xfrm>
-          <a:prstGeom prst="rect">
-            <a:avLst/>
-          </a:prstGeom>
-          <a:noFill/>
-          <a:ln/>
-        </p:spPr>
-        <p:txBody>
-          <a:bodyPr wrap="square" lIns="0" tIns="0" rIns="0" bIns="0" rtlCol="0" anchor="ctr"/>
-          <a:lstStyle/>
-          <a:p>
-            <a:pPr algn="ctr" indent="0" marL="0">
-              <a:buNone/>
-            </a:pPr>
-            <a:r>
-              <a:rPr lang="en-US" sz="1250" dirty="0">
-                <a:solidFill>
-                  <a:srgbClr val="6B7280"/>
-                </a:solidFill>
-                <a:latin typeface="Calibri" pitchFamily="34" charset="0"/>
-                <a:ea typeface="Calibri" pitchFamily="34" charset="-122"/>
-                <a:cs typeface="Calibri" pitchFamily="34" charset="-120"/>
-              </a:rPr>
-              <a:t>In effect: the lamp follows occupancy and darkness · the airing strategy follows weather costs · breaks are nudged after 2 min · disturbances are corrected in under 1 s</a:t>
-            </a:r>
-            <a:endParaRPr lang="en-US" sz="1250" dirty="0"/>
+              <a:t>What if the room could?</a:t>
+            </a:r>
+            <a:endParaRPr lang="en-US" sz="2600" dirty="0"/>
           </a:p>
         </p:txBody>
       </p:sp>
@@ -3953,7 +3153,7 @@
                 <a:ea typeface="Calibri" pitchFamily="34" charset="-122"/>
                 <a:cs typeface="Calibri" pitchFamily="34" charset="-120"/>
               </a:rPr>
-              <a:t>WHY</a:t>
+              <a:t>HOW IT WORKS</a:t>
             </a:r>
             <a:endParaRPr lang="en-US" sz="1100" dirty="0"/>
           </a:p>
@@ -3992,7 +3192,7 @@
                 <a:ea typeface="Cambria" pitchFamily="34" charset="-122"/>
                 <a:cs typeface="Cambria" pitchFamily="34" charset="-120"/>
               </a:rPr>
-              <a:t>A hot summer, a full library</a:t>
+              <a:t>Setup: two Raspberry Pis and a browser dashboard</a:t>
             </a:r>
             <a:endParaRPr lang="en-US" sz="3000" dirty="0"/>
           </a:p>
@@ -4000,30 +3200,57 @@
       </p:sp>
       <p:sp>
         <p:nvSpPr>
-          <p:cNvPr id="4" name="Text 2"/>
-          <p:cNvSpPr/>
-          <p:nvPr/>
-        </p:nvSpPr>
-        <p:spPr>
-          <a:xfrm>
-            <a:off x="640080" y="2011680"/>
-            <a:ext cx="3474720" cy="1005840"/>
-          </a:xfrm>
-          <a:prstGeom prst="rect">
-            <a:avLst/>
-          </a:prstGeom>
-          <a:noFill/>
-          <a:ln/>
-        </p:spPr>
-        <p:txBody>
-          <a:bodyPr wrap="square" lIns="0" tIns="0" rIns="0" bIns="0" rtlCol="0" anchor="ctr"/>
-          <a:lstStyle/>
-          <a:p>
-            <a:pPr indent="0" marL="0">
-              <a:buNone/>
-            </a:pPr>
-            <a:r>
-              <a:rPr lang="en-US" sz="5200" b="1" dirty="0">
+          <p:cNvPr id="4" name="Shape 2"/>
+          <p:cNvSpPr/>
+          <p:nvPr/>
+        </p:nvSpPr>
+        <p:spPr>
+          <a:xfrm>
+            <a:off x="640080" y="1325880"/>
+            <a:ext cx="3383280" cy="4343400"/>
+          </a:xfrm>
+          <a:prstGeom prst="roundRect">
+            <a:avLst>
+              <a:gd name="adj" fmla="val 2703"/>
+            </a:avLst>
+          </a:prstGeom>
+          <a:solidFill>
+            <a:srgbClr val="FFFFFF"/>
+          </a:solidFill>
+          <a:ln w="15875">
+            <a:solidFill>
+              <a:srgbClr val="E5E7EB"/>
+            </a:solidFill>
+            <a:prstDash val="solid"/>
+          </a:ln>
+        </p:spPr>
+      </p:sp>
+      <p:sp>
+        <p:nvSpPr>
+          <p:cNvPr id="5" name="Text 3"/>
+          <p:cNvSpPr/>
+          <p:nvPr/>
+        </p:nvSpPr>
+        <p:spPr>
+          <a:xfrm>
+            <a:off x="868680" y="1481328"/>
+            <a:ext cx="2926080" cy="320040"/>
+          </a:xfrm>
+          <a:prstGeom prst="rect">
+            <a:avLst/>
+          </a:prstGeom>
+          <a:noFill/>
+          <a:ln/>
+        </p:spPr>
+        <p:txBody>
+          <a:bodyPr wrap="square" lIns="0" tIns="0" rIns="0" bIns="0" rtlCol="0" anchor="ctr"/>
+          <a:lstStyle/>
+          <a:p>
+            <a:pPr indent="0" marL="0">
+              <a:buNone/>
+            </a:pPr>
+            <a:r>
+              <a:rPr lang="en-US" sz="1500" b="1" dirty="0">
                 <a:solidFill>
                   <a:srgbClr val="111827"/>
                 </a:solidFill>
@@ -4031,38 +3258,280 @@
                 <a:ea typeface="Cambria" pitchFamily="34" charset="-122"/>
                 <a:cs typeface="Cambria" pitchFamily="34" charset="-120"/>
               </a:rPr>
-              <a:t>35 °C+</a:t>
-            </a:r>
-            <a:endParaRPr lang="en-US" sz="5200" dirty="0"/>
-          </a:p>
-        </p:txBody>
-      </p:sp>
-      <p:sp>
-        <p:nvSpPr>
-          <p:cNvPr id="5" name="Text 3"/>
-          <p:cNvSpPr/>
-          <p:nvPr/>
-        </p:nvSpPr>
-        <p:spPr>
-          <a:xfrm>
-            <a:off x="640080" y="3154680"/>
-            <a:ext cx="3246120" cy="1005840"/>
-          </a:xfrm>
-          <a:prstGeom prst="rect">
-            <a:avLst/>
-          </a:prstGeom>
-          <a:noFill/>
-          <a:ln/>
-        </p:spPr>
-        <p:txBody>
-          <a:bodyPr wrap="square" lIns="0" tIns="0" rIns="0" bIns="0" rtlCol="0" anchor="ctr"/>
-          <a:lstStyle/>
-          <a:p>
-            <a:pPr indent="0" marL="0">
-              <a:buNone/>
-            </a:pPr>
-            <a:r>
-              <a:rPr lang="en-US" sz="1450" dirty="0">
+              <a:t>Raspberry Pi 3 B+  ·  edge</a:t>
+            </a:r>
+            <a:endParaRPr lang="en-US" sz="1500" dirty="0"/>
+          </a:p>
+        </p:txBody>
+      </p:sp>
+      <p:sp>
+        <p:nvSpPr>
+          <p:cNvPr id="6" name="Text 4"/>
+          <p:cNvSpPr/>
+          <p:nvPr/>
+        </p:nvSpPr>
+        <p:spPr>
+          <a:xfrm>
+            <a:off x="868680" y="1938528"/>
+            <a:ext cx="2926080" cy="228600"/>
+          </a:xfrm>
+          <a:prstGeom prst="rect">
+            <a:avLst/>
+          </a:prstGeom>
+          <a:noFill/>
+          <a:ln/>
+        </p:spPr>
+        <p:txBody>
+          <a:bodyPr wrap="square" lIns="0" tIns="0" rIns="0" bIns="0" rtlCol="0" anchor="ctr"/>
+          <a:lstStyle/>
+          <a:p>
+            <a:pPr indent="0" marL="0">
+              <a:buNone/>
+            </a:pPr>
+            <a:r>
+              <a:rPr lang="en-US" sz="950" b="1" spc="200" kern="0" dirty="0">
+                <a:solidFill>
+                  <a:srgbClr val="15803D"/>
+                </a:solidFill>
+                <a:latin typeface="Calibri" pitchFamily="34" charset="0"/>
+                <a:ea typeface="Calibri" pitchFamily="34" charset="-122"/>
+                <a:cs typeface="Calibri" pitchFamily="34" charset="-120"/>
+              </a:rPr>
+              <a:t>SENSES</a:t>
+            </a:r>
+            <a:endParaRPr lang="en-US" sz="950" dirty="0"/>
+          </a:p>
+        </p:txBody>
+      </p:sp>
+      <p:sp>
+        <p:nvSpPr>
+          <p:cNvPr id="7" name="Text 5"/>
+          <p:cNvSpPr/>
+          <p:nvPr/>
+        </p:nvSpPr>
+        <p:spPr>
+          <a:xfrm>
+            <a:off x="868680" y="2194560"/>
+            <a:ext cx="2926080" cy="594360"/>
+          </a:xfrm>
+          <a:prstGeom prst="rect">
+            <a:avLst/>
+          </a:prstGeom>
+          <a:noFill/>
+          <a:ln/>
+        </p:spPr>
+        <p:txBody>
+          <a:bodyPr wrap="square" lIns="0" tIns="0" rIns="0" bIns="0" rtlCol="0" anchor="ctr"/>
+          <a:lstStyle/>
+          <a:p>
+            <a:pPr indent="0" marL="0">
+              <a:lnSpc>
+                <a:spcPct val="125000"/>
+              </a:lnSpc>
+              <a:buNone/>
+            </a:pPr>
+            <a:r>
+              <a:rPr lang="en-US" sz="1250" dirty="0">
+                <a:solidFill>
+                  <a:srgbClr val="111827"/>
+                </a:solidFill>
+                <a:latin typeface="Calibri" pitchFamily="34" charset="0"/>
+                <a:ea typeface="Calibri" pitchFamily="34" charset="-122"/>
+                <a:cs typeface="Calibri" pitchFamily="34" charset="-120"/>
+              </a:rPr>
+              <a:t>motion sensor · 2 Hz</a:t>
+            </a:r>
+            <a:endParaRPr lang="en-US" sz="1250" dirty="0"/>
+          </a:p>
+          <a:p>
+            <a:pPr indent="0" marL="0">
+              <a:lnSpc>
+                <a:spcPct val="125000"/>
+              </a:lnSpc>
+              <a:buNone/>
+            </a:pPr>
+            <a:r>
+              <a:rPr lang="en-US" sz="1250" dirty="0">
+                <a:solidFill>
+                  <a:srgbClr val="111827"/>
+                </a:solidFill>
+                <a:latin typeface="Calibri" pitchFamily="34" charset="0"/>
+                <a:ea typeface="Calibri" pitchFamily="34" charset="-122"/>
+                <a:cs typeface="Calibri" pitchFamily="34" charset="-120"/>
+              </a:rPr>
+              <a:t>light sensor · 2 Hz</a:t>
+            </a:r>
+            <a:endParaRPr lang="en-US" sz="1250" dirty="0"/>
+          </a:p>
+        </p:txBody>
+      </p:sp>
+      <p:sp>
+        <p:nvSpPr>
+          <p:cNvPr id="8" name="Text 6"/>
+          <p:cNvSpPr/>
+          <p:nvPr/>
+        </p:nvSpPr>
+        <p:spPr>
+          <a:xfrm>
+            <a:off x="868680" y="2971800"/>
+            <a:ext cx="2926080" cy="228600"/>
+          </a:xfrm>
+          <a:prstGeom prst="rect">
+            <a:avLst/>
+          </a:prstGeom>
+          <a:noFill/>
+          <a:ln/>
+        </p:spPr>
+        <p:txBody>
+          <a:bodyPr wrap="square" lIns="0" tIns="0" rIns="0" bIns="0" rtlCol="0" anchor="ctr"/>
+          <a:lstStyle/>
+          <a:p>
+            <a:pPr indent="0" marL="0">
+              <a:buNone/>
+            </a:pPr>
+            <a:r>
+              <a:rPr lang="en-US" sz="950" b="1" spc="200" kern="0" dirty="0">
+                <a:solidFill>
+                  <a:srgbClr val="D97706"/>
+                </a:solidFill>
+                <a:latin typeface="Calibri" pitchFamily="34" charset="0"/>
+                <a:ea typeface="Calibri" pitchFamily="34" charset="-122"/>
+                <a:cs typeface="Calibri" pitchFamily="34" charset="-120"/>
+              </a:rPr>
+              <a:t>ACTS</a:t>
+            </a:r>
+            <a:endParaRPr lang="en-US" sz="950" dirty="0"/>
+          </a:p>
+        </p:txBody>
+      </p:sp>
+      <p:sp>
+        <p:nvSpPr>
+          <p:cNvPr id="9" name="Text 7"/>
+          <p:cNvSpPr/>
+          <p:nvPr/>
+        </p:nvSpPr>
+        <p:spPr>
+          <a:xfrm>
+            <a:off x="868680" y="3227832"/>
+            <a:ext cx="2926080" cy="914400"/>
+          </a:xfrm>
+          <a:prstGeom prst="rect">
+            <a:avLst/>
+          </a:prstGeom>
+          <a:noFill/>
+          <a:ln/>
+        </p:spPr>
+        <p:txBody>
+          <a:bodyPr wrap="square" lIns="0" tIns="0" rIns="0" bIns="0" rtlCol="0" anchor="ctr"/>
+          <a:lstStyle/>
+          <a:p>
+            <a:pPr indent="0" marL="0">
+              <a:lnSpc>
+                <a:spcPct val="125000"/>
+              </a:lnSpc>
+              <a:buNone/>
+            </a:pPr>
+            <a:r>
+              <a:rPr lang="en-US" sz="1250" dirty="0">
+                <a:solidFill>
+                  <a:srgbClr val="111827"/>
+                </a:solidFill>
+                <a:latin typeface="Calibri" pitchFamily="34" charset="0"/>
+                <a:ea typeface="Calibri" pitchFamily="34" charset="-122"/>
+                <a:cs typeface="Calibri" pitchFamily="34" charset="-120"/>
+              </a:rPr>
+              <a:t>reading lamp · ZigBee relay</a:t>
+            </a:r>
+            <a:endParaRPr lang="en-US" sz="1250" dirty="0"/>
+          </a:p>
+          <a:p>
+            <a:pPr indent="0" marL="0">
+              <a:lnSpc>
+                <a:spcPct val="125000"/>
+              </a:lnSpc>
+              <a:buNone/>
+            </a:pPr>
+            <a:r>
+              <a:rPr lang="en-US" sz="1250" dirty="0">
+                <a:solidFill>
+                  <a:srgbClr val="111827"/>
+                </a:solidFill>
+                <a:latin typeface="Calibri" pitchFamily="34" charset="0"/>
+                <a:ea typeface="Calibri" pitchFamily="34" charset="-122"/>
+                <a:cs typeface="Calibri" pitchFamily="34" charset="-120"/>
+              </a:rPr>
+              <a:t>break LED + quiet buzzer</a:t>
+            </a:r>
+            <a:endParaRPr lang="en-US" sz="1250" dirty="0"/>
+          </a:p>
+          <a:p>
+            <a:pPr indent="0" marL="0">
+              <a:lnSpc>
+                <a:spcPct val="125000"/>
+              </a:lnSpc>
+              <a:buNone/>
+            </a:pPr>
+            <a:r>
+              <a:rPr lang="en-US" sz="1250" dirty="0">
+                <a:solidFill>
+                  <a:srgbClr val="111827"/>
+                </a:solidFill>
+                <a:latin typeface="Calibri" pitchFamily="34" charset="0"/>
+                <a:ea typeface="Calibri" pitchFamily="34" charset="-122"/>
+                <a:cs typeface="Calibri" pitchFamily="34" charset="-120"/>
+              </a:rPr>
+              <a:t>status LCD · CO₂ light</a:t>
+            </a:r>
+            <a:endParaRPr lang="en-US" sz="1250" dirty="0"/>
+          </a:p>
+        </p:txBody>
+      </p:sp>
+      <p:sp>
+        <p:nvSpPr>
+          <p:cNvPr id="10" name="Shape 8"/>
+          <p:cNvSpPr/>
+          <p:nvPr/>
+        </p:nvSpPr>
+        <p:spPr>
+          <a:xfrm>
+            <a:off x="868680" y="4434840"/>
+            <a:ext cx="201168" cy="201168"/>
+          </a:xfrm>
+          <a:prstGeom prst="ellipse">
+            <a:avLst/>
+          </a:prstGeom>
+          <a:solidFill>
+            <a:srgbClr val="D97706"/>
+          </a:solidFill>
+          <a:ln/>
+        </p:spPr>
+      </p:sp>
+      <p:sp>
+        <p:nvSpPr>
+          <p:cNvPr id="11" name="Text 9"/>
+          <p:cNvSpPr/>
+          <p:nvPr/>
+        </p:nvSpPr>
+        <p:spPr>
+          <a:xfrm>
+            <a:off x="1170432" y="4416552"/>
+            <a:ext cx="2743200" cy="457200"/>
+          </a:xfrm>
+          <a:prstGeom prst="rect">
+            <a:avLst/>
+          </a:prstGeom>
+          <a:noFill/>
+          <a:ln/>
+        </p:spPr>
+        <p:txBody>
+          <a:bodyPr wrap="square" lIns="0" tIns="0" rIns="0" bIns="0" rtlCol="0" anchor="ctr"/>
+          <a:lstStyle/>
+          <a:p>
+            <a:pPr indent="0" marL="0">
+              <a:buNone/>
+            </a:pPr>
+            <a:r>
+              <a:rPr lang="en-US" sz="1100" dirty="0">
                 <a:solidFill>
                   <a:srgbClr val="6B7280"/>
                 </a:solidFill>
@@ -4070,38 +3539,65 @@
                 <a:ea typeface="Calibri" pitchFamily="34" charset="-122"/>
                 <a:cs typeface="Calibri" pitchFamily="34" charset="-120"/>
               </a:rPr>
-              <a:t>record heat sends students into the cool, quiet library</a:t>
-            </a:r>
-            <a:endParaRPr lang="en-US" sz="1450" dirty="0"/>
-          </a:p>
-        </p:txBody>
-      </p:sp>
-      <p:sp>
-        <p:nvSpPr>
-          <p:cNvPr id="6" name="Text 4"/>
-          <p:cNvSpPr/>
-          <p:nvPr/>
-        </p:nvSpPr>
-        <p:spPr>
-          <a:xfrm>
-            <a:off x="4480560" y="2011680"/>
-            <a:ext cx="3474720" cy="1005840"/>
-          </a:xfrm>
-          <a:prstGeom prst="rect">
-            <a:avLst/>
-          </a:prstGeom>
-          <a:noFill/>
-          <a:ln/>
-        </p:spPr>
-        <p:txBody>
-          <a:bodyPr wrap="square" lIns="0" tIns="0" rIns="0" bIns="0" rtlCol="0" anchor="ctr"/>
-          <a:lstStyle/>
-          <a:p>
-            <a:pPr indent="0" marL="0">
-              <a:buNone/>
-            </a:pPr>
-            <a:r>
-              <a:rPr lang="en-US" sz="5200" b="1" dirty="0">
+              <a:t>the relay switches a real desk lamp</a:t>
+            </a:r>
+            <a:endParaRPr lang="en-US" sz="1100" dirty="0"/>
+          </a:p>
+        </p:txBody>
+      </p:sp>
+      <p:sp>
+        <p:nvSpPr>
+          <p:cNvPr id="12" name="Shape 10"/>
+          <p:cNvSpPr/>
+          <p:nvPr/>
+        </p:nvSpPr>
+        <p:spPr>
+          <a:xfrm>
+            <a:off x="4709160" y="1325880"/>
+            <a:ext cx="3566160" cy="4343400"/>
+          </a:xfrm>
+          <a:prstGeom prst="roundRect">
+            <a:avLst>
+              <a:gd name="adj" fmla="val 2564"/>
+            </a:avLst>
+          </a:prstGeom>
+          <a:solidFill>
+            <a:srgbClr val="FFFFFF"/>
+          </a:solidFill>
+          <a:ln w="15875">
+            <a:solidFill>
+              <a:srgbClr val="E5E7EB"/>
+            </a:solidFill>
+            <a:prstDash val="solid"/>
+          </a:ln>
+        </p:spPr>
+      </p:sp>
+      <p:sp>
+        <p:nvSpPr>
+          <p:cNvPr id="13" name="Text 11"/>
+          <p:cNvSpPr/>
+          <p:nvPr/>
+        </p:nvSpPr>
+        <p:spPr>
+          <a:xfrm>
+            <a:off x="4937760" y="1481328"/>
+            <a:ext cx="3108960" cy="320040"/>
+          </a:xfrm>
+          <a:prstGeom prst="rect">
+            <a:avLst/>
+          </a:prstGeom>
+          <a:noFill/>
+          <a:ln/>
+        </p:spPr>
+        <p:txBody>
+          <a:bodyPr wrap="square" lIns="0" tIns="0" rIns="0" bIns="0" rtlCol="0" anchor="ctr"/>
+          <a:lstStyle/>
+          <a:p>
+            <a:pPr indent="0" marL="0">
+              <a:buNone/>
+            </a:pPr>
+            <a:r>
+              <a:rPr lang="en-US" sz="1500" b="1" dirty="0">
                 <a:solidFill>
                   <a:srgbClr val="111827"/>
                 </a:solidFill>
@@ -4109,38 +3605,160 @@
                 <a:ea typeface="Cambria" pitchFamily="34" charset="-122"/>
                 <a:cs typeface="Cambria" pitchFamily="34" charset="-120"/>
               </a:rPr>
-              <a:t>~40 %</a:t>
-            </a:r>
-            <a:endParaRPr lang="en-US" sz="5200" dirty="0"/>
-          </a:p>
-        </p:txBody>
-      </p:sp>
-      <p:sp>
-        <p:nvSpPr>
-          <p:cNvPr id="7" name="Text 5"/>
-          <p:cNvSpPr/>
-          <p:nvPr/>
-        </p:nvSpPr>
-        <p:spPr>
-          <a:xfrm>
-            <a:off x="4480560" y="3154680"/>
-            <a:ext cx="3246120" cy="1005840"/>
-          </a:xfrm>
-          <a:prstGeom prst="rect">
-            <a:avLst/>
-          </a:prstGeom>
-          <a:noFill/>
-          <a:ln/>
-        </p:spPr>
-        <p:txBody>
-          <a:bodyPr wrap="square" lIns="0" tIns="0" rIns="0" bIns="0" rtlCol="0" anchor="ctr"/>
-          <a:lstStyle/>
-          <a:p>
-            <a:pPr indent="0" marL="0">
-              <a:buNone/>
-            </a:pPr>
-            <a:r>
-              <a:rPr lang="en-US" sz="1450" dirty="0">
+              <a:t>Raspberry Pi 5  ·  core</a:t>
+            </a:r>
+            <a:endParaRPr lang="en-US" sz="1500" dirty="0"/>
+          </a:p>
+        </p:txBody>
+      </p:sp>
+      <p:sp>
+        <p:nvSpPr>
+          <p:cNvPr id="14" name="Shape 12"/>
+          <p:cNvSpPr/>
+          <p:nvPr/>
+        </p:nvSpPr>
+        <p:spPr>
+          <a:xfrm>
+            <a:off x="4937760" y="1874520"/>
+            <a:ext cx="3108960" cy="384048"/>
+          </a:xfrm>
+          <a:prstGeom prst="roundRect">
+            <a:avLst>
+              <a:gd name="adj" fmla="val 14286"/>
+            </a:avLst>
+          </a:prstGeom>
+          <a:solidFill>
+            <a:srgbClr val="FBEFD9"/>
+          </a:solidFill>
+          <a:ln/>
+        </p:spPr>
+      </p:sp>
+      <p:sp>
+        <p:nvSpPr>
+          <p:cNvPr id="15" name="Text 13"/>
+          <p:cNvSpPr/>
+          <p:nvPr/>
+        </p:nvSpPr>
+        <p:spPr>
+          <a:xfrm>
+            <a:off x="4937760" y="1911096"/>
+            <a:ext cx="3108960" cy="320040"/>
+          </a:xfrm>
+          <a:prstGeom prst="rect">
+            <a:avLst/>
+          </a:prstGeom>
+          <a:noFill/>
+          <a:ln/>
+        </p:spPr>
+        <p:txBody>
+          <a:bodyPr wrap="square" lIns="0" tIns="0" rIns="0" bIns="0" rtlCol="0" anchor="ctr"/>
+          <a:lstStyle/>
+          <a:p>
+            <a:pPr algn="ctr" indent="0" marL="0">
+              <a:buNone/>
+            </a:pPr>
+            <a:r>
+              <a:rPr lang="en-US" sz="1150" b="1" dirty="0">
+                <a:solidFill>
+                  <a:srgbClr val="D97706"/>
+                </a:solidFill>
+                <a:latin typeface="Calibri" pitchFamily="34" charset="0"/>
+                <a:ea typeface="Calibri" pitchFamily="34" charset="-122"/>
+                <a:cs typeface="Calibri" pitchFamily="34" charset="-120"/>
+              </a:rPr>
+              <a:t>MQTT broker · Mosquitto</a:t>
+            </a:r>
+            <a:endParaRPr lang="en-US" sz="1150" dirty="0"/>
+          </a:p>
+        </p:txBody>
+      </p:sp>
+      <p:sp>
+        <p:nvSpPr>
+          <p:cNvPr id="16" name="Shape 14"/>
+          <p:cNvSpPr/>
+          <p:nvPr/>
+        </p:nvSpPr>
+        <p:spPr>
+          <a:xfrm>
+            <a:off x="4937760" y="2450592"/>
+            <a:ext cx="3108960" cy="548640"/>
+          </a:xfrm>
+          <a:prstGeom prst="roundRect">
+            <a:avLst>
+              <a:gd name="adj" fmla="val 10000"/>
+            </a:avLst>
+          </a:prstGeom>
+          <a:solidFill>
+            <a:srgbClr val="F3F4F6"/>
+          </a:solidFill>
+          <a:ln/>
+        </p:spPr>
+      </p:sp>
+      <p:sp>
+        <p:nvSpPr>
+          <p:cNvPr id="17" name="Text 15"/>
+          <p:cNvSpPr/>
+          <p:nvPr/>
+        </p:nvSpPr>
+        <p:spPr>
+          <a:xfrm>
+            <a:off x="5047488" y="2496312"/>
+            <a:ext cx="2889504" cy="237744"/>
+          </a:xfrm>
+          <a:prstGeom prst="rect">
+            <a:avLst/>
+          </a:prstGeom>
+          <a:noFill/>
+          <a:ln/>
+        </p:spPr>
+        <p:txBody>
+          <a:bodyPr wrap="square" lIns="0" tIns="0" rIns="0" bIns="0" rtlCol="0" anchor="ctr"/>
+          <a:lstStyle/>
+          <a:p>
+            <a:pPr indent="0" marL="0">
+              <a:buNone/>
+            </a:pPr>
+            <a:r>
+              <a:rPr lang="en-US" sz="1150" b="1" dirty="0">
+                <a:solidFill>
+                  <a:srgbClr val="111827"/>
+                </a:solidFill>
+                <a:latin typeface="Calibri" pitchFamily="34" charset="0"/>
+                <a:ea typeface="Calibri" pitchFamily="34" charset="-122"/>
+                <a:cs typeface="Calibri" pitchFamily="34" charset="-120"/>
+              </a:rPr>
+              <a:t>context</a:t>
+            </a:r>
+            <a:endParaRPr lang="en-US" sz="1150" dirty="0"/>
+          </a:p>
+        </p:txBody>
+      </p:sp>
+      <p:sp>
+        <p:nvSpPr>
+          <p:cNvPr id="18" name="Text 16"/>
+          <p:cNvSpPr/>
+          <p:nvPr/>
+        </p:nvSpPr>
+        <p:spPr>
+          <a:xfrm>
+            <a:off x="5047488" y="2734056"/>
+            <a:ext cx="2889504" cy="228600"/>
+          </a:xfrm>
+          <a:prstGeom prst="rect">
+            <a:avLst/>
+          </a:prstGeom>
+          <a:noFill/>
+          <a:ln/>
+        </p:spPr>
+        <p:txBody>
+          <a:bodyPr wrap="square" lIns="0" tIns="0" rIns="0" bIns="0" rtlCol="0" anchor="ctr"/>
+          <a:lstStyle/>
+          <a:p>
+            <a:pPr indent="0" marL="0">
+              <a:buNone/>
+            </a:pPr>
+            <a:r>
+              <a:rPr lang="en-US" sz="950" dirty="0">
                 <a:solidFill>
                   <a:srgbClr val="6B7280"/>
                 </a:solidFill>
@@ -4148,38 +3766,487 @@
                 <a:ea typeface="Calibri" pitchFamily="34" charset="-122"/>
                 <a:cs typeface="Calibri" pitchFamily="34" charset="-120"/>
               </a:rPr>
-              <a:t>of EU energy consumption happens in buildings</a:t>
-            </a:r>
-            <a:endParaRPr lang="en-US" sz="1450" dirty="0"/>
-          </a:p>
-        </p:txBody>
-      </p:sp>
-      <p:sp>
-        <p:nvSpPr>
-          <p:cNvPr id="8" name="Text 6"/>
-          <p:cNvSpPr/>
-          <p:nvPr/>
-        </p:nvSpPr>
-        <p:spPr>
-          <a:xfrm>
-            <a:off x="8321040" y="2011680"/>
-            <a:ext cx="3474720" cy="1005840"/>
-          </a:xfrm>
-          <a:prstGeom prst="rect">
-            <a:avLst/>
-          </a:prstGeom>
-          <a:noFill/>
-          <a:ln/>
-        </p:spPr>
-        <p:txBody>
-          <a:bodyPr wrap="square" lIns="0" tIns="0" rIns="0" bIns="0" rtlCol="0" anchor="ctr"/>
-          <a:lstStyle/>
-          <a:p>
-            <a:pPr indent="0" marL="0">
-              <a:buNone/>
-            </a:pPr>
-            <a:r>
-              <a:rPr lang="en-US" sz="5200" b="1" dirty="0">
+              <a:t>world state · CO₂ · session FSM</a:t>
+            </a:r>
+            <a:endParaRPr lang="en-US" sz="950" dirty="0"/>
+          </a:p>
+        </p:txBody>
+      </p:sp>
+      <p:sp>
+        <p:nvSpPr>
+          <p:cNvPr id="19" name="Text 17"/>
+          <p:cNvSpPr/>
+          <p:nvPr/>
+        </p:nvSpPr>
+        <p:spPr>
+          <a:xfrm>
+            <a:off x="6400800" y="2962656"/>
+            <a:ext cx="274320" cy="274320"/>
+          </a:xfrm>
+          <a:prstGeom prst="rect">
+            <a:avLst/>
+          </a:prstGeom>
+          <a:noFill/>
+          <a:ln/>
+        </p:spPr>
+        <p:txBody>
+          <a:bodyPr wrap="square" lIns="0" tIns="0" rIns="0" bIns="0" rtlCol="0" anchor="ctr"/>
+          <a:lstStyle/>
+          <a:p>
+            <a:pPr algn="ctr" indent="0" marL="0">
+              <a:buNone/>
+            </a:pPr>
+            <a:r>
+              <a:rPr lang="en-US" sz="1100" dirty="0">
+                <a:solidFill>
+                  <a:srgbClr val="6B7280"/>
+                </a:solidFill>
+                <a:latin typeface="Calibri" pitchFamily="34" charset="0"/>
+                <a:ea typeface="Calibri" pitchFamily="34" charset="-122"/>
+                <a:cs typeface="Calibri" pitchFamily="34" charset="-120"/>
+              </a:rPr>
+              <a:t>↓</a:t>
+            </a:r>
+            <a:endParaRPr lang="en-US" sz="1100" dirty="0"/>
+          </a:p>
+        </p:txBody>
+      </p:sp>
+      <p:sp>
+        <p:nvSpPr>
+          <p:cNvPr id="20" name="Shape 18"/>
+          <p:cNvSpPr/>
+          <p:nvPr/>
+        </p:nvSpPr>
+        <p:spPr>
+          <a:xfrm>
+            <a:off x="4937760" y="3209544"/>
+            <a:ext cx="3108960" cy="548640"/>
+          </a:xfrm>
+          <a:prstGeom prst="roundRect">
+            <a:avLst>
+              <a:gd name="adj" fmla="val 10000"/>
+            </a:avLst>
+          </a:prstGeom>
+          <a:solidFill>
+            <a:srgbClr val="F3F4F6"/>
+          </a:solidFill>
+          <a:ln/>
+        </p:spPr>
+      </p:sp>
+      <p:sp>
+        <p:nvSpPr>
+          <p:cNvPr id="21" name="Text 19"/>
+          <p:cNvSpPr/>
+          <p:nvPr/>
+        </p:nvSpPr>
+        <p:spPr>
+          <a:xfrm>
+            <a:off x="5047488" y="3255264"/>
+            <a:ext cx="2889504" cy="237744"/>
+          </a:xfrm>
+          <a:prstGeom prst="rect">
+            <a:avLst/>
+          </a:prstGeom>
+          <a:noFill/>
+          <a:ln/>
+        </p:spPr>
+        <p:txBody>
+          <a:bodyPr wrap="square" lIns="0" tIns="0" rIns="0" bIns="0" rtlCol="0" anchor="ctr"/>
+          <a:lstStyle/>
+          <a:p>
+            <a:pPr indent="0" marL="0">
+              <a:buNone/>
+            </a:pPr>
+            <a:r>
+              <a:rPr lang="en-US" sz="1150" b="1" dirty="0">
+                <a:solidFill>
+                  <a:srgbClr val="111827"/>
+                </a:solidFill>
+                <a:latin typeface="Calibri" pitchFamily="34" charset="0"/>
+                <a:ea typeface="Calibri" pitchFamily="34" charset="-122"/>
+                <a:cs typeface="Calibri" pitchFamily="34" charset="-120"/>
+              </a:rPr>
+              <a:t>problem generator</a:t>
+            </a:r>
+            <a:endParaRPr lang="en-US" sz="1150" dirty="0"/>
+          </a:p>
+        </p:txBody>
+      </p:sp>
+      <p:sp>
+        <p:nvSpPr>
+          <p:cNvPr id="22" name="Text 20"/>
+          <p:cNvSpPr/>
+          <p:nvPr/>
+        </p:nvSpPr>
+        <p:spPr>
+          <a:xfrm>
+            <a:off x="5047488" y="3493008"/>
+            <a:ext cx="2889504" cy="228600"/>
+          </a:xfrm>
+          <a:prstGeom prst="rect">
+            <a:avLst/>
+          </a:prstGeom>
+          <a:noFill/>
+          <a:ln/>
+        </p:spPr>
+        <p:txBody>
+          <a:bodyPr wrap="square" lIns="0" tIns="0" rIns="0" bIns="0" rtlCol="0" anchor="ctr"/>
+          <a:lstStyle/>
+          <a:p>
+            <a:pPr indent="0" marL="0">
+              <a:buNone/>
+            </a:pPr>
+            <a:r>
+              <a:rPr lang="en-US" sz="950" dirty="0">
+                <a:solidFill>
+                  <a:srgbClr val="6B7280"/>
+                </a:solidFill>
+                <a:latin typeface="Calibri" pitchFamily="34" charset="0"/>
+                <a:ea typeface="Calibri" pitchFamily="34" charset="-122"/>
+                <a:cs typeface="Calibri" pitchFamily="34" charset="-120"/>
+              </a:rPr>
+              <a:t>state → PDDL goals + weather costs</a:t>
+            </a:r>
+            <a:endParaRPr lang="en-US" sz="950" dirty="0"/>
+          </a:p>
+        </p:txBody>
+      </p:sp>
+      <p:sp>
+        <p:nvSpPr>
+          <p:cNvPr id="23" name="Text 21"/>
+          <p:cNvSpPr/>
+          <p:nvPr/>
+        </p:nvSpPr>
+        <p:spPr>
+          <a:xfrm>
+            <a:off x="6400800" y="3721608"/>
+            <a:ext cx="274320" cy="274320"/>
+          </a:xfrm>
+          <a:prstGeom prst="rect">
+            <a:avLst/>
+          </a:prstGeom>
+          <a:noFill/>
+          <a:ln/>
+        </p:spPr>
+        <p:txBody>
+          <a:bodyPr wrap="square" lIns="0" tIns="0" rIns="0" bIns="0" rtlCol="0" anchor="ctr"/>
+          <a:lstStyle/>
+          <a:p>
+            <a:pPr algn="ctr" indent="0" marL="0">
+              <a:buNone/>
+            </a:pPr>
+            <a:r>
+              <a:rPr lang="en-US" sz="1100" dirty="0">
+                <a:solidFill>
+                  <a:srgbClr val="6B7280"/>
+                </a:solidFill>
+                <a:latin typeface="Calibri" pitchFamily="34" charset="0"/>
+                <a:ea typeface="Calibri" pitchFamily="34" charset="-122"/>
+                <a:cs typeface="Calibri" pitchFamily="34" charset="-120"/>
+              </a:rPr>
+              <a:t>↓</a:t>
+            </a:r>
+            <a:endParaRPr lang="en-US" sz="1100" dirty="0"/>
+          </a:p>
+        </p:txBody>
+      </p:sp>
+      <p:sp>
+        <p:nvSpPr>
+          <p:cNvPr id="24" name="Shape 22"/>
+          <p:cNvSpPr/>
+          <p:nvPr/>
+        </p:nvSpPr>
+        <p:spPr>
+          <a:xfrm>
+            <a:off x="4937760" y="3968496"/>
+            <a:ext cx="3108960" cy="548640"/>
+          </a:xfrm>
+          <a:prstGeom prst="roundRect">
+            <a:avLst>
+              <a:gd name="adj" fmla="val 10000"/>
+            </a:avLst>
+          </a:prstGeom>
+          <a:solidFill>
+            <a:srgbClr val="FBEFD9"/>
+          </a:solidFill>
+          <a:ln w="12700">
+            <a:solidFill>
+              <a:srgbClr val="D97706"/>
+            </a:solidFill>
+            <a:prstDash val="solid"/>
+          </a:ln>
+        </p:spPr>
+      </p:sp>
+      <p:sp>
+        <p:nvSpPr>
+          <p:cNvPr id="25" name="Text 23"/>
+          <p:cNvSpPr/>
+          <p:nvPr/>
+        </p:nvSpPr>
+        <p:spPr>
+          <a:xfrm>
+            <a:off x="5047488" y="4014216"/>
+            <a:ext cx="2889504" cy="237744"/>
+          </a:xfrm>
+          <a:prstGeom prst="rect">
+            <a:avLst/>
+          </a:prstGeom>
+          <a:noFill/>
+          <a:ln/>
+        </p:spPr>
+        <p:txBody>
+          <a:bodyPr wrap="square" lIns="0" tIns="0" rIns="0" bIns="0" rtlCol="0" anchor="ctr"/>
+          <a:lstStyle/>
+          <a:p>
+            <a:pPr indent="0" marL="0">
+              <a:buNone/>
+            </a:pPr>
+            <a:r>
+              <a:rPr lang="en-US" sz="1150" b="1" dirty="0">
+                <a:solidFill>
+                  <a:srgbClr val="D97706"/>
+                </a:solidFill>
+                <a:latin typeface="Calibri" pitchFamily="34" charset="0"/>
+                <a:ea typeface="Calibri" pitchFamily="34" charset="-122"/>
+                <a:cs typeface="Calibri" pitchFamily="34" charset="-120"/>
+              </a:rPr>
+              <a:t>planner · Fast Downward</a:t>
+            </a:r>
+            <a:endParaRPr lang="en-US" sz="1150" dirty="0"/>
+          </a:p>
+        </p:txBody>
+      </p:sp>
+      <p:sp>
+        <p:nvSpPr>
+          <p:cNvPr id="26" name="Text 24"/>
+          <p:cNvSpPr/>
+          <p:nvPr/>
+        </p:nvSpPr>
+        <p:spPr>
+          <a:xfrm>
+            <a:off x="5047488" y="4251960"/>
+            <a:ext cx="2889504" cy="228600"/>
+          </a:xfrm>
+          <a:prstGeom prst="rect">
+            <a:avLst/>
+          </a:prstGeom>
+          <a:noFill/>
+          <a:ln/>
+        </p:spPr>
+        <p:txBody>
+          <a:bodyPr wrap="square" lIns="0" tIns="0" rIns="0" bIns="0" rtlCol="0" anchor="ctr"/>
+          <a:lstStyle/>
+          <a:p>
+            <a:pPr indent="0" marL="0">
+              <a:buNone/>
+            </a:pPr>
+            <a:r>
+              <a:rPr lang="en-US" sz="950" dirty="0">
+                <a:solidFill>
+                  <a:srgbClr val="6B7280"/>
+                </a:solidFill>
+                <a:latin typeface="Calibri" pitchFamily="34" charset="0"/>
+                <a:ea typeface="Calibri" pitchFamily="34" charset="-122"/>
+                <a:cs typeface="Calibri" pitchFamily="34" charset="-120"/>
+              </a:rPr>
+              <a:t>cost-optimal plan, ~130 ms</a:t>
+            </a:r>
+            <a:endParaRPr lang="en-US" sz="950" dirty="0"/>
+          </a:p>
+        </p:txBody>
+      </p:sp>
+      <p:sp>
+        <p:nvSpPr>
+          <p:cNvPr id="27" name="Text 25"/>
+          <p:cNvSpPr/>
+          <p:nvPr/>
+        </p:nvSpPr>
+        <p:spPr>
+          <a:xfrm>
+            <a:off x="6400800" y="4480560"/>
+            <a:ext cx="274320" cy="274320"/>
+          </a:xfrm>
+          <a:prstGeom prst="rect">
+            <a:avLst/>
+          </a:prstGeom>
+          <a:noFill/>
+          <a:ln/>
+        </p:spPr>
+        <p:txBody>
+          <a:bodyPr wrap="square" lIns="0" tIns="0" rIns="0" bIns="0" rtlCol="0" anchor="ctr"/>
+          <a:lstStyle/>
+          <a:p>
+            <a:pPr algn="ctr" indent="0" marL="0">
+              <a:buNone/>
+            </a:pPr>
+            <a:r>
+              <a:rPr lang="en-US" sz="1100" dirty="0">
+                <a:solidFill>
+                  <a:srgbClr val="6B7280"/>
+                </a:solidFill>
+                <a:latin typeface="Calibri" pitchFamily="34" charset="0"/>
+                <a:ea typeface="Calibri" pitchFamily="34" charset="-122"/>
+                <a:cs typeface="Calibri" pitchFamily="34" charset="-120"/>
+              </a:rPr>
+              <a:t>↓</a:t>
+            </a:r>
+            <a:endParaRPr lang="en-US" sz="1100" dirty="0"/>
+          </a:p>
+        </p:txBody>
+      </p:sp>
+      <p:sp>
+        <p:nvSpPr>
+          <p:cNvPr id="28" name="Shape 26"/>
+          <p:cNvSpPr/>
+          <p:nvPr/>
+        </p:nvSpPr>
+        <p:spPr>
+          <a:xfrm>
+            <a:off x="4937760" y="4727448"/>
+            <a:ext cx="3108960" cy="548640"/>
+          </a:xfrm>
+          <a:prstGeom prst="roundRect">
+            <a:avLst>
+              <a:gd name="adj" fmla="val 10000"/>
+            </a:avLst>
+          </a:prstGeom>
+          <a:solidFill>
+            <a:srgbClr val="F3F4F6"/>
+          </a:solidFill>
+          <a:ln/>
+        </p:spPr>
+      </p:sp>
+      <p:sp>
+        <p:nvSpPr>
+          <p:cNvPr id="29" name="Text 27"/>
+          <p:cNvSpPr/>
+          <p:nvPr/>
+        </p:nvSpPr>
+        <p:spPr>
+          <a:xfrm>
+            <a:off x="5047488" y="4773168"/>
+            <a:ext cx="2889504" cy="237744"/>
+          </a:xfrm>
+          <a:prstGeom prst="rect">
+            <a:avLst/>
+          </a:prstGeom>
+          <a:noFill/>
+          <a:ln/>
+        </p:spPr>
+        <p:txBody>
+          <a:bodyPr wrap="square" lIns="0" tIns="0" rIns="0" bIns="0" rtlCol="0" anchor="ctr"/>
+          <a:lstStyle/>
+          <a:p>
+            <a:pPr indent="0" marL="0">
+              <a:buNone/>
+            </a:pPr>
+            <a:r>
+              <a:rPr lang="en-US" sz="1150" b="1" dirty="0">
+                <a:solidFill>
+                  <a:srgbClr val="111827"/>
+                </a:solidFill>
+                <a:latin typeface="Calibri" pitchFamily="34" charset="0"/>
+                <a:ea typeface="Calibri" pitchFamily="34" charset="-122"/>
+                <a:cs typeface="Calibri" pitchFamily="34" charset="-120"/>
+              </a:rPr>
+              <a:t>executor</a:t>
+            </a:r>
+            <a:endParaRPr lang="en-US" sz="1150" dirty="0"/>
+          </a:p>
+        </p:txBody>
+      </p:sp>
+      <p:sp>
+        <p:nvSpPr>
+          <p:cNvPr id="30" name="Text 28"/>
+          <p:cNvSpPr/>
+          <p:nvPr/>
+        </p:nvSpPr>
+        <p:spPr>
+          <a:xfrm>
+            <a:off x="5047488" y="5010912"/>
+            <a:ext cx="2889504" cy="228600"/>
+          </a:xfrm>
+          <a:prstGeom prst="rect">
+            <a:avLst/>
+          </a:prstGeom>
+          <a:noFill/>
+          <a:ln/>
+        </p:spPr>
+        <p:txBody>
+          <a:bodyPr wrap="square" lIns="0" tIns="0" rIns="0" bIns="0" rtlCol="0" anchor="ctr"/>
+          <a:lstStyle/>
+          <a:p>
+            <a:pPr indent="0" marL="0">
+              <a:buNone/>
+            </a:pPr>
+            <a:r>
+              <a:rPr lang="en-US" sz="950" dirty="0">
+                <a:solidFill>
+                  <a:srgbClr val="6B7280"/>
+                </a:solidFill>
+                <a:latin typeface="Calibri" pitchFamily="34" charset="0"/>
+                <a:ea typeface="Calibri" pitchFamily="34" charset="-122"/>
+                <a:cs typeface="Calibri" pitchFamily="34" charset="-120"/>
+              </a:rPr>
+              <a:t>dispatches planned actions</a:t>
+            </a:r>
+            <a:endParaRPr lang="en-US" sz="950" dirty="0"/>
+          </a:p>
+        </p:txBody>
+      </p:sp>
+      <p:sp>
+        <p:nvSpPr>
+          <p:cNvPr id="31" name="Shape 29"/>
+          <p:cNvSpPr/>
+          <p:nvPr/>
+        </p:nvSpPr>
+        <p:spPr>
+          <a:xfrm>
+            <a:off x="9006840" y="1325880"/>
+            <a:ext cx="2560320" cy="4343400"/>
+          </a:xfrm>
+          <a:prstGeom prst="roundRect">
+            <a:avLst>
+              <a:gd name="adj" fmla="val 3571"/>
+            </a:avLst>
+          </a:prstGeom>
+          <a:solidFill>
+            <a:srgbClr val="FFFFFF"/>
+          </a:solidFill>
+          <a:ln w="15875">
+            <a:solidFill>
+              <a:srgbClr val="E5E7EB"/>
+            </a:solidFill>
+            <a:prstDash val="solid"/>
+          </a:ln>
+        </p:spPr>
+      </p:sp>
+      <p:sp>
+        <p:nvSpPr>
+          <p:cNvPr id="32" name="Text 30"/>
+          <p:cNvSpPr/>
+          <p:nvPr/>
+        </p:nvSpPr>
+        <p:spPr>
+          <a:xfrm>
+            <a:off x="9189720" y="1481328"/>
+            <a:ext cx="2194560" cy="320040"/>
+          </a:xfrm>
+          <a:prstGeom prst="rect">
+            <a:avLst/>
+          </a:prstGeom>
+          <a:noFill/>
+          <a:ln/>
+        </p:spPr>
+        <p:txBody>
+          <a:bodyPr wrap="square" lIns="0" tIns="0" rIns="0" bIns="0" rtlCol="0" anchor="ctr"/>
+          <a:lstStyle/>
+          <a:p>
+            <a:pPr indent="0" marL="0">
+              <a:buNone/>
+            </a:pPr>
+            <a:r>
+              <a:rPr lang="en-US" sz="1500" b="1" dirty="0">
                 <a:solidFill>
                   <a:srgbClr val="111827"/>
                 </a:solidFill>
@@ -4187,38 +4254,179 @@
                 <a:ea typeface="Cambria" pitchFamily="34" charset="-122"/>
                 <a:cs typeface="Cambria" pitchFamily="34" charset="-120"/>
               </a:rPr>
-              <a:t>24/7</a:t>
-            </a:r>
-            <a:endParaRPr lang="en-US" sz="5200" dirty="0"/>
-          </a:p>
-        </p:txBody>
-      </p:sp>
-      <p:sp>
-        <p:nvSpPr>
-          <p:cNvPr id="9" name="Text 7"/>
-          <p:cNvSpPr/>
-          <p:nvPr/>
-        </p:nvSpPr>
-        <p:spPr>
-          <a:xfrm>
-            <a:off x="8321040" y="3154680"/>
-            <a:ext cx="3246120" cy="1005840"/>
-          </a:xfrm>
-          <a:prstGeom prst="rect">
-            <a:avLst/>
-          </a:prstGeom>
-          <a:noFill/>
-          <a:ln/>
-        </p:spPr>
-        <p:txBody>
-          <a:bodyPr wrap="square" lIns="0" tIns="0" rIns="0" bIns="0" rtlCol="0" anchor="ctr"/>
-          <a:lstStyle/>
-          <a:p>
-            <a:pPr indent="0" marL="0">
-              <a:buNone/>
-            </a:pPr>
-            <a:r>
-              <a:rPr lang="en-US" sz="1450" dirty="0">
+              <a:t>Laptop · browser</a:t>
+            </a:r>
+            <a:endParaRPr lang="en-US" sz="1500" dirty="0"/>
+          </a:p>
+        </p:txBody>
+      </p:sp>
+      <p:sp>
+        <p:nvSpPr>
+          <p:cNvPr id="33" name="Text 31"/>
+          <p:cNvSpPr/>
+          <p:nvPr/>
+        </p:nvSpPr>
+        <p:spPr>
+          <a:xfrm>
+            <a:off x="9189720" y="1938528"/>
+            <a:ext cx="2194560" cy="228600"/>
+          </a:xfrm>
+          <a:prstGeom prst="rect">
+            <a:avLst/>
+          </a:prstGeom>
+          <a:noFill/>
+          <a:ln/>
+        </p:spPr>
+        <p:txBody>
+          <a:bodyPr wrap="square" lIns="0" tIns="0" rIns="0" bIns="0" rtlCol="0" anchor="ctr"/>
+          <a:lstStyle/>
+          <a:p>
+            <a:pPr indent="0" marL="0">
+              <a:buNone/>
+            </a:pPr>
+            <a:r>
+              <a:rPr lang="en-US" sz="950" b="1" spc="200" kern="0" dirty="0">
+                <a:solidFill>
+                  <a:srgbClr val="1D4ED8"/>
+                </a:solidFill>
+                <a:latin typeface="Calibri" pitchFamily="34" charset="0"/>
+                <a:ea typeface="Calibri" pitchFamily="34" charset="-122"/>
+                <a:cs typeface="Calibri" pitchFamily="34" charset="-120"/>
+              </a:rPr>
+              <a:t>LIVE DASHBOARD</a:t>
+            </a:r>
+            <a:endParaRPr lang="en-US" sz="950" dirty="0"/>
+          </a:p>
+        </p:txBody>
+      </p:sp>
+      <p:sp>
+        <p:nvSpPr>
+          <p:cNvPr id="34" name="Text 32"/>
+          <p:cNvSpPr/>
+          <p:nvPr/>
+        </p:nvSpPr>
+        <p:spPr>
+          <a:xfrm>
+            <a:off x="9189720" y="2194560"/>
+            <a:ext cx="2240280" cy="1371600"/>
+          </a:xfrm>
+          <a:prstGeom prst="rect">
+            <a:avLst/>
+          </a:prstGeom>
+          <a:noFill/>
+          <a:ln/>
+        </p:spPr>
+        <p:txBody>
+          <a:bodyPr wrap="square" lIns="0" tIns="0" rIns="0" bIns="0" rtlCol="0" anchor="ctr"/>
+          <a:lstStyle/>
+          <a:p>
+            <a:pPr indent="0" marL="0">
+              <a:lnSpc>
+                <a:spcPct val="130000"/>
+              </a:lnSpc>
+              <a:buNone/>
+            </a:pPr>
+            <a:r>
+              <a:rPr lang="en-US" sz="1200" dirty="0">
+                <a:solidFill>
+                  <a:srgbClr val="111827"/>
+                </a:solidFill>
+                <a:latin typeface="Calibri" pitchFamily="34" charset="0"/>
+                <a:ea typeface="Calibri" pitchFamily="34" charset="-122"/>
+                <a:cs typeface="Calibri" pitchFamily="34" charset="-120"/>
+              </a:rPr>
+              <a:t>seat floor plan + windows</a:t>
+            </a:r>
+            <a:endParaRPr lang="en-US" sz="1200" dirty="0"/>
+          </a:p>
+          <a:p>
+            <a:pPr indent="0" marL="0">
+              <a:lnSpc>
+                <a:spcPct val="130000"/>
+              </a:lnSpc>
+              <a:buNone/>
+            </a:pPr>
+            <a:r>
+              <a:rPr lang="en-US" sz="1200" dirty="0">
+                <a:solidFill>
+                  <a:srgbClr val="111827"/>
+                </a:solidFill>
+                <a:latin typeface="Calibri" pitchFamily="34" charset="0"/>
+                <a:ea typeface="Calibri" pitchFamily="34" charset="-122"/>
+                <a:cs typeface="Calibri" pitchFamily="34" charset="-120"/>
+              </a:rPr>
+              <a:t>current plan with cost</a:t>
+            </a:r>
+            <a:endParaRPr lang="en-US" sz="1200" dirty="0"/>
+          </a:p>
+          <a:p>
+            <a:pPr indent="0" marL="0">
+              <a:lnSpc>
+                <a:spcPct val="130000"/>
+              </a:lnSpc>
+              <a:buNone/>
+            </a:pPr>
+            <a:r>
+              <a:rPr lang="en-US" sz="1200" dirty="0">
+                <a:solidFill>
+                  <a:srgbClr val="111827"/>
+                </a:solidFill>
+                <a:latin typeface="Calibri" pitchFamily="34" charset="0"/>
+                <a:ea typeface="Calibri" pitchFamily="34" charset="-122"/>
+                <a:cs typeface="Calibri" pitchFamily="34" charset="-120"/>
+              </a:rPr>
+              <a:t>trend charts</a:t>
+            </a:r>
+            <a:endParaRPr lang="en-US" sz="1200" dirty="0"/>
+          </a:p>
+          <a:p>
+            <a:pPr indent="0" marL="0">
+              <a:lnSpc>
+                <a:spcPct val="130000"/>
+              </a:lnSpc>
+              <a:buNone/>
+            </a:pPr>
+            <a:r>
+              <a:rPr lang="en-US" sz="1200" dirty="0">
+                <a:solidFill>
+                  <a:srgbClr val="111827"/>
+                </a:solidFill>
+                <a:latin typeface="Calibri" pitchFamily="34" charset="0"/>
+                <a:ea typeface="Calibri" pitchFamily="34" charset="-122"/>
+                <a:cs typeface="Calibri" pitchFamily="34" charset="-120"/>
+              </a:rPr>
+              <a:t>Pomodoro session rings</a:t>
+            </a:r>
+            <a:endParaRPr lang="en-US" sz="1200" dirty="0"/>
+          </a:p>
+        </p:txBody>
+      </p:sp>
+      <p:sp>
+        <p:nvSpPr>
+          <p:cNvPr id="35" name="Text 33"/>
+          <p:cNvSpPr/>
+          <p:nvPr/>
+        </p:nvSpPr>
+        <p:spPr>
+          <a:xfrm>
+            <a:off x="9189720" y="4160520"/>
+            <a:ext cx="2240280" cy="914400"/>
+          </a:xfrm>
+          <a:prstGeom prst="rect">
+            <a:avLst/>
+          </a:prstGeom>
+          <a:noFill/>
+          <a:ln/>
+        </p:spPr>
+        <p:txBody>
+          <a:bodyPr wrap="square" lIns="0" tIns="0" rIns="0" bIns="0" rtlCol="0" anchor="ctr"/>
+          <a:lstStyle/>
+          <a:p>
+            <a:pPr indent="0" marL="0">
+              <a:buNone/>
+            </a:pPr>
+            <a:r>
+              <a:rPr lang="en-US" sz="1050" dirty="0">
                 <a:solidFill>
                   <a:srgbClr val="6B7280"/>
                 </a:solidFill>
@@ -4226,38 +4434,58 @@
                 <a:ea typeface="Calibri" pitchFamily="34" charset="-122"/>
                 <a:cs typeface="Calibri" pitchFamily="34" charset="-120"/>
               </a:rPr>
-              <a:t>lighting and ventilation usually run on fixed schedules, not on demand</a:t>
-            </a:r>
-            <a:endParaRPr lang="en-US" sz="1450" dirty="0"/>
-          </a:p>
-        </p:txBody>
-      </p:sp>
-      <p:sp>
-        <p:nvSpPr>
-          <p:cNvPr id="10" name="Text 8"/>
-          <p:cNvSpPr/>
-          <p:nvPr/>
-        </p:nvSpPr>
-        <p:spPr>
-          <a:xfrm>
-            <a:off x="640080" y="5212080"/>
-            <a:ext cx="10881360" cy="822960"/>
-          </a:xfrm>
-          <a:prstGeom prst="rect">
-            <a:avLst/>
-          </a:prstGeom>
-          <a:noFill/>
-          <a:ln/>
-        </p:spPr>
-        <p:txBody>
-          <a:bodyPr wrap="square" lIns="0" tIns="0" rIns="0" bIns="0" rtlCol="0" anchor="ctr"/>
-          <a:lstStyle/>
-          <a:p>
-            <a:pPr indent="0" marL="0">
-              <a:buNone/>
-            </a:pPr>
-            <a:r>
-              <a:rPr lang="en-US" sz="1700" dirty="0">
+              <a:t>in demo mode the laptop joins the WiFi access point spanned by the Pi 5</a:t>
+            </a:r>
+            <a:endParaRPr lang="en-US" sz="1050" dirty="0"/>
+          </a:p>
+        </p:txBody>
+      </p:sp>
+      <p:sp>
+        <p:nvSpPr>
+          <p:cNvPr id="36" name="Shape 34"/>
+          <p:cNvSpPr/>
+          <p:nvPr/>
+        </p:nvSpPr>
+        <p:spPr>
+          <a:xfrm>
+            <a:off x="4059936" y="2148840"/>
+            <a:ext cx="621792" cy="292608"/>
+          </a:xfrm>
+          <a:prstGeom prst="rightArrow">
+            <a:avLst/>
+          </a:prstGeom>
+          <a:solidFill>
+            <a:srgbClr val="15803D"/>
+          </a:solidFill>
+          <a:ln/>
+        </p:spPr>
+      </p:sp>
+      <p:sp>
+        <p:nvSpPr>
+          <p:cNvPr id="37" name="Text 35"/>
+          <p:cNvSpPr/>
+          <p:nvPr/>
+        </p:nvSpPr>
+        <p:spPr>
+          <a:xfrm>
+            <a:off x="3913632" y="1847088"/>
+            <a:ext cx="914400" cy="256032"/>
+          </a:xfrm>
+          <a:prstGeom prst="rect">
+            <a:avLst/>
+          </a:prstGeom>
+          <a:noFill/>
+          <a:ln/>
+        </p:spPr>
+        <p:txBody>
+          <a:bodyPr wrap="square" lIns="0" tIns="0" rIns="0" bIns="0" rtlCol="0" anchor="ctr"/>
+          <a:lstStyle/>
+          <a:p>
+            <a:pPr algn="ctr" indent="0" marL="0">
+              <a:buNone/>
+            </a:pPr>
+            <a:r>
+              <a:rPr lang="en-US" sz="950" dirty="0">
                 <a:solidFill>
                   <a:srgbClr val="6B7280"/>
                 </a:solidFill>
@@ -4265,9 +4493,189 @@
                 <a:ea typeface="Calibri" pitchFamily="34" charset="-122"/>
                 <a:cs typeface="Calibri" pitchFamily="34" charset="-120"/>
               </a:rPr>
-              <a:t>Our project: a reading zone that controls light, air quality and break timing automatically, with transparent decisions.</a:t>
-            </a:r>
-            <a:endParaRPr lang="en-US" sz="1700" dirty="0"/>
+              <a:t>sensor data</a:t>
+            </a:r>
+            <a:endParaRPr lang="en-US" sz="950" dirty="0"/>
+          </a:p>
+        </p:txBody>
+      </p:sp>
+      <p:sp>
+        <p:nvSpPr>
+          <p:cNvPr id="38" name="Shape 36"/>
+          <p:cNvSpPr/>
+          <p:nvPr/>
+        </p:nvSpPr>
+        <p:spPr>
+          <a:xfrm>
+            <a:off x="4059936" y="4297680"/>
+            <a:ext cx="621792" cy="292608"/>
+          </a:xfrm>
+          <a:prstGeom prst="leftArrow">
+            <a:avLst/>
+          </a:prstGeom>
+          <a:solidFill>
+            <a:srgbClr val="D97706"/>
+          </a:solidFill>
+          <a:ln/>
+        </p:spPr>
+      </p:sp>
+      <p:sp>
+        <p:nvSpPr>
+          <p:cNvPr id="39" name="Text 37"/>
+          <p:cNvSpPr/>
+          <p:nvPr/>
+        </p:nvSpPr>
+        <p:spPr>
+          <a:xfrm>
+            <a:off x="3913632" y="4626864"/>
+            <a:ext cx="914400" cy="256032"/>
+          </a:xfrm>
+          <a:prstGeom prst="rect">
+            <a:avLst/>
+          </a:prstGeom>
+          <a:noFill/>
+          <a:ln/>
+        </p:spPr>
+        <p:txBody>
+          <a:bodyPr wrap="square" lIns="0" tIns="0" rIns="0" bIns="0" rtlCol="0" anchor="ctr"/>
+          <a:lstStyle/>
+          <a:p>
+            <a:pPr algn="ctr" indent="0" marL="0">
+              <a:buNone/>
+            </a:pPr>
+            <a:r>
+              <a:rPr lang="en-US" sz="950" dirty="0">
+                <a:solidFill>
+                  <a:srgbClr val="6B7280"/>
+                </a:solidFill>
+                <a:latin typeface="Calibri" pitchFamily="34" charset="0"/>
+                <a:ea typeface="Calibri" pitchFamily="34" charset="-122"/>
+                <a:cs typeface="Calibri" pitchFamily="34" charset="-120"/>
+              </a:rPr>
+              <a:t>actions</a:t>
+            </a:r>
+            <a:endParaRPr lang="en-US" sz="950" dirty="0"/>
+          </a:p>
+        </p:txBody>
+      </p:sp>
+      <p:sp>
+        <p:nvSpPr>
+          <p:cNvPr id="40" name="Shape 38"/>
+          <p:cNvSpPr/>
+          <p:nvPr/>
+        </p:nvSpPr>
+        <p:spPr>
+          <a:xfrm>
+            <a:off x="8311896" y="2148840"/>
+            <a:ext cx="621792" cy="292608"/>
+          </a:xfrm>
+          <a:prstGeom prst="rightArrow">
+            <a:avLst/>
+          </a:prstGeom>
+          <a:solidFill>
+            <a:srgbClr val="1D4ED8"/>
+          </a:solidFill>
+          <a:ln/>
+        </p:spPr>
+      </p:sp>
+      <p:sp>
+        <p:nvSpPr>
+          <p:cNvPr id="41" name="Text 39"/>
+          <p:cNvSpPr/>
+          <p:nvPr/>
+        </p:nvSpPr>
+        <p:spPr>
+          <a:xfrm>
+            <a:off x="8156448" y="1847088"/>
+            <a:ext cx="960120" cy="256032"/>
+          </a:xfrm>
+          <a:prstGeom prst="rect">
+            <a:avLst/>
+          </a:prstGeom>
+          <a:noFill/>
+          <a:ln/>
+        </p:spPr>
+        <p:txBody>
+          <a:bodyPr wrap="square" lIns="0" tIns="0" rIns="0" bIns="0" rtlCol="0" anchor="ctr"/>
+          <a:lstStyle/>
+          <a:p>
+            <a:pPr algn="ctr" indent="0" marL="0">
+              <a:buNone/>
+            </a:pPr>
+            <a:r>
+              <a:rPr lang="en-US" sz="950" dirty="0">
+                <a:solidFill>
+                  <a:srgbClr val="6B7280"/>
+                </a:solidFill>
+                <a:latin typeface="Calibri" pitchFamily="34" charset="0"/>
+                <a:ea typeface="Calibri" pitchFamily="34" charset="-122"/>
+                <a:cs typeface="Calibri" pitchFamily="34" charset="-120"/>
+              </a:rPr>
+              <a:t>state + plan</a:t>
+            </a:r>
+            <a:endParaRPr lang="en-US" sz="950" dirty="0"/>
+          </a:p>
+        </p:txBody>
+      </p:sp>
+      <p:sp>
+        <p:nvSpPr>
+          <p:cNvPr id="42" name="Shape 40"/>
+          <p:cNvSpPr/>
+          <p:nvPr/>
+        </p:nvSpPr>
+        <p:spPr>
+          <a:xfrm>
+            <a:off x="640080" y="5989320"/>
+            <a:ext cx="10927080" cy="0"/>
+          </a:xfrm>
+          <a:prstGeom prst="line">
+            <a:avLst/>
+          </a:prstGeom>
+          <a:noFill/>
+          <a:ln w="9525">
+            <a:solidFill>
+              <a:srgbClr val="E5E7EB"/>
+            </a:solidFill>
+            <a:prstDash val="solid"/>
+          </a:ln>
+        </p:spPr>
+      </p:sp>
+      <p:sp>
+        <p:nvSpPr>
+          <p:cNvPr id="43" name="Text 41"/>
+          <p:cNvSpPr/>
+          <p:nvPr/>
+        </p:nvSpPr>
+        <p:spPr>
+          <a:xfrm>
+            <a:off x="640080" y="6126480"/>
+            <a:ext cx="10927080" cy="457200"/>
+          </a:xfrm>
+          <a:prstGeom prst="rect">
+            <a:avLst/>
+          </a:prstGeom>
+          <a:noFill/>
+          <a:ln/>
+        </p:spPr>
+        <p:txBody>
+          <a:bodyPr wrap="square" lIns="0" tIns="0" rIns="0" bIns="0" rtlCol="0" anchor="ctr"/>
+          <a:lstStyle/>
+          <a:p>
+            <a:pPr algn="ctr" indent="0" marL="0">
+              <a:buNone/>
+            </a:pPr>
+            <a:r>
+              <a:rPr lang="en-US" sz="1250" dirty="0">
+                <a:solidFill>
+                  <a:srgbClr val="6B7280"/>
+                </a:solidFill>
+                <a:latin typeface="Calibri" pitchFamily="34" charset="0"/>
+                <a:ea typeface="Calibri" pitchFamily="34" charset="-122"/>
+                <a:cs typeface="Calibri" pitchFamily="34" charset="-120"/>
+              </a:rPr>
+              <a:t>In effect: the lamp follows occupancy and darkness · the airing strategy follows weather costs · breaks are nudged after 2 min · disturbances are corrected in under 1 s</a:t>
+            </a:r>
+            <a:endParaRPr lang="en-US" sz="1250" dirty="0"/>
           </a:p>
         </p:txBody>
       </p:sp>

--- a/docs/presentation/LibriSense_Demo.pptx
+++ b/docs/presentation/LibriSense_Demo.pptx
@@ -16,9 +16,10 @@
     <p:sldId id="264" r:id="rId10"/>
     <p:sldId id="265" r:id="rId11"/>
     <p:sldId id="266" r:id="rId12"/>
+    <p:sldId id="267" r:id="rId13"/>
   </p:sldIdLst>
   <p:notesMasterIdLst>
-    <p:notesMasterId r:id="rId13"/>
+    <p:notesMasterId r:id="rId14"/>
   </p:notesMasterIdLst>
   <p:sldSz cx="12192000" cy="6858000"/>
   <p:notesSz cx="6858000" cy="12192000"/>
@@ -600,7 +601,7 @@
           <a:p>
             <a:r>
               <a:rPr lang="en-US" dirty="0"/>
-              <a:t>Do not read the table aloud; point at the measured numbers at the bottom. These are from the running system, not estimates.</a:t>
+              <a:t>Role split: person A at the desk triggers each moment, person B narrates the dashboard, person C explains the plan card whenever it changes. Keep this slide up during the live part as the run-sheet. On 'disturbance': steps 2 and 3 are deliberately different. Covering the sensor (step 2) is a normal input change — the room simply reacts by lighting the lamp. Step 3 is the real disturbance: someone switches the lamp off by hand while the seat is still occupied and dark, so the world stops matching the plan's goal; the closed loop notices the mismatch and re-plans to switch it back on within a second. That robustness to outside interference is the point, not just reacting to darkness.</a:t>
             </a:r>
             <a:endParaRPr lang="en-US" dirty="0"/>
           </a:p>
@@ -688,7 +689,7 @@
           <a:p>
             <a:r>
               <a:rPr lang="en-US" dirty="0"/>
-              <a:t>Q&amp;A prep. Why planning, not rules? For one seat rules would do; the value is declared goals, per-instance costs and provable optimality, and it scales by adding actions instead of case distinctions. Why classical, not HTN? No task hierarchy needed; a discretised world fits classical planning with action costs exactly. What is real? Motion, light, lamp, LED, buzzer, LCD, weather. CO2 and windows are simulated and labelled.</a:t>
+              <a:t>Recap slide — take your time here, this plus the closing slide are the 2 to 3 minute summary. Frame it as a walk back through the six course requirements and how each is satisfied by something the audience just saw live: distribution = the two Pis on the desk; indirect communication = everything went over MQTT; AI planning = the PDDL problem and the cost-optimal plan on the dashboard; IoT = the sensors and the real lamp/LED/buzzer/LCD; system design = eight modules we could restart independently; visualisation = the dashboard and the on-site LCD. Do not read the table verbatim — point at the measured numbers at the bottom and stress they are from the running system, not estimates: plans in about 130 ms, closed-loop correction under a second, state at 2 Hz.</a:t>
             </a:r>
             <a:endParaRPr lang="en-US" dirty="0"/>
           </a:p>
@@ -712,6 +713,94 @@
             <a:fld id="{F7021451-1387-4CA6-816F-3879F97B5CBC}" type="slidenum">
               <a:rPr lang="en-US"/>
               <a:t>11</a:t>
+            </a:fld>
+            <a:endParaRPr lang="en-US"/>
+          </a:p>
+        </p:txBody>
+      </p:sp>
+    </p:spTree>
+    <p:extLst>
+      <p:ext uri="{BB962C8B-B14F-4D97-AF65-F5344CB8AC3E}">
+        <p14:creationId xmlns:p14="http://schemas.microsoft.com/office/powerpoint/2010/main" val="1024086991"/>
+      </p:ext>
+    </p:extLst>
+  </p:cSld>
+  <p:clrMapOvr>
+    <a:masterClrMapping/>
+  </p:clrMapOvr>
+</p:notes>
+</file>
+
+<file path=ppt/notesSlides/notesSlide12.xml><?xml version="1.0" encoding="utf-8"?>
+<p:notes xmlns:a="http://schemas.openxmlformats.org/drawingml/2006/main" xmlns:r="http://schemas.openxmlformats.org/officeDocument/2006/relationships" xmlns:p="http://schemas.openxmlformats.org/presentationml/2006/main">
+  <p:cSld>
+    <p:spTree>
+      <p:nvGrpSpPr>
+        <p:cNvPr id="1" name=""/>
+        <p:cNvGrpSpPr/>
+        <p:nvPr/>
+      </p:nvGrpSpPr>
+      <p:grpSpPr>
+        <a:xfrm>
+          <a:off x="0" y="0"/>
+          <a:ext cx="0" cy="0"/>
+          <a:chOff x="0" y="0"/>
+          <a:chExt cx="0" cy="0"/>
+        </a:xfrm>
+      </p:grpSpPr>
+      <p:sp>
+        <p:nvSpPr>
+          <p:cNvPr id="2" name="Slide Image Placeholder 1"/>
+          <p:cNvSpPr>
+            <a:spLocks noGrp="1" noRot="1" noChangeAspect="1"/>
+          </p:cNvSpPr>
+          <p:nvPr>
+            <p:ph type="sldImg"/>
+          </p:nvPr>
+        </p:nvSpPr>
+        <p:spPr/>
+      </p:sp>
+      <p:sp>
+        <p:nvSpPr>
+          <p:cNvPr id="3" name="Notes Placeholder 2"/>
+          <p:cNvSpPr>
+            <a:spLocks noGrp="1"/>
+          </p:cNvSpPr>
+          <p:nvPr>
+            <p:ph type="body" idx="1"/>
+          </p:nvPr>
+        </p:nvSpPr>
+        <p:spPr/>
+        <p:txBody>
+          <a:bodyPr/>
+          <a:lstStyle/>
+          <a:p>
+            <a:r>
+              <a:rPr lang="en-US" dirty="0"/>
+              <a:t>Closing summary — spend a minute here to tie a bow on it. Suggested wording: 'To sum up: we started with a stuffy, over-lit reading room that nobody manages. We gave it senses, a planner and hands. It reads occupancy, light, a CO2 proxy and the weather; it turns that into a PDDL problem with real action costs; Fast Downward finds the cheapest plan; and it acts on a real lamp, LED, buzzer and the windows — re-planning on every change and correcting disturbances in under a second. All six course requirements are met on live hardware.' Then the honest lessons on this slide: we dropped the sound sensor rather than fake it, we stopped the planner from being handed impossible goals, we label every simulated part, and we learned that WiFi was the hardest part so the demo carries its own access point. Close on the opening scene: 'the room from the first slide would have noticed, and acted.' Then invite questions. Q&amp;A ammunition: Why planning, not rules? For one seat rules would do; the value is declared goals, per-instance costs and provable optimality, and it scales by adding actions instead of case distinctions. Why classical, not HTN? No task hierarchy needed; a discretised world fits classical planning with action costs exactly. What is real vs simulated? Real: motion, light, lamp, LED, buzzer, LCD, weather. Simulated and clearly labelled: CO2 and the windows.</a:t>
+            </a:r>
+            <a:endParaRPr lang="en-US" dirty="0"/>
+          </a:p>
+        </p:txBody>
+      </p:sp>
+      <p:sp>
+        <p:nvSpPr>
+          <p:cNvPr id="4" name="Slide Number Placeholder 3"/>
+          <p:cNvSpPr>
+            <a:spLocks noGrp="1"/>
+          </p:cNvSpPr>
+          <p:nvPr>
+            <p:ph type="sldNum" sz="quarter" idx="10"/>
+          </p:nvPr>
+        </p:nvSpPr>
+        <p:spPr/>
+        <p:txBody>
+          <a:bodyPr/>
+          <a:lstStyle/>
+          <a:p>
+            <a:fld id="{F7021451-1387-4CA6-816F-3879F97B5CBC}" type="slidenum">
+              <a:rPr lang="en-US"/>
+              <a:t>12</a:t>
             </a:fld>
             <a:endParaRPr lang="en-US"/>
           </a:p>
@@ -952,7 +1041,7 @@
           <a:p>
             <a:r>
               <a:rPr lang="en-US" dirty="0"/>
-              <a:t>This is THE slide for how the planner decides. Walk it left to right on one real example: the room senses continuous values; the generator discretises them into PDDL facts using fixed thresholds; it frames a problem with a goal and weather-based action costs; Fast Downward searches with A* and the admissible LM-Cut heuristic and returns the cost-optimal plan; the executor acts. Because full-vent-cost is only 4 at 33 °C, one full airing beats two pulses. The loop bar is the key point: nothing is scripted, the behaviour falls out of goals plus costs, and it re-plans on every change. Slide 7 shows the real domain code, slide 8 shows the winter contrast.</a:t>
+              <a:t>This is THE slide for how the planner decides. Walk it left to right on one real example: the room senses continuous values; the generator discretises them into PDDL facts using fixed thresholds; it frames a problem with a goal and weather-based action costs; Fast Downward searches with A* and the admissible LM-Cut heuristic and returns the cost-optimal plan; the executor acts. Because full-vent-cost is only 4 at 33 °C, one full airing beats two pulses. The loop bar is the key point: nothing is scripted, the behaviour falls out of goals plus costs, and it re-plans on every change. Slide 7 shows the real domain code, slide 8 the search, slide 9 the winter contrast.</a:t>
             </a:r>
             <a:endParaRPr lang="en-US" dirty="0"/>
           </a:p>
@@ -1304,7 +1393,7 @@
           <a:p>
             <a:r>
               <a:rPr lang="en-US" dirty="0"/>
-              <a:t>Technical Q&amp;A ammunition: search is A* with the LM-Cut admissible heuristic, so plans are cost-optimal, not just satisficing. Whole planner invocation including translation is about 130 ms on the Pi 5; pure search under 2 ms at this problem size. Unsolvable and timeout cases are handled explicitly, and the generator never emits a goal without an achieving action.</a:t>
+              <a:t>Chen's technical slide. Message: we do not just find A plan, we find the cheapest one, and we can prove it. A* is best-first search on f = g + h. LM-Cut is the heuristic h: it derives landmarks (every plan must open the window somehow) and sums the cheapest action per landmark, which is a lower bound that never overestimates — that admissibility is exactly what makes A* optimal. On the tree: the full_ventilate branch reaches a goal with f=4; the two-pulse branch only reaches its goal at f=6, and because A* always expands the lowest f first, it settles the f=4 goal before ever completing the f=6 path. Numbers: about 130 ms total on the Pi 5 including PDDL translation, the raw search is under 2 ms at this size. Note for a bring-a-card cheat sheet: A* = best-first on g+h; LM-Cut = admissible landmark heuristic; admissible ⇒ optimal.</a:t>
             </a:r>
             <a:endParaRPr lang="en-US" dirty="0"/>
           </a:p>
@@ -1392,7 +1481,7 @@
           <a:p>
             <a:r>
               <a:rPr lang="en-US" dirty="0"/>
-              <a:t>Role split: person A at the desk triggers each moment, person B narrates the dashboard, person C explains the plan card whenever it changes. Keep this slide up during the live part as the run-sheet.</a:t>
+              <a:t>This is the payoff slide for planning over rules. Identical goal, identical domain; only the numeric costs differ because the generator reads live outdoor temperature. At 5 °C a full airing is expensive (12), so two cheap pulses (3+3=6) win; at 33 °C the full airing is cheap (4) and beats two pulses (6). We never wrote a winter branch — the behaviour is a consequence of the cost model plus optimal search. If asked why not just rules: a rule set would need a hand-tuned threshold for every weather-and-state combination; here one cost formula covers the whole continuum and stays correct as we add actions.</a:t>
             </a:r>
             <a:endParaRPr lang="en-US" dirty="0"/>
           </a:p>
@@ -1971,7 +2060,7 @@
                 <a:ea typeface="Calibri" pitchFamily="34" charset="-122"/>
                 <a:cs typeface="Calibri" pitchFamily="34" charset="-120"/>
               </a:rPr>
-              <a:t>COURSE REQUIREMENTS</a:t>
+              <a:t>LIVE</a:t>
             </a:r>
             <a:endParaRPr lang="en-US" sz="1100" dirty="0"/>
           </a:p>
@@ -2010,7 +2099,7 @@
                 <a:ea typeface="Cambria" pitchFamily="34" charset="-122"/>
                 <a:cs typeface="Cambria" pitchFamily="34" charset="-120"/>
               </a:rPr>
-              <a:t>All six requirements are met</a:t>
+              <a:t>Live demo procedure</a:t>
             </a:r>
             <a:endParaRPr lang="en-US" sz="3000" dirty="0"/>
           </a:p>
@@ -2024,73 +2113,73 @@
         </p:nvSpPr>
         <p:spPr>
           <a:xfrm>
-            <a:off x="640080" y="1600200"/>
-            <a:ext cx="365760" cy="365760"/>
-          </a:xfrm>
-          <a:prstGeom prst="rect">
-            <a:avLst/>
-          </a:prstGeom>
-          <a:noFill/>
-          <a:ln/>
-        </p:spPr>
-        <p:txBody>
-          <a:bodyPr wrap="square" lIns="0" tIns="0" rIns="0" bIns="0" rtlCol="0" anchor="ctr"/>
-          <a:lstStyle/>
-          <a:p>
-            <a:pPr indent="0" marL="0">
-              <a:buNone/>
-            </a:pPr>
-            <a:r>
-              <a:rPr lang="en-US" sz="1600" b="1" dirty="0">
-                <a:solidFill>
-                  <a:srgbClr val="15803D"/>
-                </a:solidFill>
-                <a:latin typeface="Calibri" pitchFamily="34" charset="0"/>
-                <a:ea typeface="Calibri" pitchFamily="34" charset="-122"/>
-                <a:cs typeface="Calibri" pitchFamily="34" charset="-120"/>
-              </a:rPr>
-              <a:t>✓</a:t>
-            </a:r>
-            <a:endParaRPr lang="en-US" sz="1600" dirty="0"/>
-          </a:p>
-        </p:txBody>
-      </p:sp>
-      <p:sp>
-        <p:nvSpPr>
-          <p:cNvPr id="5" name="Text 3"/>
-          <p:cNvSpPr/>
-          <p:nvPr/>
-        </p:nvSpPr>
-        <p:spPr>
-          <a:xfrm>
-            <a:off x="1143000" y="1618488"/>
-            <a:ext cx="3291840" cy="365760"/>
-          </a:xfrm>
-          <a:prstGeom prst="rect">
-            <a:avLst/>
-          </a:prstGeom>
-          <a:noFill/>
-          <a:ln/>
-        </p:spPr>
-        <p:txBody>
-          <a:bodyPr wrap="square" lIns="0" tIns="0" rIns="0" bIns="0" rtlCol="0" anchor="ctr"/>
-          <a:lstStyle/>
-          <a:p>
-            <a:pPr indent="0" marL="0">
-              <a:buNone/>
-            </a:pPr>
-            <a:r>
-              <a:rPr lang="en-US" sz="1450" b="1" dirty="0">
-                <a:solidFill>
-                  <a:srgbClr val="111827"/>
+            <a:off x="640080" y="1664208"/>
+            <a:ext cx="502920" cy="502920"/>
+          </a:xfrm>
+          <a:prstGeom prst="rect">
+            <a:avLst/>
+          </a:prstGeom>
+          <a:noFill/>
+          <a:ln/>
+        </p:spPr>
+        <p:txBody>
+          <a:bodyPr wrap="square" lIns="0" tIns="0" rIns="0" bIns="0" rtlCol="0" anchor="ctr"/>
+          <a:lstStyle/>
+          <a:p>
+            <a:pPr indent="0" marL="0">
+              <a:buNone/>
+            </a:pPr>
+            <a:r>
+              <a:rPr lang="en-US" sz="2600" b="1" dirty="0">
+                <a:solidFill>
+                  <a:srgbClr val="D97706"/>
                 </a:solidFill>
                 <a:latin typeface="Cambria" pitchFamily="34" charset="0"/>
                 <a:ea typeface="Cambria" pitchFamily="34" charset="-122"/>
                 <a:cs typeface="Cambria" pitchFamily="34" charset="-120"/>
               </a:rPr>
-              <a:t>System distribution</a:t>
-            </a:r>
-            <a:endParaRPr lang="en-US" sz="1450" dirty="0"/>
+              <a:t>1</a:t>
+            </a:r>
+            <a:endParaRPr lang="en-US" sz="2600" dirty="0"/>
+          </a:p>
+        </p:txBody>
+      </p:sp>
+      <p:sp>
+        <p:nvSpPr>
+          <p:cNvPr id="5" name="Text 3"/>
+          <p:cNvSpPr/>
+          <p:nvPr/>
+        </p:nvSpPr>
+        <p:spPr>
+          <a:xfrm>
+            <a:off x="1234440" y="1645920"/>
+            <a:ext cx="4663440" cy="384048"/>
+          </a:xfrm>
+          <a:prstGeom prst="rect">
+            <a:avLst/>
+          </a:prstGeom>
+          <a:noFill/>
+          <a:ln/>
+        </p:spPr>
+        <p:txBody>
+          <a:bodyPr wrap="square" lIns="0" tIns="0" rIns="0" bIns="0" rtlCol="0" anchor="ctr"/>
+          <a:lstStyle/>
+          <a:p>
+            <a:pPr indent="0" marL="0">
+              <a:buNone/>
+            </a:pPr>
+            <a:r>
+              <a:rPr lang="en-US" sz="1600" b="1" dirty="0">
+                <a:solidFill>
+                  <a:srgbClr val="111827"/>
+                </a:solidFill>
+                <a:latin typeface="Cambria" pitchFamily="34" charset="0"/>
+                <a:ea typeface="Cambria" pitchFamily="34" charset="-122"/>
+                <a:cs typeface="Cambria" pitchFamily="34" charset="-120"/>
+              </a:rPr>
+              <a:t>Sit down</a:t>
+            </a:r>
+            <a:endParaRPr lang="en-US" sz="1600" dirty="0"/>
           </a:p>
         </p:txBody>
       </p:sp>
@@ -2102,8 +2191,8 @@
         </p:nvSpPr>
         <p:spPr>
           <a:xfrm>
-            <a:off x="4572000" y="1636776"/>
-            <a:ext cx="6949440" cy="365760"/>
+            <a:off x="1234440" y="2048256"/>
+            <a:ext cx="4663440" cy="548640"/>
           </a:xfrm>
           <a:prstGeom prst="rect">
             <a:avLst/>
@@ -2127,7 +2216,7 @@
                 <a:ea typeface="Calibri" pitchFamily="34" charset="-122"/>
                 <a:cs typeface="Calibri" pitchFamily="34" charset="-120"/>
               </a:rPr>
-              <a:t>2 Raspberry Pis, own WiFi in demo mode, 10 systemd services</a:t>
+              <a:t>occupancy detected, focus session starts</a:t>
             </a:r>
             <a:endParaRPr lang="en-US" sz="1250" dirty="0"/>
           </a:p>
@@ -2141,8 +2230,8 @@
         </p:nvSpPr>
         <p:spPr>
           <a:xfrm>
-            <a:off x="640080" y="2103120"/>
-            <a:ext cx="10881360" cy="0"/>
+            <a:off x="1234440" y="2724912"/>
+            <a:ext cx="4572000" cy="0"/>
           </a:xfrm>
           <a:prstGeom prst="line">
             <a:avLst/>
@@ -2164,73 +2253,73 @@
         </p:nvSpPr>
         <p:spPr>
           <a:xfrm>
-            <a:off x="640080" y="2313432"/>
-            <a:ext cx="365760" cy="365760"/>
-          </a:xfrm>
-          <a:prstGeom prst="rect">
-            <a:avLst/>
-          </a:prstGeom>
-          <a:noFill/>
-          <a:ln/>
-        </p:spPr>
-        <p:txBody>
-          <a:bodyPr wrap="square" lIns="0" tIns="0" rIns="0" bIns="0" rtlCol="0" anchor="ctr"/>
-          <a:lstStyle/>
-          <a:p>
-            <a:pPr indent="0" marL="0">
-              <a:buNone/>
-            </a:pPr>
-            <a:r>
-              <a:rPr lang="en-US" sz="1600" b="1" dirty="0">
-                <a:solidFill>
-                  <a:srgbClr val="15803D"/>
-                </a:solidFill>
-                <a:latin typeface="Calibri" pitchFamily="34" charset="0"/>
-                <a:ea typeface="Calibri" pitchFamily="34" charset="-122"/>
-                <a:cs typeface="Calibri" pitchFamily="34" charset="-120"/>
-              </a:rPr>
-              <a:t>✓</a:t>
-            </a:r>
-            <a:endParaRPr lang="en-US" sz="1600" dirty="0"/>
-          </a:p>
-        </p:txBody>
-      </p:sp>
-      <p:sp>
-        <p:nvSpPr>
-          <p:cNvPr id="9" name="Text 7"/>
-          <p:cNvSpPr/>
-          <p:nvPr/>
-        </p:nvSpPr>
-        <p:spPr>
-          <a:xfrm>
-            <a:off x="1143000" y="2331720"/>
-            <a:ext cx="3291840" cy="365760"/>
-          </a:xfrm>
-          <a:prstGeom prst="rect">
-            <a:avLst/>
-          </a:prstGeom>
-          <a:noFill/>
-          <a:ln/>
-        </p:spPr>
-        <p:txBody>
-          <a:bodyPr wrap="square" lIns="0" tIns="0" rIns="0" bIns="0" rtlCol="0" anchor="ctr"/>
-          <a:lstStyle/>
-          <a:p>
-            <a:pPr indent="0" marL="0">
-              <a:buNone/>
-            </a:pPr>
-            <a:r>
-              <a:rPr lang="en-US" sz="1450" b="1" dirty="0">
-                <a:solidFill>
-                  <a:srgbClr val="111827"/>
+            <a:off x="6263640" y="1664208"/>
+            <a:ext cx="502920" cy="502920"/>
+          </a:xfrm>
+          <a:prstGeom prst="rect">
+            <a:avLst/>
+          </a:prstGeom>
+          <a:noFill/>
+          <a:ln/>
+        </p:spPr>
+        <p:txBody>
+          <a:bodyPr wrap="square" lIns="0" tIns="0" rIns="0" bIns="0" rtlCol="0" anchor="ctr"/>
+          <a:lstStyle/>
+          <a:p>
+            <a:pPr indent="0" marL="0">
+              <a:buNone/>
+            </a:pPr>
+            <a:r>
+              <a:rPr lang="en-US" sz="2600" b="1" dirty="0">
+                <a:solidFill>
+                  <a:srgbClr val="D97706"/>
                 </a:solidFill>
                 <a:latin typeface="Cambria" pitchFamily="34" charset="0"/>
                 <a:ea typeface="Cambria" pitchFamily="34" charset="-122"/>
                 <a:cs typeface="Cambria" pitchFamily="34" charset="-120"/>
               </a:rPr>
-              <a:t>Indirect communication</a:t>
-            </a:r>
-            <a:endParaRPr lang="en-US" sz="1450" dirty="0"/>
+              <a:t>2</a:t>
+            </a:r>
+            <a:endParaRPr lang="en-US" sz="2600" dirty="0"/>
+          </a:p>
+        </p:txBody>
+      </p:sp>
+      <p:sp>
+        <p:nvSpPr>
+          <p:cNvPr id="9" name="Text 7"/>
+          <p:cNvSpPr/>
+          <p:nvPr/>
+        </p:nvSpPr>
+        <p:spPr>
+          <a:xfrm>
+            <a:off x="6858000" y="1645920"/>
+            <a:ext cx="4663440" cy="384048"/>
+          </a:xfrm>
+          <a:prstGeom prst="rect">
+            <a:avLst/>
+          </a:prstGeom>
+          <a:noFill/>
+          <a:ln/>
+        </p:spPr>
+        <p:txBody>
+          <a:bodyPr wrap="square" lIns="0" tIns="0" rIns="0" bIns="0" rtlCol="0" anchor="ctr"/>
+          <a:lstStyle/>
+          <a:p>
+            <a:pPr indent="0" marL="0">
+              <a:buNone/>
+            </a:pPr>
+            <a:r>
+              <a:rPr lang="en-US" sz="1600" b="1" dirty="0">
+                <a:solidFill>
+                  <a:srgbClr val="111827"/>
+                </a:solidFill>
+                <a:latin typeface="Cambria" pitchFamily="34" charset="0"/>
+                <a:ea typeface="Cambria" pitchFamily="34" charset="-122"/>
+                <a:cs typeface="Cambria" pitchFamily="34" charset="-120"/>
+              </a:rPr>
+              <a:t>Cover the light sensor</a:t>
+            </a:r>
+            <a:endParaRPr lang="en-US" sz="1600" dirty="0"/>
           </a:p>
         </p:txBody>
       </p:sp>
@@ -2242,8 +2331,8 @@
         </p:nvSpPr>
         <p:spPr>
           <a:xfrm>
-            <a:off x="4572000" y="2350008"/>
-            <a:ext cx="6949440" cy="365760"/>
+            <a:off x="6858000" y="2048256"/>
+            <a:ext cx="4663440" cy="548640"/>
           </a:xfrm>
           <a:prstGeom prst="rect">
             <a:avLst/>
@@ -2267,7 +2356,7 @@
                 <a:ea typeface="Calibri" pitchFamily="34" charset="-122"/>
                 <a:cs typeface="Calibri" pitchFamily="34" charset="-120"/>
               </a:rPr>
-              <a:t>MQTT publish/subscribe only, retained latest-value topics</a:t>
+              <a:t>normal reaction: the zone turns dark, the planner switches the lamp on</a:t>
             </a:r>
             <a:endParaRPr lang="en-US" sz="1250" dirty="0"/>
           </a:p>
@@ -2281,8 +2370,8 @@
         </p:nvSpPr>
         <p:spPr>
           <a:xfrm>
-            <a:off x="640080" y="2816352"/>
-            <a:ext cx="10881360" cy="0"/>
+            <a:off x="6858000" y="2724912"/>
+            <a:ext cx="4572000" cy="0"/>
           </a:xfrm>
           <a:prstGeom prst="line">
             <a:avLst/>
@@ -2304,73 +2393,73 @@
         </p:nvSpPr>
         <p:spPr>
           <a:xfrm>
-            <a:off x="640080" y="3026664"/>
-            <a:ext cx="365760" cy="365760"/>
-          </a:xfrm>
-          <a:prstGeom prst="rect">
-            <a:avLst/>
-          </a:prstGeom>
-          <a:noFill/>
-          <a:ln/>
-        </p:spPr>
-        <p:txBody>
-          <a:bodyPr wrap="square" lIns="0" tIns="0" rIns="0" bIns="0" rtlCol="0" anchor="ctr"/>
-          <a:lstStyle/>
-          <a:p>
-            <a:pPr indent="0" marL="0">
-              <a:buNone/>
-            </a:pPr>
-            <a:r>
-              <a:rPr lang="en-US" sz="1600" b="1" dirty="0">
-                <a:solidFill>
-                  <a:srgbClr val="15803D"/>
-                </a:solidFill>
-                <a:latin typeface="Calibri" pitchFamily="34" charset="0"/>
-                <a:ea typeface="Calibri" pitchFamily="34" charset="-122"/>
-                <a:cs typeface="Calibri" pitchFamily="34" charset="-120"/>
-              </a:rPr>
-              <a:t>✓</a:t>
-            </a:r>
-            <a:endParaRPr lang="en-US" sz="1600" dirty="0"/>
-          </a:p>
-        </p:txBody>
-      </p:sp>
-      <p:sp>
-        <p:nvSpPr>
-          <p:cNvPr id="13" name="Text 11"/>
-          <p:cNvSpPr/>
-          <p:nvPr/>
-        </p:nvSpPr>
-        <p:spPr>
-          <a:xfrm>
-            <a:off x="1143000" y="3044952"/>
-            <a:ext cx="3291840" cy="365760"/>
-          </a:xfrm>
-          <a:prstGeom prst="rect">
-            <a:avLst/>
-          </a:prstGeom>
-          <a:noFill/>
-          <a:ln/>
-        </p:spPr>
-        <p:txBody>
-          <a:bodyPr wrap="square" lIns="0" tIns="0" rIns="0" bIns="0" rtlCol="0" anchor="ctr"/>
-          <a:lstStyle/>
-          <a:p>
-            <a:pPr indent="0" marL="0">
-              <a:buNone/>
-            </a:pPr>
-            <a:r>
-              <a:rPr lang="en-US" sz="1450" b="1" dirty="0">
-                <a:solidFill>
-                  <a:srgbClr val="111827"/>
+            <a:off x="640080" y="3081528"/>
+            <a:ext cx="502920" cy="502920"/>
+          </a:xfrm>
+          <a:prstGeom prst="rect">
+            <a:avLst/>
+          </a:prstGeom>
+          <a:noFill/>
+          <a:ln/>
+        </p:spPr>
+        <p:txBody>
+          <a:bodyPr wrap="square" lIns="0" tIns="0" rIns="0" bIns="0" rtlCol="0" anchor="ctr"/>
+          <a:lstStyle/>
+          <a:p>
+            <a:pPr indent="0" marL="0">
+              <a:buNone/>
+            </a:pPr>
+            <a:r>
+              <a:rPr lang="en-US" sz="2600" b="1" dirty="0">
+                <a:solidFill>
+                  <a:srgbClr val="D97706"/>
                 </a:solidFill>
                 <a:latin typeface="Cambria" pitchFamily="34" charset="0"/>
                 <a:ea typeface="Cambria" pitchFamily="34" charset="-122"/>
                 <a:cs typeface="Cambria" pitchFamily="34" charset="-120"/>
               </a:rPr>
-              <a:t>AI planning</a:t>
-            </a:r>
-            <a:endParaRPr lang="en-US" sz="1450" dirty="0"/>
+              <a:t>3</a:t>
+            </a:r>
+            <a:endParaRPr lang="en-US" sz="2600" dirty="0"/>
+          </a:p>
+        </p:txBody>
+      </p:sp>
+      <p:sp>
+        <p:nvSpPr>
+          <p:cNvPr id="13" name="Text 11"/>
+          <p:cNvSpPr/>
+          <p:nvPr/>
+        </p:nvSpPr>
+        <p:spPr>
+          <a:xfrm>
+            <a:off x="1234440" y="3063240"/>
+            <a:ext cx="4663440" cy="384048"/>
+          </a:xfrm>
+          <a:prstGeom prst="rect">
+            <a:avLst/>
+          </a:prstGeom>
+          <a:noFill/>
+          <a:ln/>
+        </p:spPr>
+        <p:txBody>
+          <a:bodyPr wrap="square" lIns="0" tIns="0" rIns="0" bIns="0" rtlCol="0" anchor="ctr"/>
+          <a:lstStyle/>
+          <a:p>
+            <a:pPr indent="0" marL="0">
+              <a:buNone/>
+            </a:pPr>
+            <a:r>
+              <a:rPr lang="en-US" sz="1600" b="1" dirty="0">
+                <a:solidFill>
+                  <a:srgbClr val="111827"/>
+                </a:solidFill>
+                <a:latin typeface="Cambria" pitchFamily="34" charset="0"/>
+                <a:ea typeface="Cambria" pitchFamily="34" charset="-122"/>
+                <a:cs typeface="Cambria" pitchFamily="34" charset="-120"/>
+              </a:rPr>
+              <a:t>Switch the lamp off by hand</a:t>
+            </a:r>
+            <a:endParaRPr lang="en-US" sz="1600" dirty="0"/>
           </a:p>
         </p:txBody>
       </p:sp>
@@ -2382,8 +2471,8 @@
         </p:nvSpPr>
         <p:spPr>
           <a:xfrm>
-            <a:off x="4572000" y="3063240"/>
-            <a:ext cx="6949440" cy="365760"/>
+            <a:off x="1234440" y="3465576"/>
+            <a:ext cx="4663440" cy="548640"/>
           </a:xfrm>
           <a:prstGeom prst="rect">
             <a:avLst/>
@@ -2407,7 +2496,7 @@
                 <a:ea typeface="Calibri" pitchFamily="34" charset="-122"/>
                 <a:cs typeface="Calibri" pitchFamily="34" charset="-120"/>
               </a:rPr>
-              <a:t>PDDL domain, auto-generated instances, Fast Downward, cost-optimal</a:t>
+              <a:t>an external disturbance: 'lit' no longer holds, so the planner re-lights it in under 1 s</a:t>
             </a:r>
             <a:endParaRPr lang="en-US" sz="1250" dirty="0"/>
           </a:p>
@@ -2421,8 +2510,8 @@
         </p:nvSpPr>
         <p:spPr>
           <a:xfrm>
-            <a:off x="640080" y="3529584"/>
-            <a:ext cx="10881360" cy="0"/>
+            <a:off x="1234440" y="4142232"/>
+            <a:ext cx="4572000" cy="0"/>
           </a:xfrm>
           <a:prstGeom prst="line">
             <a:avLst/>
@@ -2444,73 +2533,73 @@
         </p:nvSpPr>
         <p:spPr>
           <a:xfrm>
-            <a:off x="640080" y="3739896"/>
-            <a:ext cx="365760" cy="365760"/>
-          </a:xfrm>
-          <a:prstGeom prst="rect">
-            <a:avLst/>
-          </a:prstGeom>
-          <a:noFill/>
-          <a:ln/>
-        </p:spPr>
-        <p:txBody>
-          <a:bodyPr wrap="square" lIns="0" tIns="0" rIns="0" bIns="0" rtlCol="0" anchor="ctr"/>
-          <a:lstStyle/>
-          <a:p>
-            <a:pPr indent="0" marL="0">
-              <a:buNone/>
-            </a:pPr>
-            <a:r>
-              <a:rPr lang="en-US" sz="1600" b="1" dirty="0">
-                <a:solidFill>
-                  <a:srgbClr val="15803D"/>
-                </a:solidFill>
-                <a:latin typeface="Calibri" pitchFamily="34" charset="0"/>
-                <a:ea typeface="Calibri" pitchFamily="34" charset="-122"/>
-                <a:cs typeface="Calibri" pitchFamily="34" charset="-120"/>
-              </a:rPr>
-              <a:t>✓</a:t>
-            </a:r>
-            <a:endParaRPr lang="en-US" sz="1600" dirty="0"/>
-          </a:p>
-        </p:txBody>
-      </p:sp>
-      <p:sp>
-        <p:nvSpPr>
-          <p:cNvPr id="17" name="Text 15"/>
-          <p:cNvSpPr/>
-          <p:nvPr/>
-        </p:nvSpPr>
-        <p:spPr>
-          <a:xfrm>
-            <a:off x="1143000" y="3758184"/>
-            <a:ext cx="3291840" cy="365760"/>
-          </a:xfrm>
-          <a:prstGeom prst="rect">
-            <a:avLst/>
-          </a:prstGeom>
-          <a:noFill/>
-          <a:ln/>
-        </p:spPr>
-        <p:txBody>
-          <a:bodyPr wrap="square" lIns="0" tIns="0" rIns="0" bIns="0" rtlCol="0" anchor="ctr"/>
-          <a:lstStyle/>
-          <a:p>
-            <a:pPr indent="0" marL="0">
-              <a:buNone/>
-            </a:pPr>
-            <a:r>
-              <a:rPr lang="en-US" sz="1450" b="1" dirty="0">
-                <a:solidFill>
-                  <a:srgbClr val="111827"/>
+            <a:off x="6263640" y="3081528"/>
+            <a:ext cx="502920" cy="502920"/>
+          </a:xfrm>
+          <a:prstGeom prst="rect">
+            <a:avLst/>
+          </a:prstGeom>
+          <a:noFill/>
+          <a:ln/>
+        </p:spPr>
+        <p:txBody>
+          <a:bodyPr wrap="square" lIns="0" tIns="0" rIns="0" bIns="0" rtlCol="0" anchor="ctr"/>
+          <a:lstStyle/>
+          <a:p>
+            <a:pPr indent="0" marL="0">
+              <a:buNone/>
+            </a:pPr>
+            <a:r>
+              <a:rPr lang="en-US" sz="2600" b="1" dirty="0">
+                <a:solidFill>
+                  <a:srgbClr val="D97706"/>
                 </a:solidFill>
                 <a:latin typeface="Cambria" pitchFamily="34" charset="0"/>
                 <a:ea typeface="Cambria" pitchFamily="34" charset="-122"/>
                 <a:cs typeface="Cambria" pitchFamily="34" charset="-120"/>
               </a:rPr>
-              <a:t>IoT</a:t>
-            </a:r>
-            <a:endParaRPr lang="en-US" sz="1450" dirty="0"/>
+              <a:t>4</a:t>
+            </a:r>
+            <a:endParaRPr lang="en-US" sz="2600" dirty="0"/>
+          </a:p>
+        </p:txBody>
+      </p:sp>
+      <p:sp>
+        <p:nvSpPr>
+          <p:cNvPr id="17" name="Text 15"/>
+          <p:cNvSpPr/>
+          <p:nvPr/>
+        </p:nvSpPr>
+        <p:spPr>
+          <a:xfrm>
+            <a:off x="6858000" y="3063240"/>
+            <a:ext cx="4663440" cy="384048"/>
+          </a:xfrm>
+          <a:prstGeom prst="rect">
+            <a:avLst/>
+          </a:prstGeom>
+          <a:noFill/>
+          <a:ln/>
+        </p:spPr>
+        <p:txBody>
+          <a:bodyPr wrap="square" lIns="0" tIns="0" rIns="0" bIns="0" rtlCol="0" anchor="ctr"/>
+          <a:lstStyle/>
+          <a:p>
+            <a:pPr indent="0" marL="0">
+              <a:buNone/>
+            </a:pPr>
+            <a:r>
+              <a:rPr lang="en-US" sz="1600" b="1" dirty="0">
+                <a:solidFill>
+                  <a:srgbClr val="111827"/>
+                </a:solidFill>
+                <a:latin typeface="Cambria" pitchFamily="34" charset="0"/>
+                <a:ea typeface="Cambria" pitchFamily="34" charset="-122"/>
+                <a:cs typeface="Cambria" pitchFamily="34" charset="-120"/>
+              </a:rPr>
+              <a:t>Keep focusing</a:t>
+            </a:r>
+            <a:endParaRPr lang="en-US" sz="1600" dirty="0"/>
           </a:p>
         </p:txBody>
       </p:sp>
@@ -2522,8 +2611,8 @@
         </p:nvSpPr>
         <p:spPr>
           <a:xfrm>
-            <a:off x="4572000" y="3776472"/>
-            <a:ext cx="6949440" cy="365760"/>
+            <a:off x="6858000" y="3465576"/>
+            <a:ext cx="4663440" cy="548640"/>
           </a:xfrm>
           <a:prstGeom prst="rect">
             <a:avLst/>
@@ -2547,7 +2636,7 @@
                 <a:ea typeface="Calibri" pitchFamily="34" charset="-122"/>
                 <a:cs typeface="Calibri" pitchFamily="34" charset="-120"/>
               </a:rPr>
-              <a:t>5 sensors (2 physical) · 6 actuators (4 physical)</a:t>
+              <a:t>after 2 min: LED and gentle buzzer suggest a break</a:t>
             </a:r>
             <a:endParaRPr lang="en-US" sz="1250" dirty="0"/>
           </a:p>
@@ -2561,8 +2650,8 @@
         </p:nvSpPr>
         <p:spPr>
           <a:xfrm>
-            <a:off x="640080" y="4242816"/>
-            <a:ext cx="10881360" cy="0"/>
+            <a:off x="6858000" y="4142232"/>
+            <a:ext cx="4572000" cy="0"/>
           </a:xfrm>
           <a:prstGeom prst="line">
             <a:avLst/>
@@ -2584,73 +2673,73 @@
         </p:nvSpPr>
         <p:spPr>
           <a:xfrm>
-            <a:off x="640080" y="4453128"/>
-            <a:ext cx="365760" cy="365760"/>
-          </a:xfrm>
-          <a:prstGeom prst="rect">
-            <a:avLst/>
-          </a:prstGeom>
-          <a:noFill/>
-          <a:ln/>
-        </p:spPr>
-        <p:txBody>
-          <a:bodyPr wrap="square" lIns="0" tIns="0" rIns="0" bIns="0" rtlCol="0" anchor="ctr"/>
-          <a:lstStyle/>
-          <a:p>
-            <a:pPr indent="0" marL="0">
-              <a:buNone/>
-            </a:pPr>
-            <a:r>
-              <a:rPr lang="en-US" sz="1600" b="1" dirty="0">
-                <a:solidFill>
-                  <a:srgbClr val="15803D"/>
-                </a:solidFill>
-                <a:latin typeface="Calibri" pitchFamily="34" charset="0"/>
-                <a:ea typeface="Calibri" pitchFamily="34" charset="-122"/>
-                <a:cs typeface="Calibri" pitchFamily="34" charset="-120"/>
-              </a:rPr>
-              <a:t>✓</a:t>
-            </a:r>
-            <a:endParaRPr lang="en-US" sz="1600" dirty="0"/>
-          </a:p>
-        </p:txBody>
-      </p:sp>
-      <p:sp>
-        <p:nvSpPr>
-          <p:cNvPr id="21" name="Text 19"/>
-          <p:cNvSpPr/>
-          <p:nvPr/>
-        </p:nvSpPr>
-        <p:spPr>
-          <a:xfrm>
-            <a:off x="1143000" y="4471416"/>
-            <a:ext cx="3291840" cy="365760"/>
-          </a:xfrm>
-          <a:prstGeom prst="rect">
-            <a:avLst/>
-          </a:prstGeom>
-          <a:noFill/>
-          <a:ln/>
-        </p:spPr>
-        <p:txBody>
-          <a:bodyPr wrap="square" lIns="0" tIns="0" rIns="0" bIns="0" rtlCol="0" anchor="ctr"/>
-          <a:lstStyle/>
-          <a:p>
-            <a:pPr indent="0" marL="0">
-              <a:buNone/>
-            </a:pPr>
-            <a:r>
-              <a:rPr lang="en-US" sz="1450" b="1" dirty="0">
-                <a:solidFill>
-                  <a:srgbClr val="111827"/>
+            <a:off x="640080" y="4498848"/>
+            <a:ext cx="502920" cy="502920"/>
+          </a:xfrm>
+          <a:prstGeom prst="rect">
+            <a:avLst/>
+          </a:prstGeom>
+          <a:noFill/>
+          <a:ln/>
+        </p:spPr>
+        <p:txBody>
+          <a:bodyPr wrap="square" lIns="0" tIns="0" rIns="0" bIns="0" rtlCol="0" anchor="ctr"/>
+          <a:lstStyle/>
+          <a:p>
+            <a:pPr indent="0" marL="0">
+              <a:buNone/>
+            </a:pPr>
+            <a:r>
+              <a:rPr lang="en-US" sz="2600" b="1" dirty="0">
+                <a:solidFill>
+                  <a:srgbClr val="D97706"/>
                 </a:solidFill>
                 <a:latin typeface="Cambria" pitchFamily="34" charset="0"/>
                 <a:ea typeface="Cambria" pitchFamily="34" charset="-122"/>
                 <a:cs typeface="Cambria" pitchFamily="34" charset="-120"/>
               </a:rPr>
-              <a:t>System design</a:t>
-            </a:r>
-            <a:endParaRPr lang="en-US" sz="1450" dirty="0"/>
+              <a:t>5</a:t>
+            </a:r>
+            <a:endParaRPr lang="en-US" sz="2600" dirty="0"/>
+          </a:p>
+        </p:txBody>
+      </p:sp>
+      <p:sp>
+        <p:nvSpPr>
+          <p:cNvPr id="21" name="Text 19"/>
+          <p:cNvSpPr/>
+          <p:nvPr/>
+        </p:nvSpPr>
+        <p:spPr>
+          <a:xfrm>
+            <a:off x="1234440" y="4480560"/>
+            <a:ext cx="4663440" cy="384048"/>
+          </a:xfrm>
+          <a:prstGeom prst="rect">
+            <a:avLst/>
+          </a:prstGeom>
+          <a:noFill/>
+          <a:ln/>
+        </p:spPr>
+        <p:txBody>
+          <a:bodyPr wrap="square" lIns="0" tIns="0" rIns="0" bIns="0" rtlCol="0" anchor="ctr"/>
+          <a:lstStyle/>
+          <a:p>
+            <a:pPr indent="0" marL="0">
+              <a:buNone/>
+            </a:pPr>
+            <a:r>
+              <a:rPr lang="en-US" sz="1600" b="1" dirty="0">
+                <a:solidFill>
+                  <a:srgbClr val="111827"/>
+                </a:solidFill>
+                <a:latin typeface="Cambria" pitchFamily="34" charset="0"/>
+                <a:ea typeface="Cambria" pitchFamily="34" charset="-122"/>
+                <a:cs typeface="Cambria" pitchFamily="34" charset="-120"/>
+              </a:rPr>
+              <a:t>CO₂ rises</a:t>
+            </a:r>
+            <a:endParaRPr lang="en-US" sz="1600" dirty="0"/>
           </a:p>
         </p:txBody>
       </p:sp>
@@ -2662,8 +2751,8 @@
         </p:nvSpPr>
         <p:spPr>
           <a:xfrm>
-            <a:off x="4572000" y="4489704"/>
-            <a:ext cx="6949440" cy="365760"/>
+            <a:off x="1234440" y="4882896"/>
+            <a:ext cx="4663440" cy="548640"/>
           </a:xfrm>
           <a:prstGeom prst="rect">
             <a:avLst/>
@@ -2687,7 +2776,7 @@
                 <a:ea typeface="Calibri" pitchFamily="34" charset="-122"/>
                 <a:cs typeface="Calibri" pitchFamily="34" charset="-120"/>
               </a:rPr>
-              <a:t>8 decoupled modules, each independently restartable</a:t>
+              <a:t>the planner opens the windows on the floor plan, CO₂ falls again</a:t>
             </a:r>
             <a:endParaRPr lang="en-US" sz="1250" dirty="0"/>
           </a:p>
@@ -2701,8 +2790,8 @@
         </p:nvSpPr>
         <p:spPr>
           <a:xfrm>
-            <a:off x="640080" y="4956048"/>
-            <a:ext cx="10881360" cy="0"/>
+            <a:off x="1234440" y="5559552"/>
+            <a:ext cx="4572000" cy="0"/>
           </a:xfrm>
           <a:prstGeom prst="line">
             <a:avLst/>
@@ -2724,73 +2813,73 @@
         </p:nvSpPr>
         <p:spPr>
           <a:xfrm>
-            <a:off x="640080" y="5166360"/>
-            <a:ext cx="365760" cy="365760"/>
-          </a:xfrm>
-          <a:prstGeom prst="rect">
-            <a:avLst/>
-          </a:prstGeom>
-          <a:noFill/>
-          <a:ln/>
-        </p:spPr>
-        <p:txBody>
-          <a:bodyPr wrap="square" lIns="0" tIns="0" rIns="0" bIns="0" rtlCol="0" anchor="ctr"/>
-          <a:lstStyle/>
-          <a:p>
-            <a:pPr indent="0" marL="0">
-              <a:buNone/>
-            </a:pPr>
-            <a:r>
-              <a:rPr lang="en-US" sz="1600" b="1" dirty="0">
-                <a:solidFill>
-                  <a:srgbClr val="15803D"/>
-                </a:solidFill>
-                <a:latin typeface="Calibri" pitchFamily="34" charset="0"/>
-                <a:ea typeface="Calibri" pitchFamily="34" charset="-122"/>
-                <a:cs typeface="Calibri" pitchFamily="34" charset="-120"/>
-              </a:rPr>
-              <a:t>✓</a:t>
-            </a:r>
-            <a:endParaRPr lang="en-US" sz="1600" dirty="0"/>
-          </a:p>
-        </p:txBody>
-      </p:sp>
-      <p:sp>
-        <p:nvSpPr>
-          <p:cNvPr id="25" name="Text 23"/>
-          <p:cNvSpPr/>
-          <p:nvPr/>
-        </p:nvSpPr>
-        <p:spPr>
-          <a:xfrm>
-            <a:off x="1143000" y="5184648"/>
-            <a:ext cx="3291840" cy="365760"/>
-          </a:xfrm>
-          <a:prstGeom prst="rect">
-            <a:avLst/>
-          </a:prstGeom>
-          <a:noFill/>
-          <a:ln/>
-        </p:spPr>
-        <p:txBody>
-          <a:bodyPr wrap="square" lIns="0" tIns="0" rIns="0" bIns="0" rtlCol="0" anchor="ctr"/>
-          <a:lstStyle/>
-          <a:p>
-            <a:pPr indent="0" marL="0">
-              <a:buNone/>
-            </a:pPr>
-            <a:r>
-              <a:rPr lang="en-US" sz="1450" b="1" dirty="0">
-                <a:solidFill>
-                  <a:srgbClr val="111827"/>
+            <a:off x="6263640" y="4498848"/>
+            <a:ext cx="502920" cy="502920"/>
+          </a:xfrm>
+          <a:prstGeom prst="rect">
+            <a:avLst/>
+          </a:prstGeom>
+          <a:noFill/>
+          <a:ln/>
+        </p:spPr>
+        <p:txBody>
+          <a:bodyPr wrap="square" lIns="0" tIns="0" rIns="0" bIns="0" rtlCol="0" anchor="ctr"/>
+          <a:lstStyle/>
+          <a:p>
+            <a:pPr indent="0" marL="0">
+              <a:buNone/>
+            </a:pPr>
+            <a:r>
+              <a:rPr lang="en-US" sz="2600" b="1" dirty="0">
+                <a:solidFill>
+                  <a:srgbClr val="D97706"/>
                 </a:solidFill>
                 <a:latin typeface="Cambria" pitchFamily="34" charset="0"/>
                 <a:ea typeface="Cambria" pitchFamily="34" charset="-122"/>
                 <a:cs typeface="Cambria" pitchFamily="34" charset="-120"/>
               </a:rPr>
-              <a:t>Visualisation</a:t>
-            </a:r>
-            <a:endParaRPr lang="en-US" sz="1450" dirty="0"/>
+              <a:t>6</a:t>
+            </a:r>
+            <a:endParaRPr lang="en-US" sz="2600" dirty="0"/>
+          </a:p>
+        </p:txBody>
+      </p:sp>
+      <p:sp>
+        <p:nvSpPr>
+          <p:cNvPr id="25" name="Text 23"/>
+          <p:cNvSpPr/>
+          <p:nvPr/>
+        </p:nvSpPr>
+        <p:spPr>
+          <a:xfrm>
+            <a:off x="6858000" y="4480560"/>
+            <a:ext cx="4663440" cy="384048"/>
+          </a:xfrm>
+          <a:prstGeom prst="rect">
+            <a:avLst/>
+          </a:prstGeom>
+          <a:noFill/>
+          <a:ln/>
+        </p:spPr>
+        <p:txBody>
+          <a:bodyPr wrap="square" lIns="0" tIns="0" rIns="0" bIns="0" rtlCol="0" anchor="ctr"/>
+          <a:lstStyle/>
+          <a:p>
+            <a:pPr indent="0" marL="0">
+              <a:buNone/>
+            </a:pPr>
+            <a:r>
+              <a:rPr lang="en-US" sz="1600" b="1" dirty="0">
+                <a:solidFill>
+                  <a:srgbClr val="111827"/>
+                </a:solidFill>
+                <a:latin typeface="Cambria" pitchFamily="34" charset="0"/>
+                <a:ea typeface="Cambria" pitchFamily="34" charset="-122"/>
+                <a:cs typeface="Cambria" pitchFamily="34" charset="-120"/>
+              </a:rPr>
+              <a:t>Walk away</a:t>
+            </a:r>
+            <a:endParaRPr lang="en-US" sz="1600" dirty="0"/>
           </a:p>
         </p:txBody>
       </p:sp>
@@ -2802,8 +2891,8 @@
         </p:nvSpPr>
         <p:spPr>
           <a:xfrm>
-            <a:off x="4572000" y="5202936"/>
-            <a:ext cx="6949440" cy="365760"/>
+            <a:off x="6858000" y="4882896"/>
+            <a:ext cx="4663440" cy="548640"/>
           </a:xfrm>
           <a:prstGeom prst="rect">
             <a:avLst/>
@@ -2827,7 +2916,7 @@
                 <a:ea typeface="Calibri" pitchFamily="34" charset="-122"/>
                 <a:cs typeface="Calibri" pitchFamily="34" charset="-120"/>
               </a:rPr>
-              <a:t>current state + latest plan on dashboard and on-site LCD</a:t>
+              <a:t>zone empties, lamp switches off to save energy</a:t>
             </a:r>
             <a:endParaRPr lang="en-US" sz="1250" dirty="0"/>
           </a:p>
@@ -2841,8 +2930,8 @@
         </p:nvSpPr>
         <p:spPr>
           <a:xfrm>
-            <a:off x="640080" y="5669280"/>
-            <a:ext cx="10881360" cy="0"/>
+            <a:off x="6858000" y="5559552"/>
+            <a:ext cx="4572000" cy="0"/>
           </a:xfrm>
           <a:prstGeom prst="line">
             <a:avLst/>
@@ -2864,7 +2953,7 @@
         </p:nvSpPr>
         <p:spPr>
           <a:xfrm>
-            <a:off x="640080" y="6172200"/>
+            <a:off x="640080" y="6080760"/>
             <a:ext cx="10881360" cy="365760"/>
           </a:xfrm>
           <a:prstGeom prst="rect">
@@ -2877,21 +2966,21 @@
           <a:bodyPr wrap="square" lIns="0" tIns="0" rIns="0" bIns="0" rtlCol="0" anchor="ctr"/>
           <a:lstStyle/>
           <a:p>
-            <a:pPr algn="ctr" indent="0" marL="0">
-              <a:buNone/>
-            </a:pPr>
-            <a:r>
-              <a:rPr lang="en-US" sz="1250" dirty="0">
-                <a:solidFill>
-                  <a:srgbClr val="D97706"/>
-                </a:solidFill>
-                <a:latin typeface="Courier New" pitchFamily="34" charset="0"/>
-                <a:ea typeface="Courier New" pitchFamily="34" charset="-122"/>
-                <a:cs typeface="Courier New" pitchFamily="34" charset="-120"/>
-              </a:rPr>
-              <a:t>plans in ~130 ms · closed-loop correction &lt; 1 s · state at 2 Hz</a:t>
-            </a:r>
-            <a:endParaRPr lang="en-US" sz="1250" dirty="0"/>
+            <a:pPr indent="0" marL="0">
+              <a:buNone/>
+            </a:pPr>
+            <a:r>
+              <a:rPr lang="en-US" sz="1200" i="1" dirty="0">
+                <a:solidFill>
+                  <a:srgbClr val="6B7280"/>
+                </a:solidFill>
+                <a:latin typeface="Calibri" pitchFamily="34" charset="0"/>
+                <a:ea typeface="Calibri" pitchFamily="34" charset="-122"/>
+                <a:cs typeface="Calibri" pitchFamily="34" charset="-120"/>
+              </a:rPr>
+              <a:t>We start on the simulated 6-seat floor plan for context, then hide it and focus on the one real seat.</a:t>
+            </a:r>
+            <a:endParaRPr lang="en-US" sz="1200" dirty="0"/>
           </a:p>
         </p:txBody>
       </p:sp>
@@ -2906,6 +2995,995 @@
 <file path=ppt/slides/slide11.xml><?xml version="1.0" encoding="utf-8"?>
 <p:sld xmlns:a="http://schemas.openxmlformats.org/drawingml/2006/main" xmlns:r="http://schemas.openxmlformats.org/officeDocument/2006/relationships" xmlns:p="http://schemas.openxmlformats.org/presentationml/2006/main">
   <p:cSld name="Slide 11">
+    <p:bg>
+      <p:bgPr>
+        <a:solidFill>
+          <a:srgbClr val="FFFFFF"/>
+        </a:solidFill>
+      </p:bgPr>
+    </p:bg>
+    <p:spTree>
+      <p:nvGrpSpPr>
+        <p:cNvPr id="1" name=""/>
+        <p:cNvGrpSpPr/>
+        <p:nvPr/>
+      </p:nvGrpSpPr>
+      <p:grpSpPr>
+        <a:xfrm>
+          <a:off x="0" y="0"/>
+          <a:ext cx="0" cy="0"/>
+          <a:chOff x="0" y="0"/>
+          <a:chExt cx="0" cy="0"/>
+        </a:xfrm>
+      </p:grpSpPr>
+      <p:sp>
+        <p:nvSpPr>
+          <p:cNvPr id="2" name="Text 0"/>
+          <p:cNvSpPr/>
+          <p:nvPr/>
+        </p:nvSpPr>
+        <p:spPr>
+          <a:xfrm>
+            <a:off x="658368" y="219456"/>
+            <a:ext cx="10881360" cy="274320"/>
+          </a:xfrm>
+          <a:prstGeom prst="rect">
+            <a:avLst/>
+          </a:prstGeom>
+          <a:noFill/>
+          <a:ln/>
+        </p:spPr>
+        <p:txBody>
+          <a:bodyPr wrap="square" lIns="0" tIns="0" rIns="0" bIns="0" rtlCol="0" anchor="ctr"/>
+          <a:lstStyle/>
+          <a:p>
+            <a:pPr indent="0" marL="0">
+              <a:buNone/>
+            </a:pPr>
+            <a:r>
+              <a:rPr lang="en-US" sz="1100" b="1" spc="200" kern="0" dirty="0">
+                <a:solidFill>
+                  <a:srgbClr val="D97706"/>
+                </a:solidFill>
+                <a:latin typeface="Calibri" pitchFamily="34" charset="0"/>
+                <a:ea typeface="Calibri" pitchFamily="34" charset="-122"/>
+                <a:cs typeface="Calibri" pitchFamily="34" charset="-120"/>
+              </a:rPr>
+              <a:t>COURSE REQUIREMENTS</a:t>
+            </a:r>
+            <a:endParaRPr lang="en-US" sz="1100" dirty="0"/>
+          </a:p>
+        </p:txBody>
+      </p:sp>
+      <p:sp>
+        <p:nvSpPr>
+          <p:cNvPr id="3" name="Text 1"/>
+          <p:cNvSpPr/>
+          <p:nvPr/>
+        </p:nvSpPr>
+        <p:spPr>
+          <a:xfrm>
+            <a:off x="640080" y="457200"/>
+            <a:ext cx="10881360" cy="640080"/>
+          </a:xfrm>
+          <a:prstGeom prst="rect">
+            <a:avLst/>
+          </a:prstGeom>
+          <a:noFill/>
+          <a:ln/>
+        </p:spPr>
+        <p:txBody>
+          <a:bodyPr wrap="square" lIns="0" tIns="0" rIns="0" bIns="0" rtlCol="0" anchor="ctr"/>
+          <a:lstStyle/>
+          <a:p>
+            <a:pPr indent="0" marL="0">
+              <a:buNone/>
+            </a:pPr>
+            <a:r>
+              <a:rPr lang="en-US" sz="3000" b="1" dirty="0">
+                <a:solidFill>
+                  <a:srgbClr val="111827"/>
+                </a:solidFill>
+                <a:latin typeface="Cambria" pitchFamily="34" charset="0"/>
+                <a:ea typeface="Cambria" pitchFamily="34" charset="-122"/>
+                <a:cs typeface="Cambria" pitchFamily="34" charset="-120"/>
+              </a:rPr>
+              <a:t>All six requirements are met</a:t>
+            </a:r>
+            <a:endParaRPr lang="en-US" sz="3000" dirty="0"/>
+          </a:p>
+        </p:txBody>
+      </p:sp>
+      <p:sp>
+        <p:nvSpPr>
+          <p:cNvPr id="4" name="Text 2"/>
+          <p:cNvSpPr/>
+          <p:nvPr/>
+        </p:nvSpPr>
+        <p:spPr>
+          <a:xfrm>
+            <a:off x="640080" y="1600200"/>
+            <a:ext cx="365760" cy="365760"/>
+          </a:xfrm>
+          <a:prstGeom prst="rect">
+            <a:avLst/>
+          </a:prstGeom>
+          <a:noFill/>
+          <a:ln/>
+        </p:spPr>
+        <p:txBody>
+          <a:bodyPr wrap="square" lIns="0" tIns="0" rIns="0" bIns="0" rtlCol="0" anchor="ctr"/>
+          <a:lstStyle/>
+          <a:p>
+            <a:pPr indent="0" marL="0">
+              <a:buNone/>
+            </a:pPr>
+            <a:r>
+              <a:rPr lang="en-US" sz="1600" b="1" dirty="0">
+                <a:solidFill>
+                  <a:srgbClr val="15803D"/>
+                </a:solidFill>
+                <a:latin typeface="Calibri" pitchFamily="34" charset="0"/>
+                <a:ea typeface="Calibri" pitchFamily="34" charset="-122"/>
+                <a:cs typeface="Calibri" pitchFamily="34" charset="-120"/>
+              </a:rPr>
+              <a:t>✓</a:t>
+            </a:r>
+            <a:endParaRPr lang="en-US" sz="1600" dirty="0"/>
+          </a:p>
+        </p:txBody>
+      </p:sp>
+      <p:sp>
+        <p:nvSpPr>
+          <p:cNvPr id="5" name="Text 3"/>
+          <p:cNvSpPr/>
+          <p:nvPr/>
+        </p:nvSpPr>
+        <p:spPr>
+          <a:xfrm>
+            <a:off x="1143000" y="1618488"/>
+            <a:ext cx="3291840" cy="365760"/>
+          </a:xfrm>
+          <a:prstGeom prst="rect">
+            <a:avLst/>
+          </a:prstGeom>
+          <a:noFill/>
+          <a:ln/>
+        </p:spPr>
+        <p:txBody>
+          <a:bodyPr wrap="square" lIns="0" tIns="0" rIns="0" bIns="0" rtlCol="0" anchor="ctr"/>
+          <a:lstStyle/>
+          <a:p>
+            <a:pPr indent="0" marL="0">
+              <a:buNone/>
+            </a:pPr>
+            <a:r>
+              <a:rPr lang="en-US" sz="1450" b="1" dirty="0">
+                <a:solidFill>
+                  <a:srgbClr val="111827"/>
+                </a:solidFill>
+                <a:latin typeface="Cambria" pitchFamily="34" charset="0"/>
+                <a:ea typeface="Cambria" pitchFamily="34" charset="-122"/>
+                <a:cs typeface="Cambria" pitchFamily="34" charset="-120"/>
+              </a:rPr>
+              <a:t>System distribution</a:t>
+            </a:r>
+            <a:endParaRPr lang="en-US" sz="1450" dirty="0"/>
+          </a:p>
+        </p:txBody>
+      </p:sp>
+      <p:sp>
+        <p:nvSpPr>
+          <p:cNvPr id="6" name="Text 4"/>
+          <p:cNvSpPr/>
+          <p:nvPr/>
+        </p:nvSpPr>
+        <p:spPr>
+          <a:xfrm>
+            <a:off x="4572000" y="1636776"/>
+            <a:ext cx="6949440" cy="365760"/>
+          </a:xfrm>
+          <a:prstGeom prst="rect">
+            <a:avLst/>
+          </a:prstGeom>
+          <a:noFill/>
+          <a:ln/>
+        </p:spPr>
+        <p:txBody>
+          <a:bodyPr wrap="square" lIns="0" tIns="0" rIns="0" bIns="0" rtlCol="0" anchor="ctr"/>
+          <a:lstStyle/>
+          <a:p>
+            <a:pPr indent="0" marL="0">
+              <a:buNone/>
+            </a:pPr>
+            <a:r>
+              <a:rPr lang="en-US" sz="1250" dirty="0">
+                <a:solidFill>
+                  <a:srgbClr val="6B7280"/>
+                </a:solidFill>
+                <a:latin typeface="Calibri" pitchFamily="34" charset="0"/>
+                <a:ea typeface="Calibri" pitchFamily="34" charset="-122"/>
+                <a:cs typeface="Calibri" pitchFamily="34" charset="-120"/>
+              </a:rPr>
+              <a:t>2 Raspberry Pis, own WiFi in demo mode, 10 systemd services</a:t>
+            </a:r>
+            <a:endParaRPr lang="en-US" sz="1250" dirty="0"/>
+          </a:p>
+        </p:txBody>
+      </p:sp>
+      <p:sp>
+        <p:nvSpPr>
+          <p:cNvPr id="7" name="Shape 5"/>
+          <p:cNvSpPr/>
+          <p:nvPr/>
+        </p:nvSpPr>
+        <p:spPr>
+          <a:xfrm>
+            <a:off x="640080" y="2103120"/>
+            <a:ext cx="10881360" cy="0"/>
+          </a:xfrm>
+          <a:prstGeom prst="line">
+            <a:avLst/>
+          </a:prstGeom>
+          <a:noFill/>
+          <a:ln w="9525">
+            <a:solidFill>
+              <a:srgbClr val="E5E7EB"/>
+            </a:solidFill>
+            <a:prstDash val="solid"/>
+          </a:ln>
+        </p:spPr>
+      </p:sp>
+      <p:sp>
+        <p:nvSpPr>
+          <p:cNvPr id="8" name="Text 6"/>
+          <p:cNvSpPr/>
+          <p:nvPr/>
+        </p:nvSpPr>
+        <p:spPr>
+          <a:xfrm>
+            <a:off x="640080" y="2313432"/>
+            <a:ext cx="365760" cy="365760"/>
+          </a:xfrm>
+          <a:prstGeom prst="rect">
+            <a:avLst/>
+          </a:prstGeom>
+          <a:noFill/>
+          <a:ln/>
+        </p:spPr>
+        <p:txBody>
+          <a:bodyPr wrap="square" lIns="0" tIns="0" rIns="0" bIns="0" rtlCol="0" anchor="ctr"/>
+          <a:lstStyle/>
+          <a:p>
+            <a:pPr indent="0" marL="0">
+              <a:buNone/>
+            </a:pPr>
+            <a:r>
+              <a:rPr lang="en-US" sz="1600" b="1" dirty="0">
+                <a:solidFill>
+                  <a:srgbClr val="15803D"/>
+                </a:solidFill>
+                <a:latin typeface="Calibri" pitchFamily="34" charset="0"/>
+                <a:ea typeface="Calibri" pitchFamily="34" charset="-122"/>
+                <a:cs typeface="Calibri" pitchFamily="34" charset="-120"/>
+              </a:rPr>
+              <a:t>✓</a:t>
+            </a:r>
+            <a:endParaRPr lang="en-US" sz="1600" dirty="0"/>
+          </a:p>
+        </p:txBody>
+      </p:sp>
+      <p:sp>
+        <p:nvSpPr>
+          <p:cNvPr id="9" name="Text 7"/>
+          <p:cNvSpPr/>
+          <p:nvPr/>
+        </p:nvSpPr>
+        <p:spPr>
+          <a:xfrm>
+            <a:off x="1143000" y="2331720"/>
+            <a:ext cx="3291840" cy="365760"/>
+          </a:xfrm>
+          <a:prstGeom prst="rect">
+            <a:avLst/>
+          </a:prstGeom>
+          <a:noFill/>
+          <a:ln/>
+        </p:spPr>
+        <p:txBody>
+          <a:bodyPr wrap="square" lIns="0" tIns="0" rIns="0" bIns="0" rtlCol="0" anchor="ctr"/>
+          <a:lstStyle/>
+          <a:p>
+            <a:pPr indent="0" marL="0">
+              <a:buNone/>
+            </a:pPr>
+            <a:r>
+              <a:rPr lang="en-US" sz="1450" b="1" dirty="0">
+                <a:solidFill>
+                  <a:srgbClr val="111827"/>
+                </a:solidFill>
+                <a:latin typeface="Cambria" pitchFamily="34" charset="0"/>
+                <a:ea typeface="Cambria" pitchFamily="34" charset="-122"/>
+                <a:cs typeface="Cambria" pitchFamily="34" charset="-120"/>
+              </a:rPr>
+              <a:t>Indirect communication</a:t>
+            </a:r>
+            <a:endParaRPr lang="en-US" sz="1450" dirty="0"/>
+          </a:p>
+        </p:txBody>
+      </p:sp>
+      <p:sp>
+        <p:nvSpPr>
+          <p:cNvPr id="10" name="Text 8"/>
+          <p:cNvSpPr/>
+          <p:nvPr/>
+        </p:nvSpPr>
+        <p:spPr>
+          <a:xfrm>
+            <a:off x="4572000" y="2350008"/>
+            <a:ext cx="6949440" cy="365760"/>
+          </a:xfrm>
+          <a:prstGeom prst="rect">
+            <a:avLst/>
+          </a:prstGeom>
+          <a:noFill/>
+          <a:ln/>
+        </p:spPr>
+        <p:txBody>
+          <a:bodyPr wrap="square" lIns="0" tIns="0" rIns="0" bIns="0" rtlCol="0" anchor="ctr"/>
+          <a:lstStyle/>
+          <a:p>
+            <a:pPr indent="0" marL="0">
+              <a:buNone/>
+            </a:pPr>
+            <a:r>
+              <a:rPr lang="en-US" sz="1250" dirty="0">
+                <a:solidFill>
+                  <a:srgbClr val="6B7280"/>
+                </a:solidFill>
+                <a:latin typeface="Calibri" pitchFamily="34" charset="0"/>
+                <a:ea typeface="Calibri" pitchFamily="34" charset="-122"/>
+                <a:cs typeface="Calibri" pitchFamily="34" charset="-120"/>
+              </a:rPr>
+              <a:t>MQTT publish/subscribe only, retained latest-value topics</a:t>
+            </a:r>
+            <a:endParaRPr lang="en-US" sz="1250" dirty="0"/>
+          </a:p>
+        </p:txBody>
+      </p:sp>
+      <p:sp>
+        <p:nvSpPr>
+          <p:cNvPr id="11" name="Shape 9"/>
+          <p:cNvSpPr/>
+          <p:nvPr/>
+        </p:nvSpPr>
+        <p:spPr>
+          <a:xfrm>
+            <a:off x="640080" y="2816352"/>
+            <a:ext cx="10881360" cy="0"/>
+          </a:xfrm>
+          <a:prstGeom prst="line">
+            <a:avLst/>
+          </a:prstGeom>
+          <a:noFill/>
+          <a:ln w="9525">
+            <a:solidFill>
+              <a:srgbClr val="E5E7EB"/>
+            </a:solidFill>
+            <a:prstDash val="solid"/>
+          </a:ln>
+        </p:spPr>
+      </p:sp>
+      <p:sp>
+        <p:nvSpPr>
+          <p:cNvPr id="12" name="Text 10"/>
+          <p:cNvSpPr/>
+          <p:nvPr/>
+        </p:nvSpPr>
+        <p:spPr>
+          <a:xfrm>
+            <a:off x="640080" y="3026664"/>
+            <a:ext cx="365760" cy="365760"/>
+          </a:xfrm>
+          <a:prstGeom prst="rect">
+            <a:avLst/>
+          </a:prstGeom>
+          <a:noFill/>
+          <a:ln/>
+        </p:spPr>
+        <p:txBody>
+          <a:bodyPr wrap="square" lIns="0" tIns="0" rIns="0" bIns="0" rtlCol="0" anchor="ctr"/>
+          <a:lstStyle/>
+          <a:p>
+            <a:pPr indent="0" marL="0">
+              <a:buNone/>
+            </a:pPr>
+            <a:r>
+              <a:rPr lang="en-US" sz="1600" b="1" dirty="0">
+                <a:solidFill>
+                  <a:srgbClr val="15803D"/>
+                </a:solidFill>
+                <a:latin typeface="Calibri" pitchFamily="34" charset="0"/>
+                <a:ea typeface="Calibri" pitchFamily="34" charset="-122"/>
+                <a:cs typeface="Calibri" pitchFamily="34" charset="-120"/>
+              </a:rPr>
+              <a:t>✓</a:t>
+            </a:r>
+            <a:endParaRPr lang="en-US" sz="1600" dirty="0"/>
+          </a:p>
+        </p:txBody>
+      </p:sp>
+      <p:sp>
+        <p:nvSpPr>
+          <p:cNvPr id="13" name="Text 11"/>
+          <p:cNvSpPr/>
+          <p:nvPr/>
+        </p:nvSpPr>
+        <p:spPr>
+          <a:xfrm>
+            <a:off x="1143000" y="3044952"/>
+            <a:ext cx="3291840" cy="365760"/>
+          </a:xfrm>
+          <a:prstGeom prst="rect">
+            <a:avLst/>
+          </a:prstGeom>
+          <a:noFill/>
+          <a:ln/>
+        </p:spPr>
+        <p:txBody>
+          <a:bodyPr wrap="square" lIns="0" tIns="0" rIns="0" bIns="0" rtlCol="0" anchor="ctr"/>
+          <a:lstStyle/>
+          <a:p>
+            <a:pPr indent="0" marL="0">
+              <a:buNone/>
+            </a:pPr>
+            <a:r>
+              <a:rPr lang="en-US" sz="1450" b="1" dirty="0">
+                <a:solidFill>
+                  <a:srgbClr val="111827"/>
+                </a:solidFill>
+                <a:latin typeface="Cambria" pitchFamily="34" charset="0"/>
+                <a:ea typeface="Cambria" pitchFamily="34" charset="-122"/>
+                <a:cs typeface="Cambria" pitchFamily="34" charset="-120"/>
+              </a:rPr>
+              <a:t>AI planning</a:t>
+            </a:r>
+            <a:endParaRPr lang="en-US" sz="1450" dirty="0"/>
+          </a:p>
+        </p:txBody>
+      </p:sp>
+      <p:sp>
+        <p:nvSpPr>
+          <p:cNvPr id="14" name="Text 12"/>
+          <p:cNvSpPr/>
+          <p:nvPr/>
+        </p:nvSpPr>
+        <p:spPr>
+          <a:xfrm>
+            <a:off x="4572000" y="3063240"/>
+            <a:ext cx="6949440" cy="365760"/>
+          </a:xfrm>
+          <a:prstGeom prst="rect">
+            <a:avLst/>
+          </a:prstGeom>
+          <a:noFill/>
+          <a:ln/>
+        </p:spPr>
+        <p:txBody>
+          <a:bodyPr wrap="square" lIns="0" tIns="0" rIns="0" bIns="0" rtlCol="0" anchor="ctr"/>
+          <a:lstStyle/>
+          <a:p>
+            <a:pPr indent="0" marL="0">
+              <a:buNone/>
+            </a:pPr>
+            <a:r>
+              <a:rPr lang="en-US" sz="1250" dirty="0">
+                <a:solidFill>
+                  <a:srgbClr val="6B7280"/>
+                </a:solidFill>
+                <a:latin typeface="Calibri" pitchFamily="34" charset="0"/>
+                <a:ea typeface="Calibri" pitchFamily="34" charset="-122"/>
+                <a:cs typeface="Calibri" pitchFamily="34" charset="-120"/>
+              </a:rPr>
+              <a:t>PDDL domain, auto-generated instances, Fast Downward, cost-optimal</a:t>
+            </a:r>
+            <a:endParaRPr lang="en-US" sz="1250" dirty="0"/>
+          </a:p>
+        </p:txBody>
+      </p:sp>
+      <p:sp>
+        <p:nvSpPr>
+          <p:cNvPr id="15" name="Shape 13"/>
+          <p:cNvSpPr/>
+          <p:nvPr/>
+        </p:nvSpPr>
+        <p:spPr>
+          <a:xfrm>
+            <a:off x="640080" y="3529584"/>
+            <a:ext cx="10881360" cy="0"/>
+          </a:xfrm>
+          <a:prstGeom prst="line">
+            <a:avLst/>
+          </a:prstGeom>
+          <a:noFill/>
+          <a:ln w="9525">
+            <a:solidFill>
+              <a:srgbClr val="E5E7EB"/>
+            </a:solidFill>
+            <a:prstDash val="solid"/>
+          </a:ln>
+        </p:spPr>
+      </p:sp>
+      <p:sp>
+        <p:nvSpPr>
+          <p:cNvPr id="16" name="Text 14"/>
+          <p:cNvSpPr/>
+          <p:nvPr/>
+        </p:nvSpPr>
+        <p:spPr>
+          <a:xfrm>
+            <a:off x="640080" y="3739896"/>
+            <a:ext cx="365760" cy="365760"/>
+          </a:xfrm>
+          <a:prstGeom prst="rect">
+            <a:avLst/>
+          </a:prstGeom>
+          <a:noFill/>
+          <a:ln/>
+        </p:spPr>
+        <p:txBody>
+          <a:bodyPr wrap="square" lIns="0" tIns="0" rIns="0" bIns="0" rtlCol="0" anchor="ctr"/>
+          <a:lstStyle/>
+          <a:p>
+            <a:pPr indent="0" marL="0">
+              <a:buNone/>
+            </a:pPr>
+            <a:r>
+              <a:rPr lang="en-US" sz="1600" b="1" dirty="0">
+                <a:solidFill>
+                  <a:srgbClr val="15803D"/>
+                </a:solidFill>
+                <a:latin typeface="Calibri" pitchFamily="34" charset="0"/>
+                <a:ea typeface="Calibri" pitchFamily="34" charset="-122"/>
+                <a:cs typeface="Calibri" pitchFamily="34" charset="-120"/>
+              </a:rPr>
+              <a:t>✓</a:t>
+            </a:r>
+            <a:endParaRPr lang="en-US" sz="1600" dirty="0"/>
+          </a:p>
+        </p:txBody>
+      </p:sp>
+      <p:sp>
+        <p:nvSpPr>
+          <p:cNvPr id="17" name="Text 15"/>
+          <p:cNvSpPr/>
+          <p:nvPr/>
+        </p:nvSpPr>
+        <p:spPr>
+          <a:xfrm>
+            <a:off x="1143000" y="3758184"/>
+            <a:ext cx="3291840" cy="365760"/>
+          </a:xfrm>
+          <a:prstGeom prst="rect">
+            <a:avLst/>
+          </a:prstGeom>
+          <a:noFill/>
+          <a:ln/>
+        </p:spPr>
+        <p:txBody>
+          <a:bodyPr wrap="square" lIns="0" tIns="0" rIns="0" bIns="0" rtlCol="0" anchor="ctr"/>
+          <a:lstStyle/>
+          <a:p>
+            <a:pPr indent="0" marL="0">
+              <a:buNone/>
+            </a:pPr>
+            <a:r>
+              <a:rPr lang="en-US" sz="1450" b="1" dirty="0">
+                <a:solidFill>
+                  <a:srgbClr val="111827"/>
+                </a:solidFill>
+                <a:latin typeface="Cambria" pitchFamily="34" charset="0"/>
+                <a:ea typeface="Cambria" pitchFamily="34" charset="-122"/>
+                <a:cs typeface="Cambria" pitchFamily="34" charset="-120"/>
+              </a:rPr>
+              <a:t>IoT</a:t>
+            </a:r>
+            <a:endParaRPr lang="en-US" sz="1450" dirty="0"/>
+          </a:p>
+        </p:txBody>
+      </p:sp>
+      <p:sp>
+        <p:nvSpPr>
+          <p:cNvPr id="18" name="Text 16"/>
+          <p:cNvSpPr/>
+          <p:nvPr/>
+        </p:nvSpPr>
+        <p:spPr>
+          <a:xfrm>
+            <a:off x="4572000" y="3776472"/>
+            <a:ext cx="6949440" cy="365760"/>
+          </a:xfrm>
+          <a:prstGeom prst="rect">
+            <a:avLst/>
+          </a:prstGeom>
+          <a:noFill/>
+          <a:ln/>
+        </p:spPr>
+        <p:txBody>
+          <a:bodyPr wrap="square" lIns="0" tIns="0" rIns="0" bIns="0" rtlCol="0" anchor="ctr"/>
+          <a:lstStyle/>
+          <a:p>
+            <a:pPr indent="0" marL="0">
+              <a:buNone/>
+            </a:pPr>
+            <a:r>
+              <a:rPr lang="en-US" sz="1250" dirty="0">
+                <a:solidFill>
+                  <a:srgbClr val="6B7280"/>
+                </a:solidFill>
+                <a:latin typeface="Calibri" pitchFamily="34" charset="0"/>
+                <a:ea typeface="Calibri" pitchFamily="34" charset="-122"/>
+                <a:cs typeface="Calibri" pitchFamily="34" charset="-120"/>
+              </a:rPr>
+              <a:t>5 sensors (2 physical) · 6 actuators (4 physical)</a:t>
+            </a:r>
+            <a:endParaRPr lang="en-US" sz="1250" dirty="0"/>
+          </a:p>
+        </p:txBody>
+      </p:sp>
+      <p:sp>
+        <p:nvSpPr>
+          <p:cNvPr id="19" name="Shape 17"/>
+          <p:cNvSpPr/>
+          <p:nvPr/>
+        </p:nvSpPr>
+        <p:spPr>
+          <a:xfrm>
+            <a:off x="640080" y="4242816"/>
+            <a:ext cx="10881360" cy="0"/>
+          </a:xfrm>
+          <a:prstGeom prst="line">
+            <a:avLst/>
+          </a:prstGeom>
+          <a:noFill/>
+          <a:ln w="9525">
+            <a:solidFill>
+              <a:srgbClr val="E5E7EB"/>
+            </a:solidFill>
+            <a:prstDash val="solid"/>
+          </a:ln>
+        </p:spPr>
+      </p:sp>
+      <p:sp>
+        <p:nvSpPr>
+          <p:cNvPr id="20" name="Text 18"/>
+          <p:cNvSpPr/>
+          <p:nvPr/>
+        </p:nvSpPr>
+        <p:spPr>
+          <a:xfrm>
+            <a:off x="640080" y="4453128"/>
+            <a:ext cx="365760" cy="365760"/>
+          </a:xfrm>
+          <a:prstGeom prst="rect">
+            <a:avLst/>
+          </a:prstGeom>
+          <a:noFill/>
+          <a:ln/>
+        </p:spPr>
+        <p:txBody>
+          <a:bodyPr wrap="square" lIns="0" tIns="0" rIns="0" bIns="0" rtlCol="0" anchor="ctr"/>
+          <a:lstStyle/>
+          <a:p>
+            <a:pPr indent="0" marL="0">
+              <a:buNone/>
+            </a:pPr>
+            <a:r>
+              <a:rPr lang="en-US" sz="1600" b="1" dirty="0">
+                <a:solidFill>
+                  <a:srgbClr val="15803D"/>
+                </a:solidFill>
+                <a:latin typeface="Calibri" pitchFamily="34" charset="0"/>
+                <a:ea typeface="Calibri" pitchFamily="34" charset="-122"/>
+                <a:cs typeface="Calibri" pitchFamily="34" charset="-120"/>
+              </a:rPr>
+              <a:t>✓</a:t>
+            </a:r>
+            <a:endParaRPr lang="en-US" sz="1600" dirty="0"/>
+          </a:p>
+        </p:txBody>
+      </p:sp>
+      <p:sp>
+        <p:nvSpPr>
+          <p:cNvPr id="21" name="Text 19"/>
+          <p:cNvSpPr/>
+          <p:nvPr/>
+        </p:nvSpPr>
+        <p:spPr>
+          <a:xfrm>
+            <a:off x="1143000" y="4471416"/>
+            <a:ext cx="3291840" cy="365760"/>
+          </a:xfrm>
+          <a:prstGeom prst="rect">
+            <a:avLst/>
+          </a:prstGeom>
+          <a:noFill/>
+          <a:ln/>
+        </p:spPr>
+        <p:txBody>
+          <a:bodyPr wrap="square" lIns="0" tIns="0" rIns="0" bIns="0" rtlCol="0" anchor="ctr"/>
+          <a:lstStyle/>
+          <a:p>
+            <a:pPr indent="0" marL="0">
+              <a:buNone/>
+            </a:pPr>
+            <a:r>
+              <a:rPr lang="en-US" sz="1450" b="1" dirty="0">
+                <a:solidFill>
+                  <a:srgbClr val="111827"/>
+                </a:solidFill>
+                <a:latin typeface="Cambria" pitchFamily="34" charset="0"/>
+                <a:ea typeface="Cambria" pitchFamily="34" charset="-122"/>
+                <a:cs typeface="Cambria" pitchFamily="34" charset="-120"/>
+              </a:rPr>
+              <a:t>System design</a:t>
+            </a:r>
+            <a:endParaRPr lang="en-US" sz="1450" dirty="0"/>
+          </a:p>
+        </p:txBody>
+      </p:sp>
+      <p:sp>
+        <p:nvSpPr>
+          <p:cNvPr id="22" name="Text 20"/>
+          <p:cNvSpPr/>
+          <p:nvPr/>
+        </p:nvSpPr>
+        <p:spPr>
+          <a:xfrm>
+            <a:off x="4572000" y="4489704"/>
+            <a:ext cx="6949440" cy="365760"/>
+          </a:xfrm>
+          <a:prstGeom prst="rect">
+            <a:avLst/>
+          </a:prstGeom>
+          <a:noFill/>
+          <a:ln/>
+        </p:spPr>
+        <p:txBody>
+          <a:bodyPr wrap="square" lIns="0" tIns="0" rIns="0" bIns="0" rtlCol="0" anchor="ctr"/>
+          <a:lstStyle/>
+          <a:p>
+            <a:pPr indent="0" marL="0">
+              <a:buNone/>
+            </a:pPr>
+            <a:r>
+              <a:rPr lang="en-US" sz="1250" dirty="0">
+                <a:solidFill>
+                  <a:srgbClr val="6B7280"/>
+                </a:solidFill>
+                <a:latin typeface="Calibri" pitchFamily="34" charset="0"/>
+                <a:ea typeface="Calibri" pitchFamily="34" charset="-122"/>
+                <a:cs typeface="Calibri" pitchFamily="34" charset="-120"/>
+              </a:rPr>
+              <a:t>8 decoupled modules, each independently restartable</a:t>
+            </a:r>
+            <a:endParaRPr lang="en-US" sz="1250" dirty="0"/>
+          </a:p>
+        </p:txBody>
+      </p:sp>
+      <p:sp>
+        <p:nvSpPr>
+          <p:cNvPr id="23" name="Shape 21"/>
+          <p:cNvSpPr/>
+          <p:nvPr/>
+        </p:nvSpPr>
+        <p:spPr>
+          <a:xfrm>
+            <a:off x="640080" y="4956048"/>
+            <a:ext cx="10881360" cy="0"/>
+          </a:xfrm>
+          <a:prstGeom prst="line">
+            <a:avLst/>
+          </a:prstGeom>
+          <a:noFill/>
+          <a:ln w="9525">
+            <a:solidFill>
+              <a:srgbClr val="E5E7EB"/>
+            </a:solidFill>
+            <a:prstDash val="solid"/>
+          </a:ln>
+        </p:spPr>
+      </p:sp>
+      <p:sp>
+        <p:nvSpPr>
+          <p:cNvPr id="24" name="Text 22"/>
+          <p:cNvSpPr/>
+          <p:nvPr/>
+        </p:nvSpPr>
+        <p:spPr>
+          <a:xfrm>
+            <a:off x="640080" y="5166360"/>
+            <a:ext cx="365760" cy="365760"/>
+          </a:xfrm>
+          <a:prstGeom prst="rect">
+            <a:avLst/>
+          </a:prstGeom>
+          <a:noFill/>
+          <a:ln/>
+        </p:spPr>
+        <p:txBody>
+          <a:bodyPr wrap="square" lIns="0" tIns="0" rIns="0" bIns="0" rtlCol="0" anchor="ctr"/>
+          <a:lstStyle/>
+          <a:p>
+            <a:pPr indent="0" marL="0">
+              <a:buNone/>
+            </a:pPr>
+            <a:r>
+              <a:rPr lang="en-US" sz="1600" b="1" dirty="0">
+                <a:solidFill>
+                  <a:srgbClr val="15803D"/>
+                </a:solidFill>
+                <a:latin typeface="Calibri" pitchFamily="34" charset="0"/>
+                <a:ea typeface="Calibri" pitchFamily="34" charset="-122"/>
+                <a:cs typeface="Calibri" pitchFamily="34" charset="-120"/>
+              </a:rPr>
+              <a:t>✓</a:t>
+            </a:r>
+            <a:endParaRPr lang="en-US" sz="1600" dirty="0"/>
+          </a:p>
+        </p:txBody>
+      </p:sp>
+      <p:sp>
+        <p:nvSpPr>
+          <p:cNvPr id="25" name="Text 23"/>
+          <p:cNvSpPr/>
+          <p:nvPr/>
+        </p:nvSpPr>
+        <p:spPr>
+          <a:xfrm>
+            <a:off x="1143000" y="5184648"/>
+            <a:ext cx="3291840" cy="365760"/>
+          </a:xfrm>
+          <a:prstGeom prst="rect">
+            <a:avLst/>
+          </a:prstGeom>
+          <a:noFill/>
+          <a:ln/>
+        </p:spPr>
+        <p:txBody>
+          <a:bodyPr wrap="square" lIns="0" tIns="0" rIns="0" bIns="0" rtlCol="0" anchor="ctr"/>
+          <a:lstStyle/>
+          <a:p>
+            <a:pPr indent="0" marL="0">
+              <a:buNone/>
+            </a:pPr>
+            <a:r>
+              <a:rPr lang="en-US" sz="1450" b="1" dirty="0">
+                <a:solidFill>
+                  <a:srgbClr val="111827"/>
+                </a:solidFill>
+                <a:latin typeface="Cambria" pitchFamily="34" charset="0"/>
+                <a:ea typeface="Cambria" pitchFamily="34" charset="-122"/>
+                <a:cs typeface="Cambria" pitchFamily="34" charset="-120"/>
+              </a:rPr>
+              <a:t>Visualisation</a:t>
+            </a:r>
+            <a:endParaRPr lang="en-US" sz="1450" dirty="0"/>
+          </a:p>
+        </p:txBody>
+      </p:sp>
+      <p:sp>
+        <p:nvSpPr>
+          <p:cNvPr id="26" name="Text 24"/>
+          <p:cNvSpPr/>
+          <p:nvPr/>
+        </p:nvSpPr>
+        <p:spPr>
+          <a:xfrm>
+            <a:off x="4572000" y="5202936"/>
+            <a:ext cx="6949440" cy="365760"/>
+          </a:xfrm>
+          <a:prstGeom prst="rect">
+            <a:avLst/>
+          </a:prstGeom>
+          <a:noFill/>
+          <a:ln/>
+        </p:spPr>
+        <p:txBody>
+          <a:bodyPr wrap="square" lIns="0" tIns="0" rIns="0" bIns="0" rtlCol="0" anchor="ctr"/>
+          <a:lstStyle/>
+          <a:p>
+            <a:pPr indent="0" marL="0">
+              <a:buNone/>
+            </a:pPr>
+            <a:r>
+              <a:rPr lang="en-US" sz="1250" dirty="0">
+                <a:solidFill>
+                  <a:srgbClr val="6B7280"/>
+                </a:solidFill>
+                <a:latin typeface="Calibri" pitchFamily="34" charset="0"/>
+                <a:ea typeface="Calibri" pitchFamily="34" charset="-122"/>
+                <a:cs typeface="Calibri" pitchFamily="34" charset="-120"/>
+              </a:rPr>
+              <a:t>current state + latest plan on dashboard and on-site LCD</a:t>
+            </a:r>
+            <a:endParaRPr lang="en-US" sz="1250" dirty="0"/>
+          </a:p>
+        </p:txBody>
+      </p:sp>
+      <p:sp>
+        <p:nvSpPr>
+          <p:cNvPr id="27" name="Shape 25"/>
+          <p:cNvSpPr/>
+          <p:nvPr/>
+        </p:nvSpPr>
+        <p:spPr>
+          <a:xfrm>
+            <a:off x="640080" y="5669280"/>
+            <a:ext cx="10881360" cy="0"/>
+          </a:xfrm>
+          <a:prstGeom prst="line">
+            <a:avLst/>
+          </a:prstGeom>
+          <a:noFill/>
+          <a:ln w="9525">
+            <a:solidFill>
+              <a:srgbClr val="E5E7EB"/>
+            </a:solidFill>
+            <a:prstDash val="solid"/>
+          </a:ln>
+        </p:spPr>
+      </p:sp>
+      <p:sp>
+        <p:nvSpPr>
+          <p:cNvPr id="28" name="Text 26"/>
+          <p:cNvSpPr/>
+          <p:nvPr/>
+        </p:nvSpPr>
+        <p:spPr>
+          <a:xfrm>
+            <a:off x="640080" y="6172200"/>
+            <a:ext cx="10881360" cy="365760"/>
+          </a:xfrm>
+          <a:prstGeom prst="rect">
+            <a:avLst/>
+          </a:prstGeom>
+          <a:noFill/>
+          <a:ln/>
+        </p:spPr>
+        <p:txBody>
+          <a:bodyPr wrap="square" lIns="0" tIns="0" rIns="0" bIns="0" rtlCol="0" anchor="ctr"/>
+          <a:lstStyle/>
+          <a:p>
+            <a:pPr algn="ctr" indent="0" marL="0">
+              <a:buNone/>
+            </a:pPr>
+            <a:r>
+              <a:rPr lang="en-US" sz="1250" dirty="0">
+                <a:solidFill>
+                  <a:srgbClr val="D97706"/>
+                </a:solidFill>
+                <a:latin typeface="Courier New" pitchFamily="34" charset="0"/>
+                <a:ea typeface="Courier New" pitchFamily="34" charset="-122"/>
+                <a:cs typeface="Courier New" pitchFamily="34" charset="-120"/>
+              </a:rPr>
+              <a:t>plans in ~130 ms · closed-loop correction &lt; 1 s · state at 2 Hz</a:t>
+            </a:r>
+            <a:endParaRPr lang="en-US" sz="1250" dirty="0"/>
+          </a:p>
+        </p:txBody>
+      </p:sp>
+    </p:spTree>
+  </p:cSld>
+  <p:clrMapOvr>
+    <a:masterClrMapping/>
+  </p:clrMapOvr>
+</p:sld>
+</file>
+
+<file path=ppt/slides/slide12.xml><?xml version="1.0" encoding="utf-8"?>
+<p:sld xmlns:a="http://schemas.openxmlformats.org/drawingml/2006/main" xmlns:r="http://schemas.openxmlformats.org/officeDocument/2006/relationships" xmlns:p="http://schemas.openxmlformats.org/presentationml/2006/main">
+  <p:cSld name="Slide 12">
     <p:bg>
       <p:bgPr>
         <a:solidFill>
@@ -7668,7 +8746,7 @@
                 <a:ea typeface="Calibri" pitchFamily="34" charset="-122"/>
                 <a:cs typeface="Calibri" pitchFamily="34" charset="-120"/>
               </a:rPr>
-              <a:t>This is the summer case from the opening scene: 33 °C outside, so one full airing wins. In winter the same state yields two short pulses (slide 8).</a:t>
+              <a:t>This is the summer case from the opening scene: 33 °C outside, so one full airing wins. In winter the same state yields two short pulses (slide 9).</a:t>
             </a:r>
             <a:endParaRPr lang="en-US" sz="1100" dirty="0"/>
           </a:p>
@@ -11306,7 +12384,7 @@
                 <a:ea typeface="Calibri" pitchFamily="34" charset="-122"/>
                 <a:cs typeface="Calibri" pitchFamily="34" charset="-120"/>
               </a:rPr>
-              <a:t>AI PLANNING · 2/2</a:t>
+              <a:t>AI PLANNING · THE SEARCH</a:t>
             </a:r>
             <a:endParaRPr lang="en-US" sz="1100" dirty="0"/>
           </a:p>
@@ -11345,7 +12423,7 @@
                 <a:ea typeface="Cambria" pitchFamily="34" charset="-122"/>
                 <a:cs typeface="Cambria" pitchFamily="34" charset="-120"/>
               </a:rPr>
-              <a:t>Solving: A* + LM-Cut, optimal in ~130 ms</a:t>
+              <a:t>Finding the optimum: A* guided by LM-Cut</a:t>
             </a:r>
             <a:endParaRPr lang="en-US" sz="3000" dirty="0"/>
           </a:p>
@@ -11359,12 +12437,81 @@
         </p:nvSpPr>
         <p:spPr>
           <a:xfrm>
-            <a:off x="640080" y="1463040"/>
-            <a:ext cx="2057400" cy="566928"/>
+            <a:off x="2331720" y="2148840"/>
+            <a:ext cx="-777240" cy="914400"/>
+          </a:xfrm>
+          <a:prstGeom prst="line">
+            <a:avLst/>
+          </a:prstGeom>
+          <a:noFill/>
+          <a:ln w="25400">
+            <a:solidFill>
+              <a:srgbClr val="D97706"/>
+            </a:solidFill>
+            <a:prstDash val="solid"/>
+          </a:ln>
+        </p:spPr>
+      </p:sp>
+      <p:sp>
+        <p:nvSpPr>
+          <p:cNvPr id="5" name="Shape 3"/>
+          <p:cNvSpPr/>
+          <p:nvPr/>
+        </p:nvSpPr>
+        <p:spPr>
+          <a:xfrm>
+            <a:off x="3611880" y="2148840"/>
+            <a:ext cx="1325880" cy="914400"/>
+          </a:xfrm>
+          <a:prstGeom prst="line">
+            <a:avLst/>
+          </a:prstGeom>
+          <a:noFill/>
+          <a:ln w="19050">
+            <a:solidFill>
+              <a:srgbClr val="E5E7EB"/>
+            </a:solidFill>
+            <a:prstDash val="solid"/>
+          </a:ln>
+        </p:spPr>
+      </p:sp>
+      <p:sp>
+        <p:nvSpPr>
+          <p:cNvPr id="6" name="Shape 4"/>
+          <p:cNvSpPr/>
+          <p:nvPr/>
+        </p:nvSpPr>
+        <p:spPr>
+          <a:xfrm>
+            <a:off x="4937760" y="3566160"/>
+            <a:ext cx="0" cy="960120"/>
+          </a:xfrm>
+          <a:prstGeom prst="line">
+            <a:avLst/>
+          </a:prstGeom>
+          <a:noFill/>
+          <a:ln w="19050">
+            <a:solidFill>
+              <a:srgbClr val="E5E7EB"/>
+            </a:solidFill>
+            <a:prstDash val="solid"/>
+          </a:ln>
+        </p:spPr>
+      </p:sp>
+      <p:sp>
+        <p:nvSpPr>
+          <p:cNvPr id="7" name="Shape 5"/>
+          <p:cNvSpPr/>
+          <p:nvPr/>
+        </p:nvSpPr>
+        <p:spPr>
+          <a:xfrm>
+            <a:off x="2240280" y="1645920"/>
+            <a:ext cx="1874520" cy="502920"/>
           </a:xfrm>
           <a:prstGeom prst="roundRect">
             <a:avLst>
-              <a:gd name="adj" fmla="val 12903"/>
+              <a:gd name="adj" fmla="val 12727"/>
             </a:avLst>
           </a:prstGeom>
           <a:solidFill>
@@ -11380,14 +12527,14 @@
       </p:sp>
       <p:sp>
         <p:nvSpPr>
-          <p:cNvPr id="5" name="Text 3"/>
-          <p:cNvSpPr/>
-          <p:nvPr/>
-        </p:nvSpPr>
-        <p:spPr>
-          <a:xfrm>
-            <a:off x="694944" y="1517904"/>
-            <a:ext cx="1947672" cy="457200"/>
+          <p:cNvPr id="8" name="Text 6"/>
+          <p:cNvSpPr/>
+          <p:nvPr/>
+        </p:nvSpPr>
+        <p:spPr>
+          <a:xfrm>
+            <a:off x="2295144" y="1664208"/>
+            <a:ext cx="1764792" cy="457200"/>
           </a:xfrm>
           <a:prstGeom prst="rect">
             <a:avLst/>
@@ -11403,7 +12550,7 @@
               <a:buNone/>
             </a:pPr>
             <a:r>
-              <a:rPr lang="en-US" sz="950" dirty="0">
+              <a:rPr lang="en-US" sz="1050" dirty="0">
                 <a:solidFill>
                   <a:srgbClr val="111827"/>
                 </a:solidFill>
@@ -11411,65 +12558,92 @@
                 <a:ea typeface="Courier New" pitchFamily="34" charset="-122"/>
                 <a:cs typeface="Courier New" pitchFamily="34" charset="-120"/>
               </a:rPr>
-              <a:t>library/state</a:t>
-            </a:r>
-            <a:endParaRPr lang="en-US" sz="950" dirty="0"/>
-          </a:p>
-        </p:txBody>
-      </p:sp>
-      <p:sp>
-        <p:nvSpPr>
-          <p:cNvPr id="6" name="Text 4"/>
-          <p:cNvSpPr/>
-          <p:nvPr/>
-        </p:nvSpPr>
-        <p:spPr>
-          <a:xfrm>
-            <a:off x="2697480" y="1536192"/>
-            <a:ext cx="292608" cy="411480"/>
-          </a:xfrm>
-          <a:prstGeom prst="rect">
-            <a:avLst/>
-          </a:prstGeom>
-          <a:noFill/>
-          <a:ln/>
-        </p:spPr>
-        <p:txBody>
-          <a:bodyPr wrap="square" lIns="0" tIns="0" rIns="0" bIns="0" rtlCol="0" anchor="ctr"/>
-          <a:lstStyle/>
-          <a:p>
-            <a:pPr algn="ctr" indent="0" marL="0">
-              <a:buNone/>
-            </a:pPr>
-            <a:r>
-              <a:rPr lang="en-US" sz="1400" dirty="0">
-                <a:solidFill>
-                  <a:srgbClr val="6B7280"/>
-                </a:solidFill>
-                <a:latin typeface="Calibri" pitchFamily="34" charset="0"/>
-                <a:ea typeface="Calibri" pitchFamily="34" charset="-122"/>
-                <a:cs typeface="Calibri" pitchFamily="34" charset="-120"/>
-              </a:rPr>
-              <a:t>→</a:t>
-            </a:r>
-            <a:endParaRPr lang="en-US" sz="1400" dirty="0"/>
-          </a:p>
-        </p:txBody>
-      </p:sp>
-      <p:sp>
-        <p:nvSpPr>
-          <p:cNvPr id="7" name="Shape 5"/>
-          <p:cNvSpPr/>
-          <p:nvPr/>
-        </p:nvSpPr>
-        <p:spPr>
-          <a:xfrm>
-            <a:off x="2971800" y="1463040"/>
-            <a:ext cx="2057400" cy="566928"/>
+              <a:t>co2_high · g=0</a:t>
+            </a:r>
+            <a:endParaRPr lang="en-US" sz="1050" dirty="0"/>
+          </a:p>
+        </p:txBody>
+      </p:sp>
+      <p:sp>
+        <p:nvSpPr>
+          <p:cNvPr id="9" name="Shape 7"/>
+          <p:cNvSpPr/>
+          <p:nvPr/>
+        </p:nvSpPr>
+        <p:spPr>
+          <a:xfrm>
+            <a:off x="640080" y="3063240"/>
+            <a:ext cx="1874520" cy="502920"/>
           </a:xfrm>
           <a:prstGeom prst="roundRect">
             <a:avLst>
-              <a:gd name="adj" fmla="val 12903"/>
+              <a:gd name="adj" fmla="val 12727"/>
+            </a:avLst>
+          </a:prstGeom>
+          <a:solidFill>
+            <a:srgbClr val="E7F3EC"/>
+          </a:solidFill>
+          <a:ln w="19050">
+            <a:solidFill>
+              <a:srgbClr val="15803D"/>
+            </a:solidFill>
+            <a:prstDash val="solid"/>
+          </a:ln>
+        </p:spPr>
+      </p:sp>
+      <p:sp>
+        <p:nvSpPr>
+          <p:cNvPr id="10" name="Text 8"/>
+          <p:cNvSpPr/>
+          <p:nvPr/>
+        </p:nvSpPr>
+        <p:spPr>
+          <a:xfrm>
+            <a:off x="694944" y="3081528"/>
+            <a:ext cx="1764792" cy="457200"/>
+          </a:xfrm>
+          <a:prstGeom prst="rect">
+            <a:avLst/>
+          </a:prstGeom>
+          <a:noFill/>
+          <a:ln/>
+        </p:spPr>
+        <p:txBody>
+          <a:bodyPr wrap="square" lIns="0" tIns="0" rIns="0" bIns="0" rtlCol="0" anchor="ctr"/>
+          <a:lstStyle/>
+          <a:p>
+            <a:pPr algn="ctr" indent="0" marL="0">
+              <a:buNone/>
+            </a:pPr>
+            <a:r>
+              <a:rPr lang="en-US" sz="1050" b="1" dirty="0">
+                <a:solidFill>
+                  <a:srgbClr val="15803D"/>
+                </a:solidFill>
+                <a:latin typeface="Courier New" pitchFamily="34" charset="0"/>
+                <a:ea typeface="Courier New" pitchFamily="34" charset="-122"/>
+                <a:cs typeface="Courier New" pitchFamily="34" charset="-120"/>
+              </a:rPr>
+              <a:t>goal ✓ · f=4</a:t>
+            </a:r>
+            <a:endParaRPr lang="en-US" sz="1050" dirty="0"/>
+          </a:p>
+        </p:txBody>
+      </p:sp>
+      <p:sp>
+        <p:nvSpPr>
+          <p:cNvPr id="11" name="Shape 9"/>
+          <p:cNvSpPr/>
+          <p:nvPr/>
+        </p:nvSpPr>
+        <p:spPr>
+          <a:xfrm>
+            <a:off x="3977640" y="3063240"/>
+            <a:ext cx="1874520" cy="502920"/>
+          </a:xfrm>
+          <a:prstGeom prst="roundRect">
+            <a:avLst>
+              <a:gd name="adj" fmla="val 12727"/>
             </a:avLst>
           </a:prstGeom>
           <a:solidFill>
@@ -11485,14 +12659,14 @@
       </p:sp>
       <p:sp>
         <p:nvSpPr>
-          <p:cNvPr id="8" name="Text 6"/>
-          <p:cNvSpPr/>
-          <p:nvPr/>
-        </p:nvSpPr>
-        <p:spPr>
-          <a:xfrm>
-            <a:off x="3026664" y="1517904"/>
-            <a:ext cx="1947672" cy="457200"/>
+          <p:cNvPr id="12" name="Text 10"/>
+          <p:cNvSpPr/>
+          <p:nvPr/>
+        </p:nvSpPr>
+        <p:spPr>
+          <a:xfrm>
+            <a:off x="4032504" y="3081528"/>
+            <a:ext cx="1764792" cy="457200"/>
           </a:xfrm>
           <a:prstGeom prst="rect">
             <a:avLst/>
@@ -11508,7 +12682,7 @@
               <a:buNone/>
             </a:pPr>
             <a:r>
-              <a:rPr lang="en-US" sz="950" dirty="0">
+              <a:rPr lang="en-US" sz="1050" dirty="0">
                 <a:solidFill>
                   <a:srgbClr val="111827"/>
                 </a:solidFill>
@@ -11516,65 +12690,26 @@
                 <a:ea typeface="Courier New" pitchFamily="34" charset="-122"/>
                 <a:cs typeface="Courier New" pitchFamily="34" charset="-120"/>
               </a:rPr>
-              <a:t>discretise + goals + costs</a:t>
-            </a:r>
-            <a:endParaRPr lang="en-US" sz="950" dirty="0"/>
-          </a:p>
-        </p:txBody>
-      </p:sp>
-      <p:sp>
-        <p:nvSpPr>
-          <p:cNvPr id="9" name="Text 7"/>
-          <p:cNvSpPr/>
-          <p:nvPr/>
-        </p:nvSpPr>
-        <p:spPr>
-          <a:xfrm>
-            <a:off x="5029200" y="1536192"/>
-            <a:ext cx="292608" cy="411480"/>
-          </a:xfrm>
-          <a:prstGeom prst="rect">
-            <a:avLst/>
-          </a:prstGeom>
-          <a:noFill/>
-          <a:ln/>
-        </p:spPr>
-        <p:txBody>
-          <a:bodyPr wrap="square" lIns="0" tIns="0" rIns="0" bIns="0" rtlCol="0" anchor="ctr"/>
-          <a:lstStyle/>
-          <a:p>
-            <a:pPr algn="ctr" indent="0" marL="0">
-              <a:buNone/>
-            </a:pPr>
-            <a:r>
-              <a:rPr lang="en-US" sz="1400" dirty="0">
-                <a:solidFill>
-                  <a:srgbClr val="6B7280"/>
-                </a:solidFill>
-                <a:latin typeface="Calibri" pitchFamily="34" charset="0"/>
-                <a:ea typeface="Calibri" pitchFamily="34" charset="-122"/>
-                <a:cs typeface="Calibri" pitchFamily="34" charset="-120"/>
-              </a:rPr>
-              <a:t>→</a:t>
-            </a:r>
-            <a:endParaRPr lang="en-US" sz="1400" dirty="0"/>
-          </a:p>
-        </p:txBody>
-      </p:sp>
-      <p:sp>
-        <p:nvSpPr>
-          <p:cNvPr id="10" name="Shape 8"/>
-          <p:cNvSpPr/>
-          <p:nvPr/>
-        </p:nvSpPr>
-        <p:spPr>
-          <a:xfrm>
-            <a:off x="5303520" y="1463040"/>
-            <a:ext cx="2057400" cy="566928"/>
+              <a:t>co2_elevated · g=3</a:t>
+            </a:r>
+            <a:endParaRPr lang="en-US" sz="1050" dirty="0"/>
+          </a:p>
+        </p:txBody>
+      </p:sp>
+      <p:sp>
+        <p:nvSpPr>
+          <p:cNvPr id="13" name="Shape 11"/>
+          <p:cNvSpPr/>
+          <p:nvPr/>
+        </p:nvSpPr>
+        <p:spPr>
+          <a:xfrm>
+            <a:off x="3977640" y="4526280"/>
+            <a:ext cx="1874520" cy="502920"/>
           </a:xfrm>
           <a:prstGeom prst="roundRect">
             <a:avLst>
-              <a:gd name="adj" fmla="val 12903"/>
+              <a:gd name="adj" fmla="val 12727"/>
             </a:avLst>
           </a:prstGeom>
           <a:solidFill>
@@ -11590,14 +12725,14 @@
       </p:sp>
       <p:sp>
         <p:nvSpPr>
-          <p:cNvPr id="11" name="Text 9"/>
-          <p:cNvSpPr/>
-          <p:nvPr/>
-        </p:nvSpPr>
-        <p:spPr>
-          <a:xfrm>
-            <a:off x="5358384" y="1517904"/>
-            <a:ext cx="1947672" cy="457200"/>
+          <p:cNvPr id="14" name="Text 12"/>
+          <p:cNvSpPr/>
+          <p:nvPr/>
+        </p:nvSpPr>
+        <p:spPr>
+          <a:xfrm>
+            <a:off x="4032504" y="4544568"/>
+            <a:ext cx="1764792" cy="457200"/>
           </a:xfrm>
           <a:prstGeom prst="rect">
             <a:avLst/>
@@ -11613,7 +12748,7 @@
               <a:buNone/>
             </a:pPr>
             <a:r>
-              <a:rPr lang="en-US" sz="950" dirty="0">
+              <a:rPr lang="en-US" sz="1050" dirty="0">
                 <a:solidFill>
                   <a:srgbClr val="111827"/>
                 </a:solidFill>
@@ -11621,70 +12756,183 @@
                 <a:ea typeface="Courier New" pitchFamily="34" charset="-122"/>
                 <a:cs typeface="Courier New" pitchFamily="34" charset="-120"/>
               </a:rPr>
-              <a:t>PDDL instance</a:t>
-            </a:r>
-            <a:endParaRPr lang="en-US" sz="950" dirty="0"/>
-          </a:p>
-        </p:txBody>
-      </p:sp>
-      <p:sp>
-        <p:nvSpPr>
-          <p:cNvPr id="12" name="Text 10"/>
-          <p:cNvSpPr/>
-          <p:nvPr/>
-        </p:nvSpPr>
-        <p:spPr>
-          <a:xfrm>
-            <a:off x="7360920" y="1536192"/>
-            <a:ext cx="292608" cy="411480"/>
-          </a:xfrm>
-          <a:prstGeom prst="rect">
-            <a:avLst/>
-          </a:prstGeom>
-          <a:noFill/>
-          <a:ln/>
-        </p:spPr>
-        <p:txBody>
-          <a:bodyPr wrap="square" lIns="0" tIns="0" rIns="0" bIns="0" rtlCol="0" anchor="ctr"/>
-          <a:lstStyle/>
-          <a:p>
-            <a:pPr algn="ctr" indent="0" marL="0">
-              <a:buNone/>
-            </a:pPr>
-            <a:r>
-              <a:rPr lang="en-US" sz="1400" dirty="0">
+              <a:t>goal · f=6</a:t>
+            </a:r>
+            <a:endParaRPr lang="en-US" sz="1050" dirty="0"/>
+          </a:p>
+        </p:txBody>
+      </p:sp>
+      <p:sp>
+        <p:nvSpPr>
+          <p:cNvPr id="15" name="Text 13"/>
+          <p:cNvSpPr/>
+          <p:nvPr/>
+        </p:nvSpPr>
+        <p:spPr>
+          <a:xfrm>
+            <a:off x="502920" y="2487168"/>
+            <a:ext cx="2011680" cy="274320"/>
+          </a:xfrm>
+          <a:prstGeom prst="rect">
+            <a:avLst/>
+          </a:prstGeom>
+          <a:noFill/>
+          <a:ln/>
+        </p:spPr>
+        <p:txBody>
+          <a:bodyPr wrap="square" lIns="0" tIns="0" rIns="0" bIns="0" rtlCol="0" anchor="ctr"/>
+          <a:lstStyle/>
+          <a:p>
+            <a:pPr indent="0" marL="0">
+              <a:buNone/>
+            </a:pPr>
+            <a:r>
+              <a:rPr lang="en-US" sz="1000" b="1" dirty="0">
+                <a:solidFill>
+                  <a:srgbClr val="D97706"/>
+                </a:solidFill>
+                <a:latin typeface="Courier New" pitchFamily="34" charset="0"/>
+                <a:ea typeface="Courier New" pitchFamily="34" charset="-122"/>
+                <a:cs typeface="Courier New" pitchFamily="34" charset="-120"/>
+              </a:rPr>
+              <a:t>full_ventilate  +4</a:t>
+            </a:r>
+            <a:endParaRPr lang="en-US" sz="1000" dirty="0"/>
+          </a:p>
+        </p:txBody>
+      </p:sp>
+      <p:sp>
+        <p:nvSpPr>
+          <p:cNvPr id="16" name="Text 14"/>
+          <p:cNvSpPr/>
+          <p:nvPr/>
+        </p:nvSpPr>
+        <p:spPr>
+          <a:xfrm>
+            <a:off x="3977640" y="2487168"/>
+            <a:ext cx="2103120" cy="274320"/>
+          </a:xfrm>
+          <a:prstGeom prst="rect">
+            <a:avLst/>
+          </a:prstGeom>
+          <a:noFill/>
+          <a:ln/>
+        </p:spPr>
+        <p:txBody>
+          <a:bodyPr wrap="square" lIns="0" tIns="0" rIns="0" bIns="0" rtlCol="0" anchor="ctr"/>
+          <a:lstStyle/>
+          <a:p>
+            <a:pPr indent="0" marL="0">
+              <a:buNone/>
+            </a:pPr>
+            <a:r>
+              <a:rPr lang="en-US" sz="1000" dirty="0">
                 <a:solidFill>
                   <a:srgbClr val="6B7280"/>
                 </a:solidFill>
-                <a:latin typeface="Calibri" pitchFamily="34" charset="0"/>
-                <a:ea typeface="Calibri" pitchFamily="34" charset="-122"/>
-                <a:cs typeface="Calibri" pitchFamily="34" charset="-120"/>
-              </a:rPr>
-              <a:t>→</a:t>
-            </a:r>
-            <a:endParaRPr lang="en-US" sz="1400" dirty="0"/>
-          </a:p>
-        </p:txBody>
-      </p:sp>
-      <p:sp>
-        <p:nvSpPr>
-          <p:cNvPr id="13" name="Shape 11"/>
-          <p:cNvSpPr/>
-          <p:nvPr/>
-        </p:nvSpPr>
-        <p:spPr>
-          <a:xfrm>
-            <a:off x="7635240" y="1463040"/>
-            <a:ext cx="2057400" cy="566928"/>
-          </a:xfrm>
-          <a:prstGeom prst="roundRect">
-            <a:avLst>
-              <a:gd name="adj" fmla="val 12903"/>
-            </a:avLst>
-          </a:prstGeom>
-          <a:solidFill>
-            <a:srgbClr val="FFFFFF"/>
-          </a:solidFill>
+                <a:latin typeface="Courier New" pitchFamily="34" charset="0"/>
+                <a:ea typeface="Courier New" pitchFamily="34" charset="-122"/>
+                <a:cs typeface="Courier New" pitchFamily="34" charset="-120"/>
+              </a:rPr>
+              <a:t>pulse_step  +3</a:t>
+            </a:r>
+            <a:endParaRPr lang="en-US" sz="1000" dirty="0"/>
+          </a:p>
+        </p:txBody>
+      </p:sp>
+      <p:sp>
+        <p:nvSpPr>
+          <p:cNvPr id="17" name="Text 15"/>
+          <p:cNvSpPr/>
+          <p:nvPr/>
+        </p:nvSpPr>
+        <p:spPr>
+          <a:xfrm>
+            <a:off x="5074920" y="3931920"/>
+            <a:ext cx="1371600" cy="274320"/>
+          </a:xfrm>
+          <a:prstGeom prst="rect">
+            <a:avLst/>
+          </a:prstGeom>
+          <a:noFill/>
+          <a:ln/>
+        </p:spPr>
+        <p:txBody>
+          <a:bodyPr wrap="square" lIns="0" tIns="0" rIns="0" bIns="0" rtlCol="0" anchor="ctr"/>
+          <a:lstStyle/>
+          <a:p>
+            <a:pPr indent="0" marL="0">
+              <a:buNone/>
+            </a:pPr>
+            <a:r>
+              <a:rPr lang="en-US" sz="1000" dirty="0">
+                <a:solidFill>
+                  <a:srgbClr val="6B7280"/>
+                </a:solidFill>
+                <a:latin typeface="Courier New" pitchFamily="34" charset="0"/>
+                <a:ea typeface="Courier New" pitchFamily="34" charset="-122"/>
+                <a:cs typeface="Courier New" pitchFamily="34" charset="-120"/>
+              </a:rPr>
+              <a:t>pulse  +3</a:t>
+            </a:r>
+            <a:endParaRPr lang="en-US" sz="1000" dirty="0"/>
+          </a:p>
+        </p:txBody>
+      </p:sp>
+      <p:sp>
+        <p:nvSpPr>
+          <p:cNvPr id="18" name="Text 16"/>
+          <p:cNvSpPr/>
+          <p:nvPr/>
+        </p:nvSpPr>
+        <p:spPr>
+          <a:xfrm>
+            <a:off x="640080" y="5440680"/>
+            <a:ext cx="5760720" cy="868680"/>
+          </a:xfrm>
+          <a:prstGeom prst="rect">
+            <a:avLst/>
+          </a:prstGeom>
+          <a:noFill/>
+          <a:ln/>
+        </p:spPr>
+        <p:txBody>
+          <a:bodyPr wrap="square" lIns="0" tIns="0" rIns="0" bIns="0" rtlCol="0" anchor="ctr"/>
+          <a:lstStyle/>
+          <a:p>
+            <a:pPr indent="0" marL="0">
+              <a:buNone/>
+            </a:pPr>
+            <a:r>
+              <a:rPr lang="en-US" sz="1200" dirty="0">
+                <a:solidFill>
+                  <a:srgbClr val="6B7280"/>
+                </a:solidFill>
+                <a:latin typeface="Calibri" pitchFamily="34" charset="0"/>
+                <a:ea typeface="Calibri" pitchFamily="34" charset="-122"/>
+                <a:cs typeface="Calibri" pitchFamily="34" charset="-120"/>
+              </a:rPr>
+              <a:t>A* expands the frontier by lowest f. The f=4 goal is reached before the f=6 branch, so [full_ventilate] is returned — guaranteed minimum cost.</a:t>
+            </a:r>
+            <a:endParaRPr lang="en-US" sz="1200" dirty="0"/>
+          </a:p>
+        </p:txBody>
+      </p:sp>
+      <p:sp>
+        <p:nvSpPr>
+          <p:cNvPr id="19" name="Shape 17"/>
+          <p:cNvSpPr/>
+          <p:nvPr/>
+        </p:nvSpPr>
+        <p:spPr>
+          <a:xfrm>
+            <a:off x="6720840" y="1554480"/>
+            <a:ext cx="0" cy="4023360"/>
+          </a:xfrm>
+          <a:prstGeom prst="line">
+            <a:avLst/>
+          </a:prstGeom>
+          <a:noFill/>
           <a:ln w="12700">
             <a:solidFill>
               <a:srgbClr val="E5E7EB"/>
@@ -11695,597 +12943,303 @@
       </p:sp>
       <p:sp>
         <p:nvSpPr>
-          <p:cNvPr id="14" name="Text 12"/>
-          <p:cNvSpPr/>
-          <p:nvPr/>
-        </p:nvSpPr>
-        <p:spPr>
-          <a:xfrm>
-            <a:off x="7690104" y="1517904"/>
-            <a:ext cx="1947672" cy="457200"/>
-          </a:xfrm>
-          <a:prstGeom prst="rect">
-            <a:avLst/>
-          </a:prstGeom>
-          <a:noFill/>
-          <a:ln/>
-        </p:spPr>
-        <p:txBody>
-          <a:bodyPr wrap="square" lIns="0" tIns="0" rIns="0" bIns="0" rtlCol="0" anchor="ctr"/>
-          <a:lstStyle/>
-          <a:p>
-            <a:pPr algn="ctr" indent="0" marL="0">
-              <a:buNone/>
-            </a:pPr>
-            <a:r>
-              <a:rPr lang="en-US" sz="950" dirty="0">
+          <p:cNvPr id="20" name="Text 18"/>
+          <p:cNvSpPr/>
+          <p:nvPr/>
+        </p:nvSpPr>
+        <p:spPr>
+          <a:xfrm>
+            <a:off x="6949440" y="1554480"/>
+            <a:ext cx="4572000" cy="365760"/>
+          </a:xfrm>
+          <a:prstGeom prst="rect">
+            <a:avLst/>
+          </a:prstGeom>
+          <a:noFill/>
+          <a:ln/>
+        </p:spPr>
+        <p:txBody>
+          <a:bodyPr wrap="square" lIns="0" tIns="0" rIns="0" bIns="0" rtlCol="0" anchor="ctr"/>
+          <a:lstStyle/>
+          <a:p>
+            <a:pPr indent="0" marL="0">
+              <a:buNone/>
+            </a:pPr>
+            <a:r>
+              <a:rPr lang="en-US" sz="1500" b="1" dirty="0">
                 <a:solidFill>
                   <a:srgbClr val="111827"/>
+                </a:solidFill>
+                <a:latin typeface="Cambria" pitchFamily="34" charset="0"/>
+                <a:ea typeface="Cambria" pitchFamily="34" charset="-122"/>
+                <a:cs typeface="Cambria" pitchFamily="34" charset="-120"/>
+              </a:rPr>
+              <a:t>A*  ·  best-first search</a:t>
+            </a:r>
+            <a:endParaRPr lang="en-US" sz="1500" dirty="0"/>
+          </a:p>
+        </p:txBody>
+      </p:sp>
+      <p:sp>
+        <p:nvSpPr>
+          <p:cNvPr id="21" name="Text 19"/>
+          <p:cNvSpPr/>
+          <p:nvPr/>
+        </p:nvSpPr>
+        <p:spPr>
+          <a:xfrm>
+            <a:off x="6949440" y="1938528"/>
+            <a:ext cx="4617720" cy="914400"/>
+          </a:xfrm>
+          <a:prstGeom prst="rect">
+            <a:avLst/>
+          </a:prstGeom>
+          <a:noFill/>
+          <a:ln/>
+        </p:spPr>
+        <p:txBody>
+          <a:bodyPr wrap="square" lIns="0" tIns="0" rIns="0" bIns="0" rtlCol="0" anchor="ctr"/>
+          <a:lstStyle/>
+          <a:p>
+            <a:pPr indent="0" marL="0">
+              <a:lnSpc>
+                <a:spcPct val="120000"/>
+              </a:lnSpc>
+              <a:buNone/>
+            </a:pPr>
+            <a:r>
+              <a:rPr lang="en-US" sz="1250" dirty="0">
+                <a:solidFill>
+                  <a:srgbClr val="6B7280"/>
+                </a:solidFill>
+                <a:latin typeface="Calibri" pitchFamily="34" charset="0"/>
+                <a:ea typeface="Calibri" pitchFamily="34" charset="-122"/>
+                <a:cs typeface="Calibri" pitchFamily="34" charset="-120"/>
+              </a:rPr>
+              <a:t>Expands states in order of  f = g + h</a:t>
+            </a:r>
+            <a:endParaRPr lang="en-US" sz="1250" dirty="0"/>
+          </a:p>
+          <a:p>
+            <a:pPr indent="0" marL="0">
+              <a:lnSpc>
+                <a:spcPct val="120000"/>
+              </a:lnSpc>
+              <a:buNone/>
+            </a:pPr>
+            <a:r>
+              <a:rPr lang="en-US" sz="1250" dirty="0">
+                <a:solidFill>
+                  <a:srgbClr val="6B7280"/>
+                </a:solidFill>
+                <a:latin typeface="Calibri" pitchFamily="34" charset="0"/>
+                <a:ea typeface="Calibri" pitchFamily="34" charset="-122"/>
+                <a:cs typeface="Calibri" pitchFamily="34" charset="-120"/>
+              </a:rPr>
+              <a:t> g = cost of the plan so far</a:t>
+            </a:r>
+            <a:endParaRPr lang="en-US" sz="1250" dirty="0"/>
+          </a:p>
+          <a:p>
+            <a:pPr indent="0" marL="0">
+              <a:lnSpc>
+                <a:spcPct val="120000"/>
+              </a:lnSpc>
+              <a:buNone/>
+            </a:pPr>
+            <a:r>
+              <a:rPr lang="en-US" sz="1250" dirty="0">
+                <a:solidFill>
+                  <a:srgbClr val="6B7280"/>
+                </a:solidFill>
+                <a:latin typeface="Calibri" pitchFamily="34" charset="0"/>
+                <a:ea typeface="Calibri" pitchFamily="34" charset="-122"/>
+                <a:cs typeface="Calibri" pitchFamily="34" charset="-120"/>
+              </a:rPr>
+              <a:t> h = LM-Cut estimate of the cost still to go</a:t>
+            </a:r>
+            <a:endParaRPr lang="en-US" sz="1250" dirty="0"/>
+          </a:p>
+        </p:txBody>
+      </p:sp>
+      <p:sp>
+        <p:nvSpPr>
+          <p:cNvPr id="22" name="Text 20"/>
+          <p:cNvSpPr/>
+          <p:nvPr/>
+        </p:nvSpPr>
+        <p:spPr>
+          <a:xfrm>
+            <a:off x="6949440" y="3063240"/>
+            <a:ext cx="4572000" cy="365760"/>
+          </a:xfrm>
+          <a:prstGeom prst="rect">
+            <a:avLst/>
+          </a:prstGeom>
+          <a:noFill/>
+          <a:ln/>
+        </p:spPr>
+        <p:txBody>
+          <a:bodyPr wrap="square" lIns="0" tIns="0" rIns="0" bIns="0" rtlCol="0" anchor="ctr"/>
+          <a:lstStyle/>
+          <a:p>
+            <a:pPr indent="0" marL="0">
+              <a:buNone/>
+            </a:pPr>
+            <a:r>
+              <a:rPr lang="en-US" sz="1500" b="1" dirty="0">
+                <a:solidFill>
+                  <a:srgbClr val="111827"/>
+                </a:solidFill>
+                <a:latin typeface="Cambria" pitchFamily="34" charset="0"/>
+                <a:ea typeface="Cambria" pitchFamily="34" charset="-122"/>
+                <a:cs typeface="Cambria" pitchFamily="34" charset="-120"/>
+              </a:rPr>
+              <a:t>LM-Cut  ·  admissible heuristic</a:t>
+            </a:r>
+            <a:endParaRPr lang="en-US" sz="1500" dirty="0"/>
+          </a:p>
+        </p:txBody>
+      </p:sp>
+      <p:sp>
+        <p:nvSpPr>
+          <p:cNvPr id="23" name="Text 21"/>
+          <p:cNvSpPr/>
+          <p:nvPr/>
+        </p:nvSpPr>
+        <p:spPr>
+          <a:xfrm>
+            <a:off x="6949440" y="3447288"/>
+            <a:ext cx="4617720" cy="914400"/>
+          </a:xfrm>
+          <a:prstGeom prst="rect">
+            <a:avLst/>
+          </a:prstGeom>
+          <a:noFill/>
+          <a:ln/>
+        </p:spPr>
+        <p:txBody>
+          <a:bodyPr wrap="square" lIns="0" tIns="0" rIns="0" bIns="0" rtlCol="0" anchor="ctr"/>
+          <a:lstStyle/>
+          <a:p>
+            <a:pPr indent="0" marL="0">
+              <a:lnSpc>
+                <a:spcPct val="120000"/>
+              </a:lnSpc>
+              <a:buNone/>
+            </a:pPr>
+            <a:r>
+              <a:rPr lang="en-US" sz="1250" dirty="0">
+                <a:solidFill>
+                  <a:srgbClr val="6B7280"/>
+                </a:solidFill>
+                <a:latin typeface="Calibri" pitchFamily="34" charset="0"/>
+                <a:ea typeface="Calibri" pitchFamily="34" charset="-122"/>
+                <a:cs typeface="Calibri" pitchFamily="34" charset="-120"/>
+              </a:rPr>
+              <a:t>Finds landmarks — action sets every plan must use — and sums their cheapest action. This lower bound never overestimates the real cost.</a:t>
+            </a:r>
+            <a:endParaRPr lang="en-US" sz="1250" dirty="0"/>
+          </a:p>
+        </p:txBody>
+      </p:sp>
+      <p:sp>
+        <p:nvSpPr>
+          <p:cNvPr id="24" name="Shape 22"/>
+          <p:cNvSpPr/>
+          <p:nvPr/>
+        </p:nvSpPr>
+        <p:spPr>
+          <a:xfrm>
+            <a:off x="6949440" y="4526280"/>
+            <a:ext cx="4617720" cy="868680"/>
+          </a:xfrm>
+          <a:prstGeom prst="roundRect">
+            <a:avLst>
+              <a:gd name="adj" fmla="val 8421"/>
+            </a:avLst>
+          </a:prstGeom>
+          <a:solidFill>
+            <a:srgbClr val="FBEFD9"/>
+          </a:solidFill>
+          <a:ln/>
+        </p:spPr>
+      </p:sp>
+      <p:sp>
+        <p:nvSpPr>
+          <p:cNvPr id="25" name="Text 23"/>
+          <p:cNvSpPr/>
+          <p:nvPr/>
+        </p:nvSpPr>
+        <p:spPr>
+          <a:xfrm>
+            <a:off x="7132320" y="4617720"/>
+            <a:ext cx="4251960" cy="685800"/>
+          </a:xfrm>
+          <a:prstGeom prst="rect">
+            <a:avLst/>
+          </a:prstGeom>
+          <a:noFill/>
+          <a:ln/>
+        </p:spPr>
+        <p:txBody>
+          <a:bodyPr wrap="square" lIns="0" tIns="0" rIns="0" bIns="0" rtlCol="0" anchor="ctr"/>
+          <a:lstStyle/>
+          <a:p>
+            <a:pPr indent="0" marL="0">
+              <a:buNone/>
+            </a:pPr>
+            <a:r>
+              <a:rPr lang="en-US" sz="1250" b="1" dirty="0">
+                <a:solidFill>
+                  <a:srgbClr val="111827"/>
+                </a:solidFill>
+                <a:latin typeface="Calibri" pitchFamily="34" charset="0"/>
+                <a:ea typeface="Calibri" pitchFamily="34" charset="-122"/>
+                <a:cs typeface="Calibri" pitchFamily="34" charset="-120"/>
+              </a:rPr>
+              <a:t>Because h never overestimates, the first goal A* reaches is provably minimum-cost — optimal, not just feasible.</a:t>
+            </a:r>
+            <a:endParaRPr lang="en-US" sz="1250" dirty="0"/>
+          </a:p>
+        </p:txBody>
+      </p:sp>
+      <p:sp>
+        <p:nvSpPr>
+          <p:cNvPr id="26" name="Text 24"/>
+          <p:cNvSpPr/>
+          <p:nvPr/>
+        </p:nvSpPr>
+        <p:spPr>
+          <a:xfrm>
+            <a:off x="6949440" y="5532120"/>
+            <a:ext cx="4617720" cy="320040"/>
+          </a:xfrm>
+          <a:prstGeom prst="rect">
+            <a:avLst/>
+          </a:prstGeom>
+          <a:noFill/>
+          <a:ln/>
+        </p:spPr>
+        <p:txBody>
+          <a:bodyPr wrap="square" lIns="0" tIns="0" rIns="0" bIns="0" rtlCol="0" anchor="ctr"/>
+          <a:lstStyle/>
+          <a:p>
+            <a:pPr indent="0" marL="0">
+              <a:buNone/>
+            </a:pPr>
+            <a:r>
+              <a:rPr lang="en-US" sz="1150" dirty="0">
+                <a:solidFill>
+                  <a:srgbClr val="D97706"/>
                 </a:solidFill>
                 <a:latin typeface="Courier New" pitchFamily="34" charset="0"/>
                 <a:ea typeface="Courier New" pitchFamily="34" charset="-122"/>
                 <a:cs typeface="Courier New" pitchFamily="34" charset="-120"/>
               </a:rPr>
-              <a:t>Fast Downward astar(lmcut())</a:t>
-            </a:r>
-            <a:endParaRPr lang="en-US" sz="950" dirty="0"/>
-          </a:p>
-        </p:txBody>
-      </p:sp>
-      <p:sp>
-        <p:nvSpPr>
-          <p:cNvPr id="15" name="Text 13"/>
-          <p:cNvSpPr/>
-          <p:nvPr/>
-        </p:nvSpPr>
-        <p:spPr>
-          <a:xfrm>
-            <a:off x="9692640" y="1536192"/>
-            <a:ext cx="292608" cy="411480"/>
-          </a:xfrm>
-          <a:prstGeom prst="rect">
-            <a:avLst/>
-          </a:prstGeom>
-          <a:noFill/>
-          <a:ln/>
-        </p:spPr>
-        <p:txBody>
-          <a:bodyPr wrap="square" lIns="0" tIns="0" rIns="0" bIns="0" rtlCol="0" anchor="ctr"/>
-          <a:lstStyle/>
-          <a:p>
-            <a:pPr algn="ctr" indent="0" marL="0">
-              <a:buNone/>
-            </a:pPr>
-            <a:r>
-              <a:rPr lang="en-US" sz="1400" dirty="0">
-                <a:solidFill>
-                  <a:srgbClr val="6B7280"/>
-                </a:solidFill>
-                <a:latin typeface="Calibri" pitchFamily="34" charset="0"/>
-                <a:ea typeface="Calibri" pitchFamily="34" charset="-122"/>
-                <a:cs typeface="Calibri" pitchFamily="34" charset="-120"/>
-              </a:rPr>
-              <a:t>→</a:t>
-            </a:r>
-            <a:endParaRPr lang="en-US" sz="1400" dirty="0"/>
-          </a:p>
-        </p:txBody>
-      </p:sp>
-      <p:sp>
-        <p:nvSpPr>
-          <p:cNvPr id="16" name="Shape 14"/>
-          <p:cNvSpPr/>
-          <p:nvPr/>
-        </p:nvSpPr>
-        <p:spPr>
-          <a:xfrm>
-            <a:off x="9966960" y="1463040"/>
-            <a:ext cx="2057400" cy="566928"/>
-          </a:xfrm>
-          <a:prstGeom prst="roundRect">
-            <a:avLst>
-              <a:gd name="adj" fmla="val 12903"/>
-            </a:avLst>
-          </a:prstGeom>
-          <a:solidFill>
-            <a:srgbClr val="FFFFFF"/>
-          </a:solidFill>
-          <a:ln w="12700">
-            <a:solidFill>
-              <a:srgbClr val="E5E7EB"/>
-            </a:solidFill>
-            <a:prstDash val="solid"/>
-          </a:ln>
-        </p:spPr>
-      </p:sp>
-      <p:sp>
-        <p:nvSpPr>
-          <p:cNvPr id="17" name="Text 15"/>
-          <p:cNvSpPr/>
-          <p:nvPr/>
-        </p:nvSpPr>
-        <p:spPr>
-          <a:xfrm>
-            <a:off x="10021824" y="1517904"/>
-            <a:ext cx="1947672" cy="457200"/>
-          </a:xfrm>
-          <a:prstGeom prst="rect">
-            <a:avLst/>
-          </a:prstGeom>
-          <a:noFill/>
-          <a:ln/>
-        </p:spPr>
-        <p:txBody>
-          <a:bodyPr wrap="square" lIns="0" tIns="0" rIns="0" bIns="0" rtlCol="0" anchor="ctr"/>
-          <a:lstStyle/>
-          <a:p>
-            <a:pPr algn="ctr" indent="0" marL="0">
-              <a:buNone/>
-            </a:pPr>
-            <a:r>
-              <a:rPr lang="en-US" sz="950" dirty="0">
-                <a:solidFill>
-                  <a:srgbClr val="111827"/>
-                </a:solidFill>
-                <a:latin typeface="Courier New" pitchFamily="34" charset="0"/>
-                <a:ea typeface="Courier New" pitchFamily="34" charset="-122"/>
-                <a:cs typeface="Courier New" pitchFamily="34" charset="-120"/>
-              </a:rPr>
-              <a:t>library/plan</a:t>
-            </a:r>
-            <a:endParaRPr lang="en-US" sz="950" dirty="0"/>
-          </a:p>
-        </p:txBody>
-      </p:sp>
-      <p:sp>
-        <p:nvSpPr>
-          <p:cNvPr id="18" name="Text 16"/>
-          <p:cNvSpPr/>
-          <p:nvPr/>
-        </p:nvSpPr>
-        <p:spPr>
-          <a:xfrm>
-            <a:off x="640080" y="2240280"/>
-            <a:ext cx="10881360" cy="548640"/>
-          </a:xfrm>
-          <a:prstGeom prst="rect">
-            <a:avLst/>
-          </a:prstGeom>
-          <a:noFill/>
-          <a:ln/>
-        </p:spPr>
-        <p:txBody>
-          <a:bodyPr wrap="square" lIns="0" tIns="0" rIns="0" bIns="0" rtlCol="0" anchor="ctr"/>
-          <a:lstStyle/>
-          <a:p>
-            <a:pPr indent="0" marL="0">
-              <a:buNone/>
-            </a:pPr>
-            <a:r>
-              <a:rPr lang="en-US" sz="1200" dirty="0">
-                <a:solidFill>
-                  <a:srgbClr val="6B7280"/>
-                </a:solidFill>
-                <a:latin typeface="Calibri" pitchFamily="34" charset="0"/>
-                <a:ea typeface="Calibri" pitchFamily="34" charset="-122"/>
-                <a:cs typeface="Calibri" pitchFamily="34" charset="-120"/>
-              </a:rPr>
-              <a:t>Generated whenever the discretised state or the costs change, plus a 30 s heartbeat. Only achievable goals are emitted, so every instance is solvable; an empty goal set skips the planner entirely.</a:t>
-            </a:r>
-            <a:endParaRPr lang="en-US" sz="1200" dirty="0"/>
-          </a:p>
-        </p:txBody>
-      </p:sp>
-      <p:sp>
-        <p:nvSpPr>
-          <p:cNvPr id="19" name="Text 17"/>
-          <p:cNvSpPr/>
-          <p:nvPr/>
-        </p:nvSpPr>
-        <p:spPr>
-          <a:xfrm>
-            <a:off x="640080" y="3063240"/>
-            <a:ext cx="10881360" cy="411480"/>
-          </a:xfrm>
-          <a:prstGeom prst="rect">
-            <a:avLst/>
-          </a:prstGeom>
-          <a:noFill/>
-          <a:ln/>
-        </p:spPr>
-        <p:txBody>
-          <a:bodyPr wrap="square" lIns="0" tIns="0" rIns="0" bIns="0" rtlCol="0" anchor="ctr"/>
-          <a:lstStyle/>
-          <a:p>
-            <a:pPr indent="0" marL="0">
-              <a:buNone/>
-            </a:pPr>
-            <a:r>
-              <a:rPr lang="en-US" sz="1700" b="1" dirty="0">
-                <a:solidFill>
-                  <a:srgbClr val="111827"/>
-                </a:solidFill>
-                <a:latin typeface="Cambria" pitchFamily="34" charset="0"/>
-                <a:ea typeface="Cambria" pitchFamily="34" charset="-122"/>
-                <a:cs typeface="Cambria" pitchFamily="34" charset="-120"/>
-              </a:rPr>
-              <a:t>Same state (occupied, CO₂ high), different weather:</a:t>
-            </a:r>
-            <a:endParaRPr lang="en-US" sz="1700" dirty="0"/>
-          </a:p>
-        </p:txBody>
-      </p:sp>
-      <p:sp>
-        <p:nvSpPr>
-          <p:cNvPr id="20" name="Text 18"/>
-          <p:cNvSpPr/>
-          <p:nvPr/>
-        </p:nvSpPr>
-        <p:spPr>
-          <a:xfrm>
-            <a:off x="640080" y="3611880"/>
-            <a:ext cx="5212080" cy="365760"/>
-          </a:xfrm>
-          <a:prstGeom prst="rect">
-            <a:avLst/>
-          </a:prstGeom>
-          <a:noFill/>
-          <a:ln/>
-        </p:spPr>
-        <p:txBody>
-          <a:bodyPr wrap="square" lIns="0" tIns="0" rIns="0" bIns="0" rtlCol="0" anchor="ctr"/>
-          <a:lstStyle/>
-          <a:p>
-            <a:pPr indent="0" marL="0">
-              <a:buNone/>
-            </a:pPr>
-            <a:r>
-              <a:rPr lang="en-US" sz="1600" b="1" dirty="0">
-                <a:solidFill>
-                  <a:srgbClr val="1D4ED8"/>
-                </a:solidFill>
-                <a:latin typeface="Cambria" pitchFamily="34" charset="0"/>
-                <a:ea typeface="Cambria" pitchFamily="34" charset="-122"/>
-                <a:cs typeface="Cambria" pitchFamily="34" charset="-120"/>
-              </a:rPr>
-              <a:t>5 °C outside</a:t>
-            </a:r>
-            <a:endParaRPr lang="en-US" sz="1600" dirty="0"/>
-          </a:p>
-        </p:txBody>
-      </p:sp>
-      <p:sp>
-        <p:nvSpPr>
-          <p:cNvPr id="21" name="Text 19"/>
-          <p:cNvSpPr/>
-          <p:nvPr/>
-        </p:nvSpPr>
-        <p:spPr>
-          <a:xfrm>
-            <a:off x="640080" y="4005072"/>
-            <a:ext cx="5212080" cy="320040"/>
-          </a:xfrm>
-          <a:prstGeom prst="rect">
-            <a:avLst/>
-          </a:prstGeom>
-          <a:noFill/>
-          <a:ln/>
-        </p:spPr>
-        <p:txBody>
-          <a:bodyPr wrap="square" lIns="0" tIns="0" rIns="0" bIns="0" rtlCol="0" anchor="ctr"/>
-          <a:lstStyle/>
-          <a:p>
-            <a:pPr indent="0" marL="0">
-              <a:buNone/>
-            </a:pPr>
-            <a:r>
-              <a:rPr lang="en-US" sz="1200" dirty="0">
-                <a:solidFill>
-                  <a:srgbClr val="6B7280"/>
-                </a:solidFill>
-                <a:latin typeface="Courier New" pitchFamily="34" charset="0"/>
-                <a:ea typeface="Courier New" pitchFamily="34" charset="-122"/>
-                <a:cs typeface="Courier New" pitchFamily="34" charset="-120"/>
-              </a:rPr>
-              <a:t>pulse 3 · full 12</a:t>
-            </a:r>
-            <a:endParaRPr lang="en-US" sz="1200" dirty="0"/>
-          </a:p>
-        </p:txBody>
-      </p:sp>
-      <p:sp>
-        <p:nvSpPr>
-          <p:cNvPr id="22" name="Text 20"/>
-          <p:cNvSpPr/>
-          <p:nvPr/>
-        </p:nvSpPr>
-        <p:spPr>
-          <a:xfrm>
-            <a:off x="640080" y="4370832"/>
-            <a:ext cx="5349240" cy="365760"/>
-          </a:xfrm>
-          <a:prstGeom prst="rect">
-            <a:avLst/>
-          </a:prstGeom>
-          <a:noFill/>
-          <a:ln/>
-        </p:spPr>
-        <p:txBody>
-          <a:bodyPr wrap="square" lIns="0" tIns="0" rIns="0" bIns="0" rtlCol="0" anchor="ctr"/>
-          <a:lstStyle/>
-          <a:p>
-            <a:pPr indent="0" marL="0">
-              <a:buNone/>
-            </a:pPr>
-            <a:r>
-              <a:rPr lang="en-US" sz="1350" b="1" dirty="0">
-                <a:solidFill>
-                  <a:srgbClr val="111827"/>
-                </a:solidFill>
-                <a:latin typeface="Courier New" pitchFamily="34" charset="0"/>
-                <a:ea typeface="Courier New" pitchFamily="34" charset="-122"/>
-                <a:cs typeface="Courier New" pitchFamily="34" charset="-120"/>
-              </a:rPr>
-              <a:t>[pulse_ventilate_step, pulse_ventilate]</a:t>
-            </a:r>
-            <a:endParaRPr lang="en-US" sz="1350" dirty="0"/>
-          </a:p>
-        </p:txBody>
-      </p:sp>
-      <p:sp>
-        <p:nvSpPr>
-          <p:cNvPr id="23" name="Text 21"/>
-          <p:cNvSpPr/>
-          <p:nvPr/>
-        </p:nvSpPr>
-        <p:spPr>
-          <a:xfrm>
-            <a:off x="640080" y="4800600"/>
-            <a:ext cx="5212080" cy="548640"/>
-          </a:xfrm>
-          <a:prstGeom prst="rect">
-            <a:avLst/>
-          </a:prstGeom>
-          <a:noFill/>
-          <a:ln/>
-        </p:spPr>
-        <p:txBody>
-          <a:bodyPr wrap="square" lIns="0" tIns="0" rIns="0" bIns="0" rtlCol="0" anchor="ctr"/>
-          <a:lstStyle/>
-          <a:p>
-            <a:pPr indent="0" marL="0">
-              <a:buNone/>
-            </a:pPr>
-            <a:r>
-              <a:rPr lang="en-US" sz="1200" dirty="0">
-                <a:solidFill>
-                  <a:srgbClr val="6B7280"/>
-                </a:solidFill>
-                <a:latin typeface="Calibri" pitchFamily="34" charset="0"/>
-                <a:ea typeface="Calibri" pitchFamily="34" charset="-122"/>
-                <a:cs typeface="Calibri" pitchFamily="34" charset="-120"/>
-              </a:rPr>
-              <a:t>total cost 6, beats 12 · winter airing: two short pulses, heat stays inside</a:t>
-            </a:r>
-            <a:endParaRPr lang="en-US" sz="1200" dirty="0"/>
-          </a:p>
-        </p:txBody>
-      </p:sp>
-      <p:sp>
-        <p:nvSpPr>
-          <p:cNvPr id="24" name="Text 22"/>
-          <p:cNvSpPr/>
-          <p:nvPr/>
-        </p:nvSpPr>
-        <p:spPr>
-          <a:xfrm>
-            <a:off x="6263640" y="3611880"/>
-            <a:ext cx="5212080" cy="365760"/>
-          </a:xfrm>
-          <a:prstGeom prst="rect">
-            <a:avLst/>
-          </a:prstGeom>
-          <a:noFill/>
-          <a:ln/>
-        </p:spPr>
-        <p:txBody>
-          <a:bodyPr wrap="square" lIns="0" tIns="0" rIns="0" bIns="0" rtlCol="0" anchor="ctr"/>
-          <a:lstStyle/>
-          <a:p>
-            <a:pPr indent="0" marL="0">
-              <a:buNone/>
-            </a:pPr>
-            <a:r>
-              <a:rPr lang="en-US" sz="1600" b="1" dirty="0">
-                <a:solidFill>
-                  <a:srgbClr val="B91C1C"/>
-                </a:solidFill>
-                <a:latin typeface="Cambria" pitchFamily="34" charset="0"/>
-                <a:ea typeface="Cambria" pitchFamily="34" charset="-122"/>
-                <a:cs typeface="Cambria" pitchFamily="34" charset="-120"/>
-              </a:rPr>
-              <a:t>29 °C outside</a:t>
-            </a:r>
-            <a:endParaRPr lang="en-US" sz="1600" dirty="0"/>
-          </a:p>
-        </p:txBody>
-      </p:sp>
-      <p:sp>
-        <p:nvSpPr>
-          <p:cNvPr id="25" name="Text 23"/>
-          <p:cNvSpPr/>
-          <p:nvPr/>
-        </p:nvSpPr>
-        <p:spPr>
-          <a:xfrm>
-            <a:off x="6263640" y="4005072"/>
-            <a:ext cx="5212080" cy="320040"/>
-          </a:xfrm>
-          <a:prstGeom prst="rect">
-            <a:avLst/>
-          </a:prstGeom>
-          <a:noFill/>
-          <a:ln/>
-        </p:spPr>
-        <p:txBody>
-          <a:bodyPr wrap="square" lIns="0" tIns="0" rIns="0" bIns="0" rtlCol="0" anchor="ctr"/>
-          <a:lstStyle/>
-          <a:p>
-            <a:pPr indent="0" marL="0">
-              <a:buNone/>
-            </a:pPr>
-            <a:r>
-              <a:rPr lang="en-US" sz="1200" dirty="0">
-                <a:solidFill>
-                  <a:srgbClr val="6B7280"/>
-                </a:solidFill>
-                <a:latin typeface="Courier New" pitchFamily="34" charset="0"/>
-                <a:ea typeface="Courier New" pitchFamily="34" charset="-122"/>
-                <a:cs typeface="Courier New" pitchFamily="34" charset="-120"/>
-              </a:rPr>
-              <a:t>pulse 3 · full 4</a:t>
-            </a:r>
-            <a:endParaRPr lang="en-US" sz="1200" dirty="0"/>
-          </a:p>
-        </p:txBody>
-      </p:sp>
-      <p:sp>
-        <p:nvSpPr>
-          <p:cNvPr id="26" name="Text 24"/>
-          <p:cNvSpPr/>
-          <p:nvPr/>
-        </p:nvSpPr>
-        <p:spPr>
-          <a:xfrm>
-            <a:off x="6263640" y="4370832"/>
-            <a:ext cx="5349240" cy="365760"/>
-          </a:xfrm>
-          <a:prstGeom prst="rect">
-            <a:avLst/>
-          </a:prstGeom>
-          <a:noFill/>
-          <a:ln/>
-        </p:spPr>
-        <p:txBody>
-          <a:bodyPr wrap="square" lIns="0" tIns="0" rIns="0" bIns="0" rtlCol="0" anchor="ctr"/>
-          <a:lstStyle/>
-          <a:p>
-            <a:pPr indent="0" marL="0">
-              <a:buNone/>
-            </a:pPr>
-            <a:r>
-              <a:rPr lang="en-US" sz="1350" b="1" dirty="0">
-                <a:solidFill>
-                  <a:srgbClr val="111827"/>
-                </a:solidFill>
-                <a:latin typeface="Courier New" pitchFamily="34" charset="0"/>
-                <a:ea typeface="Courier New" pitchFamily="34" charset="-122"/>
-                <a:cs typeface="Courier New" pitchFamily="34" charset="-120"/>
-              </a:rPr>
-              <a:t>[full_ventilate]</a:t>
-            </a:r>
-            <a:endParaRPr lang="en-US" sz="1350" dirty="0"/>
-          </a:p>
-        </p:txBody>
-      </p:sp>
-      <p:sp>
-        <p:nvSpPr>
-          <p:cNvPr id="27" name="Text 25"/>
-          <p:cNvSpPr/>
-          <p:nvPr/>
-        </p:nvSpPr>
-        <p:spPr>
-          <a:xfrm>
-            <a:off x="6263640" y="4800600"/>
-            <a:ext cx="5212080" cy="548640"/>
-          </a:xfrm>
-          <a:prstGeom prst="rect">
-            <a:avLst/>
-          </a:prstGeom>
-          <a:noFill/>
-          <a:ln/>
-        </p:spPr>
-        <p:txBody>
-          <a:bodyPr wrap="square" lIns="0" tIns="0" rIns="0" bIns="0" rtlCol="0" anchor="ctr"/>
-          <a:lstStyle/>
-          <a:p>
-            <a:pPr indent="0" marL="0">
-              <a:buNone/>
-            </a:pPr>
-            <a:r>
-              <a:rPr lang="en-US" sz="1200" dirty="0">
-                <a:solidFill>
-                  <a:srgbClr val="6B7280"/>
-                </a:solidFill>
-                <a:latin typeface="Calibri" pitchFamily="34" charset="0"/>
-                <a:ea typeface="Calibri" pitchFamily="34" charset="-122"/>
-                <a:cs typeface="Calibri" pitchFamily="34" charset="-120"/>
-              </a:rPr>
-              <a:t>total cost 4, beats 6 · summer airing: one long opening clears the air fastest</a:t>
-            </a:r>
-            <a:endParaRPr lang="en-US" sz="1200" dirty="0"/>
-          </a:p>
-        </p:txBody>
-      </p:sp>
-      <p:sp>
-        <p:nvSpPr>
-          <p:cNvPr id="28" name="Shape 26"/>
-          <p:cNvSpPr/>
-          <p:nvPr/>
-        </p:nvSpPr>
-        <p:spPr>
-          <a:xfrm>
-            <a:off x="640080" y="5623560"/>
-            <a:ext cx="10881360" cy="0"/>
-          </a:xfrm>
-          <a:prstGeom prst="line">
-            <a:avLst/>
-          </a:prstGeom>
-          <a:noFill/>
-          <a:ln w="9525">
-            <a:solidFill>
-              <a:srgbClr val="E5E7EB"/>
-            </a:solidFill>
-            <a:prstDash val="solid"/>
-          </a:ln>
-        </p:spPr>
-      </p:sp>
-      <p:sp>
-        <p:nvSpPr>
-          <p:cNvPr id="29" name="Text 27"/>
-          <p:cNvSpPr/>
-          <p:nvPr/>
-        </p:nvSpPr>
-        <p:spPr>
-          <a:xfrm>
-            <a:off x="640080" y="5806440"/>
-            <a:ext cx="10881360" cy="548640"/>
-          </a:xfrm>
-          <a:prstGeom prst="rect">
-            <a:avLst/>
-          </a:prstGeom>
-          <a:noFill/>
-          <a:ln/>
-        </p:spPr>
-        <p:txBody>
-          <a:bodyPr wrap="square" lIns="0" tIns="0" rIns="0" bIns="0" rtlCol="0" anchor="ctr"/>
-          <a:lstStyle/>
-          <a:p>
-            <a:pPr indent="0" marL="0">
-              <a:buNone/>
-            </a:pPr>
-            <a:r>
-              <a:rPr lang="en-US" sz="1350" dirty="0">
-                <a:solidFill>
-                  <a:srgbClr val="6B7280"/>
-                </a:solidFill>
-                <a:latin typeface="Calibri" pitchFamily="34" charset="0"/>
-                <a:ea typeface="Calibri" pitchFamily="34" charset="-122"/>
-                <a:cs typeface="Calibri" pitchFamily="34" charset="-120"/>
-              </a:rPr>
-              <a:t>LM-Cut is admissible, so A* returns minimal-cost plans. The winter strategy is not hard-coded; it results from the weather-dependent action costs.</a:t>
-            </a:r>
-            <a:endParaRPr lang="en-US" sz="1350" dirty="0"/>
+              <a:t>~130 ms end to end · pure search &lt; 2 ms on the Pi 5</a:t>
+            </a:r>
+            <a:endParaRPr lang="en-US" sz="1150" dirty="0"/>
           </a:p>
         </p:txBody>
       </p:sp>
@@ -12354,7 +13308,7 @@
                 <a:ea typeface="Calibri" pitchFamily="34" charset="-122"/>
                 <a:cs typeface="Calibri" pitchFamily="34" charset="-120"/>
               </a:rPr>
-              <a:t>LIVE</a:t>
+              <a:t>AI PLANNING · ADAPTING TO COST</a:t>
             </a:r>
             <a:endParaRPr lang="en-US" sz="1100" dirty="0"/>
           </a:p>
@@ -12393,7 +13347,7 @@
                 <a:ea typeface="Cambria" pitchFamily="34" charset="-122"/>
                 <a:cs typeface="Cambria" pitchFamily="34" charset="-120"/>
               </a:rPr>
-              <a:t>Live demo procedure</a:t>
+              <a:t>Same state, different weather, different plan</a:t>
             </a:r>
             <a:endParaRPr lang="en-US" sz="3000" dirty="0"/>
           </a:p>
@@ -12407,71 +13361,98 @@
         </p:nvSpPr>
         <p:spPr>
           <a:xfrm>
-            <a:off x="640080" y="1664208"/>
-            <a:ext cx="502920" cy="502920"/>
-          </a:xfrm>
-          <a:prstGeom prst="rect">
-            <a:avLst/>
-          </a:prstGeom>
-          <a:noFill/>
-          <a:ln/>
-        </p:spPr>
-        <p:txBody>
-          <a:bodyPr wrap="square" lIns="0" tIns="0" rIns="0" bIns="0" rtlCol="0" anchor="ctr"/>
-          <a:lstStyle/>
-          <a:p>
-            <a:pPr indent="0" marL="0">
-              <a:buNone/>
-            </a:pPr>
-            <a:r>
-              <a:rPr lang="en-US" sz="2600" b="1" dirty="0">
-                <a:solidFill>
-                  <a:srgbClr val="D97706"/>
+            <a:off x="640080" y="1481328"/>
+            <a:ext cx="10881360" cy="640080"/>
+          </a:xfrm>
+          <a:prstGeom prst="rect">
+            <a:avLst/>
+          </a:prstGeom>
+          <a:noFill/>
+          <a:ln/>
+        </p:spPr>
+        <p:txBody>
+          <a:bodyPr wrap="square" lIns="0" tIns="0" rIns="0" bIns="0" rtlCol="0" anchor="ctr"/>
+          <a:lstStyle/>
+          <a:p>
+            <a:pPr indent="0" marL="0">
+              <a:buNone/>
+            </a:pPr>
+            <a:r>
+              <a:rPr lang="en-US" sz="1350" dirty="0">
+                <a:solidFill>
+                  <a:srgbClr val="6B7280"/>
+                </a:solidFill>
+                <a:latin typeface="Calibri" pitchFamily="34" charset="0"/>
+                <a:ea typeface="Calibri" pitchFamily="34" charset="-122"/>
+                <a:cs typeface="Calibri" pitchFamily="34" charset="-120"/>
+              </a:rPr>
+              <a:t>The goal is identical: clear the high CO₂. The action costs are not — a pulse always costs 3, while a full airing costs 4 + ΔT/2 with ΔT = max(0, 22 °C − T_outdoor), from the heat-loss relation Q ∝ Q_v · ΔT.</a:t>
+            </a:r>
+            <a:endParaRPr lang="en-US" sz="1350" dirty="0"/>
+          </a:p>
+        </p:txBody>
+      </p:sp>
+      <p:sp>
+        <p:nvSpPr>
+          <p:cNvPr id="5" name="Shape 3"/>
+          <p:cNvSpPr/>
+          <p:nvPr/>
+        </p:nvSpPr>
+        <p:spPr>
+          <a:xfrm>
+            <a:off x="640080" y="2286000"/>
+            <a:ext cx="5285232" cy="2697480"/>
+          </a:xfrm>
+          <a:prstGeom prst="roundRect">
+            <a:avLst>
+              <a:gd name="adj" fmla="val 3390"/>
+            </a:avLst>
+          </a:prstGeom>
+          <a:solidFill>
+            <a:srgbClr val="FFFFFF"/>
+          </a:solidFill>
+          <a:ln w="15875">
+            <a:solidFill>
+              <a:srgbClr val="E5E7EB"/>
+            </a:solidFill>
+            <a:prstDash val="solid"/>
+          </a:ln>
+        </p:spPr>
+      </p:sp>
+      <p:sp>
+        <p:nvSpPr>
+          <p:cNvPr id="6" name="Text 4"/>
+          <p:cNvSpPr/>
+          <p:nvPr/>
+        </p:nvSpPr>
+        <p:spPr>
+          <a:xfrm>
+            <a:off x="896112" y="2487168"/>
+            <a:ext cx="4754880" cy="365760"/>
+          </a:xfrm>
+          <a:prstGeom prst="rect">
+            <a:avLst/>
+          </a:prstGeom>
+          <a:noFill/>
+          <a:ln/>
+        </p:spPr>
+        <p:txBody>
+          <a:bodyPr wrap="square" lIns="0" tIns="0" rIns="0" bIns="0" rtlCol="0" anchor="ctr"/>
+          <a:lstStyle/>
+          <a:p>
+            <a:pPr indent="0" marL="0">
+              <a:buNone/>
+            </a:pPr>
+            <a:r>
+              <a:rPr lang="en-US" sz="1600" b="1" dirty="0">
+                <a:solidFill>
+                  <a:srgbClr val="1D4ED8"/>
                 </a:solidFill>
                 <a:latin typeface="Cambria" pitchFamily="34" charset="0"/>
                 <a:ea typeface="Cambria" pitchFamily="34" charset="-122"/>
                 <a:cs typeface="Cambria" pitchFamily="34" charset="-120"/>
               </a:rPr>
-              <a:t>1</a:t>
-            </a:r>
-            <a:endParaRPr lang="en-US" sz="2600" dirty="0"/>
-          </a:p>
-        </p:txBody>
-      </p:sp>
-      <p:sp>
-        <p:nvSpPr>
-          <p:cNvPr id="5" name="Text 3"/>
-          <p:cNvSpPr/>
-          <p:nvPr/>
-        </p:nvSpPr>
-        <p:spPr>
-          <a:xfrm>
-            <a:off x="1234440" y="1645920"/>
-            <a:ext cx="4663440" cy="384048"/>
-          </a:xfrm>
-          <a:prstGeom prst="rect">
-            <a:avLst/>
-          </a:prstGeom>
-          <a:noFill/>
-          <a:ln/>
-        </p:spPr>
-        <p:txBody>
-          <a:bodyPr wrap="square" lIns="0" tIns="0" rIns="0" bIns="0" rtlCol="0" anchor="ctr"/>
-          <a:lstStyle/>
-          <a:p>
-            <a:pPr indent="0" marL="0">
-              <a:buNone/>
-            </a:pPr>
-            <a:r>
-              <a:rPr lang="en-US" sz="1600" b="1" dirty="0">
-                <a:solidFill>
-                  <a:srgbClr val="111827"/>
-                </a:solidFill>
-                <a:latin typeface="Cambria" pitchFamily="34" charset="0"/>
-                <a:ea typeface="Cambria" pitchFamily="34" charset="-122"/>
-                <a:cs typeface="Cambria" pitchFamily="34" charset="-120"/>
-              </a:rPr>
-              <a:t>Sit down</a:t>
+              <a:t>Winter · 5 °C outside</a:t>
             </a:r>
             <a:endParaRPr lang="en-US" sz="1600" dirty="0"/>
           </a:p>
@@ -12479,53 +13460,53 @@
       </p:sp>
       <p:sp>
         <p:nvSpPr>
-          <p:cNvPr id="6" name="Text 4"/>
-          <p:cNvSpPr/>
-          <p:nvPr/>
-        </p:nvSpPr>
-        <p:spPr>
-          <a:xfrm>
-            <a:off x="1234440" y="2048256"/>
-            <a:ext cx="4663440" cy="548640"/>
-          </a:xfrm>
-          <a:prstGeom prst="rect">
-            <a:avLst/>
-          </a:prstGeom>
-          <a:noFill/>
-          <a:ln/>
-        </p:spPr>
-        <p:txBody>
-          <a:bodyPr wrap="square" lIns="0" tIns="0" rIns="0" bIns="0" rtlCol="0" anchor="ctr"/>
-          <a:lstStyle/>
-          <a:p>
-            <a:pPr indent="0" marL="0">
-              <a:buNone/>
-            </a:pPr>
-            <a:r>
-              <a:rPr lang="en-US" sz="1250" dirty="0">
+          <p:cNvPr id="7" name="Text 5"/>
+          <p:cNvSpPr/>
+          <p:nvPr/>
+        </p:nvSpPr>
+        <p:spPr>
+          <a:xfrm>
+            <a:off x="896112" y="2926080"/>
+            <a:ext cx="4846320" cy="320040"/>
+          </a:xfrm>
+          <a:prstGeom prst="rect">
+            <a:avLst/>
+          </a:prstGeom>
+          <a:noFill/>
+          <a:ln/>
+        </p:spPr>
+        <p:txBody>
+          <a:bodyPr wrap="square" lIns="0" tIns="0" rIns="0" bIns="0" rtlCol="0" anchor="ctr"/>
+          <a:lstStyle/>
+          <a:p>
+            <a:pPr indent="0" marL="0">
+              <a:buNone/>
+            </a:pPr>
+            <a:r>
+              <a:rPr lang="en-US" sz="1200" dirty="0">
                 <a:solidFill>
                   <a:srgbClr val="6B7280"/>
                 </a:solidFill>
-                <a:latin typeface="Calibri" pitchFamily="34" charset="0"/>
-                <a:ea typeface="Calibri" pitchFamily="34" charset="-122"/>
-                <a:cs typeface="Calibri" pitchFamily="34" charset="-120"/>
-              </a:rPr>
-              <a:t>occupancy detected, focus session starts</a:t>
-            </a:r>
-            <a:endParaRPr lang="en-US" sz="1250" dirty="0"/>
-          </a:p>
-        </p:txBody>
-      </p:sp>
-      <p:sp>
-        <p:nvSpPr>
-          <p:cNvPr id="7" name="Shape 5"/>
-          <p:cNvSpPr/>
-          <p:nvPr/>
-        </p:nvSpPr>
-        <p:spPr>
-          <a:xfrm>
-            <a:off x="1234440" y="2724912"/>
-            <a:ext cx="4572000" cy="0"/>
+                <a:latin typeface="Courier New" pitchFamily="34" charset="0"/>
+                <a:ea typeface="Courier New" pitchFamily="34" charset="-122"/>
+                <a:cs typeface="Courier New" pitchFamily="34" charset="-120"/>
+              </a:rPr>
+              <a:t>pulse = 3   ·   full = 4 + 17/2 = 12</a:t>
+            </a:r>
+            <a:endParaRPr lang="en-US" sz="1200" dirty="0"/>
+          </a:p>
+        </p:txBody>
+      </p:sp>
+      <p:sp>
+        <p:nvSpPr>
+          <p:cNvPr id="8" name="Shape 6"/>
+          <p:cNvSpPr/>
+          <p:nvPr/>
+        </p:nvSpPr>
+        <p:spPr>
+          <a:xfrm>
+            <a:off x="896112" y="3364992"/>
+            <a:ext cx="4773168" cy="0"/>
           </a:xfrm>
           <a:prstGeom prst="line">
             <a:avLst/>
@@ -12541,53 +13522,181 @@
       </p:sp>
       <p:sp>
         <p:nvSpPr>
-          <p:cNvPr id="8" name="Text 6"/>
-          <p:cNvSpPr/>
-          <p:nvPr/>
-        </p:nvSpPr>
-        <p:spPr>
-          <a:xfrm>
-            <a:off x="6263640" y="1664208"/>
-            <a:ext cx="502920" cy="502920"/>
-          </a:xfrm>
-          <a:prstGeom prst="rect">
-            <a:avLst/>
-          </a:prstGeom>
-          <a:noFill/>
-          <a:ln/>
-        </p:spPr>
-        <p:txBody>
-          <a:bodyPr wrap="square" lIns="0" tIns="0" rIns="0" bIns="0" rtlCol="0" anchor="ctr"/>
-          <a:lstStyle/>
-          <a:p>
-            <a:pPr indent="0" marL="0">
-              <a:buNone/>
-            </a:pPr>
-            <a:r>
-              <a:rPr lang="en-US" sz="2600" b="1" dirty="0">
-                <a:solidFill>
-                  <a:srgbClr val="D97706"/>
+          <p:cNvPr id="9" name="Text 7"/>
+          <p:cNvSpPr/>
+          <p:nvPr/>
+        </p:nvSpPr>
+        <p:spPr>
+          <a:xfrm>
+            <a:off x="896112" y="3493008"/>
+            <a:ext cx="4846320" cy="731520"/>
+          </a:xfrm>
+          <a:prstGeom prst="rect">
+            <a:avLst/>
+          </a:prstGeom>
+          <a:noFill/>
+          <a:ln/>
+        </p:spPr>
+        <p:txBody>
+          <a:bodyPr wrap="square" lIns="0" tIns="0" rIns="0" bIns="0" rtlCol="0" anchor="ctr"/>
+          <a:lstStyle/>
+          <a:p>
+            <a:pPr indent="0" marL="0">
+              <a:lnSpc>
+                <a:spcPct val="110000"/>
+              </a:lnSpc>
+              <a:buNone/>
+            </a:pPr>
+            <a:r>
+              <a:rPr lang="en-US" sz="1350" b="1" dirty="0">
+                <a:solidFill>
+                  <a:srgbClr val="111827"/>
+                </a:solidFill>
+                <a:latin typeface="Courier New" pitchFamily="34" charset="0"/>
+                <a:ea typeface="Courier New" pitchFamily="34" charset="-122"/>
+                <a:cs typeface="Courier New" pitchFamily="34" charset="-120"/>
+              </a:rPr>
+              <a:t>[ pulse_ventilate_step,</a:t>
+            </a:r>
+            <a:endParaRPr lang="en-US" sz="1350" dirty="0"/>
+          </a:p>
+          <a:p>
+            <a:pPr indent="0" marL="0">
+              <a:lnSpc>
+                <a:spcPct val="110000"/>
+              </a:lnSpc>
+              <a:buNone/>
+            </a:pPr>
+            <a:r>
+              <a:rPr lang="en-US" sz="1350" b="1" dirty="0">
+                <a:solidFill>
+                  <a:srgbClr val="111827"/>
+                </a:solidFill>
+                <a:latin typeface="Courier New" pitchFamily="34" charset="0"/>
+                <a:ea typeface="Courier New" pitchFamily="34" charset="-122"/>
+                <a:cs typeface="Courier New" pitchFamily="34" charset="-120"/>
+              </a:rPr>
+              <a:t>  pulse_ventilate ]</a:t>
+            </a:r>
+            <a:endParaRPr lang="en-US" sz="1350" dirty="0"/>
+          </a:p>
+        </p:txBody>
+      </p:sp>
+      <p:sp>
+        <p:nvSpPr>
+          <p:cNvPr id="10" name="Text 8"/>
+          <p:cNvSpPr/>
+          <p:nvPr/>
+        </p:nvSpPr>
+        <p:spPr>
+          <a:xfrm>
+            <a:off x="896112" y="4315968"/>
+            <a:ext cx="2286000" cy="320040"/>
+          </a:xfrm>
+          <a:prstGeom prst="rect">
+            <a:avLst/>
+          </a:prstGeom>
+          <a:noFill/>
+          <a:ln/>
+        </p:spPr>
+        <p:txBody>
+          <a:bodyPr wrap="square" lIns="0" tIns="0" rIns="0" bIns="0" rtlCol="0" anchor="ctr"/>
+          <a:lstStyle/>
+          <a:p>
+            <a:pPr indent="0" marL="0">
+              <a:buNone/>
+            </a:pPr>
+            <a:r>
+              <a:rPr lang="en-US" sz="1500" b="1" dirty="0">
+                <a:solidFill>
+                  <a:srgbClr val="1D4ED8"/>
                 </a:solidFill>
                 <a:latin typeface="Cambria" pitchFamily="34" charset="0"/>
                 <a:ea typeface="Cambria" pitchFamily="34" charset="-122"/>
                 <a:cs typeface="Cambria" pitchFamily="34" charset="-120"/>
               </a:rPr>
-              <a:t>2</a:t>
-            </a:r>
-            <a:endParaRPr lang="en-US" sz="2600" dirty="0"/>
-          </a:p>
-        </p:txBody>
-      </p:sp>
-      <p:sp>
-        <p:nvSpPr>
-          <p:cNvPr id="9" name="Text 7"/>
-          <p:cNvSpPr/>
-          <p:nvPr/>
-        </p:nvSpPr>
-        <p:spPr>
-          <a:xfrm>
-            <a:off x="6858000" y="1645920"/>
-            <a:ext cx="4663440" cy="384048"/>
+              <a:t>total 6  &lt;  12</a:t>
+            </a:r>
+            <a:endParaRPr lang="en-US" sz="1500" dirty="0"/>
+          </a:p>
+        </p:txBody>
+      </p:sp>
+      <p:sp>
+        <p:nvSpPr>
+          <p:cNvPr id="11" name="Text 9"/>
+          <p:cNvSpPr/>
+          <p:nvPr/>
+        </p:nvSpPr>
+        <p:spPr>
+          <a:xfrm>
+            <a:off x="896112" y="4617720"/>
+            <a:ext cx="4846320" cy="320040"/>
+          </a:xfrm>
+          <a:prstGeom prst="rect">
+            <a:avLst/>
+          </a:prstGeom>
+          <a:noFill/>
+          <a:ln/>
+        </p:spPr>
+        <p:txBody>
+          <a:bodyPr wrap="square" lIns="0" tIns="0" rIns="0" bIns="0" rtlCol="0" anchor="ctr"/>
+          <a:lstStyle/>
+          <a:p>
+            <a:pPr indent="0" marL="0">
+              <a:buNone/>
+            </a:pPr>
+            <a:r>
+              <a:rPr lang="en-US" sz="1200" dirty="0">
+                <a:solidFill>
+                  <a:srgbClr val="6B7280"/>
+                </a:solidFill>
+                <a:latin typeface="Calibri" pitchFamily="34" charset="0"/>
+                <a:ea typeface="Calibri" pitchFamily="34" charset="-122"/>
+                <a:cs typeface="Calibri" pitchFamily="34" charset="-120"/>
+              </a:rPr>
+              <a:t>two short pulses — the heat stays inside</a:t>
+            </a:r>
+            <a:endParaRPr lang="en-US" sz="1200" dirty="0"/>
+          </a:p>
+        </p:txBody>
+      </p:sp>
+      <p:sp>
+        <p:nvSpPr>
+          <p:cNvPr id="12" name="Shape 10"/>
+          <p:cNvSpPr/>
+          <p:nvPr/>
+        </p:nvSpPr>
+        <p:spPr>
+          <a:xfrm>
+            <a:off x="6263640" y="2286000"/>
+            <a:ext cx="5285232" cy="2697480"/>
+          </a:xfrm>
+          <a:prstGeom prst="roundRect">
+            <a:avLst>
+              <a:gd name="adj" fmla="val 3390"/>
+            </a:avLst>
+          </a:prstGeom>
+          <a:solidFill>
+            <a:srgbClr val="FFFFFF"/>
+          </a:solidFill>
+          <a:ln w="15875">
+            <a:solidFill>
+              <a:srgbClr val="E5E7EB"/>
+            </a:solidFill>
+            <a:prstDash val="solid"/>
+          </a:ln>
+        </p:spPr>
+      </p:sp>
+      <p:sp>
+        <p:nvSpPr>
+          <p:cNvPr id="13" name="Text 11"/>
+          <p:cNvSpPr/>
+          <p:nvPr/>
+        </p:nvSpPr>
+        <p:spPr>
+          <a:xfrm>
+            <a:off x="6519672" y="2487168"/>
+            <a:ext cx="4754880" cy="365760"/>
           </a:xfrm>
           <a:prstGeom prst="rect">
             <a:avLst/>
@@ -12605,13 +13714,13 @@
             <a:r>
               <a:rPr lang="en-US" sz="1600" b="1" dirty="0">
                 <a:solidFill>
-                  <a:srgbClr val="111827"/>
+                  <a:srgbClr val="D97706"/>
                 </a:solidFill>
                 <a:latin typeface="Cambria" pitchFamily="34" charset="0"/>
                 <a:ea typeface="Cambria" pitchFamily="34" charset="-122"/>
                 <a:cs typeface="Cambria" pitchFamily="34" charset="-120"/>
               </a:rPr>
-              <a:t>Cover the light sensor</a:t>
+              <a:t>Summer · 33 °C outside</a:t>
             </a:r>
             <a:endParaRPr lang="en-US" sz="1600" dirty="0"/>
           </a:p>
@@ -12619,53 +13728,53 @@
       </p:sp>
       <p:sp>
         <p:nvSpPr>
-          <p:cNvPr id="10" name="Text 8"/>
-          <p:cNvSpPr/>
-          <p:nvPr/>
-        </p:nvSpPr>
-        <p:spPr>
-          <a:xfrm>
-            <a:off x="6858000" y="2048256"/>
-            <a:ext cx="4663440" cy="548640"/>
-          </a:xfrm>
-          <a:prstGeom prst="rect">
-            <a:avLst/>
-          </a:prstGeom>
-          <a:noFill/>
-          <a:ln/>
-        </p:spPr>
-        <p:txBody>
-          <a:bodyPr wrap="square" lIns="0" tIns="0" rIns="0" bIns="0" rtlCol="0" anchor="ctr"/>
-          <a:lstStyle/>
-          <a:p>
-            <a:pPr indent="0" marL="0">
-              <a:buNone/>
-            </a:pPr>
-            <a:r>
-              <a:rPr lang="en-US" sz="1250" dirty="0">
+          <p:cNvPr id="14" name="Text 12"/>
+          <p:cNvSpPr/>
+          <p:nvPr/>
+        </p:nvSpPr>
+        <p:spPr>
+          <a:xfrm>
+            <a:off x="6519672" y="2926080"/>
+            <a:ext cx="4846320" cy="320040"/>
+          </a:xfrm>
+          <a:prstGeom prst="rect">
+            <a:avLst/>
+          </a:prstGeom>
+          <a:noFill/>
+          <a:ln/>
+        </p:spPr>
+        <p:txBody>
+          <a:bodyPr wrap="square" lIns="0" tIns="0" rIns="0" bIns="0" rtlCol="0" anchor="ctr"/>
+          <a:lstStyle/>
+          <a:p>
+            <a:pPr indent="0" marL="0">
+              <a:buNone/>
+            </a:pPr>
+            <a:r>
+              <a:rPr lang="en-US" sz="1200" dirty="0">
                 <a:solidFill>
                   <a:srgbClr val="6B7280"/>
                 </a:solidFill>
-                <a:latin typeface="Calibri" pitchFamily="34" charset="0"/>
-                <a:ea typeface="Calibri" pitchFamily="34" charset="-122"/>
-                <a:cs typeface="Calibri" pitchFamily="34" charset="-120"/>
-              </a:rPr>
-              <a:t>zone turns dark, the real lamp switches on</a:t>
-            </a:r>
-            <a:endParaRPr lang="en-US" sz="1250" dirty="0"/>
-          </a:p>
-        </p:txBody>
-      </p:sp>
-      <p:sp>
-        <p:nvSpPr>
-          <p:cNvPr id="11" name="Shape 9"/>
-          <p:cNvSpPr/>
-          <p:nvPr/>
-        </p:nvSpPr>
-        <p:spPr>
-          <a:xfrm>
-            <a:off x="6858000" y="2724912"/>
-            <a:ext cx="4572000" cy="0"/>
+                <a:latin typeface="Courier New" pitchFamily="34" charset="0"/>
+                <a:ea typeface="Courier New" pitchFamily="34" charset="-122"/>
+                <a:cs typeface="Courier New" pitchFamily="34" charset="-120"/>
+              </a:rPr>
+              <a:t>pulse = 3   ·   full = 4 + 0 = 4</a:t>
+            </a:r>
+            <a:endParaRPr lang="en-US" sz="1200" dirty="0"/>
+          </a:p>
+        </p:txBody>
+      </p:sp>
+      <p:sp>
+        <p:nvSpPr>
+          <p:cNvPr id="15" name="Shape 13"/>
+          <p:cNvSpPr/>
+          <p:nvPr/>
+        </p:nvSpPr>
+        <p:spPr>
+          <a:xfrm>
+            <a:off x="6519672" y="3364992"/>
+            <a:ext cx="4773168" cy="0"/>
           </a:xfrm>
           <a:prstGeom prst="line">
             <a:avLst/>
@@ -12681,30 +13790,72 @@
       </p:sp>
       <p:sp>
         <p:nvSpPr>
-          <p:cNvPr id="12" name="Text 10"/>
-          <p:cNvSpPr/>
-          <p:nvPr/>
-        </p:nvSpPr>
-        <p:spPr>
-          <a:xfrm>
-            <a:off x="640080" y="3081528"/>
-            <a:ext cx="502920" cy="502920"/>
-          </a:xfrm>
-          <a:prstGeom prst="rect">
-            <a:avLst/>
-          </a:prstGeom>
-          <a:noFill/>
-          <a:ln/>
-        </p:spPr>
-        <p:txBody>
-          <a:bodyPr wrap="square" lIns="0" tIns="0" rIns="0" bIns="0" rtlCol="0" anchor="ctr"/>
-          <a:lstStyle/>
-          <a:p>
-            <a:pPr indent="0" marL="0">
-              <a:buNone/>
-            </a:pPr>
-            <a:r>
-              <a:rPr lang="en-US" sz="2600" b="1" dirty="0">
+          <p:cNvPr id="16" name="Text 14"/>
+          <p:cNvSpPr/>
+          <p:nvPr/>
+        </p:nvSpPr>
+        <p:spPr>
+          <a:xfrm>
+            <a:off x="6519672" y="3493008"/>
+            <a:ext cx="4846320" cy="731520"/>
+          </a:xfrm>
+          <a:prstGeom prst="rect">
+            <a:avLst/>
+          </a:prstGeom>
+          <a:noFill/>
+          <a:ln/>
+        </p:spPr>
+        <p:txBody>
+          <a:bodyPr wrap="square" lIns="0" tIns="0" rIns="0" bIns="0" rtlCol="0" anchor="ctr"/>
+          <a:lstStyle/>
+          <a:p>
+            <a:pPr indent="0" marL="0">
+              <a:lnSpc>
+                <a:spcPct val="110000"/>
+              </a:lnSpc>
+              <a:buNone/>
+            </a:pPr>
+            <a:r>
+              <a:rPr lang="en-US" sz="1350" b="1" dirty="0">
+                <a:solidFill>
+                  <a:srgbClr val="111827"/>
+                </a:solidFill>
+                <a:latin typeface="Courier New" pitchFamily="34" charset="0"/>
+                <a:ea typeface="Courier New" pitchFamily="34" charset="-122"/>
+                <a:cs typeface="Courier New" pitchFamily="34" charset="-120"/>
+              </a:rPr>
+              <a:t>[ full_ventilate ]</a:t>
+            </a:r>
+            <a:endParaRPr lang="en-US" sz="1350" dirty="0"/>
+          </a:p>
+        </p:txBody>
+      </p:sp>
+      <p:sp>
+        <p:nvSpPr>
+          <p:cNvPr id="17" name="Text 15"/>
+          <p:cNvSpPr/>
+          <p:nvPr/>
+        </p:nvSpPr>
+        <p:spPr>
+          <a:xfrm>
+            <a:off x="6519672" y="4315968"/>
+            <a:ext cx="2286000" cy="320040"/>
+          </a:xfrm>
+          <a:prstGeom prst="rect">
+            <a:avLst/>
+          </a:prstGeom>
+          <a:noFill/>
+          <a:ln/>
+        </p:spPr>
+        <p:txBody>
+          <a:bodyPr wrap="square" lIns="0" tIns="0" rIns="0" bIns="0" rtlCol="0" anchor="ctr"/>
+          <a:lstStyle/>
+          <a:p>
+            <a:pPr indent="0" marL="0">
+              <a:buNone/>
+            </a:pPr>
+            <a:r>
+              <a:rPr lang="en-US" sz="1500" b="1" dirty="0">
                 <a:solidFill>
                   <a:srgbClr val="D97706"/>
                 </a:solidFill>
@@ -12712,77 +13863,38 @@
                 <a:ea typeface="Cambria" pitchFamily="34" charset="-122"/>
                 <a:cs typeface="Cambria" pitchFamily="34" charset="-120"/>
               </a:rPr>
-              <a:t>3</a:t>
-            </a:r>
-            <a:endParaRPr lang="en-US" sz="2600" dirty="0"/>
-          </a:p>
-        </p:txBody>
-      </p:sp>
-      <p:sp>
-        <p:nvSpPr>
-          <p:cNvPr id="13" name="Text 11"/>
-          <p:cNvSpPr/>
-          <p:nvPr/>
-        </p:nvSpPr>
-        <p:spPr>
-          <a:xfrm>
-            <a:off x="1234440" y="3063240"/>
-            <a:ext cx="4663440" cy="384048"/>
-          </a:xfrm>
-          <a:prstGeom prst="rect">
-            <a:avLst/>
-          </a:prstGeom>
-          <a:noFill/>
-          <a:ln/>
-        </p:spPr>
-        <p:txBody>
-          <a:bodyPr wrap="square" lIns="0" tIns="0" rIns="0" bIns="0" rtlCol="0" anchor="ctr"/>
-          <a:lstStyle/>
-          <a:p>
-            <a:pPr indent="0" marL="0">
-              <a:buNone/>
-            </a:pPr>
-            <a:r>
-              <a:rPr lang="en-US" sz="1600" b="1" dirty="0">
-                <a:solidFill>
-                  <a:srgbClr val="111827"/>
-                </a:solidFill>
-                <a:latin typeface="Cambria" pitchFamily="34" charset="0"/>
-                <a:ea typeface="Cambria" pitchFamily="34" charset="-122"/>
-                <a:cs typeface="Cambria" pitchFamily="34" charset="-120"/>
-              </a:rPr>
-              <a:t>Switch the lamp off manually</a:t>
-            </a:r>
-            <a:endParaRPr lang="en-US" sz="1600" dirty="0"/>
-          </a:p>
-        </p:txBody>
-      </p:sp>
-      <p:sp>
-        <p:nvSpPr>
-          <p:cNvPr id="14" name="Text 12"/>
-          <p:cNvSpPr/>
-          <p:nvPr/>
-        </p:nvSpPr>
-        <p:spPr>
-          <a:xfrm>
-            <a:off x="1234440" y="3465576"/>
-            <a:ext cx="4663440" cy="548640"/>
-          </a:xfrm>
-          <a:prstGeom prst="rect">
-            <a:avLst/>
-          </a:prstGeom>
-          <a:noFill/>
-          <a:ln/>
-        </p:spPr>
-        <p:txBody>
-          <a:bodyPr wrap="square" lIns="0" tIns="0" rIns="0" bIns="0" rtlCol="0" anchor="ctr"/>
-          <a:lstStyle/>
-          <a:p>
-            <a:pPr indent="0" marL="0">
-              <a:buNone/>
-            </a:pPr>
-            <a:r>
-              <a:rPr lang="en-US" sz="1250" dirty="0">
+              <a:t>total 4  &lt;  6</a:t>
+            </a:r>
+            <a:endParaRPr lang="en-US" sz="1500" dirty="0"/>
+          </a:p>
+        </p:txBody>
+      </p:sp>
+      <p:sp>
+        <p:nvSpPr>
+          <p:cNvPr id="18" name="Text 16"/>
+          <p:cNvSpPr/>
+          <p:nvPr/>
+        </p:nvSpPr>
+        <p:spPr>
+          <a:xfrm>
+            <a:off x="6519672" y="4617720"/>
+            <a:ext cx="4846320" cy="320040"/>
+          </a:xfrm>
+          <a:prstGeom prst="rect">
+            <a:avLst/>
+          </a:prstGeom>
+          <a:noFill/>
+          <a:ln/>
+        </p:spPr>
+        <p:txBody>
+          <a:bodyPr wrap="square" lIns="0" tIns="0" rIns="0" bIns="0" rtlCol="0" anchor="ctr"/>
+          <a:lstStyle/>
+          <a:p>
+            <a:pPr indent="0" marL="0">
+              <a:buNone/>
+            </a:pPr>
+            <a:r>
+              <a:rPr lang="en-US" sz="1200" dirty="0">
                 <a:solidFill>
                   <a:srgbClr val="6B7280"/>
                 </a:solidFill>
@@ -12790,22 +13902,22 @@
                 <a:ea typeface="Calibri" pitchFamily="34" charset="-122"/>
                 <a:cs typeface="Calibri" pitchFamily="34" charset="-120"/>
               </a:rPr>
-              <a:t>the disturbance is detected and corrected in under 1 s</a:t>
-            </a:r>
-            <a:endParaRPr lang="en-US" sz="1250" dirty="0"/>
-          </a:p>
-        </p:txBody>
-      </p:sp>
-      <p:sp>
-        <p:nvSpPr>
-          <p:cNvPr id="15" name="Shape 13"/>
-          <p:cNvSpPr/>
-          <p:nvPr/>
-        </p:nvSpPr>
-        <p:spPr>
-          <a:xfrm>
-            <a:off x="1234440" y="4142232"/>
-            <a:ext cx="4572000" cy="0"/>
+              <a:t>one long opening clears the air fastest</a:t>
+            </a:r>
+            <a:endParaRPr lang="en-US" sz="1200" dirty="0"/>
+          </a:p>
+        </p:txBody>
+      </p:sp>
+      <p:sp>
+        <p:nvSpPr>
+          <p:cNvPr id="19" name="Shape 17"/>
+          <p:cNvSpPr/>
+          <p:nvPr/>
+        </p:nvSpPr>
+        <p:spPr>
+          <a:xfrm>
+            <a:off x="640080" y="5349240"/>
+            <a:ext cx="10881360" cy="0"/>
           </a:xfrm>
           <a:prstGeom prst="line">
             <a:avLst/>
@@ -12821,108 +13933,44 @@
       </p:sp>
       <p:sp>
         <p:nvSpPr>
-          <p:cNvPr id="16" name="Text 14"/>
-          <p:cNvSpPr/>
-          <p:nvPr/>
-        </p:nvSpPr>
-        <p:spPr>
-          <a:xfrm>
-            <a:off x="6263640" y="3081528"/>
-            <a:ext cx="502920" cy="502920"/>
-          </a:xfrm>
-          <a:prstGeom prst="rect">
-            <a:avLst/>
-          </a:prstGeom>
-          <a:noFill/>
-          <a:ln/>
-        </p:spPr>
-        <p:txBody>
-          <a:bodyPr wrap="square" lIns="0" tIns="0" rIns="0" bIns="0" rtlCol="0" anchor="ctr"/>
-          <a:lstStyle/>
-          <a:p>
-            <a:pPr indent="0" marL="0">
-              <a:buNone/>
-            </a:pPr>
-            <a:r>
-              <a:rPr lang="en-US" sz="2600" b="1" dirty="0">
-                <a:solidFill>
-                  <a:srgbClr val="D97706"/>
-                </a:solidFill>
-                <a:latin typeface="Cambria" pitchFamily="34" charset="0"/>
-                <a:ea typeface="Cambria" pitchFamily="34" charset="-122"/>
-                <a:cs typeface="Cambria" pitchFamily="34" charset="-120"/>
-              </a:rPr>
-              <a:t>4</a:t>
-            </a:r>
-            <a:endParaRPr lang="en-US" sz="2600" dirty="0"/>
-          </a:p>
-        </p:txBody>
-      </p:sp>
-      <p:sp>
-        <p:nvSpPr>
-          <p:cNvPr id="17" name="Text 15"/>
-          <p:cNvSpPr/>
-          <p:nvPr/>
-        </p:nvSpPr>
-        <p:spPr>
-          <a:xfrm>
-            <a:off x="6858000" y="3063240"/>
-            <a:ext cx="4663440" cy="384048"/>
-          </a:xfrm>
-          <a:prstGeom prst="rect">
-            <a:avLst/>
-          </a:prstGeom>
-          <a:noFill/>
-          <a:ln/>
-        </p:spPr>
-        <p:txBody>
-          <a:bodyPr wrap="square" lIns="0" tIns="0" rIns="0" bIns="0" rtlCol="0" anchor="ctr"/>
-          <a:lstStyle/>
-          <a:p>
-            <a:pPr indent="0" marL="0">
-              <a:buNone/>
-            </a:pPr>
-            <a:r>
-              <a:rPr lang="en-US" sz="1600" b="1" dirty="0">
+          <p:cNvPr id="20" name="Text 18"/>
+          <p:cNvSpPr/>
+          <p:nvPr/>
+        </p:nvSpPr>
+        <p:spPr>
+          <a:xfrm>
+            <a:off x="640080" y="5532120"/>
+            <a:ext cx="10881360" cy="731520"/>
+          </a:xfrm>
+          <a:prstGeom prst="rect">
+            <a:avLst/>
+          </a:prstGeom>
+          <a:noFill/>
+          <a:ln/>
+        </p:spPr>
+        <p:txBody>
+          <a:bodyPr wrap="square" lIns="0" tIns="0" rIns="0" bIns="0" rtlCol="0" anchor="ctr"/>
+          <a:lstStyle/>
+          <a:p>
+            <a:pPr indent="0" marL="0">
+              <a:buNone/>
+            </a:pPr>
+            <a:r>
+              <a:rPr lang="en-US" sz="1350" b="1" dirty="0">
                 <a:solidFill>
                   <a:srgbClr val="111827"/>
                 </a:solidFill>
-                <a:latin typeface="Cambria" pitchFamily="34" charset="0"/>
-                <a:ea typeface="Cambria" pitchFamily="34" charset="-122"/>
-                <a:cs typeface="Cambria" pitchFamily="34" charset="-120"/>
-              </a:rPr>
-              <a:t>Keep focusing</a:t>
-            </a:r>
-            <a:endParaRPr lang="en-US" sz="1600" dirty="0"/>
-          </a:p>
-        </p:txBody>
-      </p:sp>
-      <p:sp>
-        <p:nvSpPr>
-          <p:cNvPr id="18" name="Text 16"/>
-          <p:cNvSpPr/>
-          <p:nvPr/>
-        </p:nvSpPr>
-        <p:spPr>
-          <a:xfrm>
-            <a:off x="6858000" y="3465576"/>
-            <a:ext cx="4663440" cy="548640"/>
-          </a:xfrm>
-          <a:prstGeom prst="rect">
-            <a:avLst/>
-          </a:prstGeom>
-          <a:noFill/>
-          <a:ln/>
-        </p:spPr>
-        <p:txBody>
-          <a:bodyPr wrap="square" lIns="0" tIns="0" rIns="0" bIns="0" rtlCol="0" anchor="ctr"/>
-          <a:lstStyle/>
-          <a:p>
-            <a:pPr indent="0" marL="0">
-              <a:buNone/>
-            </a:pPr>
-            <a:r>
-              <a:rPr lang="en-US" sz="1250" dirty="0">
+                <a:latin typeface="Calibri" pitchFamily="34" charset="0"/>
+                <a:ea typeface="Calibri" pitchFamily="34" charset="-122"/>
+                <a:cs typeface="Calibri" pitchFamily="34" charset="-120"/>
+              </a:rPr>
+              <a:t>Nobody coded “if cold, pulse”.  </a:t>
+            </a:r>
+            <a:pPr indent="0" marL="0">
+              <a:buNone/>
+            </a:pPr>
+            <a:r>
+              <a:rPr lang="en-US" sz="1350" dirty="0">
                 <a:solidFill>
                   <a:srgbClr val="6B7280"/>
                 </a:solidFill>
@@ -12930,351 +13978,9 @@
                 <a:ea typeface="Calibri" pitchFamily="34" charset="-122"/>
                 <a:cs typeface="Calibri" pitchFamily="34" charset="-120"/>
               </a:rPr>
-              <a:t>after 2 min: LED and gentle buzzer suggest a break</a:t>
-            </a:r>
-            <a:endParaRPr lang="en-US" sz="1250" dirty="0"/>
-          </a:p>
-        </p:txBody>
-      </p:sp>
-      <p:sp>
-        <p:nvSpPr>
-          <p:cNvPr id="19" name="Shape 17"/>
-          <p:cNvSpPr/>
-          <p:nvPr/>
-        </p:nvSpPr>
-        <p:spPr>
-          <a:xfrm>
-            <a:off x="6858000" y="4142232"/>
-            <a:ext cx="4572000" cy="0"/>
-          </a:xfrm>
-          <a:prstGeom prst="line">
-            <a:avLst/>
-          </a:prstGeom>
-          <a:noFill/>
-          <a:ln w="9525">
-            <a:solidFill>
-              <a:srgbClr val="E5E7EB"/>
-            </a:solidFill>
-            <a:prstDash val="solid"/>
-          </a:ln>
-        </p:spPr>
-      </p:sp>
-      <p:sp>
-        <p:nvSpPr>
-          <p:cNvPr id="20" name="Text 18"/>
-          <p:cNvSpPr/>
-          <p:nvPr/>
-        </p:nvSpPr>
-        <p:spPr>
-          <a:xfrm>
-            <a:off x="640080" y="4498848"/>
-            <a:ext cx="502920" cy="502920"/>
-          </a:xfrm>
-          <a:prstGeom prst="rect">
-            <a:avLst/>
-          </a:prstGeom>
-          <a:noFill/>
-          <a:ln/>
-        </p:spPr>
-        <p:txBody>
-          <a:bodyPr wrap="square" lIns="0" tIns="0" rIns="0" bIns="0" rtlCol="0" anchor="ctr"/>
-          <a:lstStyle/>
-          <a:p>
-            <a:pPr indent="0" marL="0">
-              <a:buNone/>
-            </a:pPr>
-            <a:r>
-              <a:rPr lang="en-US" sz="2600" b="1" dirty="0">
-                <a:solidFill>
-                  <a:srgbClr val="D97706"/>
-                </a:solidFill>
-                <a:latin typeface="Cambria" pitchFamily="34" charset="0"/>
-                <a:ea typeface="Cambria" pitchFamily="34" charset="-122"/>
-                <a:cs typeface="Cambria" pitchFamily="34" charset="-120"/>
-              </a:rPr>
-              <a:t>5</a:t>
-            </a:r>
-            <a:endParaRPr lang="en-US" sz="2600" dirty="0"/>
-          </a:p>
-        </p:txBody>
-      </p:sp>
-      <p:sp>
-        <p:nvSpPr>
-          <p:cNvPr id="21" name="Text 19"/>
-          <p:cNvSpPr/>
-          <p:nvPr/>
-        </p:nvSpPr>
-        <p:spPr>
-          <a:xfrm>
-            <a:off x="1234440" y="4480560"/>
-            <a:ext cx="4663440" cy="384048"/>
-          </a:xfrm>
-          <a:prstGeom prst="rect">
-            <a:avLst/>
-          </a:prstGeom>
-          <a:noFill/>
-          <a:ln/>
-        </p:spPr>
-        <p:txBody>
-          <a:bodyPr wrap="square" lIns="0" tIns="0" rIns="0" bIns="0" rtlCol="0" anchor="ctr"/>
-          <a:lstStyle/>
-          <a:p>
-            <a:pPr indent="0" marL="0">
-              <a:buNone/>
-            </a:pPr>
-            <a:r>
-              <a:rPr lang="en-US" sz="1600" b="1" dirty="0">
-                <a:solidFill>
-                  <a:srgbClr val="111827"/>
-                </a:solidFill>
-                <a:latin typeface="Cambria" pitchFamily="34" charset="0"/>
-                <a:ea typeface="Cambria" pitchFamily="34" charset="-122"/>
-                <a:cs typeface="Cambria" pitchFamily="34" charset="-120"/>
-              </a:rPr>
-              <a:t>CO₂ rises</a:t>
-            </a:r>
-            <a:endParaRPr lang="en-US" sz="1600" dirty="0"/>
-          </a:p>
-        </p:txBody>
-      </p:sp>
-      <p:sp>
-        <p:nvSpPr>
-          <p:cNvPr id="22" name="Text 20"/>
-          <p:cNvSpPr/>
-          <p:nvPr/>
-        </p:nvSpPr>
-        <p:spPr>
-          <a:xfrm>
-            <a:off x="1234440" y="4882896"/>
-            <a:ext cx="4663440" cy="548640"/>
-          </a:xfrm>
-          <a:prstGeom prst="rect">
-            <a:avLst/>
-          </a:prstGeom>
-          <a:noFill/>
-          <a:ln/>
-        </p:spPr>
-        <p:txBody>
-          <a:bodyPr wrap="square" lIns="0" tIns="0" rIns="0" bIns="0" rtlCol="0" anchor="ctr"/>
-          <a:lstStyle/>
-          <a:p>
-            <a:pPr indent="0" marL="0">
-              <a:buNone/>
-            </a:pPr>
-            <a:r>
-              <a:rPr lang="en-US" sz="1250" dirty="0">
-                <a:solidFill>
-                  <a:srgbClr val="6B7280"/>
-                </a:solidFill>
-                <a:latin typeface="Calibri" pitchFamily="34" charset="0"/>
-                <a:ea typeface="Calibri" pitchFamily="34" charset="-122"/>
-                <a:cs typeface="Calibri" pitchFamily="34" charset="-120"/>
-              </a:rPr>
-              <a:t>the planner opens the windows on the floor plan, CO₂ falls again</a:t>
-            </a:r>
-            <a:endParaRPr lang="en-US" sz="1250" dirty="0"/>
-          </a:p>
-        </p:txBody>
-      </p:sp>
-      <p:sp>
-        <p:nvSpPr>
-          <p:cNvPr id="23" name="Shape 21"/>
-          <p:cNvSpPr/>
-          <p:nvPr/>
-        </p:nvSpPr>
-        <p:spPr>
-          <a:xfrm>
-            <a:off x="1234440" y="5559552"/>
-            <a:ext cx="4572000" cy="0"/>
-          </a:xfrm>
-          <a:prstGeom prst="line">
-            <a:avLst/>
-          </a:prstGeom>
-          <a:noFill/>
-          <a:ln w="9525">
-            <a:solidFill>
-              <a:srgbClr val="E5E7EB"/>
-            </a:solidFill>
-            <a:prstDash val="solid"/>
-          </a:ln>
-        </p:spPr>
-      </p:sp>
-      <p:sp>
-        <p:nvSpPr>
-          <p:cNvPr id="24" name="Text 22"/>
-          <p:cNvSpPr/>
-          <p:nvPr/>
-        </p:nvSpPr>
-        <p:spPr>
-          <a:xfrm>
-            <a:off x="6263640" y="4498848"/>
-            <a:ext cx="502920" cy="502920"/>
-          </a:xfrm>
-          <a:prstGeom prst="rect">
-            <a:avLst/>
-          </a:prstGeom>
-          <a:noFill/>
-          <a:ln/>
-        </p:spPr>
-        <p:txBody>
-          <a:bodyPr wrap="square" lIns="0" tIns="0" rIns="0" bIns="0" rtlCol="0" anchor="ctr"/>
-          <a:lstStyle/>
-          <a:p>
-            <a:pPr indent="0" marL="0">
-              <a:buNone/>
-            </a:pPr>
-            <a:r>
-              <a:rPr lang="en-US" sz="2600" b="1" dirty="0">
-                <a:solidFill>
-                  <a:srgbClr val="D97706"/>
-                </a:solidFill>
-                <a:latin typeface="Cambria" pitchFamily="34" charset="0"/>
-                <a:ea typeface="Cambria" pitchFamily="34" charset="-122"/>
-                <a:cs typeface="Cambria" pitchFamily="34" charset="-120"/>
-              </a:rPr>
-              <a:t>6</a:t>
-            </a:r>
-            <a:endParaRPr lang="en-US" sz="2600" dirty="0"/>
-          </a:p>
-        </p:txBody>
-      </p:sp>
-      <p:sp>
-        <p:nvSpPr>
-          <p:cNvPr id="25" name="Text 23"/>
-          <p:cNvSpPr/>
-          <p:nvPr/>
-        </p:nvSpPr>
-        <p:spPr>
-          <a:xfrm>
-            <a:off x="6858000" y="4480560"/>
-            <a:ext cx="4663440" cy="384048"/>
-          </a:xfrm>
-          <a:prstGeom prst="rect">
-            <a:avLst/>
-          </a:prstGeom>
-          <a:noFill/>
-          <a:ln/>
-        </p:spPr>
-        <p:txBody>
-          <a:bodyPr wrap="square" lIns="0" tIns="0" rIns="0" bIns="0" rtlCol="0" anchor="ctr"/>
-          <a:lstStyle/>
-          <a:p>
-            <a:pPr indent="0" marL="0">
-              <a:buNone/>
-            </a:pPr>
-            <a:r>
-              <a:rPr lang="en-US" sz="1600" b="1" dirty="0">
-                <a:solidFill>
-                  <a:srgbClr val="111827"/>
-                </a:solidFill>
-                <a:latin typeface="Cambria" pitchFamily="34" charset="0"/>
-                <a:ea typeface="Cambria" pitchFamily="34" charset="-122"/>
-                <a:cs typeface="Cambria" pitchFamily="34" charset="-120"/>
-              </a:rPr>
-              <a:t>Walk away</a:t>
-            </a:r>
-            <a:endParaRPr lang="en-US" sz="1600" dirty="0"/>
-          </a:p>
-        </p:txBody>
-      </p:sp>
-      <p:sp>
-        <p:nvSpPr>
-          <p:cNvPr id="26" name="Text 24"/>
-          <p:cNvSpPr/>
-          <p:nvPr/>
-        </p:nvSpPr>
-        <p:spPr>
-          <a:xfrm>
-            <a:off x="6858000" y="4882896"/>
-            <a:ext cx="4663440" cy="548640"/>
-          </a:xfrm>
-          <a:prstGeom prst="rect">
-            <a:avLst/>
-          </a:prstGeom>
-          <a:noFill/>
-          <a:ln/>
-        </p:spPr>
-        <p:txBody>
-          <a:bodyPr wrap="square" lIns="0" tIns="0" rIns="0" bIns="0" rtlCol="0" anchor="ctr"/>
-          <a:lstStyle/>
-          <a:p>
-            <a:pPr indent="0" marL="0">
-              <a:buNone/>
-            </a:pPr>
-            <a:r>
-              <a:rPr lang="en-US" sz="1250" dirty="0">
-                <a:solidFill>
-                  <a:srgbClr val="6B7280"/>
-                </a:solidFill>
-                <a:latin typeface="Calibri" pitchFamily="34" charset="0"/>
-                <a:ea typeface="Calibri" pitchFamily="34" charset="-122"/>
-                <a:cs typeface="Calibri" pitchFamily="34" charset="-120"/>
-              </a:rPr>
-              <a:t>zone empties, lamp switches off to save energy</a:t>
-            </a:r>
-            <a:endParaRPr lang="en-US" sz="1250" dirty="0"/>
-          </a:p>
-        </p:txBody>
-      </p:sp>
-      <p:sp>
-        <p:nvSpPr>
-          <p:cNvPr id="27" name="Shape 25"/>
-          <p:cNvSpPr/>
-          <p:nvPr/>
-        </p:nvSpPr>
-        <p:spPr>
-          <a:xfrm>
-            <a:off x="6858000" y="5559552"/>
-            <a:ext cx="4572000" cy="0"/>
-          </a:xfrm>
-          <a:prstGeom prst="line">
-            <a:avLst/>
-          </a:prstGeom>
-          <a:noFill/>
-          <a:ln w="9525">
-            <a:solidFill>
-              <a:srgbClr val="E5E7EB"/>
-            </a:solidFill>
-            <a:prstDash val="solid"/>
-          </a:ln>
-        </p:spPr>
-      </p:sp>
-      <p:sp>
-        <p:nvSpPr>
-          <p:cNvPr id="28" name="Text 26"/>
-          <p:cNvSpPr/>
-          <p:nvPr/>
-        </p:nvSpPr>
-        <p:spPr>
-          <a:xfrm>
-            <a:off x="640080" y="6080760"/>
-            <a:ext cx="10881360" cy="365760"/>
-          </a:xfrm>
-          <a:prstGeom prst="rect">
-            <a:avLst/>
-          </a:prstGeom>
-          <a:noFill/>
-          <a:ln/>
-        </p:spPr>
-        <p:txBody>
-          <a:bodyPr wrap="square" lIns="0" tIns="0" rIns="0" bIns="0" rtlCol="0" anchor="ctr"/>
-          <a:lstStyle/>
-          <a:p>
-            <a:pPr indent="0" marL="0">
-              <a:buNone/>
-            </a:pPr>
-            <a:r>
-              <a:rPr lang="en-US" sz="1200" i="1" dirty="0">
-                <a:solidFill>
-                  <a:srgbClr val="6B7280"/>
-                </a:solidFill>
-                <a:latin typeface="Calibri" pitchFamily="34" charset="0"/>
-                <a:ea typeface="Calibri" pitchFamily="34" charset="-122"/>
-                <a:cs typeface="Calibri" pitchFamily="34" charset="-120"/>
-              </a:rPr>
-              <a:t>We start on the simulated 6-seat floor plan for context, then hide it and focus on the one real seat.</a:t>
-            </a:r>
-            <a:endParaRPr lang="en-US" sz="1200" dirty="0"/>
+              <a:t>The winter strategy falls out of the weather-dependent costs — that is what a cost-optimal planner buys us over fixed rules.</a:t>
+            </a:r>
+            <a:endParaRPr lang="en-US" sz="1350" dirty="0"/>
           </a:p>
         </p:txBody>
       </p:sp>

--- a/docs/presentation/LibriSense_Demo.pptx
+++ b/docs/presentation/LibriSense_Demo.pptx
@@ -601,7 +601,7 @@
           <a:p>
             <a:r>
               <a:rPr lang="en-US" dirty="0"/>
-              <a:t>Role split: person A at the desk triggers each moment, person B narrates the dashboard, person C explains the plan card whenever it changes. Keep this slide up during the live part as the run-sheet. On 'disturbance': steps 2 and 3 are deliberately different. Covering the sensor (step 2) is a normal input change — the room simply reacts by lighting the lamp. Step 3 is the real disturbance: someone switches the lamp off by hand while the seat is still occupied and dark, so the world stops matching the plan's goal; the closed loop notices the mismatch and re-plans to switch it back on within a second. That robustness to outside interference is the point, not just reacting to darkness.</a:t>
+              <a:t>Role split: person A at the desk triggers each moment, person B narrates the dashboard, person C explains the plan card whenever it changes. Keep this slide up during the live part as the run-sheet. On the closed loop: the honest, demonstrable self-correction is the light one. Covering the sensor is an environmental disturbance; the illuminance drops below the dark threshold and the planner re-lights the seat inside one 2 Hz cycle, under a second. We deliberately do NOT claim to detect a lamp switched off by hand: the lamp state in the model is the last command we sent, not a relay readback, so a manual toggle would not be seen. Keep the story to what the sensors actually close the loop on.</a:t>
             </a:r>
             <a:endParaRPr lang="en-US" dirty="0"/>
           </a:p>
@@ -865,7 +865,7 @@
           <a:p>
             <a:r>
               <a:rPr lang="en-US" dirty="0"/>
-              <a:t>Narrative opener (idea by Niclas). Tell it slowly, first person. The card numbers are an illustrative scenario; the Harvard COGfx study (2015) documented cognitive decline above roughly 1,000 ppm CO2. Close with the question, then answer it on the next slide: this is exactly what LibriSense does.</a:t>
+              <a:t>Opening contrast (concept by Niclas), rebuilt in our design. Left is the status quo: a student concentrating while CO2 silently climbs past 1,500 ppm, well above the ~1,000 ppm mark where the Harvard COGfx study (2015) measured a drop in cognitive performance. Right is the same morning with LibriSense: the room senses the rise and the planner acts, holding the air in the comfortable band. Deliver it as a single before/after beat, then move into the setup slide.</a:t>
             </a:r>
             <a:endParaRPr lang="en-US" dirty="0"/>
           </a:p>
@@ -2216,7 +2216,7 @@
                 <a:ea typeface="Calibri" pitchFamily="34" charset="-122"/>
                 <a:cs typeface="Calibri" pitchFamily="34" charset="-120"/>
               </a:rPr>
-              <a:t>occupancy detected, focus session starts</a:t>
+              <a:t>occupancy detected, the focus session starts</a:t>
             </a:r>
             <a:endParaRPr lang="en-US" sz="1250" dirty="0"/>
           </a:p>
@@ -2356,7 +2356,7 @@
                 <a:ea typeface="Calibri" pitchFamily="34" charset="-122"/>
                 <a:cs typeface="Calibri" pitchFamily="34" charset="-120"/>
               </a:rPr>
-              <a:t>normal reaction: the zone turns dark, the planner switches the lamp on</a:t>
+              <a:t>the illuminance drops, the planner re-lights the seat within one cycle, under 1 s</a:t>
             </a:r>
             <a:endParaRPr lang="en-US" sz="1250" dirty="0"/>
           </a:p>
@@ -2457,7 +2457,7 @@
                 <a:ea typeface="Cambria" pitchFamily="34" charset="-122"/>
                 <a:cs typeface="Cambria" pitchFamily="34" charset="-120"/>
               </a:rPr>
-              <a:t>Switch the lamp off by hand</a:t>
+              <a:t>Keep focusing</a:t>
             </a:r>
             <a:endParaRPr lang="en-US" sz="1600" dirty="0"/>
           </a:p>
@@ -2496,7 +2496,7 @@
                 <a:ea typeface="Calibri" pitchFamily="34" charset="-122"/>
                 <a:cs typeface="Calibri" pitchFamily="34" charset="-120"/>
               </a:rPr>
-              <a:t>an external disturbance: 'lit' no longer holds, so the planner re-lights it in under 1 s</a:t>
+              <a:t>after 2 min: LED and gentle buzzer suggest a break</a:t>
             </a:r>
             <a:endParaRPr lang="en-US" sz="1250" dirty="0"/>
           </a:p>
@@ -2597,7 +2597,7 @@
                 <a:ea typeface="Cambria" pitchFamily="34" charset="-122"/>
                 <a:cs typeface="Cambria" pitchFamily="34" charset="-120"/>
               </a:rPr>
-              <a:t>Keep focusing</a:t>
+              <a:t>CO₂ rises</a:t>
             </a:r>
             <a:endParaRPr lang="en-US" sz="1600" dirty="0"/>
           </a:p>
@@ -2636,7 +2636,7 @@
                 <a:ea typeface="Calibri" pitchFamily="34" charset="-122"/>
                 <a:cs typeface="Calibri" pitchFamily="34" charset="-120"/>
               </a:rPr>
-              <a:t>after 2 min: LED and gentle buzzer suggest a break</a:t>
+              <a:t>the planner opens the windows on the floor plan, CO₂ falls again</a:t>
             </a:r>
             <a:endParaRPr lang="en-US" sz="1250" dirty="0"/>
           </a:p>
@@ -2737,7 +2737,7 @@
                 <a:ea typeface="Cambria" pitchFamily="34" charset="-122"/>
                 <a:cs typeface="Cambria" pitchFamily="34" charset="-120"/>
               </a:rPr>
-              <a:t>CO₂ rises</a:t>
+              <a:t>Walk away</a:t>
             </a:r>
             <a:endParaRPr lang="en-US" sz="1600" dirty="0"/>
           </a:p>
@@ -2776,7 +2776,7 @@
                 <a:ea typeface="Calibri" pitchFamily="34" charset="-122"/>
                 <a:cs typeface="Calibri" pitchFamily="34" charset="-120"/>
               </a:rPr>
-              <a:t>the planner opens the windows on the floor plan, CO₂ falls again</a:t>
+              <a:t>the zone empties, the lamp switches off to save energy</a:t>
             </a:r>
             <a:endParaRPr lang="en-US" sz="1250" dirty="0"/>
           </a:p>
@@ -2808,146 +2808,6 @@
       <p:sp>
         <p:nvSpPr>
           <p:cNvPr id="24" name="Text 22"/>
-          <p:cNvSpPr/>
-          <p:nvPr/>
-        </p:nvSpPr>
-        <p:spPr>
-          <a:xfrm>
-            <a:off x="6263640" y="4498848"/>
-            <a:ext cx="502920" cy="502920"/>
-          </a:xfrm>
-          <a:prstGeom prst="rect">
-            <a:avLst/>
-          </a:prstGeom>
-          <a:noFill/>
-          <a:ln/>
-        </p:spPr>
-        <p:txBody>
-          <a:bodyPr wrap="square" lIns="0" tIns="0" rIns="0" bIns="0" rtlCol="0" anchor="ctr"/>
-          <a:lstStyle/>
-          <a:p>
-            <a:pPr indent="0" marL="0">
-              <a:buNone/>
-            </a:pPr>
-            <a:r>
-              <a:rPr lang="en-US" sz="2600" b="1" dirty="0">
-                <a:solidFill>
-                  <a:srgbClr val="D97706"/>
-                </a:solidFill>
-                <a:latin typeface="Cambria" pitchFamily="34" charset="0"/>
-                <a:ea typeface="Cambria" pitchFamily="34" charset="-122"/>
-                <a:cs typeface="Cambria" pitchFamily="34" charset="-120"/>
-              </a:rPr>
-              <a:t>6</a:t>
-            </a:r>
-            <a:endParaRPr lang="en-US" sz="2600" dirty="0"/>
-          </a:p>
-        </p:txBody>
-      </p:sp>
-      <p:sp>
-        <p:nvSpPr>
-          <p:cNvPr id="25" name="Text 23"/>
-          <p:cNvSpPr/>
-          <p:nvPr/>
-        </p:nvSpPr>
-        <p:spPr>
-          <a:xfrm>
-            <a:off x="6858000" y="4480560"/>
-            <a:ext cx="4663440" cy="384048"/>
-          </a:xfrm>
-          <a:prstGeom prst="rect">
-            <a:avLst/>
-          </a:prstGeom>
-          <a:noFill/>
-          <a:ln/>
-        </p:spPr>
-        <p:txBody>
-          <a:bodyPr wrap="square" lIns="0" tIns="0" rIns="0" bIns="0" rtlCol="0" anchor="ctr"/>
-          <a:lstStyle/>
-          <a:p>
-            <a:pPr indent="0" marL="0">
-              <a:buNone/>
-            </a:pPr>
-            <a:r>
-              <a:rPr lang="en-US" sz="1600" b="1" dirty="0">
-                <a:solidFill>
-                  <a:srgbClr val="111827"/>
-                </a:solidFill>
-                <a:latin typeface="Cambria" pitchFamily="34" charset="0"/>
-                <a:ea typeface="Cambria" pitchFamily="34" charset="-122"/>
-                <a:cs typeface="Cambria" pitchFamily="34" charset="-120"/>
-              </a:rPr>
-              <a:t>Walk away</a:t>
-            </a:r>
-            <a:endParaRPr lang="en-US" sz="1600" dirty="0"/>
-          </a:p>
-        </p:txBody>
-      </p:sp>
-      <p:sp>
-        <p:nvSpPr>
-          <p:cNvPr id="26" name="Text 24"/>
-          <p:cNvSpPr/>
-          <p:nvPr/>
-        </p:nvSpPr>
-        <p:spPr>
-          <a:xfrm>
-            <a:off x="6858000" y="4882896"/>
-            <a:ext cx="4663440" cy="548640"/>
-          </a:xfrm>
-          <a:prstGeom prst="rect">
-            <a:avLst/>
-          </a:prstGeom>
-          <a:noFill/>
-          <a:ln/>
-        </p:spPr>
-        <p:txBody>
-          <a:bodyPr wrap="square" lIns="0" tIns="0" rIns="0" bIns="0" rtlCol="0" anchor="ctr"/>
-          <a:lstStyle/>
-          <a:p>
-            <a:pPr indent="0" marL="0">
-              <a:buNone/>
-            </a:pPr>
-            <a:r>
-              <a:rPr lang="en-US" sz="1250" dirty="0">
-                <a:solidFill>
-                  <a:srgbClr val="6B7280"/>
-                </a:solidFill>
-                <a:latin typeface="Calibri" pitchFamily="34" charset="0"/>
-                <a:ea typeface="Calibri" pitchFamily="34" charset="-122"/>
-                <a:cs typeface="Calibri" pitchFamily="34" charset="-120"/>
-              </a:rPr>
-              <a:t>zone empties, lamp switches off to save energy</a:t>
-            </a:r>
-            <a:endParaRPr lang="en-US" sz="1250" dirty="0"/>
-          </a:p>
-        </p:txBody>
-      </p:sp>
-      <p:sp>
-        <p:nvSpPr>
-          <p:cNvPr id="27" name="Shape 25"/>
-          <p:cNvSpPr/>
-          <p:nvPr/>
-        </p:nvSpPr>
-        <p:spPr>
-          <a:xfrm>
-            <a:off x="6858000" y="5559552"/>
-            <a:ext cx="4572000" cy="0"/>
-          </a:xfrm>
-          <a:prstGeom prst="line">
-            <a:avLst/>
-          </a:prstGeom>
-          <a:noFill/>
-          <a:ln w="9525">
-            <a:solidFill>
-              <a:srgbClr val="E5E7EB"/>
-            </a:solidFill>
-            <a:prstDash val="solid"/>
-          </a:ln>
-        </p:spPr>
-      </p:sp>
-      <p:sp>
-        <p:nvSpPr>
-          <p:cNvPr id="28" name="Text 26"/>
           <p:cNvSpPr/>
           <p:nvPr/>
         </p:nvSpPr>
@@ -4471,7 +4331,7 @@
     <p:bg>
       <p:bgPr>
         <a:solidFill>
-          <a:srgbClr val="0F1B2D"/>
+          <a:srgbClr val="FFFFFF"/>
         </a:solidFill>
       </p:bgPr>
     </p:bg>
@@ -4491,135 +4351,657 @@
       </p:grpSpPr>
       <p:sp>
         <p:nvSpPr>
-          <p:cNvPr id="2" name="Text 0"/>
-          <p:cNvSpPr/>
-          <p:nvPr/>
-        </p:nvSpPr>
-        <p:spPr>
-          <a:xfrm>
-            <a:off x="822960" y="502920"/>
-            <a:ext cx="5486400" cy="274320"/>
-          </a:xfrm>
-          <a:prstGeom prst="rect">
-            <a:avLst/>
-          </a:prstGeom>
-          <a:noFill/>
-          <a:ln/>
-        </p:spPr>
-        <p:txBody>
-          <a:bodyPr wrap="square" lIns="0" tIns="0" rIns="0" bIns="0" rtlCol="0" anchor="ctr"/>
-          <a:lstStyle/>
-          <a:p>
-            <a:pPr indent="0" marL="0">
-              <a:buNone/>
-            </a:pPr>
-            <a:r>
-              <a:rPr lang="en-US" sz="1100" b="1" spc="200" kern="0" dirty="0">
-                <a:solidFill>
-                  <a:srgbClr val="D97706"/>
-                </a:solidFill>
-                <a:latin typeface="Calibri" pitchFamily="34" charset="0"/>
-                <a:ea typeface="Calibri" pitchFamily="34" charset="-122"/>
-                <a:cs typeface="Calibri" pitchFamily="34" charset="-120"/>
-              </a:rPr>
-              <a:t>THE PROBLEM</a:t>
-            </a:r>
-            <a:endParaRPr lang="en-US" sz="1100" dirty="0"/>
-          </a:p>
-        </p:txBody>
-      </p:sp>
-      <p:sp>
-        <p:nvSpPr>
-          <p:cNvPr id="3" name="Text 1"/>
-          <p:cNvSpPr/>
-          <p:nvPr/>
-        </p:nvSpPr>
-        <p:spPr>
-          <a:xfrm>
-            <a:off x="822960" y="1097280"/>
-            <a:ext cx="5852160" cy="1600200"/>
-          </a:xfrm>
-          <a:prstGeom prst="rect">
-            <a:avLst/>
-          </a:prstGeom>
-          <a:noFill/>
-          <a:ln/>
-        </p:spPr>
-        <p:txBody>
-          <a:bodyPr wrap="square" lIns="0" tIns="0" rIns="0" bIns="0" rtlCol="0" anchor="ctr"/>
-          <a:lstStyle/>
-          <a:p>
-            <a:pPr indent="0" marL="0">
-              <a:lnSpc>
-                <a:spcPct val="115000"/>
-              </a:lnSpc>
-              <a:buNone/>
-            </a:pPr>
-            <a:r>
-              <a:rPr lang="en-US" sz="2500" b="1" dirty="0">
-                <a:solidFill>
-                  <a:srgbClr val="FFFFFF"/>
+          <p:cNvPr id="2" name="Shape 0"/>
+          <p:cNvSpPr/>
+          <p:nvPr/>
+        </p:nvSpPr>
+        <p:spPr>
+          <a:xfrm>
+            <a:off x="6094476" y="0"/>
+            <a:ext cx="6094476" cy="6858000"/>
+          </a:xfrm>
+          <a:prstGeom prst="rect">
+            <a:avLst/>
+          </a:prstGeom>
+          <a:solidFill>
+            <a:srgbClr val="0F1B2D"/>
+          </a:solidFill>
+          <a:ln/>
+        </p:spPr>
+      </p:sp>
+      <p:sp>
+        <p:nvSpPr>
+          <p:cNvPr id="3" name="Shape 1"/>
+          <p:cNvSpPr/>
+          <p:nvPr/>
+        </p:nvSpPr>
+        <p:spPr>
+          <a:xfrm>
+            <a:off x="0" y="0"/>
+            <a:ext cx="6094476" cy="54864"/>
+          </a:xfrm>
+          <a:prstGeom prst="rect">
+            <a:avLst/>
+          </a:prstGeom>
+          <a:solidFill>
+            <a:srgbClr val="B91C1C"/>
+          </a:solidFill>
+          <a:ln/>
+        </p:spPr>
+      </p:sp>
+      <p:sp>
+        <p:nvSpPr>
+          <p:cNvPr id="4" name="Shape 2"/>
+          <p:cNvSpPr/>
+          <p:nvPr/>
+        </p:nvSpPr>
+        <p:spPr>
+          <a:xfrm>
+            <a:off x="6094476" y="0"/>
+            <a:ext cx="6094476" cy="54864"/>
+          </a:xfrm>
+          <a:prstGeom prst="rect">
+            <a:avLst/>
+          </a:prstGeom>
+          <a:solidFill>
+            <a:srgbClr val="15803D"/>
+          </a:solidFill>
+          <a:ln/>
+        </p:spPr>
+      </p:sp>
+      <p:sp>
+        <p:nvSpPr>
+          <p:cNvPr id="5" name="Text 3"/>
+          <p:cNvSpPr/>
+          <p:nvPr/>
+        </p:nvSpPr>
+        <p:spPr>
+          <a:xfrm>
+            <a:off x="685800" y="502920"/>
+            <a:ext cx="4754880" cy="274320"/>
+          </a:xfrm>
+          <a:prstGeom prst="rect">
+            <a:avLst/>
+          </a:prstGeom>
+          <a:noFill/>
+          <a:ln/>
+        </p:spPr>
+        <p:txBody>
+          <a:bodyPr wrap="square" lIns="0" tIns="0" rIns="0" bIns="0" rtlCol="0" anchor="ctr"/>
+          <a:lstStyle/>
+          <a:p>
+            <a:pPr indent="0" marL="0">
+              <a:buNone/>
+            </a:pPr>
+            <a:r>
+              <a:rPr lang="en-US" sz="1200" b="1" spc="300" kern="0" dirty="0">
+                <a:solidFill>
+                  <a:srgbClr val="B91C1C"/>
+                </a:solidFill>
+                <a:latin typeface="Calibri" pitchFamily="34" charset="0"/>
+                <a:ea typeface="Calibri" pitchFamily="34" charset="-122"/>
+                <a:cs typeface="Calibri" pitchFamily="34" charset="-120"/>
+              </a:rPr>
+              <a:t>BEFORE</a:t>
+            </a:r>
+            <a:endParaRPr lang="en-US" sz="1200" dirty="0"/>
+          </a:p>
+        </p:txBody>
+      </p:sp>
+      <p:sp>
+        <p:nvSpPr>
+          <p:cNvPr id="6" name="Text 4"/>
+          <p:cNvSpPr/>
+          <p:nvPr/>
+        </p:nvSpPr>
+        <p:spPr>
+          <a:xfrm>
+            <a:off x="685800" y="914400"/>
+            <a:ext cx="5120640" cy="640080"/>
+          </a:xfrm>
+          <a:prstGeom prst="rect">
+            <a:avLst/>
+          </a:prstGeom>
+          <a:noFill/>
+          <a:ln/>
+        </p:spPr>
+        <p:txBody>
+          <a:bodyPr wrap="square" lIns="0" tIns="0" rIns="0" bIns="0" rtlCol="0" anchor="ctr"/>
+          <a:lstStyle/>
+          <a:p>
+            <a:pPr indent="0" marL="0">
+              <a:buNone/>
+            </a:pPr>
+            <a:r>
+              <a:rPr lang="en-US" sz="3000" b="1" dirty="0">
+                <a:solidFill>
+                  <a:srgbClr val="111827"/>
                 </a:solidFill>
                 <a:latin typeface="Cambria" pitchFamily="34" charset="0"/>
                 <a:ea typeface="Cambria" pitchFamily="34" charset="-122"/>
                 <a:cs typeface="Cambria" pitchFamily="34" charset="-120"/>
               </a:rPr>
-              <a:t>It's a hot Monday morning.</a:t>
-            </a:r>
-            <a:endParaRPr lang="en-US" sz="2500" dirty="0"/>
-          </a:p>
-          <a:p>
-            <a:pPr indent="0" marL="0">
-              <a:lnSpc>
-                <a:spcPct val="115000"/>
-              </a:lnSpc>
-              <a:buNone/>
-            </a:pPr>
-            <a:r>
-              <a:rPr lang="en-US" sz="2500" b="1" dirty="0">
-                <a:solidFill>
-                  <a:srgbClr val="FFFFFF"/>
+              <a:t>Monday morning.</a:t>
+            </a:r>
+            <a:endParaRPr lang="en-US" sz="3000" dirty="0"/>
+          </a:p>
+        </p:txBody>
+      </p:sp>
+      <p:sp>
+        <p:nvSpPr>
+          <p:cNvPr id="7" name="Text 5"/>
+          <p:cNvSpPr/>
+          <p:nvPr/>
+        </p:nvSpPr>
+        <p:spPr>
+          <a:xfrm>
+            <a:off x="685800" y="1874520"/>
+            <a:ext cx="5029200" cy="457200"/>
+          </a:xfrm>
+          <a:prstGeom prst="rect">
+            <a:avLst/>
+          </a:prstGeom>
+          <a:noFill/>
+          <a:ln/>
+        </p:spPr>
+        <p:txBody>
+          <a:bodyPr wrap="square" lIns="0" tIns="0" rIns="0" bIns="0" rtlCol="0" anchor="ctr"/>
+          <a:lstStyle/>
+          <a:p>
+            <a:pPr indent="0" marL="0">
+              <a:buNone/>
+            </a:pPr>
+            <a:r>
+              <a:rPr lang="en-US" sz="1550" dirty="0">
+                <a:solidFill>
+                  <a:srgbClr val="6B7280"/>
+                </a:solidFill>
+                <a:latin typeface="Calibri" pitchFamily="34" charset="0"/>
+                <a:ea typeface="Calibri" pitchFamily="34" charset="-122"/>
+                <a:cs typeface="Calibri" pitchFamily="34" charset="-120"/>
+              </a:rPr>
+              <a:t>Library. Studying for Friday's exam.</a:t>
+            </a:r>
+            <a:endParaRPr lang="en-US" sz="1550" dirty="0"/>
+          </a:p>
+        </p:txBody>
+      </p:sp>
+      <p:sp>
+        <p:nvSpPr>
+          <p:cNvPr id="8" name="Text 6"/>
+          <p:cNvSpPr/>
+          <p:nvPr/>
+        </p:nvSpPr>
+        <p:spPr>
+          <a:xfrm>
+            <a:off x="685800" y="2423160"/>
+            <a:ext cx="5029200" cy="457200"/>
+          </a:xfrm>
+          <a:prstGeom prst="rect">
+            <a:avLst/>
+          </a:prstGeom>
+          <a:noFill/>
+          <a:ln/>
+        </p:spPr>
+        <p:txBody>
+          <a:bodyPr wrap="square" lIns="0" tIns="0" rIns="0" bIns="0" rtlCol="0" anchor="ctr"/>
+          <a:lstStyle/>
+          <a:p>
+            <a:pPr indent="0" marL="0">
+              <a:buNone/>
+            </a:pPr>
+            <a:r>
+              <a:rPr lang="en-US" sz="1550" dirty="0">
+                <a:solidFill>
+                  <a:srgbClr val="6B7280"/>
+                </a:solidFill>
+                <a:latin typeface="Calibri" pitchFamily="34" charset="0"/>
+                <a:ea typeface="Calibri" pitchFamily="34" charset="-122"/>
+                <a:cs typeface="Calibri" pitchFamily="34" charset="-120"/>
+              </a:rPr>
+              <a:t>Head down, full concentration.</a:t>
+            </a:r>
+            <a:endParaRPr lang="en-US" sz="1550" dirty="0"/>
+          </a:p>
+        </p:txBody>
+      </p:sp>
+      <p:sp>
+        <p:nvSpPr>
+          <p:cNvPr id="9" name="Text 7"/>
+          <p:cNvSpPr/>
+          <p:nvPr/>
+        </p:nvSpPr>
+        <p:spPr>
+          <a:xfrm>
+            <a:off x="685800" y="2971800"/>
+            <a:ext cx="5029200" cy="457200"/>
+          </a:xfrm>
+          <a:prstGeom prst="rect">
+            <a:avLst/>
+          </a:prstGeom>
+          <a:noFill/>
+          <a:ln/>
+        </p:spPr>
+        <p:txBody>
+          <a:bodyPr wrap="square" lIns="0" tIns="0" rIns="0" bIns="0" rtlCol="0" anchor="ctr"/>
+          <a:lstStyle/>
+          <a:p>
+            <a:pPr indent="0" marL="0">
+              <a:buNone/>
+            </a:pPr>
+            <a:r>
+              <a:rPr lang="en-US" sz="1550" dirty="0">
+                <a:solidFill>
+                  <a:srgbClr val="6B7280"/>
+                </a:solidFill>
+                <a:latin typeface="Calibri" pitchFamily="34" charset="0"/>
+                <a:ea typeface="Calibri" pitchFamily="34" charset="-122"/>
+                <a:cs typeface="Calibri" pitchFamily="34" charset="-120"/>
+              </a:rPr>
+              <a:t>CO₂ climbs past 1,500 ppm. Silently.</a:t>
+            </a:r>
+            <a:endParaRPr lang="en-US" sz="1550" dirty="0"/>
+          </a:p>
+        </p:txBody>
+      </p:sp>
+      <p:sp>
+        <p:nvSpPr>
+          <p:cNvPr id="10" name="Text 8"/>
+          <p:cNvSpPr/>
+          <p:nvPr/>
+        </p:nvSpPr>
+        <p:spPr>
+          <a:xfrm>
+            <a:off x="685800" y="3566160"/>
+            <a:ext cx="5029200" cy="457200"/>
+          </a:xfrm>
+          <a:prstGeom prst="rect">
+            <a:avLst/>
+          </a:prstGeom>
+          <a:noFill/>
+          <a:ln/>
+        </p:spPr>
+        <p:txBody>
+          <a:bodyPr wrap="square" lIns="0" tIns="0" rIns="0" bIns="0" rtlCol="0" anchor="ctr"/>
+          <a:lstStyle/>
+          <a:p>
+            <a:pPr indent="0" marL="0">
+              <a:buNone/>
+            </a:pPr>
+            <a:r>
+              <a:rPr lang="en-US" sz="1650" b="1" dirty="0">
+                <a:solidFill>
+                  <a:srgbClr val="111827"/>
+                </a:solidFill>
+                <a:latin typeface="Calibri" pitchFamily="34" charset="0"/>
+                <a:ea typeface="Calibri" pitchFamily="34" charset="-122"/>
+                <a:cs typeface="Calibri" pitchFamily="34" charset="-120"/>
+              </a:rPr>
+              <a:t>Your work is wasted.</a:t>
+            </a:r>
+            <a:endParaRPr lang="en-US" sz="1650" dirty="0"/>
+          </a:p>
+        </p:txBody>
+      </p:sp>
+      <p:sp>
+        <p:nvSpPr>
+          <p:cNvPr id="11" name="Shape 9"/>
+          <p:cNvSpPr/>
+          <p:nvPr/>
+        </p:nvSpPr>
+        <p:spPr>
+          <a:xfrm>
+            <a:off x="685800" y="4297680"/>
+            <a:ext cx="4663440" cy="0"/>
+          </a:xfrm>
+          <a:prstGeom prst="line">
+            <a:avLst/>
+          </a:prstGeom>
+          <a:noFill/>
+          <a:ln w="12700">
+            <a:solidFill>
+              <a:srgbClr val="E5E7EB"/>
+            </a:solidFill>
+            <a:prstDash val="solid"/>
+          </a:ln>
+        </p:spPr>
+      </p:sp>
+      <p:sp>
+        <p:nvSpPr>
+          <p:cNvPr id="12" name="Text 10"/>
+          <p:cNvSpPr/>
+          <p:nvPr/>
+        </p:nvSpPr>
+        <p:spPr>
+          <a:xfrm>
+            <a:off x="685800" y="4526280"/>
+            <a:ext cx="5029200" cy="822960"/>
+          </a:xfrm>
+          <a:prstGeom prst="rect">
+            <a:avLst/>
+          </a:prstGeom>
+          <a:noFill/>
+          <a:ln/>
+        </p:spPr>
+        <p:txBody>
+          <a:bodyPr wrap="square" lIns="0" tIns="0" rIns="0" bIns="0" rtlCol="0" anchor="ctr"/>
+          <a:lstStyle/>
+          <a:p>
+            <a:pPr indent="0" marL="0">
+              <a:buNone/>
+            </a:pPr>
+            <a:r>
+              <a:rPr lang="en-US" sz="4600" b="1" dirty="0">
+                <a:solidFill>
+                  <a:srgbClr val="B91C1C"/>
                 </a:solidFill>
                 <a:latin typeface="Cambria" pitchFamily="34" charset="0"/>
                 <a:ea typeface="Cambria" pitchFamily="34" charset="-122"/>
                 <a:cs typeface="Cambria" pitchFamily="34" charset="-120"/>
               </a:rPr>
-              <a:t>You find a seat in the library,</a:t>
-            </a:r>
-            <a:endParaRPr lang="en-US" sz="2500" dirty="0"/>
-          </a:p>
-          <a:p>
-            <a:pPr indent="0" marL="0">
-              <a:lnSpc>
-                <a:spcPct val="115000"/>
-              </a:lnSpc>
-              <a:buNone/>
-            </a:pPr>
-            <a:r>
-              <a:rPr lang="en-US" sz="2500" b="1" dirty="0">
-                <a:solidFill>
-                  <a:srgbClr val="FFFFFF"/>
+              <a:t>1,500</a:t>
+            </a:r>
+            <a:pPr indent="0" marL="0">
+              <a:buNone/>
+            </a:pPr>
+            <a:r>
+              <a:rPr lang="en-US" sz="2000" dirty="0">
+                <a:solidFill>
+                  <a:srgbClr val="6B7280"/>
                 </a:solidFill>
                 <a:latin typeface="Cambria" pitchFamily="34" charset="0"/>
                 <a:ea typeface="Cambria" pitchFamily="34" charset="-122"/>
                 <a:cs typeface="Cambria" pitchFamily="34" charset="-120"/>
               </a:rPr>
-              <a:t>close the door.</a:t>
-            </a:r>
-            <a:endParaRPr lang="en-US" sz="2500" dirty="0"/>
-          </a:p>
-        </p:txBody>
-      </p:sp>
-      <p:sp>
-        <p:nvSpPr>
-          <p:cNvPr id="4" name="Shape 2"/>
-          <p:cNvSpPr/>
-          <p:nvPr/>
-        </p:nvSpPr>
-        <p:spPr>
-          <a:xfrm>
-            <a:off x="822960" y="2926080"/>
-            <a:ext cx="2377440" cy="0"/>
+              <a:t>  ppm</a:t>
+            </a:r>
+            <a:endParaRPr lang="en-US" sz="4600" dirty="0"/>
+          </a:p>
+        </p:txBody>
+      </p:sp>
+      <p:sp>
+        <p:nvSpPr>
+          <p:cNvPr id="13" name="Text 11"/>
+          <p:cNvSpPr/>
+          <p:nvPr/>
+        </p:nvSpPr>
+        <p:spPr>
+          <a:xfrm>
+            <a:off x="685800" y="5440680"/>
+            <a:ext cx="5029200" cy="457200"/>
+          </a:xfrm>
+          <a:prstGeom prst="rect">
+            <a:avLst/>
+          </a:prstGeom>
+          <a:noFill/>
+          <a:ln/>
+        </p:spPr>
+        <p:txBody>
+          <a:bodyPr wrap="square" lIns="0" tIns="0" rIns="0" bIns="0" rtlCol="0" anchor="ctr"/>
+          <a:lstStyle/>
+          <a:p>
+            <a:pPr indent="0" marL="0">
+              <a:buNone/>
+            </a:pPr>
+            <a:r>
+              <a:rPr lang="en-US" sz="1200" i="1" dirty="0">
+                <a:solidFill>
+                  <a:srgbClr val="6B7280"/>
+                </a:solidFill>
+                <a:latin typeface="Calibri" pitchFamily="34" charset="0"/>
+                <a:ea typeface="Calibri" pitchFamily="34" charset="-122"/>
+                <a:cs typeface="Calibri" pitchFamily="34" charset="-120"/>
+              </a:rPr>
+              <a:t>above 1,000 ppm, cognitive performance measurably drops</a:t>
+            </a:r>
+            <a:endParaRPr lang="en-US" sz="1200" dirty="0"/>
+          </a:p>
+        </p:txBody>
+      </p:sp>
+      <p:sp>
+        <p:nvSpPr>
+          <p:cNvPr id="14" name="Text 12"/>
+          <p:cNvSpPr/>
+          <p:nvPr/>
+        </p:nvSpPr>
+        <p:spPr>
+          <a:xfrm>
+            <a:off x="6766560" y="502920"/>
+            <a:ext cx="4754880" cy="274320"/>
+          </a:xfrm>
+          <a:prstGeom prst="rect">
+            <a:avLst/>
+          </a:prstGeom>
+          <a:noFill/>
+          <a:ln/>
+        </p:spPr>
+        <p:txBody>
+          <a:bodyPr wrap="square" lIns="0" tIns="0" rIns="0" bIns="0" rtlCol="0" anchor="ctr"/>
+          <a:lstStyle/>
+          <a:p>
+            <a:pPr indent="0" marL="0">
+              <a:buNone/>
+            </a:pPr>
+            <a:r>
+              <a:rPr lang="en-US" sz="1200" b="1" spc="300" kern="0" dirty="0">
+                <a:solidFill>
+                  <a:srgbClr val="3FBF7F"/>
+                </a:solidFill>
+                <a:latin typeface="Calibri" pitchFamily="34" charset="0"/>
+                <a:ea typeface="Calibri" pitchFamily="34" charset="-122"/>
+                <a:cs typeface="Calibri" pitchFamily="34" charset="-120"/>
+              </a:rPr>
+              <a:t>WITH LIBRISENSE</a:t>
+            </a:r>
+            <a:endParaRPr lang="en-US" sz="1200" dirty="0"/>
+          </a:p>
+        </p:txBody>
+      </p:sp>
+      <p:sp>
+        <p:nvSpPr>
+          <p:cNvPr id="15" name="Text 13"/>
+          <p:cNvSpPr/>
+          <p:nvPr/>
+        </p:nvSpPr>
+        <p:spPr>
+          <a:xfrm>
+            <a:off x="6766560" y="914400"/>
+            <a:ext cx="5120640" cy="640080"/>
+          </a:xfrm>
+          <a:prstGeom prst="rect">
+            <a:avLst/>
+          </a:prstGeom>
+          <a:noFill/>
+          <a:ln/>
+        </p:spPr>
+        <p:txBody>
+          <a:bodyPr wrap="square" lIns="0" tIns="0" rIns="0" bIns="0" rtlCol="0" anchor="ctr"/>
+          <a:lstStyle/>
+          <a:p>
+            <a:pPr indent="0" marL="0">
+              <a:buNone/>
+            </a:pPr>
+            <a:r>
+              <a:rPr lang="en-US" sz="3000" b="1" dirty="0">
+                <a:solidFill>
+                  <a:srgbClr val="FFFFFF"/>
+                </a:solidFill>
+                <a:latin typeface="Cambria" pitchFamily="34" charset="0"/>
+                <a:ea typeface="Cambria" pitchFamily="34" charset="-122"/>
+                <a:cs typeface="Cambria" pitchFamily="34" charset="-120"/>
+              </a:rPr>
+              <a:t>Same morning.</a:t>
+            </a:r>
+            <a:endParaRPr lang="en-US" sz="3000" dirty="0"/>
+          </a:p>
+        </p:txBody>
+      </p:sp>
+      <p:sp>
+        <p:nvSpPr>
+          <p:cNvPr id="16" name="Text 14"/>
+          <p:cNvSpPr/>
+          <p:nvPr/>
+        </p:nvSpPr>
+        <p:spPr>
+          <a:xfrm>
+            <a:off x="6766560" y="1874520"/>
+            <a:ext cx="4937760" cy="457200"/>
+          </a:xfrm>
+          <a:prstGeom prst="rect">
+            <a:avLst/>
+          </a:prstGeom>
+          <a:noFill/>
+          <a:ln/>
+        </p:spPr>
+        <p:txBody>
+          <a:bodyPr wrap="square" lIns="0" tIns="0" rIns="0" bIns="0" rtlCol="0" anchor="ctr"/>
+          <a:lstStyle/>
+          <a:p>
+            <a:pPr indent="0" marL="0">
+              <a:buNone/>
+            </a:pPr>
+            <a:r>
+              <a:rPr lang="en-US" sz="1550" dirty="0">
+                <a:solidFill>
+                  <a:srgbClr val="9DB2C7"/>
+                </a:solidFill>
+                <a:latin typeface="Calibri" pitchFamily="34" charset="0"/>
+                <a:ea typeface="Calibri" pitchFamily="34" charset="-122"/>
+                <a:cs typeface="Calibri" pitchFamily="34" charset="-120"/>
+              </a:rPr>
+              <a:t>Sensors catch the CO₂ rise.</a:t>
+            </a:r>
+            <a:endParaRPr lang="en-US" sz="1550" dirty="0"/>
+          </a:p>
+        </p:txBody>
+      </p:sp>
+      <p:sp>
+        <p:nvSpPr>
+          <p:cNvPr id="17" name="Text 15"/>
+          <p:cNvSpPr/>
+          <p:nvPr/>
+        </p:nvSpPr>
+        <p:spPr>
+          <a:xfrm>
+            <a:off x="6766560" y="2423160"/>
+            <a:ext cx="4937760" cy="457200"/>
+          </a:xfrm>
+          <a:prstGeom prst="rect">
+            <a:avLst/>
+          </a:prstGeom>
+          <a:noFill/>
+          <a:ln/>
+        </p:spPr>
+        <p:txBody>
+          <a:bodyPr wrap="square" lIns="0" tIns="0" rIns="0" bIns="0" rtlCol="0" anchor="ctr"/>
+          <a:lstStyle/>
+          <a:p>
+            <a:pPr indent="0" marL="0">
+              <a:buNone/>
+            </a:pPr>
+            <a:r>
+              <a:rPr lang="en-US" sz="1550" dirty="0">
+                <a:solidFill>
+                  <a:srgbClr val="9DB2C7"/>
+                </a:solidFill>
+                <a:latin typeface="Calibri" pitchFamily="34" charset="0"/>
+                <a:ea typeface="Calibri" pitchFamily="34" charset="-122"/>
+                <a:cs typeface="Calibri" pitchFamily="34" charset="-120"/>
+              </a:rPr>
+              <a:t>The AI planner finds the optimal environment.</a:t>
+            </a:r>
+            <a:endParaRPr lang="en-US" sz="1550" dirty="0"/>
+          </a:p>
+        </p:txBody>
+      </p:sp>
+      <p:sp>
+        <p:nvSpPr>
+          <p:cNvPr id="18" name="Text 16"/>
+          <p:cNvSpPr/>
+          <p:nvPr/>
+        </p:nvSpPr>
+        <p:spPr>
+          <a:xfrm>
+            <a:off x="6766560" y="2971800"/>
+            <a:ext cx="4937760" cy="457200"/>
+          </a:xfrm>
+          <a:prstGeom prst="rect">
+            <a:avLst/>
+          </a:prstGeom>
+          <a:noFill/>
+          <a:ln/>
+        </p:spPr>
+        <p:txBody>
+          <a:bodyPr wrap="square" lIns="0" tIns="0" rIns="0" bIns="0" rtlCol="0" anchor="ctr"/>
+          <a:lstStyle/>
+          <a:p>
+            <a:pPr indent="0" marL="0">
+              <a:buNone/>
+            </a:pPr>
+            <a:r>
+              <a:rPr lang="en-US" sz="1550" dirty="0">
+                <a:solidFill>
+                  <a:srgbClr val="9DB2C7"/>
+                </a:solidFill>
+                <a:latin typeface="Calibri" pitchFamily="34" charset="0"/>
+                <a:ea typeface="Calibri" pitchFamily="34" charset="-122"/>
+                <a:cs typeface="Calibri" pitchFamily="34" charset="-120"/>
+              </a:rPr>
+              <a:t>It optimises the whole room, not just your seat.</a:t>
+            </a:r>
+            <a:endParaRPr lang="en-US" sz="1550" dirty="0"/>
+          </a:p>
+        </p:txBody>
+      </p:sp>
+      <p:sp>
+        <p:nvSpPr>
+          <p:cNvPr id="19" name="Text 17"/>
+          <p:cNvSpPr/>
+          <p:nvPr/>
+        </p:nvSpPr>
+        <p:spPr>
+          <a:xfrm>
+            <a:off x="6766560" y="3566160"/>
+            <a:ext cx="4937760" cy="457200"/>
+          </a:xfrm>
+          <a:prstGeom prst="rect">
+            <a:avLst/>
+          </a:prstGeom>
+          <a:noFill/>
+          <a:ln/>
+        </p:spPr>
+        <p:txBody>
+          <a:bodyPr wrap="square" lIns="0" tIns="0" rIns="0" bIns="0" rtlCol="0" anchor="ctr"/>
+          <a:lstStyle/>
+          <a:p>
+            <a:pPr indent="0" marL="0">
+              <a:buNone/>
+            </a:pPr>
+            <a:r>
+              <a:rPr lang="en-US" sz="1650" b="1" dirty="0">
+                <a:solidFill>
+                  <a:srgbClr val="FFFFFF"/>
+                </a:solidFill>
+                <a:latin typeface="Calibri" pitchFamily="34" charset="0"/>
+                <a:ea typeface="Calibri" pitchFamily="34" charset="-122"/>
+                <a:cs typeface="Calibri" pitchFamily="34" charset="-120"/>
+              </a:rPr>
+              <a:t>The room manages itself.</a:t>
+            </a:r>
+            <a:endParaRPr lang="en-US" sz="1650" dirty="0"/>
+          </a:p>
+        </p:txBody>
+      </p:sp>
+      <p:sp>
+        <p:nvSpPr>
+          <p:cNvPr id="20" name="Shape 18"/>
+          <p:cNvSpPr/>
+          <p:nvPr/>
+        </p:nvSpPr>
+        <p:spPr>
+          <a:xfrm>
+            <a:off x="6766560" y="4297680"/>
+            <a:ext cx="4663440" cy="0"/>
           </a:xfrm>
           <a:prstGeom prst="line">
             <a:avLst/>
@@ -4627,7 +5009,7 @@
           <a:noFill/>
           <a:ln w="12700">
             <a:solidFill>
-              <a:srgbClr val="3A4A63"/>
+              <a:srgbClr val="2A3B55"/>
             </a:solidFill>
             <a:prstDash val="solid"/>
           </a:ln>
@@ -4635,53 +5017,83 @@
       </p:sp>
       <p:sp>
         <p:nvSpPr>
-          <p:cNvPr id="5" name="Text 3"/>
-          <p:cNvSpPr/>
-          <p:nvPr/>
-        </p:nvSpPr>
-        <p:spPr>
-          <a:xfrm>
-            <a:off x="822960" y="3154680"/>
-            <a:ext cx="5852160" cy="1234440"/>
-          </a:xfrm>
-          <a:prstGeom prst="rect">
-            <a:avLst/>
-          </a:prstGeom>
-          <a:noFill/>
-          <a:ln/>
-        </p:spPr>
-        <p:txBody>
-          <a:bodyPr wrap="square" lIns="0" tIns="0" rIns="0" bIns="0" rtlCol="0" anchor="ctr"/>
-          <a:lstStyle/>
-          <a:p>
-            <a:pPr indent="0" marL="0">
-              <a:lnSpc>
-                <a:spcPct val="130000"/>
-              </a:lnSpc>
-              <a:buNone/>
-            </a:pPr>
-            <a:r>
-              <a:rPr lang="en-US" sz="1550" dirty="0">
+          <p:cNvPr id="21" name="Text 19"/>
+          <p:cNvSpPr/>
+          <p:nvPr/>
+        </p:nvSpPr>
+        <p:spPr>
+          <a:xfrm>
+            <a:off x="6766560" y="4526280"/>
+            <a:ext cx="4937760" cy="822960"/>
+          </a:xfrm>
+          <a:prstGeom prst="rect">
+            <a:avLst/>
+          </a:prstGeom>
+          <a:noFill/>
+          <a:ln/>
+        </p:spPr>
+        <p:txBody>
+          <a:bodyPr wrap="square" lIns="0" tIns="0" rIns="0" bIns="0" rtlCol="0" anchor="ctr"/>
+          <a:lstStyle/>
+          <a:p>
+            <a:pPr indent="0" marL="0">
+              <a:buNone/>
+            </a:pPr>
+            <a:r>
+              <a:rPr lang="en-US" sz="4600" b="1" dirty="0">
+                <a:solidFill>
+                  <a:srgbClr val="3FBF7F"/>
+                </a:solidFill>
+                <a:latin typeface="Cambria" pitchFamily="34" charset="0"/>
+                <a:ea typeface="Cambria" pitchFamily="34" charset="-122"/>
+                <a:cs typeface="Cambria" pitchFamily="34" charset="-120"/>
+              </a:rPr>
+              <a:t>800</a:t>
+            </a:r>
+            <a:pPr indent="0" marL="0">
+              <a:buNone/>
+            </a:pPr>
+            <a:r>
+              <a:rPr lang="en-US" sz="2000" dirty="0">
                 <a:solidFill>
                   <a:srgbClr val="9DB2C7"/>
                 </a:solidFill>
-                <a:latin typeface="Calibri" pitchFamily="34" charset="0"/>
-                <a:ea typeface="Calibri" pitchFamily="34" charset="-122"/>
-                <a:cs typeface="Calibri" pitchFamily="34" charset="-120"/>
-              </a:rPr>
-              <a:t>Two hours in, the air is heavy.</a:t>
-            </a:r>
-            <a:endParaRPr lang="en-US" sz="1550" dirty="0"/>
-          </a:p>
-          <a:p>
-            <a:pPr indent="0" marL="0">
-              <a:lnSpc>
-                <a:spcPct val="130000"/>
-              </a:lnSpc>
-              <a:buNone/>
-            </a:pPr>
-            <a:r>
-              <a:rPr lang="en-US" sz="1550" dirty="0">
+                <a:latin typeface="Cambria" pitchFamily="34" charset="0"/>
+                <a:ea typeface="Cambria" pitchFamily="34" charset="-122"/>
+                <a:cs typeface="Cambria" pitchFamily="34" charset="-120"/>
+              </a:rPr>
+              <a:t>  ppm  ✓</a:t>
+            </a:r>
+            <a:endParaRPr lang="en-US" sz="4600" dirty="0"/>
+          </a:p>
+        </p:txBody>
+      </p:sp>
+      <p:sp>
+        <p:nvSpPr>
+          <p:cNvPr id="22" name="Text 20"/>
+          <p:cNvSpPr/>
+          <p:nvPr/>
+        </p:nvSpPr>
+        <p:spPr>
+          <a:xfrm>
+            <a:off x="6766560" y="5440680"/>
+            <a:ext cx="4937760" cy="457200"/>
+          </a:xfrm>
+          <a:prstGeom prst="rect">
+            <a:avLst/>
+          </a:prstGeom>
+          <a:noFill/>
+          <a:ln/>
+        </p:spPr>
+        <p:txBody>
+          <a:bodyPr wrap="square" lIns="0" tIns="0" rIns="0" bIns="0" rtlCol="0" anchor="ctr"/>
+          <a:lstStyle/>
+          <a:p>
+            <a:pPr indent="0" marL="0">
+              <a:buNone/>
+            </a:pPr>
+            <a:r>
+              <a:rPr lang="en-US" sz="1200" i="1" dirty="0">
                 <a:solidFill>
                   <a:srgbClr val="9DB2C7"/>
                 </a:solidFill>
@@ -4689,560 +5101,36 @@
                 <a:ea typeface="Calibri" pitchFamily="34" charset="-122"/>
                 <a:cs typeface="Calibri" pitchFamily="34" charset="-120"/>
               </a:rPr>
-              <a:t>You can't open the window.</a:t>
-            </a:r>
-            <a:endParaRPr lang="en-US" sz="1550" dirty="0"/>
-          </a:p>
-          <a:p>
-            <a:pPr indent="0" marL="0">
-              <a:lnSpc>
-                <a:spcPct val="130000"/>
-              </a:lnSpc>
-              <a:buNone/>
-            </a:pPr>
-            <a:r>
-              <a:rPr lang="en-US" sz="1550" dirty="0">
-                <a:solidFill>
-                  <a:srgbClr val="9DB2C7"/>
-                </a:solidFill>
-                <a:latin typeface="Calibri" pitchFamily="34" charset="0"/>
-                <a:ea typeface="Calibri" pitchFamily="34" charset="-122"/>
-                <a:cs typeface="Calibri" pitchFamily="34" charset="-120"/>
-              </a:rPr>
-              <a:t>It's hotter outside than in.</a:t>
-            </a:r>
-            <a:endParaRPr lang="en-US" sz="1550" dirty="0"/>
-          </a:p>
-        </p:txBody>
-      </p:sp>
-      <p:sp>
-        <p:nvSpPr>
-          <p:cNvPr id="6" name="Text 4"/>
-          <p:cNvSpPr/>
-          <p:nvPr/>
-        </p:nvSpPr>
-        <p:spPr>
-          <a:xfrm>
-            <a:off x="822960" y="4526280"/>
-            <a:ext cx="5852160" cy="457200"/>
-          </a:xfrm>
-          <a:prstGeom prst="rect">
-            <a:avLst/>
-          </a:prstGeom>
-          <a:noFill/>
-          <a:ln/>
-        </p:spPr>
-        <p:txBody>
-          <a:bodyPr wrap="square" lIns="0" tIns="0" rIns="0" bIns="0" rtlCol="0" anchor="ctr"/>
-          <a:lstStyle/>
-          <a:p>
-            <a:pPr indent="0" marL="0">
-              <a:buNone/>
-            </a:pPr>
-            <a:r>
-              <a:rPr lang="en-US" sz="1550" dirty="0">
-                <a:solidFill>
-                  <a:srgbClr val="9DB2C7"/>
-                </a:solidFill>
-                <a:latin typeface="Calibri" pitchFamily="34" charset="0"/>
-                <a:ea typeface="Calibri" pitchFamily="34" charset="-122"/>
-                <a:cs typeface="Calibri" pitchFamily="34" charset="-120"/>
-              </a:rPr>
-              <a:t>By hour three, you're rereading the same paragraph.</a:t>
-            </a:r>
-            <a:endParaRPr lang="en-US" sz="1550" dirty="0"/>
-          </a:p>
-        </p:txBody>
-      </p:sp>
-      <p:sp>
-        <p:nvSpPr>
-          <p:cNvPr id="7" name="Text 5"/>
-          <p:cNvSpPr/>
-          <p:nvPr/>
-        </p:nvSpPr>
-        <p:spPr>
-          <a:xfrm>
-            <a:off x="822960" y="5120640"/>
-            <a:ext cx="5852160" cy="457200"/>
-          </a:xfrm>
-          <a:prstGeom prst="rect">
-            <a:avLst/>
-          </a:prstGeom>
-          <a:noFill/>
-          <a:ln/>
-        </p:spPr>
-        <p:txBody>
-          <a:bodyPr wrap="square" lIns="0" tIns="0" rIns="0" bIns="0" rtlCol="0" anchor="ctr"/>
-          <a:lstStyle/>
-          <a:p>
-            <a:pPr indent="0" marL="0">
-              <a:buNone/>
-            </a:pPr>
-            <a:r>
-              <a:rPr lang="en-US" sz="1650" b="1" dirty="0">
-                <a:solidFill>
-                  <a:srgbClr val="FFFFFF"/>
-                </a:solidFill>
-                <a:latin typeface="Calibri" pitchFamily="34" charset="0"/>
-                <a:ea typeface="Calibri" pitchFamily="34" charset="-122"/>
-                <a:cs typeface="Calibri" pitchFamily="34" charset="-120"/>
-              </a:rPr>
-              <a:t>Nobody noticed. Nobody acted.</a:t>
-            </a:r>
-            <a:endParaRPr lang="en-US" sz="1650" dirty="0"/>
-          </a:p>
-        </p:txBody>
-      </p:sp>
-      <p:sp>
-        <p:nvSpPr>
-          <p:cNvPr id="8" name="Shape 6"/>
-          <p:cNvSpPr/>
-          <p:nvPr/>
-        </p:nvSpPr>
-        <p:spPr>
-          <a:xfrm>
-            <a:off x="7223760" y="960120"/>
-            <a:ext cx="4297680" cy="1874520"/>
-          </a:xfrm>
-          <a:prstGeom prst="roundRect">
-            <a:avLst>
-              <a:gd name="adj" fmla="val 4878"/>
-            </a:avLst>
+              <a:t>comfort · energy · focus: the whole room, optimised</a:t>
+            </a:r>
+            <a:endParaRPr lang="en-US" sz="1200" dirty="0"/>
+          </a:p>
+        </p:txBody>
+      </p:sp>
+      <p:sp>
+        <p:nvSpPr>
+          <p:cNvPr id="23" name="Shape 21"/>
+          <p:cNvSpPr/>
+          <p:nvPr/>
+        </p:nvSpPr>
+        <p:spPr>
+          <a:xfrm>
+            <a:off x="5838444" y="3063240"/>
+            <a:ext cx="512064" cy="310896"/>
+          </a:xfrm>
+          <a:prstGeom prst="rightArrow">
+            <a:avLst/>
           </a:prstGeom>
           <a:solidFill>
-            <a:srgbClr val="2A2113"/>
+            <a:srgbClr val="D97706"/>
           </a:solidFill>
           <a:ln w="12700">
             <a:solidFill>
-              <a:srgbClr val="6B5426"/>
+              <a:srgbClr val="FFFFFF"/>
             </a:solidFill>
             <a:prstDash val="solid"/>
           </a:ln>
         </p:spPr>
-      </p:sp>
-      <p:sp>
-        <p:nvSpPr>
-          <p:cNvPr id="9" name="Text 7"/>
-          <p:cNvSpPr/>
-          <p:nvPr/>
-        </p:nvSpPr>
-        <p:spPr>
-          <a:xfrm>
-            <a:off x="7452360" y="1143000"/>
-            <a:ext cx="3840480" cy="256032"/>
-          </a:xfrm>
-          <a:prstGeom prst="rect">
-            <a:avLst/>
-          </a:prstGeom>
-          <a:noFill/>
-          <a:ln/>
-        </p:spPr>
-        <p:txBody>
-          <a:bodyPr wrap="square" lIns="0" tIns="0" rIns="0" bIns="0" rtlCol="0" anchor="ctr"/>
-          <a:lstStyle/>
-          <a:p>
-            <a:pPr indent="0" marL="0">
-              <a:buNone/>
-            </a:pPr>
-            <a:r>
-              <a:rPr lang="en-US" sz="1050" b="1" spc="200" kern="0" dirty="0">
-                <a:solidFill>
-                  <a:srgbClr val="E8B45A"/>
-                </a:solidFill>
-                <a:latin typeface="Calibri" pitchFamily="34" charset="0"/>
-                <a:ea typeface="Calibri" pitchFamily="34" charset="-122"/>
-                <a:cs typeface="Calibri" pitchFamily="34" charset="-120"/>
-              </a:rPr>
-              <a:t>OUTDOOR TEMPERATURE</a:t>
-            </a:r>
-            <a:endParaRPr lang="en-US" sz="1050" dirty="0"/>
-          </a:p>
-        </p:txBody>
-      </p:sp>
-      <p:sp>
-        <p:nvSpPr>
-          <p:cNvPr id="10" name="Text 8"/>
-          <p:cNvSpPr/>
-          <p:nvPr/>
-        </p:nvSpPr>
-        <p:spPr>
-          <a:xfrm>
-            <a:off x="7452360" y="1463040"/>
-            <a:ext cx="3840480" cy="777240"/>
-          </a:xfrm>
-          <a:prstGeom prst="rect">
-            <a:avLst/>
-          </a:prstGeom>
-          <a:noFill/>
-          <a:ln/>
-        </p:spPr>
-        <p:txBody>
-          <a:bodyPr wrap="square" lIns="0" tIns="0" rIns="0" bIns="0" rtlCol="0" anchor="ctr"/>
-          <a:lstStyle/>
-          <a:p>
-            <a:pPr indent="0" marL="0">
-              <a:buNone/>
-            </a:pPr>
-            <a:r>
-              <a:rPr lang="en-US" sz="4400" b="1" dirty="0">
-                <a:solidFill>
-                  <a:srgbClr val="D97706"/>
-                </a:solidFill>
-                <a:latin typeface="Cambria" pitchFamily="34" charset="0"/>
-                <a:ea typeface="Cambria" pitchFamily="34" charset="-122"/>
-                <a:cs typeface="Cambria" pitchFamily="34" charset="-120"/>
-              </a:rPr>
-              <a:t>33 °C</a:t>
-            </a:r>
-            <a:endParaRPr lang="en-US" sz="4400" dirty="0"/>
-          </a:p>
-        </p:txBody>
-      </p:sp>
-      <p:sp>
-        <p:nvSpPr>
-          <p:cNvPr id="11" name="Text 9"/>
-          <p:cNvSpPr/>
-          <p:nvPr/>
-        </p:nvSpPr>
-        <p:spPr>
-          <a:xfrm>
-            <a:off x="7452360" y="2331720"/>
-            <a:ext cx="3840480" cy="365760"/>
-          </a:xfrm>
-          <a:prstGeom prst="rect">
-            <a:avLst/>
-          </a:prstGeom>
-          <a:noFill/>
-          <a:ln/>
-        </p:spPr>
-        <p:txBody>
-          <a:bodyPr wrap="square" lIns="0" tIns="0" rIns="0" bIns="0" rtlCol="0" anchor="ctr"/>
-          <a:lstStyle/>
-          <a:p>
-            <a:pPr indent="0" marL="0">
-              <a:buNone/>
-            </a:pPr>
-            <a:r>
-              <a:rPr lang="en-US" sz="1150" dirty="0">
-                <a:solidFill>
-                  <a:srgbClr val="B08D4F"/>
-                </a:solidFill>
-                <a:latin typeface="Calibri" pitchFamily="34" charset="0"/>
-                <a:ea typeface="Calibri" pitchFamily="34" charset="-122"/>
-                <a:cs typeface="Calibri" pitchFamily="34" charset="-120"/>
-              </a:rPr>
-              <a:t>windows stay closed, hotter outside than in</a:t>
-            </a:r>
-            <a:endParaRPr lang="en-US" sz="1150" dirty="0"/>
-          </a:p>
-        </p:txBody>
-      </p:sp>
-      <p:sp>
-        <p:nvSpPr>
-          <p:cNvPr id="12" name="Shape 10"/>
-          <p:cNvSpPr/>
-          <p:nvPr/>
-        </p:nvSpPr>
-        <p:spPr>
-          <a:xfrm>
-            <a:off x="7223760" y="3063240"/>
-            <a:ext cx="4297680" cy="2331720"/>
-          </a:xfrm>
-          <a:prstGeom prst="roundRect">
-            <a:avLst>
-              <a:gd name="adj" fmla="val 3922"/>
-            </a:avLst>
-          </a:prstGeom>
-          <a:solidFill>
-            <a:srgbClr val="2A1214"/>
-          </a:solidFill>
-          <a:ln w="12700">
-            <a:solidFill>
-              <a:srgbClr val="7A2E2E"/>
-            </a:solidFill>
-            <a:prstDash val="solid"/>
-          </a:ln>
-        </p:spPr>
-      </p:sp>
-      <p:sp>
-        <p:nvSpPr>
-          <p:cNvPr id="13" name="Text 11"/>
-          <p:cNvSpPr/>
-          <p:nvPr/>
-        </p:nvSpPr>
-        <p:spPr>
-          <a:xfrm>
-            <a:off x="7452360" y="3246120"/>
-            <a:ext cx="3840480" cy="256032"/>
-          </a:xfrm>
-          <a:prstGeom prst="rect">
-            <a:avLst/>
-          </a:prstGeom>
-          <a:noFill/>
-          <a:ln/>
-        </p:spPr>
-        <p:txBody>
-          <a:bodyPr wrap="square" lIns="0" tIns="0" rIns="0" bIns="0" rtlCol="0" anchor="ctr"/>
-          <a:lstStyle/>
-          <a:p>
-            <a:pPr indent="0" marL="0">
-              <a:buNone/>
-            </a:pPr>
-            <a:r>
-              <a:rPr lang="en-US" sz="1050" b="1" spc="200" kern="0" dirty="0">
-                <a:solidFill>
-                  <a:srgbClr val="F0655A"/>
-                </a:solidFill>
-                <a:latin typeface="Calibri" pitchFamily="34" charset="0"/>
-                <a:ea typeface="Calibri" pitchFamily="34" charset="-122"/>
-                <a:cs typeface="Calibri" pitchFamily="34" charset="-120"/>
-              </a:rPr>
-              <a:t>CO₂ CONCENTRATION</a:t>
-            </a:r>
-            <a:endParaRPr lang="en-US" sz="1050" dirty="0"/>
-          </a:p>
-        </p:txBody>
-      </p:sp>
-      <p:sp>
-        <p:nvSpPr>
-          <p:cNvPr id="14" name="Shape 12"/>
-          <p:cNvSpPr/>
-          <p:nvPr/>
-        </p:nvSpPr>
-        <p:spPr>
-          <a:xfrm>
-            <a:off x="7452360" y="3675888"/>
-            <a:ext cx="3840480" cy="0"/>
-          </a:xfrm>
-          <a:prstGeom prst="line">
-            <a:avLst/>
-          </a:prstGeom>
-          <a:noFill/>
-          <a:ln w="25400">
-            <a:solidFill>
-              <a:srgbClr val="F0655A"/>
-            </a:solidFill>
-            <a:prstDash val="solid"/>
-          </a:ln>
-        </p:spPr>
-      </p:sp>
-      <p:sp>
-        <p:nvSpPr>
-          <p:cNvPr id="15" name="Shape 13"/>
-          <p:cNvSpPr/>
-          <p:nvPr/>
-        </p:nvSpPr>
-        <p:spPr>
-          <a:xfrm>
-            <a:off x="9966960" y="3584448"/>
-            <a:ext cx="0" cy="182880"/>
-          </a:xfrm>
-          <a:prstGeom prst="line">
-            <a:avLst/>
-          </a:prstGeom>
-          <a:noFill/>
-          <a:ln w="25400">
-            <a:solidFill>
-              <a:srgbClr val="F0655A"/>
-            </a:solidFill>
-            <a:prstDash val="solid"/>
-          </a:ln>
-        </p:spPr>
-      </p:sp>
-      <p:sp>
-        <p:nvSpPr>
-          <p:cNvPr id="16" name="Text 14"/>
-          <p:cNvSpPr/>
-          <p:nvPr/>
-        </p:nvSpPr>
-        <p:spPr>
-          <a:xfrm>
-            <a:off x="9052560" y="3767328"/>
-            <a:ext cx="2240280" cy="228600"/>
-          </a:xfrm>
-          <a:prstGeom prst="rect">
-            <a:avLst/>
-          </a:prstGeom>
-          <a:noFill/>
-          <a:ln/>
-        </p:spPr>
-        <p:txBody>
-          <a:bodyPr wrap="square" lIns="0" tIns="0" rIns="0" bIns="0" rtlCol="0" anchor="ctr"/>
-          <a:lstStyle/>
-          <a:p>
-            <a:pPr indent="0" marL="0">
-              <a:buNone/>
-            </a:pPr>
-            <a:r>
-              <a:rPr lang="en-US" sz="950" dirty="0">
-                <a:solidFill>
-                  <a:srgbClr val="B76A6A"/>
-                </a:solidFill>
-                <a:latin typeface="Calibri" pitchFamily="34" charset="0"/>
-                <a:ea typeface="Calibri" pitchFamily="34" charset="-122"/>
-                <a:cs typeface="Calibri" pitchFamily="34" charset="-120"/>
-              </a:rPr>
-              <a:t>1,000 ppm threshold</a:t>
-            </a:r>
-            <a:endParaRPr lang="en-US" sz="950" dirty="0"/>
-          </a:p>
-        </p:txBody>
-      </p:sp>
-      <p:sp>
-        <p:nvSpPr>
-          <p:cNvPr id="17" name="Text 15"/>
-          <p:cNvSpPr/>
-          <p:nvPr/>
-        </p:nvSpPr>
-        <p:spPr>
-          <a:xfrm>
-            <a:off x="7452360" y="4023360"/>
-            <a:ext cx="3840480" cy="777240"/>
-          </a:xfrm>
-          <a:prstGeom prst="rect">
-            <a:avLst/>
-          </a:prstGeom>
-          <a:noFill/>
-          <a:ln/>
-        </p:spPr>
-        <p:txBody>
-          <a:bodyPr wrap="square" lIns="0" tIns="0" rIns="0" bIns="0" rtlCol="0" anchor="ctr"/>
-          <a:lstStyle/>
-          <a:p>
-            <a:pPr indent="0" marL="0">
-              <a:buNone/>
-            </a:pPr>
-            <a:r>
-              <a:rPr lang="en-US" sz="4600" b="1" dirty="0">
-                <a:solidFill>
-                  <a:srgbClr val="F0655A"/>
-                </a:solidFill>
-                <a:latin typeface="Cambria" pitchFamily="34" charset="0"/>
-                <a:ea typeface="Cambria" pitchFamily="34" charset="-122"/>
-                <a:cs typeface="Cambria" pitchFamily="34" charset="-120"/>
-              </a:rPr>
-              <a:t>1,547</a:t>
-            </a:r>
-            <a:endParaRPr lang="en-US" sz="4600" dirty="0"/>
-          </a:p>
-        </p:txBody>
-      </p:sp>
-      <p:sp>
-        <p:nvSpPr>
-          <p:cNvPr id="18" name="Text 16"/>
-          <p:cNvSpPr/>
-          <p:nvPr/>
-        </p:nvSpPr>
-        <p:spPr>
-          <a:xfrm>
-            <a:off x="7452360" y="4892040"/>
-            <a:ext cx="3840480" cy="457200"/>
-          </a:xfrm>
-          <a:prstGeom prst="rect">
-            <a:avLst/>
-          </a:prstGeom>
-          <a:noFill/>
-          <a:ln/>
-        </p:spPr>
-        <p:txBody>
-          <a:bodyPr wrap="square" lIns="0" tIns="0" rIns="0" bIns="0" rtlCol="0" anchor="ctr"/>
-          <a:lstStyle/>
-          <a:p>
-            <a:pPr indent="0" marL="0">
-              <a:buNone/>
-            </a:pPr>
-            <a:r>
-              <a:rPr lang="en-US" sz="1100" dirty="0">
-                <a:solidFill>
-                  <a:srgbClr val="B76A6A"/>
-                </a:solidFill>
-                <a:latin typeface="Calibri" pitchFamily="34" charset="0"/>
-                <a:ea typeface="Calibri" pitchFamily="34" charset="-122"/>
-                <a:cs typeface="Calibri" pitchFamily="34" charset="-120"/>
-              </a:rPr>
-              <a:t>ppm · cognitive performance declines above 1,000 ppm (Harvard study, 2015)</a:t>
-            </a:r>
-            <a:endParaRPr lang="en-US" sz="1100" dirty="0"/>
-          </a:p>
-        </p:txBody>
-      </p:sp>
-      <p:sp>
-        <p:nvSpPr>
-          <p:cNvPr id="19" name="Text 17"/>
-          <p:cNvSpPr/>
-          <p:nvPr/>
-        </p:nvSpPr>
-        <p:spPr>
-          <a:xfrm>
-            <a:off x="7223760" y="5532120"/>
-            <a:ext cx="4297680" cy="228600"/>
-          </a:xfrm>
-          <a:prstGeom prst="rect">
-            <a:avLst/>
-          </a:prstGeom>
-          <a:noFill/>
-          <a:ln/>
-        </p:spPr>
-        <p:txBody>
-          <a:bodyPr wrap="square" lIns="0" tIns="0" rIns="0" bIns="0" rtlCol="0" anchor="ctr"/>
-          <a:lstStyle/>
-          <a:p>
-            <a:pPr algn="r" indent="0" marL="0">
-              <a:buNone/>
-            </a:pPr>
-            <a:r>
-              <a:rPr lang="en-US" sz="900" spc="200" kern="0" dirty="0">
-                <a:solidFill>
-                  <a:srgbClr val="3A4A63"/>
-                </a:solidFill>
-                <a:latin typeface="Calibri" pitchFamily="34" charset="0"/>
-                <a:ea typeface="Calibri" pitchFamily="34" charset="-122"/>
-                <a:cs typeface="Calibri" pitchFamily="34" charset="-120"/>
-              </a:rPr>
-              <a:t>UNIVERSITÄTSBIBLIOTHEK STUTTGART</a:t>
-            </a:r>
-            <a:endParaRPr lang="en-US" sz="900" dirty="0"/>
-          </a:p>
-        </p:txBody>
-      </p:sp>
-      <p:sp>
-        <p:nvSpPr>
-          <p:cNvPr id="20" name="Text 18"/>
-          <p:cNvSpPr/>
-          <p:nvPr/>
-        </p:nvSpPr>
-        <p:spPr>
-          <a:xfrm>
-            <a:off x="0" y="6035040"/>
-            <a:ext cx="12188952" cy="548640"/>
-          </a:xfrm>
-          <a:prstGeom prst="rect">
-            <a:avLst/>
-          </a:prstGeom>
-          <a:noFill/>
-          <a:ln/>
-        </p:spPr>
-        <p:txBody>
-          <a:bodyPr wrap="square" lIns="0" tIns="0" rIns="0" bIns="0" rtlCol="0" anchor="ctr"/>
-          <a:lstStyle/>
-          <a:p>
-            <a:pPr algn="ctr" indent="0" marL="0">
-              <a:buNone/>
-            </a:pPr>
-            <a:r>
-              <a:rPr lang="en-US" sz="2600" b="1" dirty="0">
-                <a:solidFill>
-                  <a:srgbClr val="FFFFFF"/>
-                </a:solidFill>
-                <a:latin typeface="Cambria" pitchFamily="34" charset="0"/>
-                <a:ea typeface="Cambria" pitchFamily="34" charset="-122"/>
-                <a:cs typeface="Cambria" pitchFamily="34" charset="-120"/>
-              </a:rPr>
-              <a:t>What if the room could?</a:t>
-            </a:r>
-            <a:endParaRPr lang="en-US" sz="2600" dirty="0"/>
-          </a:p>
-        </p:txBody>
       </p:sp>
     </p:spTree>
   </p:cSld>

--- a/docs/presentation/LibriSense_Demo.pptx
+++ b/docs/presentation/LibriSense_Demo.pptx
@@ -4598,7 +4598,7 @@
                 <a:ea typeface="Calibri" pitchFamily="34" charset="-122"/>
                 <a:cs typeface="Calibri" pitchFamily="34" charset="-120"/>
               </a:rPr>
-              <a:t>CO₂ climbs past 1,500 ppm. Silently.</a:t>
+              <a:t>CO₂ climbs past 1,500 ppm. Nobody notices.</a:t>
             </a:r>
             <a:endParaRPr lang="en-US" sz="1550" dirty="0"/>
           </a:p>
@@ -4637,7 +4637,7 @@
                 <a:ea typeface="Calibri" pitchFamily="34" charset="-122"/>
                 <a:cs typeface="Calibri" pitchFamily="34" charset="-120"/>
               </a:rPr>
-              <a:t>Your work is wasted.</a:t>
+              <a:t>The focus quietly slips away.</a:t>
             </a:r>
             <a:endParaRPr lang="en-US" sz="1650" dirty="0"/>
           </a:p>
@@ -4869,7 +4869,7 @@
                 <a:ea typeface="Calibri" pitchFamily="34" charset="-122"/>
                 <a:cs typeface="Calibri" pitchFamily="34" charset="-120"/>
               </a:rPr>
-              <a:t>Sensors catch the CO₂ rise.</a:t>
+              <a:t>The sensors pick up the CO₂ rise.</a:t>
             </a:r>
             <a:endParaRPr lang="en-US" sz="1550" dirty="0"/>
           </a:p>
@@ -4908,7 +4908,7 @@
                 <a:ea typeface="Calibri" pitchFamily="34" charset="-122"/>
                 <a:cs typeface="Calibri" pitchFamily="34" charset="-120"/>
               </a:rPr>
-              <a:t>The AI planner finds the optimal environment.</a:t>
+              <a:t>The planner airs the room in time.</a:t>
             </a:r>
             <a:endParaRPr lang="en-US" sz="1550" dirty="0"/>
           </a:p>
@@ -4947,7 +4947,7 @@
                 <a:ea typeface="Calibri" pitchFamily="34" charset="-122"/>
                 <a:cs typeface="Calibri" pitchFamily="34" charset="-120"/>
               </a:rPr>
-              <a:t>It optimises the whole room, not just your seat.</a:t>
+              <a:t>Light, air and breaks stay in range.</a:t>
             </a:r>
             <a:endParaRPr lang="en-US" sz="1550" dirty="0"/>
           </a:p>
@@ -4986,7 +4986,7 @@
                 <a:ea typeface="Calibri" pitchFamily="34" charset="-122"/>
                 <a:cs typeface="Calibri" pitchFamily="34" charset="-120"/>
               </a:rPr>
-              <a:t>The room manages itself.</a:t>
+              <a:t>The room adjusts on its own.</a:t>
             </a:r>
             <a:endParaRPr lang="en-US" sz="1650" dirty="0"/>
           </a:p>
@@ -5101,7 +5101,7 @@
                 <a:ea typeface="Calibri" pitchFamily="34" charset="-122"/>
                 <a:cs typeface="Calibri" pitchFamily="34" charset="-120"/>
               </a:rPr>
-              <a:t>comfort · energy · focus: the whole room, optimised</a:t>
+              <a:t>back inside the comfortable range</a:t>
             </a:r>
             <a:endParaRPr lang="en-US" sz="1200" dirty="0"/>
           </a:p>
